--- a/test-out.pptx
+++ b/test-out.pptx
@@ -15606,7 +15606,7 @@
                 </a:solidFill>
                 <a:latin typeface="Aptos"/>
               </a:rPr>
-              <a:t>MongoDB, MySQL, and PostgreSQL readiness from Strategy_PaaS_Preferred.xlsx.</a:t>
+              <a:t>Discovery footprint, support status, and PaaS readiness for MongoDB, MySQL, and PostgreSQL.</a:t>
             </a:r>
           </a:p>
         </p:txBody>
@@ -15619,8 +15619,8 @@
         </p:nvSpPr>
         <p:spPr>
           <a:xfrm>
-            <a:off x="640080" y="1234440"/>
-            <a:ext cx="10927080" cy="4846320"/>
+            <a:off x="594360" y="1097280"/>
+            <a:ext cx="5303520" cy="1783080"/>
           </a:xfrm>
           <a:prstGeom prst="roundRect">
             <a:avLst/>
@@ -15664,8 +15664,8 @@
         </p:nvSpPr>
         <p:spPr>
           <a:xfrm>
-            <a:off x="640080" y="1234440"/>
-            <a:ext cx="10927080" cy="73152"/>
+            <a:off x="594360" y="1097280"/>
+            <a:ext cx="5303520" cy="73152"/>
           </a:xfrm>
           <a:prstGeom prst="rect">
             <a:avLst/>
@@ -15707,8 +15707,8 @@
         </p:nvSpPr>
         <p:spPr>
           <a:xfrm>
-            <a:off x="777240" y="1362456"/>
-            <a:ext cx="10652759" cy="274320"/>
+            <a:off x="731520" y="1225295"/>
+            <a:ext cx="5029200" cy="274320"/>
           </a:xfrm>
           <a:prstGeom prst="rect">
             <a:avLst/>
@@ -15722,13 +15722,13 @@
           <a:lstStyle/>
           <a:p>
             <a:r>
-              <a:rPr sz="1700" b="1">
+              <a:rPr sz="1400" b="1">
                 <a:solidFill>
                   <a:srgbClr val="1E2761"/>
                 </a:solidFill>
                 <a:latin typeface="Aptos"/>
               </a:rPr>
-              <a:t>Readiness by database type</a:t>
+              <a:t>Discovery footprint</a:t>
             </a:r>
           </a:p>
         </p:txBody>
@@ -15741,8 +15741,1616 @@
         </p:nvSpPr>
         <p:spPr>
           <a:xfrm>
-            <a:off x="2331720" y="2057400"/>
-            <a:ext cx="2057400" cy="658368"/>
+            <a:off x="2148840" y="1572768"/>
+            <a:ext cx="1078992" cy="228600"/>
+          </a:xfrm>
+          <a:prstGeom prst="roundRect">
+            <a:avLst/>
+          </a:prstGeom>
+          <a:solidFill>
+            <a:srgbClr val="1E2761"/>
+          </a:solidFill>
+          <a:ln>
+            <a:noFill/>
+          </a:ln>
+        </p:spPr>
+        <p:style>
+          <a:lnRef idx="1">
+            <a:schemeClr val="accent1"/>
+          </a:lnRef>
+          <a:fillRef idx="3">
+            <a:schemeClr val="accent1"/>
+          </a:fillRef>
+          <a:effectRef idx="2">
+            <a:schemeClr val="accent1"/>
+          </a:effectRef>
+          <a:fontRef idx="minor">
+            <a:schemeClr val="lt1"/>
+          </a:fontRef>
+        </p:style>
+        <p:txBody>
+          <a:bodyPr rtlCol="0" anchor="ctr"/>
+          <a:lstStyle/>
+          <a:p>
+            <a:pPr algn="ctr"/>
+          </a:p>
+        </p:txBody>
+      </p:sp>
+      <p:sp>
+        <p:nvSpPr>
+          <p:cNvPr id="8" name="TextBox 7"/>
+          <p:cNvSpPr txBox="1"/>
+          <p:nvPr/>
+        </p:nvSpPr>
+        <p:spPr>
+          <a:xfrm>
+            <a:off x="2203704" y="1609344"/>
+            <a:ext cx="969264" cy="146304"/>
+          </a:xfrm>
+          <a:prstGeom prst="rect">
+            <a:avLst/>
+          </a:prstGeom>
+          <a:noFill/>
+        </p:spPr>
+        <p:txBody>
+          <a:bodyPr wrap="square" lIns="0" rIns="0" tIns="0" bIns="0">
+            <a:spAutoFit/>
+          </a:bodyPr>
+          <a:lstStyle/>
+          <a:p>
+            <a:pPr algn="ctr"/>
+            <a:r>
+              <a:rPr sz="900" b="1">
+                <a:solidFill>
+                  <a:srgbClr val="FFFFFF"/>
+                </a:solidFill>
+                <a:latin typeface="Aptos"/>
+              </a:rPr>
+              <a:t>Instances</a:t>
+            </a:r>
+          </a:p>
+        </p:txBody>
+      </p:sp>
+      <p:sp>
+        <p:nvSpPr>
+          <p:cNvPr id="9" name="Rounded Rectangle 8"/>
+          <p:cNvSpPr/>
+          <p:nvPr/>
+        </p:nvSpPr>
+        <p:spPr>
+          <a:xfrm>
+            <a:off x="3273552" y="1572768"/>
+            <a:ext cx="1078992" cy="228600"/>
+          </a:xfrm>
+          <a:prstGeom prst="roundRect">
+            <a:avLst/>
+          </a:prstGeom>
+          <a:solidFill>
+            <a:srgbClr val="1E2761"/>
+          </a:solidFill>
+          <a:ln>
+            <a:noFill/>
+          </a:ln>
+        </p:spPr>
+        <p:style>
+          <a:lnRef idx="1">
+            <a:schemeClr val="accent1"/>
+          </a:lnRef>
+          <a:fillRef idx="3">
+            <a:schemeClr val="accent1"/>
+          </a:fillRef>
+          <a:effectRef idx="2">
+            <a:schemeClr val="accent1"/>
+          </a:effectRef>
+          <a:fontRef idx="minor">
+            <a:schemeClr val="lt1"/>
+          </a:fontRef>
+        </p:style>
+        <p:txBody>
+          <a:bodyPr rtlCol="0" anchor="ctr"/>
+          <a:lstStyle/>
+          <a:p>
+            <a:pPr algn="ctr"/>
+          </a:p>
+        </p:txBody>
+      </p:sp>
+      <p:sp>
+        <p:nvSpPr>
+          <p:cNvPr id="10" name="TextBox 9"/>
+          <p:cNvSpPr txBox="1"/>
+          <p:nvPr/>
+        </p:nvSpPr>
+        <p:spPr>
+          <a:xfrm>
+            <a:off x="3328416" y="1609344"/>
+            <a:ext cx="969264" cy="146304"/>
+          </a:xfrm>
+          <a:prstGeom prst="rect">
+            <a:avLst/>
+          </a:prstGeom>
+          <a:noFill/>
+        </p:spPr>
+        <p:txBody>
+          <a:bodyPr wrap="square" lIns="0" rIns="0" tIns="0" bIns="0">
+            <a:spAutoFit/>
+          </a:bodyPr>
+          <a:lstStyle/>
+          <a:p>
+            <a:pPr algn="ctr"/>
+            <a:r>
+              <a:rPr sz="900" b="1">
+                <a:solidFill>
+                  <a:srgbClr val="FFFFFF"/>
+                </a:solidFill>
+                <a:latin typeface="Aptos"/>
+              </a:rPr>
+              <a:t>Servers</a:t>
+            </a:r>
+          </a:p>
+        </p:txBody>
+      </p:sp>
+      <p:sp>
+        <p:nvSpPr>
+          <p:cNvPr id="11" name="Rounded Rectangle 10"/>
+          <p:cNvSpPr/>
+          <p:nvPr/>
+        </p:nvSpPr>
+        <p:spPr>
+          <a:xfrm>
+            <a:off x="4398264" y="1572768"/>
+            <a:ext cx="1078992" cy="228600"/>
+          </a:xfrm>
+          <a:prstGeom prst="roundRect">
+            <a:avLst/>
+          </a:prstGeom>
+          <a:solidFill>
+            <a:srgbClr val="1E2761"/>
+          </a:solidFill>
+          <a:ln>
+            <a:noFill/>
+          </a:ln>
+        </p:spPr>
+        <p:style>
+          <a:lnRef idx="1">
+            <a:schemeClr val="accent1"/>
+          </a:lnRef>
+          <a:fillRef idx="3">
+            <a:schemeClr val="accent1"/>
+          </a:fillRef>
+          <a:effectRef idx="2">
+            <a:schemeClr val="accent1"/>
+          </a:effectRef>
+          <a:fontRef idx="minor">
+            <a:schemeClr val="lt1"/>
+          </a:fontRef>
+        </p:style>
+        <p:txBody>
+          <a:bodyPr rtlCol="0" anchor="ctr"/>
+          <a:lstStyle/>
+          <a:p>
+            <a:pPr algn="ctr"/>
+          </a:p>
+        </p:txBody>
+      </p:sp>
+      <p:sp>
+        <p:nvSpPr>
+          <p:cNvPr id="12" name="TextBox 11"/>
+          <p:cNvSpPr txBox="1"/>
+          <p:nvPr/>
+        </p:nvSpPr>
+        <p:spPr>
+          <a:xfrm>
+            <a:off x="4453128" y="1609344"/>
+            <a:ext cx="969264" cy="146304"/>
+          </a:xfrm>
+          <a:prstGeom prst="rect">
+            <a:avLst/>
+          </a:prstGeom>
+          <a:noFill/>
+        </p:spPr>
+        <p:txBody>
+          <a:bodyPr wrap="square" lIns="0" rIns="0" tIns="0" bIns="0">
+            <a:spAutoFit/>
+          </a:bodyPr>
+          <a:lstStyle/>
+          <a:p>
+            <a:pPr algn="ctr"/>
+            <a:r>
+              <a:rPr sz="900" b="1">
+                <a:solidFill>
+                  <a:srgbClr val="FFFFFF"/>
+                </a:solidFill>
+                <a:latin typeface="Aptos"/>
+              </a:rPr>
+              <a:t>Versions</a:t>
+            </a:r>
+          </a:p>
+        </p:txBody>
+      </p:sp>
+      <p:sp>
+        <p:nvSpPr>
+          <p:cNvPr id="13" name="TextBox 12"/>
+          <p:cNvSpPr txBox="1"/>
+          <p:nvPr/>
+        </p:nvSpPr>
+        <p:spPr>
+          <a:xfrm>
+            <a:off x="822960" y="1883664"/>
+            <a:ext cx="1078992" cy="164592"/>
+          </a:xfrm>
+          <a:prstGeom prst="rect">
+            <a:avLst/>
+          </a:prstGeom>
+          <a:noFill/>
+        </p:spPr>
+        <p:txBody>
+          <a:bodyPr wrap="square" lIns="0" rIns="0" tIns="0" bIns="0">
+            <a:spAutoFit/>
+          </a:bodyPr>
+          <a:lstStyle/>
+          <a:p>
+            <a:r>
+              <a:rPr sz="1000" b="1">
+                <a:solidFill>
+                  <a:srgbClr val="1E2761"/>
+                </a:solidFill>
+                <a:latin typeface="Aptos"/>
+              </a:rPr>
+              <a:t>MongoDB</a:t>
+            </a:r>
+          </a:p>
+        </p:txBody>
+      </p:sp>
+      <p:sp>
+        <p:nvSpPr>
+          <p:cNvPr id="14" name="Rounded Rectangle 13"/>
+          <p:cNvSpPr/>
+          <p:nvPr/>
+        </p:nvSpPr>
+        <p:spPr>
+          <a:xfrm>
+            <a:off x="2148840" y="1847088"/>
+            <a:ext cx="1078992" cy="228600"/>
+          </a:xfrm>
+          <a:prstGeom prst="roundRect">
+            <a:avLst/>
+          </a:prstGeom>
+          <a:solidFill>
+            <a:srgbClr val="F1F5F9"/>
+          </a:solidFill>
+          <a:ln w="12700">
+            <a:solidFill>
+              <a:srgbClr val="FFFFFF"/>
+            </a:solidFill>
+          </a:ln>
+        </p:spPr>
+        <p:style>
+          <a:lnRef idx="1">
+            <a:schemeClr val="accent1"/>
+          </a:lnRef>
+          <a:fillRef idx="3">
+            <a:schemeClr val="accent1"/>
+          </a:fillRef>
+          <a:effectRef idx="2">
+            <a:schemeClr val="accent1"/>
+          </a:effectRef>
+          <a:fontRef idx="minor">
+            <a:schemeClr val="lt1"/>
+          </a:fontRef>
+        </p:style>
+        <p:txBody>
+          <a:bodyPr rtlCol="0" anchor="ctr"/>
+          <a:lstStyle/>
+          <a:p>
+            <a:pPr algn="ctr"/>
+          </a:p>
+        </p:txBody>
+      </p:sp>
+      <p:sp>
+        <p:nvSpPr>
+          <p:cNvPr id="15" name="TextBox 14"/>
+          <p:cNvSpPr txBox="1"/>
+          <p:nvPr/>
+        </p:nvSpPr>
+        <p:spPr>
+          <a:xfrm>
+            <a:off x="2203704" y="1883664"/>
+            <a:ext cx="969264" cy="137160"/>
+          </a:xfrm>
+          <a:prstGeom prst="rect">
+            <a:avLst/>
+          </a:prstGeom>
+          <a:noFill/>
+        </p:spPr>
+        <p:txBody>
+          <a:bodyPr wrap="square" lIns="0" rIns="0" tIns="0" bIns="0">
+            <a:spAutoFit/>
+          </a:bodyPr>
+          <a:lstStyle/>
+          <a:p>
+            <a:pPr algn="ctr"/>
+            <a:r>
+              <a:rPr sz="900" b="1">
+                <a:solidFill>
+                  <a:srgbClr val="1E2761"/>
+                </a:solidFill>
+                <a:latin typeface="Aptos"/>
+              </a:rPr>
+              <a:t>19</a:t>
+            </a:r>
+          </a:p>
+        </p:txBody>
+      </p:sp>
+      <p:sp>
+        <p:nvSpPr>
+          <p:cNvPr id="16" name="Rounded Rectangle 15"/>
+          <p:cNvSpPr/>
+          <p:nvPr/>
+        </p:nvSpPr>
+        <p:spPr>
+          <a:xfrm>
+            <a:off x="3273552" y="1847088"/>
+            <a:ext cx="1078992" cy="228600"/>
+          </a:xfrm>
+          <a:prstGeom prst="roundRect">
+            <a:avLst/>
+          </a:prstGeom>
+          <a:solidFill>
+            <a:srgbClr val="F1F5F9"/>
+          </a:solidFill>
+          <a:ln w="12700">
+            <a:solidFill>
+              <a:srgbClr val="FFFFFF"/>
+            </a:solidFill>
+          </a:ln>
+        </p:spPr>
+        <p:style>
+          <a:lnRef idx="1">
+            <a:schemeClr val="accent1"/>
+          </a:lnRef>
+          <a:fillRef idx="3">
+            <a:schemeClr val="accent1"/>
+          </a:fillRef>
+          <a:effectRef idx="2">
+            <a:schemeClr val="accent1"/>
+          </a:effectRef>
+          <a:fontRef idx="minor">
+            <a:schemeClr val="lt1"/>
+          </a:fontRef>
+        </p:style>
+        <p:txBody>
+          <a:bodyPr rtlCol="0" anchor="ctr"/>
+          <a:lstStyle/>
+          <a:p>
+            <a:pPr algn="ctr"/>
+          </a:p>
+        </p:txBody>
+      </p:sp>
+      <p:sp>
+        <p:nvSpPr>
+          <p:cNvPr id="17" name="TextBox 16"/>
+          <p:cNvSpPr txBox="1"/>
+          <p:nvPr/>
+        </p:nvSpPr>
+        <p:spPr>
+          <a:xfrm>
+            <a:off x="3328416" y="1883664"/>
+            <a:ext cx="969264" cy="137160"/>
+          </a:xfrm>
+          <a:prstGeom prst="rect">
+            <a:avLst/>
+          </a:prstGeom>
+          <a:noFill/>
+        </p:spPr>
+        <p:txBody>
+          <a:bodyPr wrap="square" lIns="0" rIns="0" tIns="0" bIns="0">
+            <a:spAutoFit/>
+          </a:bodyPr>
+          <a:lstStyle/>
+          <a:p>
+            <a:pPr algn="ctr"/>
+            <a:r>
+              <a:rPr sz="900" b="1">
+                <a:solidFill>
+                  <a:srgbClr val="1E2761"/>
+                </a:solidFill>
+                <a:latin typeface="Aptos"/>
+              </a:rPr>
+              <a:t>19</a:t>
+            </a:r>
+          </a:p>
+        </p:txBody>
+      </p:sp>
+      <p:sp>
+        <p:nvSpPr>
+          <p:cNvPr id="18" name="Rounded Rectangle 17"/>
+          <p:cNvSpPr/>
+          <p:nvPr/>
+        </p:nvSpPr>
+        <p:spPr>
+          <a:xfrm>
+            <a:off x="4398264" y="1847088"/>
+            <a:ext cx="1078992" cy="228600"/>
+          </a:xfrm>
+          <a:prstGeom prst="roundRect">
+            <a:avLst/>
+          </a:prstGeom>
+          <a:solidFill>
+            <a:srgbClr val="F1F5F9"/>
+          </a:solidFill>
+          <a:ln w="12700">
+            <a:solidFill>
+              <a:srgbClr val="FFFFFF"/>
+            </a:solidFill>
+          </a:ln>
+        </p:spPr>
+        <p:style>
+          <a:lnRef idx="1">
+            <a:schemeClr val="accent1"/>
+          </a:lnRef>
+          <a:fillRef idx="3">
+            <a:schemeClr val="accent1"/>
+          </a:fillRef>
+          <a:effectRef idx="2">
+            <a:schemeClr val="accent1"/>
+          </a:effectRef>
+          <a:fontRef idx="minor">
+            <a:schemeClr val="lt1"/>
+          </a:fontRef>
+        </p:style>
+        <p:txBody>
+          <a:bodyPr rtlCol="0" anchor="ctr"/>
+          <a:lstStyle/>
+          <a:p>
+            <a:pPr algn="ctr"/>
+          </a:p>
+        </p:txBody>
+      </p:sp>
+      <p:sp>
+        <p:nvSpPr>
+          <p:cNvPr id="19" name="TextBox 18"/>
+          <p:cNvSpPr txBox="1"/>
+          <p:nvPr/>
+        </p:nvSpPr>
+        <p:spPr>
+          <a:xfrm>
+            <a:off x="4453128" y="1883664"/>
+            <a:ext cx="969264" cy="137160"/>
+          </a:xfrm>
+          <a:prstGeom prst="rect">
+            <a:avLst/>
+          </a:prstGeom>
+          <a:noFill/>
+        </p:spPr>
+        <p:txBody>
+          <a:bodyPr wrap="square" lIns="0" rIns="0" tIns="0" bIns="0">
+            <a:spAutoFit/>
+          </a:bodyPr>
+          <a:lstStyle/>
+          <a:p>
+            <a:pPr algn="ctr"/>
+            <a:r>
+              <a:rPr sz="900" b="1">
+                <a:solidFill>
+                  <a:srgbClr val="1E2761"/>
+                </a:solidFill>
+                <a:latin typeface="Aptos"/>
+              </a:rPr>
+              <a:t>5</a:t>
+            </a:r>
+          </a:p>
+        </p:txBody>
+      </p:sp>
+      <p:sp>
+        <p:nvSpPr>
+          <p:cNvPr id="20" name="TextBox 19"/>
+          <p:cNvSpPr txBox="1"/>
+          <p:nvPr/>
+        </p:nvSpPr>
+        <p:spPr>
+          <a:xfrm>
+            <a:off x="822960" y="2157984"/>
+            <a:ext cx="1078992" cy="164592"/>
+          </a:xfrm>
+          <a:prstGeom prst="rect">
+            <a:avLst/>
+          </a:prstGeom>
+          <a:noFill/>
+        </p:spPr>
+        <p:txBody>
+          <a:bodyPr wrap="square" lIns="0" rIns="0" tIns="0" bIns="0">
+            <a:spAutoFit/>
+          </a:bodyPr>
+          <a:lstStyle/>
+          <a:p>
+            <a:r>
+              <a:rPr sz="1000" b="1">
+                <a:solidFill>
+                  <a:srgbClr val="1E2761"/>
+                </a:solidFill>
+                <a:latin typeface="Aptos"/>
+              </a:rPr>
+              <a:t>MySQL</a:t>
+            </a:r>
+          </a:p>
+        </p:txBody>
+      </p:sp>
+      <p:sp>
+        <p:nvSpPr>
+          <p:cNvPr id="21" name="Rounded Rectangle 20"/>
+          <p:cNvSpPr/>
+          <p:nvPr/>
+        </p:nvSpPr>
+        <p:spPr>
+          <a:xfrm>
+            <a:off x="2148840" y="2121408"/>
+            <a:ext cx="1078992" cy="228600"/>
+          </a:xfrm>
+          <a:prstGeom prst="roundRect">
+            <a:avLst/>
+          </a:prstGeom>
+          <a:solidFill>
+            <a:srgbClr val="F1F5F9"/>
+          </a:solidFill>
+          <a:ln w="12700">
+            <a:solidFill>
+              <a:srgbClr val="FFFFFF"/>
+            </a:solidFill>
+          </a:ln>
+        </p:spPr>
+        <p:style>
+          <a:lnRef idx="1">
+            <a:schemeClr val="accent1"/>
+          </a:lnRef>
+          <a:fillRef idx="3">
+            <a:schemeClr val="accent1"/>
+          </a:fillRef>
+          <a:effectRef idx="2">
+            <a:schemeClr val="accent1"/>
+          </a:effectRef>
+          <a:fontRef idx="minor">
+            <a:schemeClr val="lt1"/>
+          </a:fontRef>
+        </p:style>
+        <p:txBody>
+          <a:bodyPr rtlCol="0" anchor="ctr"/>
+          <a:lstStyle/>
+          <a:p>
+            <a:pPr algn="ctr"/>
+          </a:p>
+        </p:txBody>
+      </p:sp>
+      <p:sp>
+        <p:nvSpPr>
+          <p:cNvPr id="22" name="TextBox 21"/>
+          <p:cNvSpPr txBox="1"/>
+          <p:nvPr/>
+        </p:nvSpPr>
+        <p:spPr>
+          <a:xfrm>
+            <a:off x="2203704" y="2157984"/>
+            <a:ext cx="969264" cy="137160"/>
+          </a:xfrm>
+          <a:prstGeom prst="rect">
+            <a:avLst/>
+          </a:prstGeom>
+          <a:noFill/>
+        </p:spPr>
+        <p:txBody>
+          <a:bodyPr wrap="square" lIns="0" rIns="0" tIns="0" bIns="0">
+            <a:spAutoFit/>
+          </a:bodyPr>
+          <a:lstStyle/>
+          <a:p>
+            <a:pPr algn="ctr"/>
+            <a:r>
+              <a:rPr sz="900" b="1">
+                <a:solidFill>
+                  <a:srgbClr val="1E2761"/>
+                </a:solidFill>
+                <a:latin typeface="Aptos"/>
+              </a:rPr>
+              <a:t>11</a:t>
+            </a:r>
+          </a:p>
+        </p:txBody>
+      </p:sp>
+      <p:sp>
+        <p:nvSpPr>
+          <p:cNvPr id="23" name="Rounded Rectangle 22"/>
+          <p:cNvSpPr/>
+          <p:nvPr/>
+        </p:nvSpPr>
+        <p:spPr>
+          <a:xfrm>
+            <a:off x="3273552" y="2121408"/>
+            <a:ext cx="1078992" cy="228600"/>
+          </a:xfrm>
+          <a:prstGeom prst="roundRect">
+            <a:avLst/>
+          </a:prstGeom>
+          <a:solidFill>
+            <a:srgbClr val="F1F5F9"/>
+          </a:solidFill>
+          <a:ln w="12700">
+            <a:solidFill>
+              <a:srgbClr val="FFFFFF"/>
+            </a:solidFill>
+          </a:ln>
+        </p:spPr>
+        <p:style>
+          <a:lnRef idx="1">
+            <a:schemeClr val="accent1"/>
+          </a:lnRef>
+          <a:fillRef idx="3">
+            <a:schemeClr val="accent1"/>
+          </a:fillRef>
+          <a:effectRef idx="2">
+            <a:schemeClr val="accent1"/>
+          </a:effectRef>
+          <a:fontRef idx="minor">
+            <a:schemeClr val="lt1"/>
+          </a:fontRef>
+        </p:style>
+        <p:txBody>
+          <a:bodyPr rtlCol="0" anchor="ctr"/>
+          <a:lstStyle/>
+          <a:p>
+            <a:pPr algn="ctr"/>
+          </a:p>
+        </p:txBody>
+      </p:sp>
+      <p:sp>
+        <p:nvSpPr>
+          <p:cNvPr id="24" name="TextBox 23"/>
+          <p:cNvSpPr txBox="1"/>
+          <p:nvPr/>
+        </p:nvSpPr>
+        <p:spPr>
+          <a:xfrm>
+            <a:off x="3328416" y="2157984"/>
+            <a:ext cx="969264" cy="137160"/>
+          </a:xfrm>
+          <a:prstGeom prst="rect">
+            <a:avLst/>
+          </a:prstGeom>
+          <a:noFill/>
+        </p:spPr>
+        <p:txBody>
+          <a:bodyPr wrap="square" lIns="0" rIns="0" tIns="0" bIns="0">
+            <a:spAutoFit/>
+          </a:bodyPr>
+          <a:lstStyle/>
+          <a:p>
+            <a:pPr algn="ctr"/>
+            <a:r>
+              <a:rPr sz="900" b="1">
+                <a:solidFill>
+                  <a:srgbClr val="1E2761"/>
+                </a:solidFill>
+                <a:latin typeface="Aptos"/>
+              </a:rPr>
+              <a:t>11</a:t>
+            </a:r>
+          </a:p>
+        </p:txBody>
+      </p:sp>
+      <p:sp>
+        <p:nvSpPr>
+          <p:cNvPr id="25" name="Rounded Rectangle 24"/>
+          <p:cNvSpPr/>
+          <p:nvPr/>
+        </p:nvSpPr>
+        <p:spPr>
+          <a:xfrm>
+            <a:off x="4398264" y="2121408"/>
+            <a:ext cx="1078992" cy="228600"/>
+          </a:xfrm>
+          <a:prstGeom prst="roundRect">
+            <a:avLst/>
+          </a:prstGeom>
+          <a:solidFill>
+            <a:srgbClr val="F1F5F9"/>
+          </a:solidFill>
+          <a:ln w="12700">
+            <a:solidFill>
+              <a:srgbClr val="FFFFFF"/>
+            </a:solidFill>
+          </a:ln>
+        </p:spPr>
+        <p:style>
+          <a:lnRef idx="1">
+            <a:schemeClr val="accent1"/>
+          </a:lnRef>
+          <a:fillRef idx="3">
+            <a:schemeClr val="accent1"/>
+          </a:fillRef>
+          <a:effectRef idx="2">
+            <a:schemeClr val="accent1"/>
+          </a:effectRef>
+          <a:fontRef idx="minor">
+            <a:schemeClr val="lt1"/>
+          </a:fontRef>
+        </p:style>
+        <p:txBody>
+          <a:bodyPr rtlCol="0" anchor="ctr"/>
+          <a:lstStyle/>
+          <a:p>
+            <a:pPr algn="ctr"/>
+          </a:p>
+        </p:txBody>
+      </p:sp>
+      <p:sp>
+        <p:nvSpPr>
+          <p:cNvPr id="26" name="TextBox 25"/>
+          <p:cNvSpPr txBox="1"/>
+          <p:nvPr/>
+        </p:nvSpPr>
+        <p:spPr>
+          <a:xfrm>
+            <a:off x="4453128" y="2157984"/>
+            <a:ext cx="969264" cy="137160"/>
+          </a:xfrm>
+          <a:prstGeom prst="rect">
+            <a:avLst/>
+          </a:prstGeom>
+          <a:noFill/>
+        </p:spPr>
+        <p:txBody>
+          <a:bodyPr wrap="square" lIns="0" rIns="0" tIns="0" bIns="0">
+            <a:spAutoFit/>
+          </a:bodyPr>
+          <a:lstStyle/>
+          <a:p>
+            <a:pPr algn="ctr"/>
+            <a:r>
+              <a:rPr sz="900" b="1">
+                <a:solidFill>
+                  <a:srgbClr val="1E2761"/>
+                </a:solidFill>
+                <a:latin typeface="Aptos"/>
+              </a:rPr>
+              <a:t>10</a:t>
+            </a:r>
+          </a:p>
+        </p:txBody>
+      </p:sp>
+      <p:sp>
+        <p:nvSpPr>
+          <p:cNvPr id="27" name="TextBox 26"/>
+          <p:cNvSpPr txBox="1"/>
+          <p:nvPr/>
+        </p:nvSpPr>
+        <p:spPr>
+          <a:xfrm>
+            <a:off x="822960" y="2432304"/>
+            <a:ext cx="1078992" cy="164592"/>
+          </a:xfrm>
+          <a:prstGeom prst="rect">
+            <a:avLst/>
+          </a:prstGeom>
+          <a:noFill/>
+        </p:spPr>
+        <p:txBody>
+          <a:bodyPr wrap="square" lIns="0" rIns="0" tIns="0" bIns="0">
+            <a:spAutoFit/>
+          </a:bodyPr>
+          <a:lstStyle/>
+          <a:p>
+            <a:r>
+              <a:rPr sz="1000" b="1">
+                <a:solidFill>
+                  <a:srgbClr val="1E2761"/>
+                </a:solidFill>
+                <a:latin typeface="Aptos"/>
+              </a:rPr>
+              <a:t>PostgreSQL</a:t>
+            </a:r>
+          </a:p>
+        </p:txBody>
+      </p:sp>
+      <p:sp>
+        <p:nvSpPr>
+          <p:cNvPr id="28" name="Rounded Rectangle 27"/>
+          <p:cNvSpPr/>
+          <p:nvPr/>
+        </p:nvSpPr>
+        <p:spPr>
+          <a:xfrm>
+            <a:off x="2148840" y="2395728"/>
+            <a:ext cx="1078992" cy="228600"/>
+          </a:xfrm>
+          <a:prstGeom prst="roundRect">
+            <a:avLst/>
+          </a:prstGeom>
+          <a:solidFill>
+            <a:srgbClr val="F1F5F9"/>
+          </a:solidFill>
+          <a:ln w="12700">
+            <a:solidFill>
+              <a:srgbClr val="FFFFFF"/>
+            </a:solidFill>
+          </a:ln>
+        </p:spPr>
+        <p:style>
+          <a:lnRef idx="1">
+            <a:schemeClr val="accent1"/>
+          </a:lnRef>
+          <a:fillRef idx="3">
+            <a:schemeClr val="accent1"/>
+          </a:fillRef>
+          <a:effectRef idx="2">
+            <a:schemeClr val="accent1"/>
+          </a:effectRef>
+          <a:fontRef idx="minor">
+            <a:schemeClr val="lt1"/>
+          </a:fontRef>
+        </p:style>
+        <p:txBody>
+          <a:bodyPr rtlCol="0" anchor="ctr"/>
+          <a:lstStyle/>
+          <a:p>
+            <a:pPr algn="ctr"/>
+          </a:p>
+        </p:txBody>
+      </p:sp>
+      <p:sp>
+        <p:nvSpPr>
+          <p:cNvPr id="29" name="TextBox 28"/>
+          <p:cNvSpPr txBox="1"/>
+          <p:nvPr/>
+        </p:nvSpPr>
+        <p:spPr>
+          <a:xfrm>
+            <a:off x="2203704" y="2432304"/>
+            <a:ext cx="969264" cy="137160"/>
+          </a:xfrm>
+          <a:prstGeom prst="rect">
+            <a:avLst/>
+          </a:prstGeom>
+          <a:noFill/>
+        </p:spPr>
+        <p:txBody>
+          <a:bodyPr wrap="square" lIns="0" rIns="0" tIns="0" bIns="0">
+            <a:spAutoFit/>
+          </a:bodyPr>
+          <a:lstStyle/>
+          <a:p>
+            <a:pPr algn="ctr"/>
+            <a:r>
+              <a:rPr sz="900" b="1">
+                <a:solidFill>
+                  <a:srgbClr val="1E2761"/>
+                </a:solidFill>
+                <a:latin typeface="Aptos"/>
+              </a:rPr>
+              <a:t>7</a:t>
+            </a:r>
+          </a:p>
+        </p:txBody>
+      </p:sp>
+      <p:sp>
+        <p:nvSpPr>
+          <p:cNvPr id="30" name="Rounded Rectangle 29"/>
+          <p:cNvSpPr/>
+          <p:nvPr/>
+        </p:nvSpPr>
+        <p:spPr>
+          <a:xfrm>
+            <a:off x="3273552" y="2395728"/>
+            <a:ext cx="1078992" cy="228600"/>
+          </a:xfrm>
+          <a:prstGeom prst="roundRect">
+            <a:avLst/>
+          </a:prstGeom>
+          <a:solidFill>
+            <a:srgbClr val="F1F5F9"/>
+          </a:solidFill>
+          <a:ln w="12700">
+            <a:solidFill>
+              <a:srgbClr val="FFFFFF"/>
+            </a:solidFill>
+          </a:ln>
+        </p:spPr>
+        <p:style>
+          <a:lnRef idx="1">
+            <a:schemeClr val="accent1"/>
+          </a:lnRef>
+          <a:fillRef idx="3">
+            <a:schemeClr val="accent1"/>
+          </a:fillRef>
+          <a:effectRef idx="2">
+            <a:schemeClr val="accent1"/>
+          </a:effectRef>
+          <a:fontRef idx="minor">
+            <a:schemeClr val="lt1"/>
+          </a:fontRef>
+        </p:style>
+        <p:txBody>
+          <a:bodyPr rtlCol="0" anchor="ctr"/>
+          <a:lstStyle/>
+          <a:p>
+            <a:pPr algn="ctr"/>
+          </a:p>
+        </p:txBody>
+      </p:sp>
+      <p:sp>
+        <p:nvSpPr>
+          <p:cNvPr id="31" name="TextBox 30"/>
+          <p:cNvSpPr txBox="1"/>
+          <p:nvPr/>
+        </p:nvSpPr>
+        <p:spPr>
+          <a:xfrm>
+            <a:off x="3328416" y="2432304"/>
+            <a:ext cx="969264" cy="137160"/>
+          </a:xfrm>
+          <a:prstGeom prst="rect">
+            <a:avLst/>
+          </a:prstGeom>
+          <a:noFill/>
+        </p:spPr>
+        <p:txBody>
+          <a:bodyPr wrap="square" lIns="0" rIns="0" tIns="0" bIns="0">
+            <a:spAutoFit/>
+          </a:bodyPr>
+          <a:lstStyle/>
+          <a:p>
+            <a:pPr algn="ctr"/>
+            <a:r>
+              <a:rPr sz="900" b="1">
+                <a:solidFill>
+                  <a:srgbClr val="1E2761"/>
+                </a:solidFill>
+                <a:latin typeface="Aptos"/>
+              </a:rPr>
+              <a:t>7</a:t>
+            </a:r>
+          </a:p>
+        </p:txBody>
+      </p:sp>
+      <p:sp>
+        <p:nvSpPr>
+          <p:cNvPr id="32" name="Rounded Rectangle 31"/>
+          <p:cNvSpPr/>
+          <p:nvPr/>
+        </p:nvSpPr>
+        <p:spPr>
+          <a:xfrm>
+            <a:off x="4398264" y="2395728"/>
+            <a:ext cx="1078992" cy="228600"/>
+          </a:xfrm>
+          <a:prstGeom prst="roundRect">
+            <a:avLst/>
+          </a:prstGeom>
+          <a:solidFill>
+            <a:srgbClr val="F1F5F9"/>
+          </a:solidFill>
+          <a:ln w="12700">
+            <a:solidFill>
+              <a:srgbClr val="FFFFFF"/>
+            </a:solidFill>
+          </a:ln>
+        </p:spPr>
+        <p:style>
+          <a:lnRef idx="1">
+            <a:schemeClr val="accent1"/>
+          </a:lnRef>
+          <a:fillRef idx="3">
+            <a:schemeClr val="accent1"/>
+          </a:fillRef>
+          <a:effectRef idx="2">
+            <a:schemeClr val="accent1"/>
+          </a:effectRef>
+          <a:fontRef idx="minor">
+            <a:schemeClr val="lt1"/>
+          </a:fontRef>
+        </p:style>
+        <p:txBody>
+          <a:bodyPr rtlCol="0" anchor="ctr"/>
+          <a:lstStyle/>
+          <a:p>
+            <a:pPr algn="ctr"/>
+          </a:p>
+        </p:txBody>
+      </p:sp>
+      <p:sp>
+        <p:nvSpPr>
+          <p:cNvPr id="33" name="TextBox 32"/>
+          <p:cNvSpPr txBox="1"/>
+          <p:nvPr/>
+        </p:nvSpPr>
+        <p:spPr>
+          <a:xfrm>
+            <a:off x="4453128" y="2432304"/>
+            <a:ext cx="969264" cy="137160"/>
+          </a:xfrm>
+          <a:prstGeom prst="rect">
+            <a:avLst/>
+          </a:prstGeom>
+          <a:noFill/>
+        </p:spPr>
+        <p:txBody>
+          <a:bodyPr wrap="square" lIns="0" rIns="0" tIns="0" bIns="0">
+            <a:spAutoFit/>
+          </a:bodyPr>
+          <a:lstStyle/>
+          <a:p>
+            <a:pPr algn="ctr"/>
+            <a:r>
+              <a:rPr sz="900" b="1">
+                <a:solidFill>
+                  <a:srgbClr val="1E2761"/>
+                </a:solidFill>
+                <a:latin typeface="Aptos"/>
+              </a:rPr>
+              <a:t>5</a:t>
+            </a:r>
+          </a:p>
+        </p:txBody>
+      </p:sp>
+      <p:sp>
+        <p:nvSpPr>
+          <p:cNvPr id="34" name="TextBox 33"/>
+          <p:cNvSpPr txBox="1"/>
+          <p:nvPr/>
+        </p:nvSpPr>
+        <p:spPr>
+          <a:xfrm>
+            <a:off x="822960" y="2706624"/>
+            <a:ext cx="1078992" cy="164592"/>
+          </a:xfrm>
+          <a:prstGeom prst="rect">
+            <a:avLst/>
+          </a:prstGeom>
+          <a:noFill/>
+        </p:spPr>
+        <p:txBody>
+          <a:bodyPr wrap="square" lIns="0" rIns="0" tIns="0" bIns="0">
+            <a:spAutoFit/>
+          </a:bodyPr>
+          <a:lstStyle/>
+          <a:p>
+            <a:r>
+              <a:rPr sz="1000" b="1">
+                <a:solidFill>
+                  <a:srgbClr val="1E2761"/>
+                </a:solidFill>
+                <a:latin typeface="Aptos"/>
+              </a:rPr>
+              <a:t>Total</a:t>
+            </a:r>
+          </a:p>
+        </p:txBody>
+      </p:sp>
+      <p:sp>
+        <p:nvSpPr>
+          <p:cNvPr id="35" name="Rounded Rectangle 34"/>
+          <p:cNvSpPr/>
+          <p:nvPr/>
+        </p:nvSpPr>
+        <p:spPr>
+          <a:xfrm>
+            <a:off x="2148840" y="2670048"/>
+            <a:ext cx="1078992" cy="228600"/>
+          </a:xfrm>
+          <a:prstGeom prst="roundRect">
+            <a:avLst/>
+          </a:prstGeom>
+          <a:solidFill>
+            <a:srgbClr val="1E2761"/>
+          </a:solidFill>
+          <a:ln w="12700">
+            <a:solidFill>
+              <a:srgbClr val="FFFFFF"/>
+            </a:solidFill>
+          </a:ln>
+        </p:spPr>
+        <p:style>
+          <a:lnRef idx="1">
+            <a:schemeClr val="accent1"/>
+          </a:lnRef>
+          <a:fillRef idx="3">
+            <a:schemeClr val="accent1"/>
+          </a:fillRef>
+          <a:effectRef idx="2">
+            <a:schemeClr val="accent1"/>
+          </a:effectRef>
+          <a:fontRef idx="minor">
+            <a:schemeClr val="lt1"/>
+          </a:fontRef>
+        </p:style>
+        <p:txBody>
+          <a:bodyPr rtlCol="0" anchor="ctr"/>
+          <a:lstStyle/>
+          <a:p>
+            <a:pPr algn="ctr"/>
+          </a:p>
+        </p:txBody>
+      </p:sp>
+      <p:sp>
+        <p:nvSpPr>
+          <p:cNvPr id="36" name="TextBox 35"/>
+          <p:cNvSpPr txBox="1"/>
+          <p:nvPr/>
+        </p:nvSpPr>
+        <p:spPr>
+          <a:xfrm>
+            <a:off x="2203704" y="2706624"/>
+            <a:ext cx="969264" cy="137160"/>
+          </a:xfrm>
+          <a:prstGeom prst="rect">
+            <a:avLst/>
+          </a:prstGeom>
+          <a:noFill/>
+        </p:spPr>
+        <p:txBody>
+          <a:bodyPr wrap="square" lIns="0" rIns="0" tIns="0" bIns="0">
+            <a:spAutoFit/>
+          </a:bodyPr>
+          <a:lstStyle/>
+          <a:p>
+            <a:pPr algn="ctr"/>
+            <a:r>
+              <a:rPr sz="900" b="1">
+                <a:solidFill>
+                  <a:srgbClr val="FFFFFF"/>
+                </a:solidFill>
+                <a:latin typeface="Aptos"/>
+              </a:rPr>
+              <a:t>37</a:t>
+            </a:r>
+          </a:p>
+        </p:txBody>
+      </p:sp>
+      <p:sp>
+        <p:nvSpPr>
+          <p:cNvPr id="37" name="Rounded Rectangle 36"/>
+          <p:cNvSpPr/>
+          <p:nvPr/>
+        </p:nvSpPr>
+        <p:spPr>
+          <a:xfrm>
+            <a:off x="3273552" y="2670048"/>
+            <a:ext cx="1078992" cy="228600"/>
+          </a:xfrm>
+          <a:prstGeom prst="roundRect">
+            <a:avLst/>
+          </a:prstGeom>
+          <a:solidFill>
+            <a:srgbClr val="1E2761"/>
+          </a:solidFill>
+          <a:ln w="12700">
+            <a:solidFill>
+              <a:srgbClr val="FFFFFF"/>
+            </a:solidFill>
+          </a:ln>
+        </p:spPr>
+        <p:style>
+          <a:lnRef idx="1">
+            <a:schemeClr val="accent1"/>
+          </a:lnRef>
+          <a:fillRef idx="3">
+            <a:schemeClr val="accent1"/>
+          </a:fillRef>
+          <a:effectRef idx="2">
+            <a:schemeClr val="accent1"/>
+          </a:effectRef>
+          <a:fontRef idx="minor">
+            <a:schemeClr val="lt1"/>
+          </a:fontRef>
+        </p:style>
+        <p:txBody>
+          <a:bodyPr rtlCol="0" anchor="ctr"/>
+          <a:lstStyle/>
+          <a:p>
+            <a:pPr algn="ctr"/>
+          </a:p>
+        </p:txBody>
+      </p:sp>
+      <p:sp>
+        <p:nvSpPr>
+          <p:cNvPr id="38" name="TextBox 37"/>
+          <p:cNvSpPr txBox="1"/>
+          <p:nvPr/>
+        </p:nvSpPr>
+        <p:spPr>
+          <a:xfrm>
+            <a:off x="3328416" y="2706624"/>
+            <a:ext cx="969264" cy="137160"/>
+          </a:xfrm>
+          <a:prstGeom prst="rect">
+            <a:avLst/>
+          </a:prstGeom>
+          <a:noFill/>
+        </p:spPr>
+        <p:txBody>
+          <a:bodyPr wrap="square" lIns="0" rIns="0" tIns="0" bIns="0">
+            <a:spAutoFit/>
+          </a:bodyPr>
+          <a:lstStyle/>
+          <a:p>
+            <a:pPr algn="ctr"/>
+            <a:r>
+              <a:rPr sz="900" b="1">
+                <a:solidFill>
+                  <a:srgbClr val="FFFFFF"/>
+                </a:solidFill>
+                <a:latin typeface="Aptos"/>
+              </a:rPr>
+              <a:t>37</a:t>
+            </a:r>
+          </a:p>
+        </p:txBody>
+      </p:sp>
+      <p:sp>
+        <p:nvSpPr>
+          <p:cNvPr id="39" name="Rounded Rectangle 38"/>
+          <p:cNvSpPr/>
+          <p:nvPr/>
+        </p:nvSpPr>
+        <p:spPr>
+          <a:xfrm>
+            <a:off x="4398264" y="2670048"/>
+            <a:ext cx="1078992" cy="228600"/>
+          </a:xfrm>
+          <a:prstGeom prst="roundRect">
+            <a:avLst/>
+          </a:prstGeom>
+          <a:solidFill>
+            <a:srgbClr val="1E2761"/>
+          </a:solidFill>
+          <a:ln w="12700">
+            <a:solidFill>
+              <a:srgbClr val="FFFFFF"/>
+            </a:solidFill>
+          </a:ln>
+        </p:spPr>
+        <p:style>
+          <a:lnRef idx="1">
+            <a:schemeClr val="accent1"/>
+          </a:lnRef>
+          <a:fillRef idx="3">
+            <a:schemeClr val="accent1"/>
+          </a:fillRef>
+          <a:effectRef idx="2">
+            <a:schemeClr val="accent1"/>
+          </a:effectRef>
+          <a:fontRef idx="minor">
+            <a:schemeClr val="lt1"/>
+          </a:fontRef>
+        </p:style>
+        <p:txBody>
+          <a:bodyPr rtlCol="0" anchor="ctr"/>
+          <a:lstStyle/>
+          <a:p>
+            <a:pPr algn="ctr"/>
+          </a:p>
+        </p:txBody>
+      </p:sp>
+      <p:sp>
+        <p:nvSpPr>
+          <p:cNvPr id="40" name="TextBox 39"/>
+          <p:cNvSpPr txBox="1"/>
+          <p:nvPr/>
+        </p:nvSpPr>
+        <p:spPr>
+          <a:xfrm>
+            <a:off x="4453128" y="2706624"/>
+            <a:ext cx="969264" cy="137160"/>
+          </a:xfrm>
+          <a:prstGeom prst="rect">
+            <a:avLst/>
+          </a:prstGeom>
+          <a:noFill/>
+        </p:spPr>
+        <p:txBody>
+          <a:bodyPr wrap="square" lIns="0" rIns="0" tIns="0" bIns="0">
+            <a:spAutoFit/>
+          </a:bodyPr>
+          <a:lstStyle/>
+          <a:p>
+            <a:pPr algn="ctr"/>
+            <a:r>
+              <a:rPr sz="900" b="1">
+                <a:solidFill>
+                  <a:srgbClr val="FFFFFF"/>
+                </a:solidFill>
+                <a:latin typeface="Aptos"/>
+              </a:rPr>
+              <a:t>18</a:t>
+            </a:r>
+          </a:p>
+        </p:txBody>
+      </p:sp>
+      <p:sp>
+        <p:nvSpPr>
+          <p:cNvPr id="41" name="Rounded Rectangle 40"/>
+          <p:cNvSpPr/>
+          <p:nvPr/>
+        </p:nvSpPr>
+        <p:spPr>
+          <a:xfrm>
+            <a:off x="6172200" y="1097280"/>
+            <a:ext cx="5394960" cy="1783080"/>
+          </a:xfrm>
+          <a:prstGeom prst="roundRect">
+            <a:avLst/>
+          </a:prstGeom>
+          <a:solidFill>
+            <a:srgbClr val="FFFFFF"/>
+          </a:solidFill>
+          <a:ln w="12700">
+            <a:solidFill>
+              <a:srgbClr val="DAE2EE"/>
+            </a:solidFill>
+          </a:ln>
+        </p:spPr>
+        <p:style>
+          <a:lnRef idx="1">
+            <a:schemeClr val="accent1"/>
+          </a:lnRef>
+          <a:fillRef idx="3">
+            <a:schemeClr val="accent1"/>
+          </a:fillRef>
+          <a:effectRef idx="2">
+            <a:schemeClr val="accent1"/>
+          </a:effectRef>
+          <a:fontRef idx="minor">
+            <a:schemeClr val="lt1"/>
+          </a:fontRef>
+        </p:style>
+        <p:txBody>
+          <a:bodyPr rtlCol="0" anchor="ctr"/>
+          <a:lstStyle/>
+          <a:p>
+            <a:pPr algn="ctr"/>
+          </a:p>
+        </p:txBody>
+      </p:sp>
+      <p:sp>
+        <p:nvSpPr>
+          <p:cNvPr id="42" name="Rectangle 41"/>
+          <p:cNvSpPr/>
+          <p:nvPr/>
+        </p:nvSpPr>
+        <p:spPr>
+          <a:xfrm>
+            <a:off x="6172200" y="1097280"/>
+            <a:ext cx="5394960" cy="73152"/>
+          </a:xfrm>
+          <a:prstGeom prst="rect">
+            <a:avLst/>
+          </a:prstGeom>
+          <a:solidFill>
+            <a:srgbClr val="028090"/>
+          </a:solidFill>
+          <a:ln>
+            <a:noFill/>
+          </a:ln>
+        </p:spPr>
+        <p:style>
+          <a:lnRef idx="1">
+            <a:schemeClr val="accent1"/>
+          </a:lnRef>
+          <a:fillRef idx="3">
+            <a:schemeClr val="accent1"/>
+          </a:fillRef>
+          <a:effectRef idx="2">
+            <a:schemeClr val="accent1"/>
+          </a:effectRef>
+          <a:fontRef idx="minor">
+            <a:schemeClr val="lt1"/>
+          </a:fontRef>
+        </p:style>
+        <p:txBody>
+          <a:bodyPr rtlCol="0" anchor="ctr"/>
+          <a:lstStyle/>
+          <a:p>
+            <a:pPr algn="ctr"/>
+          </a:p>
+        </p:txBody>
+      </p:sp>
+      <p:sp>
+        <p:nvSpPr>
+          <p:cNvPr id="43" name="TextBox 42"/>
+          <p:cNvSpPr txBox="1"/>
+          <p:nvPr/>
+        </p:nvSpPr>
+        <p:spPr>
+          <a:xfrm>
+            <a:off x="6309360" y="1225295"/>
+            <a:ext cx="5120640" cy="274320"/>
+          </a:xfrm>
+          <a:prstGeom prst="rect">
+            <a:avLst/>
+          </a:prstGeom>
+          <a:noFill/>
+        </p:spPr>
+        <p:txBody>
+          <a:bodyPr wrap="square" lIns="0" rIns="0" tIns="0" bIns="0">
+            <a:spAutoFit/>
+          </a:bodyPr>
+          <a:lstStyle/>
+          <a:p>
+            <a:r>
+              <a:rPr sz="1400" b="1">
+                <a:solidFill>
+                  <a:srgbClr val="1E2761"/>
+                </a:solidFill>
+                <a:latin typeface="Aptos"/>
+              </a:rPr>
+              <a:t>Support status by database type</a:t>
+            </a:r>
+          </a:p>
+        </p:txBody>
+      </p:sp>
+      <p:sp>
+        <p:nvSpPr>
+          <p:cNvPr id="44" name="Rounded Rectangle 43"/>
+          <p:cNvSpPr/>
+          <p:nvPr/>
+        </p:nvSpPr>
+        <p:spPr>
+          <a:xfrm>
+            <a:off x="7498079" y="1572768"/>
+            <a:ext cx="1197863" cy="228600"/>
+          </a:xfrm>
+          <a:prstGeom prst="roundRect">
+            <a:avLst/>
+          </a:prstGeom>
+          <a:solidFill>
+            <a:srgbClr val="228B22"/>
+          </a:solidFill>
+          <a:ln>
+            <a:noFill/>
+          </a:ln>
+        </p:spPr>
+        <p:style>
+          <a:lnRef idx="1">
+            <a:schemeClr val="accent1"/>
+          </a:lnRef>
+          <a:fillRef idx="3">
+            <a:schemeClr val="accent1"/>
+          </a:fillRef>
+          <a:effectRef idx="2">
+            <a:schemeClr val="accent1"/>
+          </a:effectRef>
+          <a:fontRef idx="minor">
+            <a:schemeClr val="lt1"/>
+          </a:fontRef>
+        </p:style>
+        <p:txBody>
+          <a:bodyPr rtlCol="0" anchor="ctr"/>
+          <a:lstStyle/>
+          <a:p>
+            <a:pPr algn="ctr"/>
+          </a:p>
+        </p:txBody>
+      </p:sp>
+      <p:sp>
+        <p:nvSpPr>
+          <p:cNvPr id="45" name="TextBox 44"/>
+          <p:cNvSpPr txBox="1"/>
+          <p:nvPr/>
+        </p:nvSpPr>
+        <p:spPr>
+          <a:xfrm>
+            <a:off x="7543800" y="1618488"/>
+            <a:ext cx="1106423" cy="146304"/>
+          </a:xfrm>
+          <a:prstGeom prst="rect">
+            <a:avLst/>
+          </a:prstGeom>
+          <a:noFill/>
+        </p:spPr>
+        <p:txBody>
+          <a:bodyPr wrap="square" lIns="0" rIns="0" tIns="0" bIns="0">
+            <a:spAutoFit/>
+          </a:bodyPr>
+          <a:lstStyle/>
+          <a:p>
+            <a:pPr algn="ctr"/>
+            <a:r>
+              <a:rPr sz="900" b="1">
+                <a:solidFill>
+                  <a:srgbClr val="FFFFFF"/>
+                </a:solidFill>
+                <a:latin typeface="Aptos"/>
+              </a:rPr>
+              <a:t>Mainstream</a:t>
+            </a:r>
+          </a:p>
+        </p:txBody>
+      </p:sp>
+      <p:sp>
+        <p:nvSpPr>
+          <p:cNvPr id="46" name="Rounded Rectangle 45"/>
+          <p:cNvSpPr/>
+          <p:nvPr/>
+        </p:nvSpPr>
+        <p:spPr>
+          <a:xfrm>
+            <a:off x="8732519" y="1572768"/>
+            <a:ext cx="1197863" cy="228600"/>
+          </a:xfrm>
+          <a:prstGeom prst="roundRect">
+            <a:avLst/>
+          </a:prstGeom>
+          <a:solidFill>
+            <a:srgbClr val="DC2626"/>
+          </a:solidFill>
+          <a:ln>
+            <a:noFill/>
+          </a:ln>
+        </p:spPr>
+        <p:style>
+          <a:lnRef idx="1">
+            <a:schemeClr val="accent1"/>
+          </a:lnRef>
+          <a:fillRef idx="3">
+            <a:schemeClr val="accent1"/>
+          </a:fillRef>
+          <a:effectRef idx="2">
+            <a:schemeClr val="accent1"/>
+          </a:effectRef>
+          <a:fontRef idx="minor">
+            <a:schemeClr val="lt1"/>
+          </a:fontRef>
+        </p:style>
+        <p:txBody>
+          <a:bodyPr rtlCol="0" anchor="ctr"/>
+          <a:lstStyle/>
+          <a:p>
+            <a:pPr algn="ctr"/>
+          </a:p>
+        </p:txBody>
+      </p:sp>
+      <p:sp>
+        <p:nvSpPr>
+          <p:cNvPr id="47" name="TextBox 46"/>
+          <p:cNvSpPr txBox="1"/>
+          <p:nvPr/>
+        </p:nvSpPr>
+        <p:spPr>
+          <a:xfrm>
+            <a:off x="8778240" y="1618488"/>
+            <a:ext cx="1106423" cy="146304"/>
+          </a:xfrm>
+          <a:prstGeom prst="rect">
+            <a:avLst/>
+          </a:prstGeom>
+          <a:noFill/>
+        </p:spPr>
+        <p:txBody>
+          <a:bodyPr wrap="square" lIns="0" rIns="0" tIns="0" bIns="0">
+            <a:spAutoFit/>
+          </a:bodyPr>
+          <a:lstStyle/>
+          <a:p>
+            <a:pPr algn="ctr"/>
+            <a:r>
+              <a:rPr sz="900" b="1">
+                <a:solidFill>
+                  <a:srgbClr val="FFFFFF"/>
+                </a:solidFill>
+                <a:latin typeface="Aptos"/>
+              </a:rPr>
+              <a:t>Out of support</a:t>
+            </a:r>
+          </a:p>
+        </p:txBody>
+      </p:sp>
+      <p:sp>
+        <p:nvSpPr>
+          <p:cNvPr id="48" name="Rounded Rectangle 47"/>
+          <p:cNvSpPr/>
+          <p:nvPr/>
+        </p:nvSpPr>
+        <p:spPr>
+          <a:xfrm>
+            <a:off x="9966959" y="1572768"/>
+            <a:ext cx="1197863" cy="228600"/>
           </a:xfrm>
           <a:prstGeom prst="roundRect">
             <a:avLst/>
@@ -15778,14 +17386,14 @@
       </p:sp>
       <p:sp>
         <p:nvSpPr>
-          <p:cNvPr id="8" name="TextBox 7"/>
+          <p:cNvPr id="49" name="TextBox 48"/>
           <p:cNvSpPr txBox="1"/>
           <p:nvPr/>
         </p:nvSpPr>
         <p:spPr>
           <a:xfrm>
-            <a:off x="2423160" y="2240280"/>
-            <a:ext cx="1874519" cy="228600"/>
+            <a:off x="10012680" y="1618488"/>
+            <a:ext cx="1106423" cy="146304"/>
           </a:xfrm>
           <a:prstGeom prst="rect">
             <a:avLst/>
@@ -15800,7 +17408,7 @@
           <a:p>
             <a:pPr algn="ctr"/>
             <a:r>
-              <a:rPr sz="1200" b="1">
+              <a:rPr sz="900" b="1">
                 <a:solidFill>
                   <a:srgbClr val="FFFFFF"/>
                 </a:solidFill>
@@ -15813,23 +17421,59 @@
       </p:sp>
       <p:sp>
         <p:nvSpPr>
-          <p:cNvPr id="9" name="Rounded Rectangle 8"/>
+          <p:cNvPr id="50" name="TextBox 49"/>
+          <p:cNvSpPr txBox="1"/>
+          <p:nvPr/>
+        </p:nvSpPr>
+        <p:spPr>
+          <a:xfrm>
+            <a:off x="6400800" y="1883664"/>
+            <a:ext cx="960120" cy="164592"/>
+          </a:xfrm>
+          <a:prstGeom prst="rect">
+            <a:avLst/>
+          </a:prstGeom>
+          <a:noFill/>
+        </p:spPr>
+        <p:txBody>
+          <a:bodyPr wrap="square" lIns="0" rIns="0" tIns="0" bIns="0">
+            <a:spAutoFit/>
+          </a:bodyPr>
+          <a:lstStyle/>
+          <a:p>
+            <a:r>
+              <a:rPr sz="1000" b="1">
+                <a:solidFill>
+                  <a:srgbClr val="1E2761"/>
+                </a:solidFill>
+                <a:latin typeface="Aptos"/>
+              </a:rPr>
+              <a:t>MongoDB</a:t>
+            </a:r>
+          </a:p>
+        </p:txBody>
+      </p:sp>
+      <p:sp>
+        <p:nvSpPr>
+          <p:cNvPr id="51" name="Rounded Rectangle 50"/>
           <p:cNvSpPr/>
           <p:nvPr/>
         </p:nvSpPr>
         <p:spPr>
           <a:xfrm>
-            <a:off x="4462272" y="2057400"/>
-            <a:ext cx="2057400" cy="658368"/>
+            <a:off x="7498079" y="1847088"/>
+            <a:ext cx="1197863" cy="228600"/>
           </a:xfrm>
           <a:prstGeom prst="roundRect">
             <a:avLst/>
           </a:prstGeom>
           <a:solidFill>
-            <a:srgbClr val="228B22"/>
+            <a:srgbClr val="CEE5CE"/>
           </a:solidFill>
-          <a:ln>
-            <a:noFill/>
+          <a:ln w="12700">
+            <a:solidFill>
+              <a:srgbClr val="FFFFFF"/>
+            </a:solidFill>
           </a:ln>
         </p:spPr>
         <p:style>
@@ -15856,14 +17500,14 @@
       </p:sp>
       <p:sp>
         <p:nvSpPr>
-          <p:cNvPr id="10" name="TextBox 9"/>
+          <p:cNvPr id="52" name="TextBox 51"/>
           <p:cNvSpPr txBox="1"/>
           <p:nvPr/>
         </p:nvSpPr>
         <p:spPr>
           <a:xfrm>
-            <a:off x="4553712" y="2240280"/>
-            <a:ext cx="1874519" cy="228600"/>
+            <a:off x="7543800" y="1883664"/>
+            <a:ext cx="1106423" cy="137160"/>
           </a:xfrm>
           <a:prstGeom prst="rect">
             <a:avLst/>
@@ -15878,36 +17522,38 @@
           <a:p>
             <a:pPr algn="ctr"/>
             <a:r>
-              <a:rPr sz="1200" b="1">
-                <a:solidFill>
-                  <a:srgbClr val="FFFFFF"/>
+              <a:rPr sz="900" b="1">
+                <a:solidFill>
+                  <a:srgbClr val="1E2761"/>
                 </a:solidFill>
                 <a:latin typeface="Aptos"/>
               </a:rPr>
-              <a:t>Ready</a:t>
-            </a:r>
-          </a:p>
-        </p:txBody>
-      </p:sp>
-      <p:sp>
-        <p:nvSpPr>
-          <p:cNvPr id="11" name="Rounded Rectangle 10"/>
+              <a:t>10</a:t>
+            </a:r>
+          </a:p>
+        </p:txBody>
+      </p:sp>
+      <p:sp>
+        <p:nvSpPr>
+          <p:cNvPr id="53" name="Rounded Rectangle 52"/>
           <p:cNvSpPr/>
           <p:nvPr/>
         </p:nvSpPr>
         <p:spPr>
           <a:xfrm>
-            <a:off x="6592824" y="2057400"/>
-            <a:ext cx="2057400" cy="658368"/>
+            <a:off x="8732519" y="1847088"/>
+            <a:ext cx="1197863" cy="228600"/>
           </a:xfrm>
           <a:prstGeom prst="roundRect">
             <a:avLst/>
           </a:prstGeom>
           <a:solidFill>
-            <a:srgbClr val="EAB308"/>
+            <a:srgbClr val="F7CFCF"/>
           </a:solidFill>
-          <a:ln>
-            <a:noFill/>
+          <a:ln w="12700">
+            <a:solidFill>
+              <a:srgbClr val="FFFFFF"/>
+            </a:solidFill>
           </a:ln>
         </p:spPr>
         <p:style>
@@ -15934,14 +17580,14 @@
       </p:sp>
       <p:sp>
         <p:nvSpPr>
-          <p:cNvPr id="12" name="TextBox 11"/>
+          <p:cNvPr id="54" name="TextBox 53"/>
           <p:cNvSpPr txBox="1"/>
           <p:nvPr/>
         </p:nvSpPr>
         <p:spPr>
           <a:xfrm>
-            <a:off x="6684264" y="2240280"/>
-            <a:ext cx="1874519" cy="228600"/>
+            <a:off x="8778240" y="1883664"/>
+            <a:ext cx="1106423" cy="137160"/>
           </a:xfrm>
           <a:prstGeom prst="rect">
             <a:avLst/>
@@ -15956,139 +17602,27 @@
           <a:p>
             <a:pPr algn="ctr"/>
             <a:r>
-              <a:rPr sz="1200" b="1">
+              <a:rPr sz="900" b="1">
                 <a:solidFill>
                   <a:srgbClr val="1E2761"/>
                 </a:solidFill>
                 <a:latin typeface="Aptos"/>
               </a:rPr>
-              <a:t>Ready w/ conditions</a:t>
-            </a:r>
-          </a:p>
-        </p:txBody>
-      </p:sp>
-      <p:sp>
-        <p:nvSpPr>
-          <p:cNvPr id="13" name="Rounded Rectangle 12"/>
+              <a:t>4</a:t>
+            </a:r>
+          </a:p>
+        </p:txBody>
+      </p:sp>
+      <p:sp>
+        <p:nvSpPr>
+          <p:cNvPr id="55" name="Rounded Rectangle 54"/>
           <p:cNvSpPr/>
           <p:nvPr/>
         </p:nvSpPr>
         <p:spPr>
           <a:xfrm>
-            <a:off x="8723376" y="2057400"/>
-            <a:ext cx="2057400" cy="658368"/>
-          </a:xfrm>
-          <a:prstGeom prst="roundRect">
-            <a:avLst/>
-          </a:prstGeom>
-          <a:solidFill>
-            <a:srgbClr val="DC2626"/>
-          </a:solidFill>
-          <a:ln>
-            <a:noFill/>
-          </a:ln>
-        </p:spPr>
-        <p:style>
-          <a:lnRef idx="1">
-            <a:schemeClr val="accent1"/>
-          </a:lnRef>
-          <a:fillRef idx="3">
-            <a:schemeClr val="accent1"/>
-          </a:fillRef>
-          <a:effectRef idx="2">
-            <a:schemeClr val="accent1"/>
-          </a:effectRef>
-          <a:fontRef idx="minor">
-            <a:schemeClr val="lt1"/>
-          </a:fontRef>
-        </p:style>
-        <p:txBody>
-          <a:bodyPr rtlCol="0" anchor="ctr"/>
-          <a:lstStyle/>
-          <a:p>
-            <a:pPr algn="ctr"/>
-          </a:p>
-        </p:txBody>
-      </p:sp>
-      <p:sp>
-        <p:nvSpPr>
-          <p:cNvPr id="14" name="TextBox 13"/>
-          <p:cNvSpPr txBox="1"/>
-          <p:nvPr/>
-        </p:nvSpPr>
-        <p:spPr>
-          <a:xfrm>
-            <a:off x="8814815" y="2240280"/>
-            <a:ext cx="1874519" cy="228600"/>
-          </a:xfrm>
-          <a:prstGeom prst="rect">
-            <a:avLst/>
-          </a:prstGeom>
-          <a:noFill/>
-        </p:spPr>
-        <p:txBody>
-          <a:bodyPr wrap="square" lIns="0" rIns="0" tIns="0" bIns="0">
-            <a:spAutoFit/>
-          </a:bodyPr>
-          <a:lstStyle/>
-          <a:p>
-            <a:pPr algn="ctr"/>
-            <a:r>
-              <a:rPr sz="1200" b="1">
-                <a:solidFill>
-                  <a:srgbClr val="FFFFFF"/>
-                </a:solidFill>
-                <a:latin typeface="Aptos"/>
-              </a:rPr>
-              <a:t>Not ready</a:t>
-            </a:r>
-          </a:p>
-        </p:txBody>
-      </p:sp>
-      <p:sp>
-        <p:nvSpPr>
-          <p:cNvPr id="15" name="TextBox 14"/>
-          <p:cNvSpPr txBox="1"/>
-          <p:nvPr/>
-        </p:nvSpPr>
-        <p:spPr>
-          <a:xfrm>
-            <a:off x="914400" y="2971800"/>
-            <a:ext cx="1143000" cy="228600"/>
-          </a:xfrm>
-          <a:prstGeom prst="rect">
-            <a:avLst/>
-          </a:prstGeom>
-          <a:noFill/>
-        </p:spPr>
-        <p:txBody>
-          <a:bodyPr wrap="square" lIns="0" rIns="0" tIns="0" bIns="0">
-            <a:spAutoFit/>
-          </a:bodyPr>
-          <a:lstStyle/>
-          <a:p>
-            <a:r>
-              <a:rPr sz="1200" b="1">
-                <a:solidFill>
-                  <a:srgbClr val="1E2761"/>
-                </a:solidFill>
-                <a:latin typeface="Aptos"/>
-              </a:rPr>
-              <a:t>MongoDB</a:t>
-            </a:r>
-          </a:p>
-        </p:txBody>
-      </p:sp>
-      <p:sp>
-        <p:nvSpPr>
-          <p:cNvPr id="16" name="Rounded Rectangle 15"/>
-          <p:cNvSpPr/>
-          <p:nvPr/>
-        </p:nvSpPr>
-        <p:spPr>
-          <a:xfrm>
-            <a:off x="2331720" y="2788920"/>
-            <a:ext cx="2057400" cy="658368"/>
+            <a:off x="9966959" y="1847088"/>
+            <a:ext cx="1197863" cy="228600"/>
           </a:xfrm>
           <a:prstGeom prst="roundRect">
             <a:avLst/>
@@ -16126,14 +17660,14 @@
       </p:sp>
       <p:sp>
         <p:nvSpPr>
-          <p:cNvPr id="17" name="TextBox 16"/>
+          <p:cNvPr id="56" name="TextBox 55"/>
           <p:cNvSpPr txBox="1"/>
           <p:nvPr/>
         </p:nvSpPr>
         <p:spPr>
           <a:xfrm>
-            <a:off x="2423160" y="2953512"/>
-            <a:ext cx="1874519" cy="256032"/>
+            <a:off x="10012680" y="1883664"/>
+            <a:ext cx="1106423" cy="137160"/>
           </a:xfrm>
           <a:prstGeom prst="rect">
             <a:avLst/>
@@ -16148,27 +17682,61 @@
           <a:p>
             <a:pPr algn="ctr"/>
             <a:r>
-              <a:rPr sz="1600" b="1">
+              <a:rPr sz="900" b="1">
                 <a:solidFill>
                   <a:srgbClr val="1E2761"/>
                 </a:solidFill>
                 <a:latin typeface="Aptos"/>
               </a:rPr>
-              <a:t>0</a:t>
-            </a:r>
-          </a:p>
-        </p:txBody>
-      </p:sp>
-      <p:sp>
-        <p:nvSpPr>
-          <p:cNvPr id="18" name="Rounded Rectangle 17"/>
+              <a:t>5</a:t>
+            </a:r>
+          </a:p>
+        </p:txBody>
+      </p:sp>
+      <p:sp>
+        <p:nvSpPr>
+          <p:cNvPr id="57" name="TextBox 56"/>
+          <p:cNvSpPr txBox="1"/>
+          <p:nvPr/>
+        </p:nvSpPr>
+        <p:spPr>
+          <a:xfrm>
+            <a:off x="6400800" y="2157984"/>
+            <a:ext cx="960120" cy="164592"/>
+          </a:xfrm>
+          <a:prstGeom prst="rect">
+            <a:avLst/>
+          </a:prstGeom>
+          <a:noFill/>
+        </p:spPr>
+        <p:txBody>
+          <a:bodyPr wrap="square" lIns="0" rIns="0" tIns="0" bIns="0">
+            <a:spAutoFit/>
+          </a:bodyPr>
+          <a:lstStyle/>
+          <a:p>
+            <a:r>
+              <a:rPr sz="1000" b="1">
+                <a:solidFill>
+                  <a:srgbClr val="1E2761"/>
+                </a:solidFill>
+                <a:latin typeface="Aptos"/>
+              </a:rPr>
+              <a:t>MySQL</a:t>
+            </a:r>
+          </a:p>
+        </p:txBody>
+      </p:sp>
+      <p:sp>
+        <p:nvSpPr>
+          <p:cNvPr id="58" name="Rounded Rectangle 57"/>
           <p:cNvSpPr/>
           <p:nvPr/>
         </p:nvSpPr>
         <p:spPr>
           <a:xfrm>
-            <a:off x="4462272" y="2788920"/>
-            <a:ext cx="2057400" cy="658368"/>
+            <a:off x="7498079" y="2121408"/>
+            <a:ext cx="1197863" cy="228600"/>
           </a:xfrm>
           <a:prstGeom prst="roundRect">
             <a:avLst/>
@@ -16206,14 +17774,14 @@
       </p:sp>
       <p:sp>
         <p:nvSpPr>
-          <p:cNvPr id="19" name="TextBox 18"/>
+          <p:cNvPr id="59" name="TextBox 58"/>
           <p:cNvSpPr txBox="1"/>
           <p:nvPr/>
         </p:nvSpPr>
         <p:spPr>
           <a:xfrm>
-            <a:off x="4553712" y="2953512"/>
-            <a:ext cx="1874519" cy="256032"/>
+            <a:off x="7543800" y="2157984"/>
+            <a:ext cx="1106423" cy="137160"/>
           </a:xfrm>
           <a:prstGeom prst="rect">
             <a:avLst/>
@@ -16228,7 +17796,1263 @@
           <a:p>
             <a:pPr algn="ctr"/>
             <a:r>
-              <a:rPr sz="1600" b="1">
+              <a:rPr sz="900" b="1">
+                <a:solidFill>
+                  <a:srgbClr val="1E2761"/>
+                </a:solidFill>
+                <a:latin typeface="Aptos"/>
+              </a:rPr>
+              <a:t>2</a:t>
+            </a:r>
+          </a:p>
+        </p:txBody>
+      </p:sp>
+      <p:sp>
+        <p:nvSpPr>
+          <p:cNvPr id="60" name="Rounded Rectangle 59"/>
+          <p:cNvSpPr/>
+          <p:nvPr/>
+        </p:nvSpPr>
+        <p:spPr>
+          <a:xfrm>
+            <a:off x="8732519" y="2121408"/>
+            <a:ext cx="1197863" cy="228600"/>
+          </a:xfrm>
+          <a:prstGeom prst="roundRect">
+            <a:avLst/>
+          </a:prstGeom>
+          <a:solidFill>
+            <a:srgbClr val="F7CFCF"/>
+          </a:solidFill>
+          <a:ln w="12700">
+            <a:solidFill>
+              <a:srgbClr val="FFFFFF"/>
+            </a:solidFill>
+          </a:ln>
+        </p:spPr>
+        <p:style>
+          <a:lnRef idx="1">
+            <a:schemeClr val="accent1"/>
+          </a:lnRef>
+          <a:fillRef idx="3">
+            <a:schemeClr val="accent1"/>
+          </a:fillRef>
+          <a:effectRef idx="2">
+            <a:schemeClr val="accent1"/>
+          </a:effectRef>
+          <a:fontRef idx="minor">
+            <a:schemeClr val="lt1"/>
+          </a:fontRef>
+        </p:style>
+        <p:txBody>
+          <a:bodyPr rtlCol="0" anchor="ctr"/>
+          <a:lstStyle/>
+          <a:p>
+            <a:pPr algn="ctr"/>
+          </a:p>
+        </p:txBody>
+      </p:sp>
+      <p:sp>
+        <p:nvSpPr>
+          <p:cNvPr id="61" name="TextBox 60"/>
+          <p:cNvSpPr txBox="1"/>
+          <p:nvPr/>
+        </p:nvSpPr>
+        <p:spPr>
+          <a:xfrm>
+            <a:off x="8778240" y="2157984"/>
+            <a:ext cx="1106423" cy="137160"/>
+          </a:xfrm>
+          <a:prstGeom prst="rect">
+            <a:avLst/>
+          </a:prstGeom>
+          <a:noFill/>
+        </p:spPr>
+        <p:txBody>
+          <a:bodyPr wrap="square" lIns="0" rIns="0" tIns="0" bIns="0">
+            <a:spAutoFit/>
+          </a:bodyPr>
+          <a:lstStyle/>
+          <a:p>
+            <a:pPr algn="ctr"/>
+            <a:r>
+              <a:rPr sz="900" b="1">
+                <a:solidFill>
+                  <a:srgbClr val="1E2761"/>
+                </a:solidFill>
+                <a:latin typeface="Aptos"/>
+              </a:rPr>
+              <a:t>8</a:t>
+            </a:r>
+          </a:p>
+        </p:txBody>
+      </p:sp>
+      <p:sp>
+        <p:nvSpPr>
+          <p:cNvPr id="62" name="Rounded Rectangle 61"/>
+          <p:cNvSpPr/>
+          <p:nvPr/>
+        </p:nvSpPr>
+        <p:spPr>
+          <a:xfrm>
+            <a:off x="9966959" y="2121408"/>
+            <a:ext cx="1197863" cy="228600"/>
+          </a:xfrm>
+          <a:prstGeom prst="roundRect">
+            <a:avLst/>
+          </a:prstGeom>
+          <a:solidFill>
+            <a:srgbClr val="E7EAEF"/>
+          </a:solidFill>
+          <a:ln w="12700">
+            <a:solidFill>
+              <a:srgbClr val="FFFFFF"/>
+            </a:solidFill>
+          </a:ln>
+        </p:spPr>
+        <p:style>
+          <a:lnRef idx="1">
+            <a:schemeClr val="accent1"/>
+          </a:lnRef>
+          <a:fillRef idx="3">
+            <a:schemeClr val="accent1"/>
+          </a:fillRef>
+          <a:effectRef idx="2">
+            <a:schemeClr val="accent1"/>
+          </a:effectRef>
+          <a:fontRef idx="minor">
+            <a:schemeClr val="lt1"/>
+          </a:fontRef>
+        </p:style>
+        <p:txBody>
+          <a:bodyPr rtlCol="0" anchor="ctr"/>
+          <a:lstStyle/>
+          <a:p>
+            <a:pPr algn="ctr"/>
+          </a:p>
+        </p:txBody>
+      </p:sp>
+      <p:sp>
+        <p:nvSpPr>
+          <p:cNvPr id="63" name="TextBox 62"/>
+          <p:cNvSpPr txBox="1"/>
+          <p:nvPr/>
+        </p:nvSpPr>
+        <p:spPr>
+          <a:xfrm>
+            <a:off x="10012680" y="2157984"/>
+            <a:ext cx="1106423" cy="137160"/>
+          </a:xfrm>
+          <a:prstGeom prst="rect">
+            <a:avLst/>
+          </a:prstGeom>
+          <a:noFill/>
+        </p:spPr>
+        <p:txBody>
+          <a:bodyPr wrap="square" lIns="0" rIns="0" tIns="0" bIns="0">
+            <a:spAutoFit/>
+          </a:bodyPr>
+          <a:lstStyle/>
+          <a:p>
+            <a:pPr algn="ctr"/>
+            <a:r>
+              <a:rPr sz="900" b="1">
+                <a:solidFill>
+                  <a:srgbClr val="1E2761"/>
+                </a:solidFill>
+                <a:latin typeface="Aptos"/>
+              </a:rPr>
+              <a:t>1</a:t>
+            </a:r>
+          </a:p>
+        </p:txBody>
+      </p:sp>
+      <p:sp>
+        <p:nvSpPr>
+          <p:cNvPr id="64" name="TextBox 63"/>
+          <p:cNvSpPr txBox="1"/>
+          <p:nvPr/>
+        </p:nvSpPr>
+        <p:spPr>
+          <a:xfrm>
+            <a:off x="6400800" y="2432304"/>
+            <a:ext cx="960120" cy="164592"/>
+          </a:xfrm>
+          <a:prstGeom prst="rect">
+            <a:avLst/>
+          </a:prstGeom>
+          <a:noFill/>
+        </p:spPr>
+        <p:txBody>
+          <a:bodyPr wrap="square" lIns="0" rIns="0" tIns="0" bIns="0">
+            <a:spAutoFit/>
+          </a:bodyPr>
+          <a:lstStyle/>
+          <a:p>
+            <a:r>
+              <a:rPr sz="1000" b="1">
+                <a:solidFill>
+                  <a:srgbClr val="1E2761"/>
+                </a:solidFill>
+                <a:latin typeface="Aptos"/>
+              </a:rPr>
+              <a:t>PostgreSQL</a:t>
+            </a:r>
+          </a:p>
+        </p:txBody>
+      </p:sp>
+      <p:sp>
+        <p:nvSpPr>
+          <p:cNvPr id="65" name="Rounded Rectangle 64"/>
+          <p:cNvSpPr/>
+          <p:nvPr/>
+        </p:nvSpPr>
+        <p:spPr>
+          <a:xfrm>
+            <a:off x="7498079" y="2395728"/>
+            <a:ext cx="1197863" cy="228600"/>
+          </a:xfrm>
+          <a:prstGeom prst="roundRect">
+            <a:avLst/>
+          </a:prstGeom>
+          <a:solidFill>
+            <a:srgbClr val="CEE5CE"/>
+          </a:solidFill>
+          <a:ln w="12700">
+            <a:solidFill>
+              <a:srgbClr val="FFFFFF"/>
+            </a:solidFill>
+          </a:ln>
+        </p:spPr>
+        <p:style>
+          <a:lnRef idx="1">
+            <a:schemeClr val="accent1"/>
+          </a:lnRef>
+          <a:fillRef idx="3">
+            <a:schemeClr val="accent1"/>
+          </a:fillRef>
+          <a:effectRef idx="2">
+            <a:schemeClr val="accent1"/>
+          </a:effectRef>
+          <a:fontRef idx="minor">
+            <a:schemeClr val="lt1"/>
+          </a:fontRef>
+        </p:style>
+        <p:txBody>
+          <a:bodyPr rtlCol="0" anchor="ctr"/>
+          <a:lstStyle/>
+          <a:p>
+            <a:pPr algn="ctr"/>
+          </a:p>
+        </p:txBody>
+      </p:sp>
+      <p:sp>
+        <p:nvSpPr>
+          <p:cNvPr id="66" name="TextBox 65"/>
+          <p:cNvSpPr txBox="1"/>
+          <p:nvPr/>
+        </p:nvSpPr>
+        <p:spPr>
+          <a:xfrm>
+            <a:off x="7543800" y="2432304"/>
+            <a:ext cx="1106423" cy="137160"/>
+          </a:xfrm>
+          <a:prstGeom prst="rect">
+            <a:avLst/>
+          </a:prstGeom>
+          <a:noFill/>
+        </p:spPr>
+        <p:txBody>
+          <a:bodyPr wrap="square" lIns="0" rIns="0" tIns="0" bIns="0">
+            <a:spAutoFit/>
+          </a:bodyPr>
+          <a:lstStyle/>
+          <a:p>
+            <a:pPr algn="ctr"/>
+            <a:r>
+              <a:rPr sz="900" b="1">
+                <a:solidFill>
+                  <a:srgbClr val="1E2761"/>
+                </a:solidFill>
+                <a:latin typeface="Aptos"/>
+              </a:rPr>
+              <a:t>2</a:t>
+            </a:r>
+          </a:p>
+        </p:txBody>
+      </p:sp>
+      <p:sp>
+        <p:nvSpPr>
+          <p:cNvPr id="67" name="Rounded Rectangle 66"/>
+          <p:cNvSpPr/>
+          <p:nvPr/>
+        </p:nvSpPr>
+        <p:spPr>
+          <a:xfrm>
+            <a:off x="8732519" y="2395728"/>
+            <a:ext cx="1197863" cy="228600"/>
+          </a:xfrm>
+          <a:prstGeom prst="roundRect">
+            <a:avLst/>
+          </a:prstGeom>
+          <a:solidFill>
+            <a:srgbClr val="F7CFCF"/>
+          </a:solidFill>
+          <a:ln w="12700">
+            <a:solidFill>
+              <a:srgbClr val="FFFFFF"/>
+            </a:solidFill>
+          </a:ln>
+        </p:spPr>
+        <p:style>
+          <a:lnRef idx="1">
+            <a:schemeClr val="accent1"/>
+          </a:lnRef>
+          <a:fillRef idx="3">
+            <a:schemeClr val="accent1"/>
+          </a:fillRef>
+          <a:effectRef idx="2">
+            <a:schemeClr val="accent1"/>
+          </a:effectRef>
+          <a:fontRef idx="minor">
+            <a:schemeClr val="lt1"/>
+          </a:fontRef>
+        </p:style>
+        <p:txBody>
+          <a:bodyPr rtlCol="0" anchor="ctr"/>
+          <a:lstStyle/>
+          <a:p>
+            <a:pPr algn="ctr"/>
+          </a:p>
+        </p:txBody>
+      </p:sp>
+      <p:sp>
+        <p:nvSpPr>
+          <p:cNvPr id="68" name="TextBox 67"/>
+          <p:cNvSpPr txBox="1"/>
+          <p:nvPr/>
+        </p:nvSpPr>
+        <p:spPr>
+          <a:xfrm>
+            <a:off x="8778240" y="2432304"/>
+            <a:ext cx="1106423" cy="137160"/>
+          </a:xfrm>
+          <a:prstGeom prst="rect">
+            <a:avLst/>
+          </a:prstGeom>
+          <a:noFill/>
+        </p:spPr>
+        <p:txBody>
+          <a:bodyPr wrap="square" lIns="0" rIns="0" tIns="0" bIns="0">
+            <a:spAutoFit/>
+          </a:bodyPr>
+          <a:lstStyle/>
+          <a:p>
+            <a:pPr algn="ctr"/>
+            <a:r>
+              <a:rPr sz="900" b="1">
+                <a:solidFill>
+                  <a:srgbClr val="1E2761"/>
+                </a:solidFill>
+                <a:latin typeface="Aptos"/>
+              </a:rPr>
+              <a:t>2</a:t>
+            </a:r>
+          </a:p>
+        </p:txBody>
+      </p:sp>
+      <p:sp>
+        <p:nvSpPr>
+          <p:cNvPr id="69" name="Rounded Rectangle 68"/>
+          <p:cNvSpPr/>
+          <p:nvPr/>
+        </p:nvSpPr>
+        <p:spPr>
+          <a:xfrm>
+            <a:off x="9966959" y="2395728"/>
+            <a:ext cx="1197863" cy="228600"/>
+          </a:xfrm>
+          <a:prstGeom prst="roundRect">
+            <a:avLst/>
+          </a:prstGeom>
+          <a:solidFill>
+            <a:srgbClr val="E7EAEF"/>
+          </a:solidFill>
+          <a:ln w="12700">
+            <a:solidFill>
+              <a:srgbClr val="FFFFFF"/>
+            </a:solidFill>
+          </a:ln>
+        </p:spPr>
+        <p:style>
+          <a:lnRef idx="1">
+            <a:schemeClr val="accent1"/>
+          </a:lnRef>
+          <a:fillRef idx="3">
+            <a:schemeClr val="accent1"/>
+          </a:fillRef>
+          <a:effectRef idx="2">
+            <a:schemeClr val="accent1"/>
+          </a:effectRef>
+          <a:fontRef idx="minor">
+            <a:schemeClr val="lt1"/>
+          </a:fontRef>
+        </p:style>
+        <p:txBody>
+          <a:bodyPr rtlCol="0" anchor="ctr"/>
+          <a:lstStyle/>
+          <a:p>
+            <a:pPr algn="ctr"/>
+          </a:p>
+        </p:txBody>
+      </p:sp>
+      <p:sp>
+        <p:nvSpPr>
+          <p:cNvPr id="70" name="TextBox 69"/>
+          <p:cNvSpPr txBox="1"/>
+          <p:nvPr/>
+        </p:nvSpPr>
+        <p:spPr>
+          <a:xfrm>
+            <a:off x="10012680" y="2432304"/>
+            <a:ext cx="1106423" cy="137160"/>
+          </a:xfrm>
+          <a:prstGeom prst="rect">
+            <a:avLst/>
+          </a:prstGeom>
+          <a:noFill/>
+        </p:spPr>
+        <p:txBody>
+          <a:bodyPr wrap="square" lIns="0" rIns="0" tIns="0" bIns="0">
+            <a:spAutoFit/>
+          </a:bodyPr>
+          <a:lstStyle/>
+          <a:p>
+            <a:pPr algn="ctr"/>
+            <a:r>
+              <a:rPr sz="900" b="1">
+                <a:solidFill>
+                  <a:srgbClr val="1E2761"/>
+                </a:solidFill>
+                <a:latin typeface="Aptos"/>
+              </a:rPr>
+              <a:t>3</a:t>
+            </a:r>
+          </a:p>
+        </p:txBody>
+      </p:sp>
+      <p:sp>
+        <p:nvSpPr>
+          <p:cNvPr id="71" name="TextBox 70"/>
+          <p:cNvSpPr txBox="1"/>
+          <p:nvPr/>
+        </p:nvSpPr>
+        <p:spPr>
+          <a:xfrm>
+            <a:off x="6400800" y="2706624"/>
+            <a:ext cx="960120" cy="164592"/>
+          </a:xfrm>
+          <a:prstGeom prst="rect">
+            <a:avLst/>
+          </a:prstGeom>
+          <a:noFill/>
+        </p:spPr>
+        <p:txBody>
+          <a:bodyPr wrap="square" lIns="0" rIns="0" tIns="0" bIns="0">
+            <a:spAutoFit/>
+          </a:bodyPr>
+          <a:lstStyle/>
+          <a:p>
+            <a:r>
+              <a:rPr sz="1000" b="1">
+                <a:solidFill>
+                  <a:srgbClr val="1E2761"/>
+                </a:solidFill>
+                <a:latin typeface="Aptos"/>
+              </a:rPr>
+              <a:t>Total</a:t>
+            </a:r>
+          </a:p>
+        </p:txBody>
+      </p:sp>
+      <p:sp>
+        <p:nvSpPr>
+          <p:cNvPr id="72" name="Rounded Rectangle 71"/>
+          <p:cNvSpPr/>
+          <p:nvPr/>
+        </p:nvSpPr>
+        <p:spPr>
+          <a:xfrm>
+            <a:off x="7498079" y="2670048"/>
+            <a:ext cx="1197863" cy="228600"/>
+          </a:xfrm>
+          <a:prstGeom prst="roundRect">
+            <a:avLst/>
+          </a:prstGeom>
+          <a:solidFill>
+            <a:srgbClr val="228B22"/>
+          </a:solidFill>
+          <a:ln w="12700">
+            <a:solidFill>
+              <a:srgbClr val="FFFFFF"/>
+            </a:solidFill>
+          </a:ln>
+        </p:spPr>
+        <p:style>
+          <a:lnRef idx="1">
+            <a:schemeClr val="accent1"/>
+          </a:lnRef>
+          <a:fillRef idx="3">
+            <a:schemeClr val="accent1"/>
+          </a:fillRef>
+          <a:effectRef idx="2">
+            <a:schemeClr val="accent1"/>
+          </a:effectRef>
+          <a:fontRef idx="minor">
+            <a:schemeClr val="lt1"/>
+          </a:fontRef>
+        </p:style>
+        <p:txBody>
+          <a:bodyPr rtlCol="0" anchor="ctr"/>
+          <a:lstStyle/>
+          <a:p>
+            <a:pPr algn="ctr"/>
+          </a:p>
+        </p:txBody>
+      </p:sp>
+      <p:sp>
+        <p:nvSpPr>
+          <p:cNvPr id="73" name="TextBox 72"/>
+          <p:cNvSpPr txBox="1"/>
+          <p:nvPr/>
+        </p:nvSpPr>
+        <p:spPr>
+          <a:xfrm>
+            <a:off x="7543800" y="2706624"/>
+            <a:ext cx="1106423" cy="137160"/>
+          </a:xfrm>
+          <a:prstGeom prst="rect">
+            <a:avLst/>
+          </a:prstGeom>
+          <a:noFill/>
+        </p:spPr>
+        <p:txBody>
+          <a:bodyPr wrap="square" lIns="0" rIns="0" tIns="0" bIns="0">
+            <a:spAutoFit/>
+          </a:bodyPr>
+          <a:lstStyle/>
+          <a:p>
+            <a:pPr algn="ctr"/>
+            <a:r>
+              <a:rPr sz="900" b="1">
+                <a:solidFill>
+                  <a:srgbClr val="FFFFFF"/>
+                </a:solidFill>
+                <a:latin typeface="Aptos"/>
+              </a:rPr>
+              <a:t>14</a:t>
+            </a:r>
+          </a:p>
+        </p:txBody>
+      </p:sp>
+      <p:sp>
+        <p:nvSpPr>
+          <p:cNvPr id="74" name="Rounded Rectangle 73"/>
+          <p:cNvSpPr/>
+          <p:nvPr/>
+        </p:nvSpPr>
+        <p:spPr>
+          <a:xfrm>
+            <a:off x="8732519" y="2670048"/>
+            <a:ext cx="1197863" cy="228600"/>
+          </a:xfrm>
+          <a:prstGeom prst="roundRect">
+            <a:avLst/>
+          </a:prstGeom>
+          <a:solidFill>
+            <a:srgbClr val="DC2626"/>
+          </a:solidFill>
+          <a:ln w="12700">
+            <a:solidFill>
+              <a:srgbClr val="FFFFFF"/>
+            </a:solidFill>
+          </a:ln>
+        </p:spPr>
+        <p:style>
+          <a:lnRef idx="1">
+            <a:schemeClr val="accent1"/>
+          </a:lnRef>
+          <a:fillRef idx="3">
+            <a:schemeClr val="accent1"/>
+          </a:fillRef>
+          <a:effectRef idx="2">
+            <a:schemeClr val="accent1"/>
+          </a:effectRef>
+          <a:fontRef idx="minor">
+            <a:schemeClr val="lt1"/>
+          </a:fontRef>
+        </p:style>
+        <p:txBody>
+          <a:bodyPr rtlCol="0" anchor="ctr"/>
+          <a:lstStyle/>
+          <a:p>
+            <a:pPr algn="ctr"/>
+          </a:p>
+        </p:txBody>
+      </p:sp>
+      <p:sp>
+        <p:nvSpPr>
+          <p:cNvPr id="75" name="TextBox 74"/>
+          <p:cNvSpPr txBox="1"/>
+          <p:nvPr/>
+        </p:nvSpPr>
+        <p:spPr>
+          <a:xfrm>
+            <a:off x="8778240" y="2706624"/>
+            <a:ext cx="1106423" cy="137160"/>
+          </a:xfrm>
+          <a:prstGeom prst="rect">
+            <a:avLst/>
+          </a:prstGeom>
+          <a:noFill/>
+        </p:spPr>
+        <p:txBody>
+          <a:bodyPr wrap="square" lIns="0" rIns="0" tIns="0" bIns="0">
+            <a:spAutoFit/>
+          </a:bodyPr>
+          <a:lstStyle/>
+          <a:p>
+            <a:pPr algn="ctr"/>
+            <a:r>
+              <a:rPr sz="900" b="1">
+                <a:solidFill>
+                  <a:srgbClr val="FFFFFF"/>
+                </a:solidFill>
+                <a:latin typeface="Aptos"/>
+              </a:rPr>
+              <a:t>14</a:t>
+            </a:r>
+          </a:p>
+        </p:txBody>
+      </p:sp>
+      <p:sp>
+        <p:nvSpPr>
+          <p:cNvPr id="76" name="Rounded Rectangle 75"/>
+          <p:cNvSpPr/>
+          <p:nvPr/>
+        </p:nvSpPr>
+        <p:spPr>
+          <a:xfrm>
+            <a:off x="9966959" y="2670048"/>
+            <a:ext cx="1197863" cy="228600"/>
+          </a:xfrm>
+          <a:prstGeom prst="roundRect">
+            <a:avLst/>
+          </a:prstGeom>
+          <a:solidFill>
+            <a:srgbClr val="94A3B8"/>
+          </a:solidFill>
+          <a:ln w="12700">
+            <a:solidFill>
+              <a:srgbClr val="FFFFFF"/>
+            </a:solidFill>
+          </a:ln>
+        </p:spPr>
+        <p:style>
+          <a:lnRef idx="1">
+            <a:schemeClr val="accent1"/>
+          </a:lnRef>
+          <a:fillRef idx="3">
+            <a:schemeClr val="accent1"/>
+          </a:fillRef>
+          <a:effectRef idx="2">
+            <a:schemeClr val="accent1"/>
+          </a:effectRef>
+          <a:fontRef idx="minor">
+            <a:schemeClr val="lt1"/>
+          </a:fontRef>
+        </p:style>
+        <p:txBody>
+          <a:bodyPr rtlCol="0" anchor="ctr"/>
+          <a:lstStyle/>
+          <a:p>
+            <a:pPr algn="ctr"/>
+          </a:p>
+        </p:txBody>
+      </p:sp>
+      <p:sp>
+        <p:nvSpPr>
+          <p:cNvPr id="77" name="TextBox 76"/>
+          <p:cNvSpPr txBox="1"/>
+          <p:nvPr/>
+        </p:nvSpPr>
+        <p:spPr>
+          <a:xfrm>
+            <a:off x="10012680" y="2706624"/>
+            <a:ext cx="1106423" cy="137160"/>
+          </a:xfrm>
+          <a:prstGeom prst="rect">
+            <a:avLst/>
+          </a:prstGeom>
+          <a:noFill/>
+        </p:spPr>
+        <p:txBody>
+          <a:bodyPr wrap="square" lIns="0" rIns="0" tIns="0" bIns="0">
+            <a:spAutoFit/>
+          </a:bodyPr>
+          <a:lstStyle/>
+          <a:p>
+            <a:pPr algn="ctr"/>
+            <a:r>
+              <a:rPr sz="900" b="1">
+                <a:solidFill>
+                  <a:srgbClr val="FFFFFF"/>
+                </a:solidFill>
+                <a:latin typeface="Aptos"/>
+              </a:rPr>
+              <a:t>9</a:t>
+            </a:r>
+          </a:p>
+        </p:txBody>
+      </p:sp>
+      <p:sp>
+        <p:nvSpPr>
+          <p:cNvPr id="78" name="Rounded Rectangle 77"/>
+          <p:cNvSpPr/>
+          <p:nvPr/>
+        </p:nvSpPr>
+        <p:spPr>
+          <a:xfrm>
+            <a:off x="594360" y="3154680"/>
+            <a:ext cx="10972800" cy="2788920"/>
+          </a:xfrm>
+          <a:prstGeom prst="roundRect">
+            <a:avLst/>
+          </a:prstGeom>
+          <a:solidFill>
+            <a:srgbClr val="FFFFFF"/>
+          </a:solidFill>
+          <a:ln w="12700">
+            <a:solidFill>
+              <a:srgbClr val="DAE2EE"/>
+            </a:solidFill>
+          </a:ln>
+        </p:spPr>
+        <p:style>
+          <a:lnRef idx="1">
+            <a:schemeClr val="accent1"/>
+          </a:lnRef>
+          <a:fillRef idx="3">
+            <a:schemeClr val="accent1"/>
+          </a:fillRef>
+          <a:effectRef idx="2">
+            <a:schemeClr val="accent1"/>
+          </a:effectRef>
+          <a:fontRef idx="minor">
+            <a:schemeClr val="lt1"/>
+          </a:fontRef>
+        </p:style>
+        <p:txBody>
+          <a:bodyPr rtlCol="0" anchor="ctr"/>
+          <a:lstStyle/>
+          <a:p>
+            <a:pPr algn="ctr"/>
+          </a:p>
+        </p:txBody>
+      </p:sp>
+      <p:sp>
+        <p:nvSpPr>
+          <p:cNvPr id="79" name="Rectangle 78"/>
+          <p:cNvSpPr/>
+          <p:nvPr/>
+        </p:nvSpPr>
+        <p:spPr>
+          <a:xfrm>
+            <a:off x="594360" y="3154680"/>
+            <a:ext cx="10972800" cy="73152"/>
+          </a:xfrm>
+          <a:prstGeom prst="rect">
+            <a:avLst/>
+          </a:prstGeom>
+          <a:solidFill>
+            <a:srgbClr val="028090"/>
+          </a:solidFill>
+          <a:ln>
+            <a:noFill/>
+          </a:ln>
+        </p:spPr>
+        <p:style>
+          <a:lnRef idx="1">
+            <a:schemeClr val="accent1"/>
+          </a:lnRef>
+          <a:fillRef idx="3">
+            <a:schemeClr val="accent1"/>
+          </a:fillRef>
+          <a:effectRef idx="2">
+            <a:schemeClr val="accent1"/>
+          </a:effectRef>
+          <a:fontRef idx="minor">
+            <a:schemeClr val="lt1"/>
+          </a:fontRef>
+        </p:style>
+        <p:txBody>
+          <a:bodyPr rtlCol="0" anchor="ctr"/>
+          <a:lstStyle/>
+          <a:p>
+            <a:pPr algn="ctr"/>
+          </a:p>
+        </p:txBody>
+      </p:sp>
+      <p:sp>
+        <p:nvSpPr>
+          <p:cNvPr id="80" name="TextBox 79"/>
+          <p:cNvSpPr txBox="1"/>
+          <p:nvPr/>
+        </p:nvSpPr>
+        <p:spPr>
+          <a:xfrm>
+            <a:off x="731520" y="3282696"/>
+            <a:ext cx="10698480" cy="274320"/>
+          </a:xfrm>
+          <a:prstGeom prst="rect">
+            <a:avLst/>
+          </a:prstGeom>
+          <a:noFill/>
+        </p:spPr>
+        <p:txBody>
+          <a:bodyPr wrap="square" lIns="0" rIns="0" tIns="0" bIns="0">
+            <a:spAutoFit/>
+          </a:bodyPr>
+          <a:lstStyle/>
+          <a:p>
+            <a:r>
+              <a:rPr sz="1400" b="1">
+                <a:solidFill>
+                  <a:srgbClr val="1E2761"/>
+                </a:solidFill>
+                <a:latin typeface="Aptos"/>
+              </a:rPr>
+              <a:t>PaaS readiness by database type</a:t>
+            </a:r>
+          </a:p>
+        </p:txBody>
+      </p:sp>
+      <p:sp>
+        <p:nvSpPr>
+          <p:cNvPr id="81" name="Rounded Rectangle 80"/>
+          <p:cNvSpPr/>
+          <p:nvPr/>
+        </p:nvSpPr>
+        <p:spPr>
+          <a:xfrm>
+            <a:off x="2148840" y="3675887"/>
+            <a:ext cx="2057400" cy="384048"/>
+          </a:xfrm>
+          <a:prstGeom prst="roundRect">
+            <a:avLst/>
+          </a:prstGeom>
+          <a:solidFill>
+            <a:srgbClr val="94A3B8"/>
+          </a:solidFill>
+          <a:ln>
+            <a:noFill/>
+          </a:ln>
+        </p:spPr>
+        <p:style>
+          <a:lnRef idx="1">
+            <a:schemeClr val="accent1"/>
+          </a:lnRef>
+          <a:fillRef idx="3">
+            <a:schemeClr val="accent1"/>
+          </a:fillRef>
+          <a:effectRef idx="2">
+            <a:schemeClr val="accent1"/>
+          </a:effectRef>
+          <a:fontRef idx="minor">
+            <a:schemeClr val="lt1"/>
+          </a:fontRef>
+        </p:style>
+        <p:txBody>
+          <a:bodyPr rtlCol="0" anchor="ctr"/>
+          <a:lstStyle/>
+          <a:p>
+            <a:pPr algn="ctr"/>
+          </a:p>
+        </p:txBody>
+      </p:sp>
+      <p:sp>
+        <p:nvSpPr>
+          <p:cNvPr id="82" name="TextBox 81"/>
+          <p:cNvSpPr txBox="1"/>
+          <p:nvPr/>
+        </p:nvSpPr>
+        <p:spPr>
+          <a:xfrm>
+            <a:off x="2240280" y="3749039"/>
+            <a:ext cx="1874519" cy="219456"/>
+          </a:xfrm>
+          <a:prstGeom prst="rect">
+            <a:avLst/>
+          </a:prstGeom>
+          <a:noFill/>
+        </p:spPr>
+        <p:txBody>
+          <a:bodyPr wrap="square" lIns="0" rIns="0" tIns="0" bIns="0">
+            <a:spAutoFit/>
+          </a:bodyPr>
+          <a:lstStyle/>
+          <a:p>
+            <a:pPr algn="ctr"/>
+            <a:r>
+              <a:rPr sz="1200" b="1">
+                <a:solidFill>
+                  <a:srgbClr val="FFFFFF"/>
+                </a:solidFill>
+                <a:latin typeface="Aptos"/>
+              </a:rPr>
+              <a:t>Unknown</a:t>
+            </a:r>
+          </a:p>
+        </p:txBody>
+      </p:sp>
+      <p:sp>
+        <p:nvSpPr>
+          <p:cNvPr id="83" name="Rounded Rectangle 82"/>
+          <p:cNvSpPr/>
+          <p:nvPr/>
+        </p:nvSpPr>
+        <p:spPr>
+          <a:xfrm>
+            <a:off x="4279392" y="3675887"/>
+            <a:ext cx="2057400" cy="384048"/>
+          </a:xfrm>
+          <a:prstGeom prst="roundRect">
+            <a:avLst/>
+          </a:prstGeom>
+          <a:solidFill>
+            <a:srgbClr val="228B22"/>
+          </a:solidFill>
+          <a:ln>
+            <a:noFill/>
+          </a:ln>
+        </p:spPr>
+        <p:style>
+          <a:lnRef idx="1">
+            <a:schemeClr val="accent1"/>
+          </a:lnRef>
+          <a:fillRef idx="3">
+            <a:schemeClr val="accent1"/>
+          </a:fillRef>
+          <a:effectRef idx="2">
+            <a:schemeClr val="accent1"/>
+          </a:effectRef>
+          <a:fontRef idx="minor">
+            <a:schemeClr val="lt1"/>
+          </a:fontRef>
+        </p:style>
+        <p:txBody>
+          <a:bodyPr rtlCol="0" anchor="ctr"/>
+          <a:lstStyle/>
+          <a:p>
+            <a:pPr algn="ctr"/>
+          </a:p>
+        </p:txBody>
+      </p:sp>
+      <p:sp>
+        <p:nvSpPr>
+          <p:cNvPr id="84" name="TextBox 83"/>
+          <p:cNvSpPr txBox="1"/>
+          <p:nvPr/>
+        </p:nvSpPr>
+        <p:spPr>
+          <a:xfrm>
+            <a:off x="4370831" y="3749039"/>
+            <a:ext cx="1874519" cy="219456"/>
+          </a:xfrm>
+          <a:prstGeom prst="rect">
+            <a:avLst/>
+          </a:prstGeom>
+          <a:noFill/>
+        </p:spPr>
+        <p:txBody>
+          <a:bodyPr wrap="square" lIns="0" rIns="0" tIns="0" bIns="0">
+            <a:spAutoFit/>
+          </a:bodyPr>
+          <a:lstStyle/>
+          <a:p>
+            <a:pPr algn="ctr"/>
+            <a:r>
+              <a:rPr sz="1200" b="1">
+                <a:solidFill>
+                  <a:srgbClr val="FFFFFF"/>
+                </a:solidFill>
+                <a:latin typeface="Aptos"/>
+              </a:rPr>
+              <a:t>Ready</a:t>
+            </a:r>
+          </a:p>
+        </p:txBody>
+      </p:sp>
+      <p:sp>
+        <p:nvSpPr>
+          <p:cNvPr id="85" name="Rounded Rectangle 84"/>
+          <p:cNvSpPr/>
+          <p:nvPr/>
+        </p:nvSpPr>
+        <p:spPr>
+          <a:xfrm>
+            <a:off x="6409944" y="3675887"/>
+            <a:ext cx="2057400" cy="384048"/>
+          </a:xfrm>
+          <a:prstGeom prst="roundRect">
+            <a:avLst/>
+          </a:prstGeom>
+          <a:solidFill>
+            <a:srgbClr val="EAB308"/>
+          </a:solidFill>
+          <a:ln>
+            <a:noFill/>
+          </a:ln>
+        </p:spPr>
+        <p:style>
+          <a:lnRef idx="1">
+            <a:schemeClr val="accent1"/>
+          </a:lnRef>
+          <a:fillRef idx="3">
+            <a:schemeClr val="accent1"/>
+          </a:fillRef>
+          <a:effectRef idx="2">
+            <a:schemeClr val="accent1"/>
+          </a:effectRef>
+          <a:fontRef idx="minor">
+            <a:schemeClr val="lt1"/>
+          </a:fontRef>
+        </p:style>
+        <p:txBody>
+          <a:bodyPr rtlCol="0" anchor="ctr"/>
+          <a:lstStyle/>
+          <a:p>
+            <a:pPr algn="ctr"/>
+          </a:p>
+        </p:txBody>
+      </p:sp>
+      <p:sp>
+        <p:nvSpPr>
+          <p:cNvPr id="86" name="TextBox 85"/>
+          <p:cNvSpPr txBox="1"/>
+          <p:nvPr/>
+        </p:nvSpPr>
+        <p:spPr>
+          <a:xfrm>
+            <a:off x="6501383" y="3749039"/>
+            <a:ext cx="1874519" cy="219456"/>
+          </a:xfrm>
+          <a:prstGeom prst="rect">
+            <a:avLst/>
+          </a:prstGeom>
+          <a:noFill/>
+        </p:spPr>
+        <p:txBody>
+          <a:bodyPr wrap="square" lIns="0" rIns="0" tIns="0" bIns="0">
+            <a:spAutoFit/>
+          </a:bodyPr>
+          <a:lstStyle/>
+          <a:p>
+            <a:pPr algn="ctr"/>
+            <a:r>
+              <a:rPr sz="1200" b="1">
+                <a:solidFill>
+                  <a:srgbClr val="1E2761"/>
+                </a:solidFill>
+                <a:latin typeface="Aptos"/>
+              </a:rPr>
+              <a:t>Ready w/ conditions</a:t>
+            </a:r>
+          </a:p>
+        </p:txBody>
+      </p:sp>
+      <p:sp>
+        <p:nvSpPr>
+          <p:cNvPr id="87" name="Rounded Rectangle 86"/>
+          <p:cNvSpPr/>
+          <p:nvPr/>
+        </p:nvSpPr>
+        <p:spPr>
+          <a:xfrm>
+            <a:off x="8540496" y="3675887"/>
+            <a:ext cx="2057400" cy="384048"/>
+          </a:xfrm>
+          <a:prstGeom prst="roundRect">
+            <a:avLst/>
+          </a:prstGeom>
+          <a:solidFill>
+            <a:srgbClr val="DC2626"/>
+          </a:solidFill>
+          <a:ln>
+            <a:noFill/>
+          </a:ln>
+        </p:spPr>
+        <p:style>
+          <a:lnRef idx="1">
+            <a:schemeClr val="accent1"/>
+          </a:lnRef>
+          <a:fillRef idx="3">
+            <a:schemeClr val="accent1"/>
+          </a:fillRef>
+          <a:effectRef idx="2">
+            <a:schemeClr val="accent1"/>
+          </a:effectRef>
+          <a:fontRef idx="minor">
+            <a:schemeClr val="lt1"/>
+          </a:fontRef>
+        </p:style>
+        <p:txBody>
+          <a:bodyPr rtlCol="0" anchor="ctr"/>
+          <a:lstStyle/>
+          <a:p>
+            <a:pPr algn="ctr"/>
+          </a:p>
+        </p:txBody>
+      </p:sp>
+      <p:sp>
+        <p:nvSpPr>
+          <p:cNvPr id="88" name="TextBox 87"/>
+          <p:cNvSpPr txBox="1"/>
+          <p:nvPr/>
+        </p:nvSpPr>
+        <p:spPr>
+          <a:xfrm>
+            <a:off x="8631936" y="3749039"/>
+            <a:ext cx="1874519" cy="219456"/>
+          </a:xfrm>
+          <a:prstGeom prst="rect">
+            <a:avLst/>
+          </a:prstGeom>
+          <a:noFill/>
+        </p:spPr>
+        <p:txBody>
+          <a:bodyPr wrap="square" lIns="0" rIns="0" tIns="0" bIns="0">
+            <a:spAutoFit/>
+          </a:bodyPr>
+          <a:lstStyle/>
+          <a:p>
+            <a:pPr algn="ctr"/>
+            <a:r>
+              <a:rPr sz="1200" b="1">
+                <a:solidFill>
+                  <a:srgbClr val="FFFFFF"/>
+                </a:solidFill>
+                <a:latin typeface="Aptos"/>
+              </a:rPr>
+              <a:t>Not ready</a:t>
+            </a:r>
+          </a:p>
+        </p:txBody>
+      </p:sp>
+      <p:sp>
+        <p:nvSpPr>
+          <p:cNvPr id="89" name="TextBox 88"/>
+          <p:cNvSpPr txBox="1"/>
+          <p:nvPr/>
+        </p:nvSpPr>
+        <p:spPr>
+          <a:xfrm>
+            <a:off x="868680" y="4160520"/>
+            <a:ext cx="1143000" cy="274320"/>
+          </a:xfrm>
+          <a:prstGeom prst="rect">
+            <a:avLst/>
+          </a:prstGeom>
+          <a:noFill/>
+        </p:spPr>
+        <p:txBody>
+          <a:bodyPr wrap="square" lIns="0" rIns="0" tIns="0" bIns="0">
+            <a:spAutoFit/>
+          </a:bodyPr>
+          <a:lstStyle/>
+          <a:p>
+            <a:r>
+              <a:rPr sz="1400" b="1">
+                <a:solidFill>
+                  <a:srgbClr val="1E2761"/>
+                </a:solidFill>
+                <a:latin typeface="Aptos"/>
+              </a:rPr>
+              <a:t>MongoDB</a:t>
+            </a:r>
+          </a:p>
+        </p:txBody>
+      </p:sp>
+      <p:sp>
+        <p:nvSpPr>
+          <p:cNvPr id="90" name="Rounded Rectangle 89"/>
+          <p:cNvSpPr/>
+          <p:nvPr/>
+        </p:nvSpPr>
+        <p:spPr>
+          <a:xfrm>
+            <a:off x="2148840" y="4114800"/>
+            <a:ext cx="2057400" cy="384048"/>
+          </a:xfrm>
+          <a:prstGeom prst="roundRect">
+            <a:avLst/>
+          </a:prstGeom>
+          <a:solidFill>
+            <a:srgbClr val="E7EAEF"/>
+          </a:solidFill>
+          <a:ln w="12700">
+            <a:solidFill>
+              <a:srgbClr val="FFFFFF"/>
+            </a:solidFill>
+          </a:ln>
+        </p:spPr>
+        <p:style>
+          <a:lnRef idx="1">
+            <a:schemeClr val="accent1"/>
+          </a:lnRef>
+          <a:fillRef idx="3">
+            <a:schemeClr val="accent1"/>
+          </a:fillRef>
+          <a:effectRef idx="2">
+            <a:schemeClr val="accent1"/>
+          </a:effectRef>
+          <a:fontRef idx="minor">
+            <a:schemeClr val="lt1"/>
+          </a:fontRef>
+        </p:style>
+        <p:txBody>
+          <a:bodyPr rtlCol="0" anchor="ctr"/>
+          <a:lstStyle/>
+          <a:p>
+            <a:pPr algn="ctr"/>
+          </a:p>
+        </p:txBody>
+      </p:sp>
+      <p:sp>
+        <p:nvSpPr>
+          <p:cNvPr id="91" name="TextBox 90"/>
+          <p:cNvSpPr txBox="1"/>
+          <p:nvPr/>
+        </p:nvSpPr>
+        <p:spPr>
+          <a:xfrm>
+            <a:off x="2240280" y="4197096"/>
+            <a:ext cx="1874519" cy="164592"/>
+          </a:xfrm>
+          <a:prstGeom prst="rect">
+            <a:avLst/>
+          </a:prstGeom>
+          <a:noFill/>
+        </p:spPr>
+        <p:txBody>
+          <a:bodyPr wrap="square" lIns="0" rIns="0" tIns="0" bIns="0">
+            <a:spAutoFit/>
+          </a:bodyPr>
+          <a:lstStyle/>
+          <a:p>
+            <a:pPr algn="ctr"/>
+            <a:r>
+              <a:rPr sz="1100" b="1">
                 <a:solidFill>
                   <a:srgbClr val="1E2761"/>
                 </a:solidFill>
@@ -16241,14 +19065,94 @@
       </p:sp>
       <p:sp>
         <p:nvSpPr>
-          <p:cNvPr id="20" name="Rounded Rectangle 19"/>
+          <p:cNvPr id="92" name="Rounded Rectangle 91"/>
           <p:cNvSpPr/>
           <p:nvPr/>
         </p:nvSpPr>
         <p:spPr>
           <a:xfrm>
-            <a:off x="6592824" y="2788920"/>
-            <a:ext cx="2057400" cy="658368"/>
+            <a:off x="4279392" y="4114800"/>
+            <a:ext cx="2057400" cy="384048"/>
+          </a:xfrm>
+          <a:prstGeom prst="roundRect">
+            <a:avLst/>
+          </a:prstGeom>
+          <a:solidFill>
+            <a:srgbClr val="CEE5CE"/>
+          </a:solidFill>
+          <a:ln w="12700">
+            <a:solidFill>
+              <a:srgbClr val="FFFFFF"/>
+            </a:solidFill>
+          </a:ln>
+        </p:spPr>
+        <p:style>
+          <a:lnRef idx="1">
+            <a:schemeClr val="accent1"/>
+          </a:lnRef>
+          <a:fillRef idx="3">
+            <a:schemeClr val="accent1"/>
+          </a:fillRef>
+          <a:effectRef idx="2">
+            <a:schemeClr val="accent1"/>
+          </a:effectRef>
+          <a:fontRef idx="minor">
+            <a:schemeClr val="lt1"/>
+          </a:fontRef>
+        </p:style>
+        <p:txBody>
+          <a:bodyPr rtlCol="0" anchor="ctr"/>
+          <a:lstStyle/>
+          <a:p>
+            <a:pPr algn="ctr"/>
+          </a:p>
+        </p:txBody>
+      </p:sp>
+      <p:sp>
+        <p:nvSpPr>
+          <p:cNvPr id="93" name="TextBox 92"/>
+          <p:cNvSpPr txBox="1"/>
+          <p:nvPr/>
+        </p:nvSpPr>
+        <p:spPr>
+          <a:xfrm>
+            <a:off x="4370831" y="4197096"/>
+            <a:ext cx="1874519" cy="164592"/>
+          </a:xfrm>
+          <a:prstGeom prst="rect">
+            <a:avLst/>
+          </a:prstGeom>
+          <a:noFill/>
+        </p:spPr>
+        <p:txBody>
+          <a:bodyPr wrap="square" lIns="0" rIns="0" tIns="0" bIns="0">
+            <a:spAutoFit/>
+          </a:bodyPr>
+          <a:lstStyle/>
+          <a:p>
+            <a:pPr algn="ctr"/>
+            <a:r>
+              <a:rPr sz="1100" b="1">
+                <a:solidFill>
+                  <a:srgbClr val="1E2761"/>
+                </a:solidFill>
+                <a:latin typeface="Aptos"/>
+              </a:rPr>
+              <a:t>0</a:t>
+            </a:r>
+          </a:p>
+        </p:txBody>
+      </p:sp>
+      <p:sp>
+        <p:nvSpPr>
+          <p:cNvPr id="94" name="Rounded Rectangle 93"/>
+          <p:cNvSpPr/>
+          <p:nvPr/>
+        </p:nvSpPr>
+        <p:spPr>
+          <a:xfrm>
+            <a:off x="6409944" y="4114800"/>
+            <a:ext cx="2057400" cy="384048"/>
           </a:xfrm>
           <a:prstGeom prst="roundRect">
             <a:avLst/>
@@ -16286,14 +19190,14 @@
       </p:sp>
       <p:sp>
         <p:nvSpPr>
-          <p:cNvPr id="21" name="TextBox 20"/>
+          <p:cNvPr id="95" name="TextBox 94"/>
           <p:cNvSpPr txBox="1"/>
           <p:nvPr/>
         </p:nvSpPr>
         <p:spPr>
           <a:xfrm>
-            <a:off x="6684264" y="2953512"/>
-            <a:ext cx="1874519" cy="256032"/>
+            <a:off x="6501383" y="4197096"/>
+            <a:ext cx="1874519" cy="164592"/>
           </a:xfrm>
           <a:prstGeom prst="rect">
             <a:avLst/>
@@ -16308,7 +19212,7 @@
           <a:p>
             <a:pPr algn="ctr"/>
             <a:r>
-              <a:rPr sz="1600" b="1">
+              <a:rPr sz="1100" b="1">
                 <a:solidFill>
                   <a:srgbClr val="1E2761"/>
                 </a:solidFill>
@@ -16321,14 +19225,14 @@
       </p:sp>
       <p:sp>
         <p:nvSpPr>
-          <p:cNvPr id="22" name="Rounded Rectangle 21"/>
+          <p:cNvPr id="96" name="Rounded Rectangle 95"/>
           <p:cNvSpPr/>
           <p:nvPr/>
         </p:nvSpPr>
         <p:spPr>
           <a:xfrm>
-            <a:off x="8723376" y="2788920"/>
-            <a:ext cx="2057400" cy="658368"/>
+            <a:off x="8540496" y="4114800"/>
+            <a:ext cx="2057400" cy="384048"/>
           </a:xfrm>
           <a:prstGeom prst="roundRect">
             <a:avLst/>
@@ -16366,14 +19270,14 @@
       </p:sp>
       <p:sp>
         <p:nvSpPr>
-          <p:cNvPr id="23" name="TextBox 22"/>
+          <p:cNvPr id="97" name="TextBox 96"/>
           <p:cNvSpPr txBox="1"/>
           <p:nvPr/>
         </p:nvSpPr>
         <p:spPr>
           <a:xfrm>
-            <a:off x="8814815" y="2953512"/>
-            <a:ext cx="1874519" cy="256032"/>
+            <a:off x="8631936" y="4197096"/>
+            <a:ext cx="1874519" cy="164592"/>
           </a:xfrm>
           <a:prstGeom prst="rect">
             <a:avLst/>
@@ -16388,7 +19292,7 @@
           <a:p>
             <a:pPr algn="ctr"/>
             <a:r>
-              <a:rPr sz="1600" b="1">
+              <a:rPr sz="1100" b="1">
                 <a:solidFill>
                   <a:srgbClr val="1E2761"/>
                 </a:solidFill>
@@ -16401,14 +19305,14 @@
       </p:sp>
       <p:sp>
         <p:nvSpPr>
-          <p:cNvPr id="24" name="TextBox 23"/>
+          <p:cNvPr id="98" name="TextBox 97"/>
           <p:cNvSpPr txBox="1"/>
           <p:nvPr/>
         </p:nvSpPr>
         <p:spPr>
           <a:xfrm>
-            <a:off x="914400" y="3703320"/>
-            <a:ext cx="1143000" cy="228600"/>
+            <a:off x="868680" y="4599431"/>
+            <a:ext cx="1143000" cy="274320"/>
           </a:xfrm>
           <a:prstGeom prst="rect">
             <a:avLst/>
@@ -16422,7 +19326,7 @@
           <a:lstStyle/>
           <a:p>
             <a:r>
-              <a:rPr sz="1200" b="1">
+              <a:rPr sz="1400" b="1">
                 <a:solidFill>
                   <a:srgbClr val="1E2761"/>
                 </a:solidFill>
@@ -16435,14 +19339,14 @@
       </p:sp>
       <p:sp>
         <p:nvSpPr>
-          <p:cNvPr id="25" name="Rounded Rectangle 24"/>
+          <p:cNvPr id="99" name="Rounded Rectangle 98"/>
           <p:cNvSpPr/>
           <p:nvPr/>
         </p:nvSpPr>
         <p:spPr>
           <a:xfrm>
-            <a:off x="2331720" y="3520439"/>
-            <a:ext cx="2057400" cy="658368"/>
+            <a:off x="2148840" y="4553712"/>
+            <a:ext cx="2057400" cy="384048"/>
           </a:xfrm>
           <a:prstGeom prst="roundRect">
             <a:avLst/>
@@ -16480,14 +19384,14 @@
       </p:sp>
       <p:sp>
         <p:nvSpPr>
-          <p:cNvPr id="26" name="TextBox 25"/>
+          <p:cNvPr id="100" name="TextBox 99"/>
           <p:cNvSpPr txBox="1"/>
           <p:nvPr/>
         </p:nvSpPr>
         <p:spPr>
           <a:xfrm>
-            <a:off x="2423160" y="3685031"/>
-            <a:ext cx="1874519" cy="256032"/>
+            <a:off x="2240280" y="4636007"/>
+            <a:ext cx="1874519" cy="164592"/>
           </a:xfrm>
           <a:prstGeom prst="rect">
             <a:avLst/>
@@ -16502,7 +19406,7 @@
           <a:p>
             <a:pPr algn="ctr"/>
             <a:r>
-              <a:rPr sz="1600" b="1">
+              <a:rPr sz="1100" b="1">
                 <a:solidFill>
                   <a:srgbClr val="1E2761"/>
                 </a:solidFill>
@@ -16515,14 +19419,14 @@
       </p:sp>
       <p:sp>
         <p:nvSpPr>
-          <p:cNvPr id="27" name="Rounded Rectangle 26"/>
+          <p:cNvPr id="101" name="Rounded Rectangle 100"/>
           <p:cNvSpPr/>
           <p:nvPr/>
         </p:nvSpPr>
         <p:spPr>
           <a:xfrm>
-            <a:off x="4462272" y="3520439"/>
-            <a:ext cx="2057400" cy="658368"/>
+            <a:off x="4279392" y="4553712"/>
+            <a:ext cx="2057400" cy="384048"/>
           </a:xfrm>
           <a:prstGeom prst="roundRect">
             <a:avLst/>
@@ -16560,14 +19464,14 @@
       </p:sp>
       <p:sp>
         <p:nvSpPr>
-          <p:cNvPr id="28" name="TextBox 27"/>
+          <p:cNvPr id="102" name="TextBox 101"/>
           <p:cNvSpPr txBox="1"/>
           <p:nvPr/>
         </p:nvSpPr>
         <p:spPr>
           <a:xfrm>
-            <a:off x="4553712" y="3685031"/>
-            <a:ext cx="1874519" cy="256032"/>
+            <a:off x="4370831" y="4636007"/>
+            <a:ext cx="1874519" cy="164592"/>
           </a:xfrm>
           <a:prstGeom prst="rect">
             <a:avLst/>
@@ -16582,7 +19486,7 @@
           <a:p>
             <a:pPr algn="ctr"/>
             <a:r>
-              <a:rPr sz="1600" b="1">
+              <a:rPr sz="1100" b="1">
                 <a:solidFill>
                   <a:srgbClr val="1E2761"/>
                 </a:solidFill>
@@ -16595,14 +19499,14 @@
       </p:sp>
       <p:sp>
         <p:nvSpPr>
-          <p:cNvPr id="29" name="Rounded Rectangle 28"/>
+          <p:cNvPr id="103" name="Rounded Rectangle 102"/>
           <p:cNvSpPr/>
           <p:nvPr/>
         </p:nvSpPr>
         <p:spPr>
           <a:xfrm>
-            <a:off x="6592824" y="3520439"/>
-            <a:ext cx="2057400" cy="658368"/>
+            <a:off x="6409944" y="4553712"/>
+            <a:ext cx="2057400" cy="384048"/>
           </a:xfrm>
           <a:prstGeom prst="roundRect">
             <a:avLst/>
@@ -16640,14 +19544,14 @@
       </p:sp>
       <p:sp>
         <p:nvSpPr>
-          <p:cNvPr id="30" name="TextBox 29"/>
+          <p:cNvPr id="104" name="TextBox 103"/>
           <p:cNvSpPr txBox="1"/>
           <p:nvPr/>
         </p:nvSpPr>
         <p:spPr>
           <a:xfrm>
-            <a:off x="6684264" y="3685031"/>
-            <a:ext cx="1874519" cy="256032"/>
+            <a:off x="6501383" y="4636007"/>
+            <a:ext cx="1874519" cy="164592"/>
           </a:xfrm>
           <a:prstGeom prst="rect">
             <a:avLst/>
@@ -16662,7 +19566,7 @@
           <a:p>
             <a:pPr algn="ctr"/>
             <a:r>
-              <a:rPr sz="1600" b="1">
+              <a:rPr sz="1100" b="1">
                 <a:solidFill>
                   <a:srgbClr val="1E2761"/>
                 </a:solidFill>
@@ -16675,14 +19579,14 @@
       </p:sp>
       <p:sp>
         <p:nvSpPr>
-          <p:cNvPr id="31" name="Rounded Rectangle 30"/>
+          <p:cNvPr id="105" name="Rounded Rectangle 104"/>
           <p:cNvSpPr/>
           <p:nvPr/>
         </p:nvSpPr>
         <p:spPr>
           <a:xfrm>
-            <a:off x="8723376" y="3520439"/>
-            <a:ext cx="2057400" cy="658368"/>
+            <a:off x="8540496" y="4553712"/>
+            <a:ext cx="2057400" cy="384048"/>
           </a:xfrm>
           <a:prstGeom prst="roundRect">
             <a:avLst/>
@@ -16720,14 +19624,14 @@
       </p:sp>
       <p:sp>
         <p:nvSpPr>
-          <p:cNvPr id="32" name="TextBox 31"/>
+          <p:cNvPr id="106" name="TextBox 105"/>
           <p:cNvSpPr txBox="1"/>
           <p:nvPr/>
         </p:nvSpPr>
         <p:spPr>
           <a:xfrm>
-            <a:off x="8814815" y="3685031"/>
-            <a:ext cx="1874519" cy="256032"/>
+            <a:off x="8631936" y="4636007"/>
+            <a:ext cx="1874519" cy="164592"/>
           </a:xfrm>
           <a:prstGeom prst="rect">
             <a:avLst/>
@@ -16742,7 +19646,7 @@
           <a:p>
             <a:pPr algn="ctr"/>
             <a:r>
-              <a:rPr sz="1600" b="1">
+              <a:rPr sz="1100" b="1">
                 <a:solidFill>
                   <a:srgbClr val="1E2761"/>
                 </a:solidFill>
@@ -16755,14 +19659,14 @@
       </p:sp>
       <p:sp>
         <p:nvSpPr>
-          <p:cNvPr id="33" name="TextBox 32"/>
+          <p:cNvPr id="107" name="TextBox 106"/>
           <p:cNvSpPr txBox="1"/>
           <p:nvPr/>
         </p:nvSpPr>
         <p:spPr>
           <a:xfrm>
-            <a:off x="914400" y="4434840"/>
-            <a:ext cx="1143000" cy="228600"/>
+            <a:off x="868680" y="5038343"/>
+            <a:ext cx="1143000" cy="274320"/>
           </a:xfrm>
           <a:prstGeom prst="rect">
             <a:avLst/>
@@ -16776,7 +19680,7 @@
           <a:lstStyle/>
           <a:p>
             <a:r>
-              <a:rPr sz="1200" b="1">
+              <a:rPr sz="1400" b="1">
                 <a:solidFill>
                   <a:srgbClr val="1E2761"/>
                 </a:solidFill>
@@ -16789,14 +19693,14 @@
       </p:sp>
       <p:sp>
         <p:nvSpPr>
-          <p:cNvPr id="34" name="Rounded Rectangle 33"/>
+          <p:cNvPr id="108" name="Rounded Rectangle 107"/>
           <p:cNvSpPr/>
           <p:nvPr/>
         </p:nvSpPr>
         <p:spPr>
           <a:xfrm>
-            <a:off x="2331720" y="4251960"/>
-            <a:ext cx="2057400" cy="658368"/>
+            <a:off x="2148840" y="4992623"/>
+            <a:ext cx="2057400" cy="384048"/>
           </a:xfrm>
           <a:prstGeom prst="roundRect">
             <a:avLst/>
@@ -16834,14 +19738,14 @@
       </p:sp>
       <p:sp>
         <p:nvSpPr>
-          <p:cNvPr id="35" name="TextBox 34"/>
+          <p:cNvPr id="109" name="TextBox 108"/>
           <p:cNvSpPr txBox="1"/>
           <p:nvPr/>
         </p:nvSpPr>
         <p:spPr>
           <a:xfrm>
-            <a:off x="2423160" y="4416552"/>
-            <a:ext cx="1874519" cy="256032"/>
+            <a:off x="2240280" y="5074919"/>
+            <a:ext cx="1874519" cy="164592"/>
           </a:xfrm>
           <a:prstGeom prst="rect">
             <a:avLst/>
@@ -16856,7 +19760,7 @@
           <a:p>
             <a:pPr algn="ctr"/>
             <a:r>
-              <a:rPr sz="1600" b="1">
+              <a:rPr sz="1100" b="1">
                 <a:solidFill>
                   <a:srgbClr val="1E2761"/>
                 </a:solidFill>
@@ -16869,14 +19773,14 @@
       </p:sp>
       <p:sp>
         <p:nvSpPr>
-          <p:cNvPr id="36" name="Rounded Rectangle 35"/>
+          <p:cNvPr id="110" name="Rounded Rectangle 109"/>
           <p:cNvSpPr/>
           <p:nvPr/>
         </p:nvSpPr>
         <p:spPr>
           <a:xfrm>
-            <a:off x="4462272" y="4251960"/>
-            <a:ext cx="2057400" cy="658368"/>
+            <a:off x="4279392" y="4992623"/>
+            <a:ext cx="2057400" cy="384048"/>
           </a:xfrm>
           <a:prstGeom prst="roundRect">
             <a:avLst/>
@@ -16914,14 +19818,14 @@
       </p:sp>
       <p:sp>
         <p:nvSpPr>
-          <p:cNvPr id="37" name="TextBox 36"/>
+          <p:cNvPr id="111" name="TextBox 110"/>
           <p:cNvSpPr txBox="1"/>
           <p:nvPr/>
         </p:nvSpPr>
         <p:spPr>
           <a:xfrm>
-            <a:off x="4553712" y="4416552"/>
-            <a:ext cx="1874519" cy="256032"/>
+            <a:off x="4370831" y="5074919"/>
+            <a:ext cx="1874519" cy="164592"/>
           </a:xfrm>
           <a:prstGeom prst="rect">
             <a:avLst/>
@@ -16936,7 +19840,7 @@
           <a:p>
             <a:pPr algn="ctr"/>
             <a:r>
-              <a:rPr sz="1600" b="1">
+              <a:rPr sz="1100" b="1">
                 <a:solidFill>
                   <a:srgbClr val="1E2761"/>
                 </a:solidFill>
@@ -16949,14 +19853,14 @@
       </p:sp>
       <p:sp>
         <p:nvSpPr>
-          <p:cNvPr id="38" name="Rounded Rectangle 37"/>
+          <p:cNvPr id="112" name="Rounded Rectangle 111"/>
           <p:cNvSpPr/>
           <p:nvPr/>
         </p:nvSpPr>
         <p:spPr>
           <a:xfrm>
-            <a:off x="6592824" y="4251960"/>
-            <a:ext cx="2057400" cy="658368"/>
+            <a:off x="6409944" y="4992623"/>
+            <a:ext cx="2057400" cy="384048"/>
           </a:xfrm>
           <a:prstGeom prst="roundRect">
             <a:avLst/>
@@ -16994,14 +19898,14 @@
       </p:sp>
       <p:sp>
         <p:nvSpPr>
-          <p:cNvPr id="39" name="TextBox 38"/>
+          <p:cNvPr id="113" name="TextBox 112"/>
           <p:cNvSpPr txBox="1"/>
           <p:nvPr/>
         </p:nvSpPr>
         <p:spPr>
           <a:xfrm>
-            <a:off x="6684264" y="4416552"/>
-            <a:ext cx="1874519" cy="256032"/>
+            <a:off x="6501383" y="5074919"/>
+            <a:ext cx="1874519" cy="164592"/>
           </a:xfrm>
           <a:prstGeom prst="rect">
             <a:avLst/>
@@ -17016,7 +19920,7 @@
           <a:p>
             <a:pPr algn="ctr"/>
             <a:r>
-              <a:rPr sz="1600" b="1">
+              <a:rPr sz="1100" b="1">
                 <a:solidFill>
                   <a:srgbClr val="1E2761"/>
                 </a:solidFill>
@@ -17029,14 +19933,14 @@
       </p:sp>
       <p:sp>
         <p:nvSpPr>
-          <p:cNvPr id="40" name="Rounded Rectangle 39"/>
+          <p:cNvPr id="114" name="Rounded Rectangle 113"/>
           <p:cNvSpPr/>
           <p:nvPr/>
         </p:nvSpPr>
         <p:spPr>
           <a:xfrm>
-            <a:off x="8723376" y="4251960"/>
-            <a:ext cx="2057400" cy="658368"/>
+            <a:off x="8540496" y="4992623"/>
+            <a:ext cx="2057400" cy="384048"/>
           </a:xfrm>
           <a:prstGeom prst="roundRect">
             <a:avLst/>
@@ -17074,14 +19978,14 @@
       </p:sp>
       <p:sp>
         <p:nvSpPr>
-          <p:cNvPr id="41" name="TextBox 40"/>
+          <p:cNvPr id="115" name="TextBox 114"/>
           <p:cNvSpPr txBox="1"/>
           <p:nvPr/>
         </p:nvSpPr>
         <p:spPr>
           <a:xfrm>
-            <a:off x="8814815" y="4416552"/>
-            <a:ext cx="1874519" cy="256032"/>
+            <a:off x="8631936" y="5074919"/>
+            <a:ext cx="1874519" cy="164592"/>
           </a:xfrm>
           <a:prstGeom prst="rect">
             <a:avLst/>
@@ -17096,7 +20000,7 @@
           <a:p>
             <a:pPr algn="ctr"/>
             <a:r>
-              <a:rPr sz="1600" b="1">
+              <a:rPr sz="1100" b="1">
                 <a:solidFill>
                   <a:srgbClr val="1E2761"/>
                 </a:solidFill>
@@ -17109,14 +20013,14 @@
       </p:sp>
       <p:sp>
         <p:nvSpPr>
-          <p:cNvPr id="42" name="TextBox 41"/>
+          <p:cNvPr id="116" name="TextBox 115"/>
           <p:cNvSpPr txBox="1"/>
           <p:nvPr/>
         </p:nvSpPr>
         <p:spPr>
           <a:xfrm>
-            <a:off x="914400" y="5166359"/>
-            <a:ext cx="1143000" cy="228600"/>
+            <a:off x="868680" y="5477255"/>
+            <a:ext cx="1143000" cy="274320"/>
           </a:xfrm>
           <a:prstGeom prst="rect">
             <a:avLst/>
@@ -17130,7 +20034,7 @@
           <a:lstStyle/>
           <a:p>
             <a:r>
-              <a:rPr sz="1200" b="1">
+              <a:rPr sz="1400" b="1">
                 <a:solidFill>
                   <a:srgbClr val="1E2761"/>
                 </a:solidFill>
@@ -17143,14 +20047,14 @@
       </p:sp>
       <p:sp>
         <p:nvSpPr>
-          <p:cNvPr id="43" name="Rounded Rectangle 42"/>
+          <p:cNvPr id="117" name="Rounded Rectangle 116"/>
           <p:cNvSpPr/>
           <p:nvPr/>
         </p:nvSpPr>
         <p:spPr>
           <a:xfrm>
-            <a:off x="2331720" y="4983479"/>
-            <a:ext cx="2057400" cy="658368"/>
+            <a:off x="2148840" y="5431536"/>
+            <a:ext cx="2057400" cy="384048"/>
           </a:xfrm>
           <a:prstGeom prst="roundRect">
             <a:avLst/>
@@ -17188,14 +20092,14 @@
       </p:sp>
       <p:sp>
         <p:nvSpPr>
-          <p:cNvPr id="44" name="TextBox 43"/>
+          <p:cNvPr id="118" name="TextBox 117"/>
           <p:cNvSpPr txBox="1"/>
           <p:nvPr/>
         </p:nvSpPr>
         <p:spPr>
           <a:xfrm>
-            <a:off x="2423160" y="5148071"/>
-            <a:ext cx="1874519" cy="256032"/>
+            <a:off x="2240280" y="5513831"/>
+            <a:ext cx="1874519" cy="164592"/>
           </a:xfrm>
           <a:prstGeom prst="rect">
             <a:avLst/>
@@ -17210,7 +20114,7 @@
           <a:p>
             <a:pPr algn="ctr"/>
             <a:r>
-              <a:rPr sz="1600" b="1">
+              <a:rPr sz="1100" b="1">
                 <a:solidFill>
                   <a:srgbClr val="FFFFFF"/>
                 </a:solidFill>
@@ -17223,14 +20127,14 @@
       </p:sp>
       <p:sp>
         <p:nvSpPr>
-          <p:cNvPr id="45" name="Rounded Rectangle 44"/>
+          <p:cNvPr id="119" name="Rounded Rectangle 118"/>
           <p:cNvSpPr/>
           <p:nvPr/>
         </p:nvSpPr>
         <p:spPr>
           <a:xfrm>
-            <a:off x="4462272" y="4983479"/>
-            <a:ext cx="2057400" cy="658368"/>
+            <a:off x="4279392" y="5431536"/>
+            <a:ext cx="2057400" cy="384048"/>
           </a:xfrm>
           <a:prstGeom prst="roundRect">
             <a:avLst/>
@@ -17268,14 +20172,14 @@
       </p:sp>
       <p:sp>
         <p:nvSpPr>
-          <p:cNvPr id="46" name="TextBox 45"/>
+          <p:cNvPr id="120" name="TextBox 119"/>
           <p:cNvSpPr txBox="1"/>
           <p:nvPr/>
         </p:nvSpPr>
         <p:spPr>
           <a:xfrm>
-            <a:off x="4553712" y="5148071"/>
-            <a:ext cx="1874519" cy="256032"/>
+            <a:off x="4370831" y="5513831"/>
+            <a:ext cx="1874519" cy="164592"/>
           </a:xfrm>
           <a:prstGeom prst="rect">
             <a:avLst/>
@@ -17290,7 +20194,7 @@
           <a:p>
             <a:pPr algn="ctr"/>
             <a:r>
-              <a:rPr sz="1600" b="1">
+              <a:rPr sz="1100" b="1">
                 <a:solidFill>
                   <a:srgbClr val="FFFFFF"/>
                 </a:solidFill>
@@ -17303,14 +20207,14 @@
       </p:sp>
       <p:sp>
         <p:nvSpPr>
-          <p:cNvPr id="47" name="Rounded Rectangle 46"/>
+          <p:cNvPr id="121" name="Rounded Rectangle 120"/>
           <p:cNvSpPr/>
           <p:nvPr/>
         </p:nvSpPr>
         <p:spPr>
           <a:xfrm>
-            <a:off x="6592824" y="4983479"/>
-            <a:ext cx="2057400" cy="658368"/>
+            <a:off x="6409944" y="5431536"/>
+            <a:ext cx="2057400" cy="384048"/>
           </a:xfrm>
           <a:prstGeom prst="roundRect">
             <a:avLst/>
@@ -17348,14 +20252,14 @@
       </p:sp>
       <p:sp>
         <p:nvSpPr>
-          <p:cNvPr id="48" name="TextBox 47"/>
+          <p:cNvPr id="122" name="TextBox 121"/>
           <p:cNvSpPr txBox="1"/>
           <p:nvPr/>
         </p:nvSpPr>
         <p:spPr>
           <a:xfrm>
-            <a:off x="6684264" y="5148071"/>
-            <a:ext cx="1874519" cy="256032"/>
+            <a:off x="6501383" y="5513831"/>
+            <a:ext cx="1874519" cy="164592"/>
           </a:xfrm>
           <a:prstGeom prst="rect">
             <a:avLst/>
@@ -17370,7 +20274,7 @@
           <a:p>
             <a:pPr algn="ctr"/>
             <a:r>
-              <a:rPr sz="1600" b="1">
+              <a:rPr sz="1100" b="1">
                 <a:solidFill>
                   <a:srgbClr val="1E2761"/>
                 </a:solidFill>
@@ -17383,14 +20287,14 @@
       </p:sp>
       <p:sp>
         <p:nvSpPr>
-          <p:cNvPr id="49" name="Rounded Rectangle 48"/>
+          <p:cNvPr id="123" name="Rounded Rectangle 122"/>
           <p:cNvSpPr/>
           <p:nvPr/>
         </p:nvSpPr>
         <p:spPr>
           <a:xfrm>
-            <a:off x="8723376" y="4983479"/>
-            <a:ext cx="2057400" cy="658368"/>
+            <a:off x="8540496" y="5431536"/>
+            <a:ext cx="2057400" cy="384048"/>
           </a:xfrm>
           <a:prstGeom prst="roundRect">
             <a:avLst/>
@@ -17428,14 +20332,14 @@
       </p:sp>
       <p:sp>
         <p:nvSpPr>
-          <p:cNvPr id="50" name="TextBox 49"/>
+          <p:cNvPr id="124" name="TextBox 123"/>
           <p:cNvSpPr txBox="1"/>
           <p:nvPr/>
         </p:nvSpPr>
         <p:spPr>
           <a:xfrm>
-            <a:off x="8814815" y="5148071"/>
-            <a:ext cx="1874519" cy="256032"/>
+            <a:off x="8631936" y="5513831"/>
+            <a:ext cx="1874519" cy="164592"/>
           </a:xfrm>
           <a:prstGeom prst="rect">
             <a:avLst/>
@@ -17450,7 +20354,7 @@
           <a:p>
             <a:pPr algn="ctr"/>
             <a:r>
-              <a:rPr sz="1600" b="1">
+              <a:rPr sz="1100" b="1">
                 <a:solidFill>
                   <a:srgbClr val="FFFFFF"/>
                 </a:solidFill>
@@ -17463,14 +20367,14 @@
       </p:sp>
       <p:sp>
         <p:nvSpPr>
-          <p:cNvPr id="51" name="TextBox 50"/>
+          <p:cNvPr id="125" name="TextBox 124"/>
           <p:cNvSpPr txBox="1"/>
           <p:nvPr/>
         </p:nvSpPr>
         <p:spPr>
           <a:xfrm>
-            <a:off x="914400" y="5532120"/>
-            <a:ext cx="4343400" cy="228600"/>
+            <a:off x="548640" y="6327648"/>
+            <a:ext cx="11064240" cy="164592"/>
           </a:xfrm>
           <a:prstGeom prst="rect">
             <a:avLst/>
@@ -17484,47 +20388,13 @@
           <a:lstStyle/>
           <a:p>
             <a:r>
-              <a:rPr sz="1100" b="1">
-                <a:solidFill>
-                  <a:srgbClr val="36454F"/>
+              <a:rPr sz="700" b="0">
+                <a:solidFill>
+                  <a:srgbClr val="64748B"/>
                 </a:solidFill>
                 <a:latin typeface="Aptos"/>
               </a:rPr>
-              <a:t>Total non-SQL database rows assessed: 37</a:t>
-            </a:r>
-          </a:p>
-        </p:txBody>
-      </p:sp>
-      <p:sp>
-        <p:nvSpPr>
-          <p:cNvPr id="52" name="TextBox 51"/>
-          <p:cNvSpPr txBox="1"/>
-          <p:nvPr/>
-        </p:nvSpPr>
-        <p:spPr>
-          <a:xfrm>
-            <a:off x="548640" y="6327648"/>
-            <a:ext cx="11064240" cy="164592"/>
-          </a:xfrm>
-          <a:prstGeom prst="rect">
-            <a:avLst/>
-          </a:prstGeom>
-          <a:noFill/>
-        </p:spPr>
-        <p:txBody>
-          <a:bodyPr wrap="square" lIns="0" rIns="0" tIns="0" bIns="0">
-            <a:spAutoFit/>
-          </a:bodyPr>
-          <a:lstStyle/>
-          <a:p>
-            <a:r>
-              <a:rPr sz="800" b="0">
-                <a:solidFill>
-                  <a:srgbClr val="64748B"/>
-                </a:solidFill>
-                <a:latin typeface="Aptos"/>
-              </a:rPr>
-              <a:t>Source: Strategy_PaaS_Preferred.xlsx sheets Mongo_to_Azure_Document_DB, MySQL_to_AzureFlexServerMySQL, and PgSQL_to_AzureFlexServerPG.</a:t>
+              <a:t>Sources: Discovery.xlsx Data sheet for instances, servers, versions, and directSupportStatus; Strategy_PaaS_Preferred.xlsx for PaaS readiness.</a:t>
             </a:r>
           </a:p>
         </p:txBody>

--- a/test-out.pptx
+++ b/test-out.pptx
@@ -15,6 +15,7 @@
     <p:sldId id="263" r:id="rId14"/>
     <p:sldId id="264" r:id="rId15"/>
     <p:sldId id="265" r:id="rId16"/>
+    <p:sldId id="266" r:id="rId17"/>
   </p:sldIdLst>
   <p:sldSz cx="12191695" cy="6858000" type="screen4x3"/>
   <p:notesSz cx="6858000" cy="9144000"/>
@@ -3227,6 +3228,3399 @@
 </file>
 
 <file path=ppt/slides/slide10.xml><?xml version="1.0" encoding="utf-8"?>
+<p:sld xmlns:a="http://schemas.openxmlformats.org/drawingml/2006/main" xmlns:p="http://schemas.openxmlformats.org/presentationml/2006/main" xmlns:r="http://schemas.openxmlformats.org/officeDocument/2006/relationships">
+  <p:cSld>
+    <p:bg>
+      <p:bgPr>
+        <a:solidFill>
+          <a:srgbClr val="F8FAFC"/>
+        </a:solidFill>
+        <a:effectLst/>
+      </p:bgPr>
+    </p:bg>
+    <p:spTree>
+      <p:nvGrpSpPr>
+        <p:cNvPr id="1" name=""/>
+        <p:cNvGrpSpPr/>
+        <p:nvPr/>
+      </p:nvGrpSpPr>
+      <p:grpSpPr/>
+      <p:sp>
+        <p:nvSpPr>
+          <p:cNvPr id="2" name="TextBox 1"/>
+          <p:cNvSpPr txBox="1"/>
+          <p:nvPr/>
+        </p:nvSpPr>
+        <p:spPr>
+          <a:xfrm>
+            <a:off x="457200" y="320040"/>
+            <a:ext cx="7955279" cy="502920"/>
+          </a:xfrm>
+          <a:prstGeom prst="rect">
+            <a:avLst/>
+          </a:prstGeom>
+          <a:noFill/>
+        </p:spPr>
+        <p:txBody>
+          <a:bodyPr wrap="square" lIns="0" rIns="0" tIns="0" bIns="0">
+            <a:spAutoFit/>
+          </a:bodyPr>
+          <a:lstStyle/>
+          <a:p>
+            <a:r>
+              <a:rPr sz="3200" b="1">
+                <a:solidFill>
+                  <a:srgbClr val="1E2761"/>
+                </a:solidFill>
+                <a:latin typeface="Aptos Display"/>
+              </a:rPr>
+              <a:t>WebApp Readiness</a:t>
+            </a:r>
+          </a:p>
+        </p:txBody>
+      </p:sp>
+      <p:sp>
+        <p:nvSpPr>
+          <p:cNvPr id="3" name="TextBox 2"/>
+          <p:cNvSpPr txBox="1"/>
+          <p:nvPr/>
+        </p:nvSpPr>
+        <p:spPr>
+          <a:xfrm>
+            <a:off x="475488" y="841248"/>
+            <a:ext cx="8229600" cy="274320"/>
+          </a:xfrm>
+          <a:prstGeom prst="rect">
+            <a:avLst/>
+          </a:prstGeom>
+          <a:noFill/>
+        </p:spPr>
+        <p:txBody>
+          <a:bodyPr wrap="square" lIns="0" rIns="0" tIns="0" bIns="0">
+            <a:spAutoFit/>
+          </a:bodyPr>
+          <a:lstStyle/>
+          <a:p>
+            <a:r>
+              <a:rPr sz="1200" b="0">
+                <a:solidFill>
+                  <a:srgbClr val="64748B"/>
+                </a:solidFill>
+                <a:latin typeface="Aptos"/>
+              </a:rPr>
+              <a:t>Discovery web application footprint, support status, and AKS readiness by web app type.</a:t>
+            </a:r>
+          </a:p>
+        </p:txBody>
+      </p:sp>
+      <p:sp>
+        <p:nvSpPr>
+          <p:cNvPr id="4" name="Rounded Rectangle 3"/>
+          <p:cNvSpPr/>
+          <p:nvPr/>
+        </p:nvSpPr>
+        <p:spPr>
+          <a:xfrm>
+            <a:off x="502920" y="1024128"/>
+            <a:ext cx="3794760" cy="2331720"/>
+          </a:xfrm>
+          <a:prstGeom prst="roundRect">
+            <a:avLst/>
+          </a:prstGeom>
+          <a:solidFill>
+            <a:srgbClr val="FFFFFF"/>
+          </a:solidFill>
+          <a:ln w="12700">
+            <a:solidFill>
+              <a:srgbClr val="DAE2EE"/>
+            </a:solidFill>
+          </a:ln>
+        </p:spPr>
+        <p:style>
+          <a:lnRef idx="1">
+            <a:schemeClr val="accent1"/>
+          </a:lnRef>
+          <a:fillRef idx="3">
+            <a:schemeClr val="accent1"/>
+          </a:fillRef>
+          <a:effectRef idx="2">
+            <a:schemeClr val="accent1"/>
+          </a:effectRef>
+          <a:fontRef idx="minor">
+            <a:schemeClr val="lt1"/>
+          </a:fontRef>
+        </p:style>
+        <p:txBody>
+          <a:bodyPr rtlCol="0" anchor="ctr"/>
+          <a:lstStyle/>
+          <a:p>
+            <a:pPr algn="ctr"/>
+          </a:p>
+        </p:txBody>
+      </p:sp>
+      <p:sp>
+        <p:nvSpPr>
+          <p:cNvPr id="5" name="Rectangle 4"/>
+          <p:cNvSpPr/>
+          <p:nvPr/>
+        </p:nvSpPr>
+        <p:spPr>
+          <a:xfrm>
+            <a:off x="502920" y="1024128"/>
+            <a:ext cx="3794760" cy="73152"/>
+          </a:xfrm>
+          <a:prstGeom prst="rect">
+            <a:avLst/>
+          </a:prstGeom>
+          <a:solidFill>
+            <a:srgbClr val="028090"/>
+          </a:solidFill>
+          <a:ln>
+            <a:noFill/>
+          </a:ln>
+        </p:spPr>
+        <p:style>
+          <a:lnRef idx="1">
+            <a:schemeClr val="accent1"/>
+          </a:lnRef>
+          <a:fillRef idx="3">
+            <a:schemeClr val="accent1"/>
+          </a:fillRef>
+          <a:effectRef idx="2">
+            <a:schemeClr val="accent1"/>
+          </a:effectRef>
+          <a:fontRef idx="minor">
+            <a:schemeClr val="lt1"/>
+          </a:fontRef>
+        </p:style>
+        <p:txBody>
+          <a:bodyPr rtlCol="0" anchor="ctr"/>
+          <a:lstStyle/>
+          <a:p>
+            <a:pPr algn="ctr"/>
+          </a:p>
+        </p:txBody>
+      </p:sp>
+      <p:sp>
+        <p:nvSpPr>
+          <p:cNvPr id="6" name="TextBox 5"/>
+          <p:cNvSpPr txBox="1"/>
+          <p:nvPr/>
+        </p:nvSpPr>
+        <p:spPr>
+          <a:xfrm>
+            <a:off x="640080" y="1152144"/>
+            <a:ext cx="3520440" cy="274320"/>
+          </a:xfrm>
+          <a:prstGeom prst="rect">
+            <a:avLst/>
+          </a:prstGeom>
+          <a:noFill/>
+        </p:spPr>
+        <p:txBody>
+          <a:bodyPr wrap="square" lIns="0" rIns="0" tIns="0" bIns="0">
+            <a:spAutoFit/>
+          </a:bodyPr>
+          <a:lstStyle/>
+          <a:p>
+            <a:r>
+              <a:rPr sz="1300" b="1">
+                <a:solidFill>
+                  <a:srgbClr val="1E2761"/>
+                </a:solidFill>
+                <a:latin typeface="Aptos"/>
+              </a:rPr>
+              <a:t>WebApp type distribution</a:t>
+            </a:r>
+          </a:p>
+        </p:txBody>
+      </p:sp>
+      <p:pic>
+        <p:nvPicPr>
+          <p:cNvPr id="7" name="Picture 6" descr="webapp-type-distribution.png"/>
+          <p:cNvPicPr>
+            <a:picLocks noChangeAspect="1"/>
+          </p:cNvPicPr>
+          <p:nvPr/>
+        </p:nvPicPr>
+        <p:blipFill>
+          <a:blip r:embed="rId2"/>
+          <a:stretch>
+            <a:fillRect/>
+          </a:stretch>
+        </p:blipFill>
+        <p:spPr>
+          <a:xfrm>
+            <a:off x="658368" y="1353312"/>
+            <a:ext cx="3474720" cy="1847088"/>
+          </a:xfrm>
+          <a:prstGeom prst="rect">
+            <a:avLst/>
+          </a:prstGeom>
+        </p:spPr>
+      </p:pic>
+      <p:sp>
+        <p:nvSpPr>
+          <p:cNvPr id="8" name="Rounded Rectangle 7"/>
+          <p:cNvSpPr/>
+          <p:nvPr/>
+        </p:nvSpPr>
+        <p:spPr>
+          <a:xfrm>
+            <a:off x="4526280" y="1024128"/>
+            <a:ext cx="7086600" cy="2331720"/>
+          </a:xfrm>
+          <a:prstGeom prst="roundRect">
+            <a:avLst/>
+          </a:prstGeom>
+          <a:solidFill>
+            <a:srgbClr val="FFFFFF"/>
+          </a:solidFill>
+          <a:ln w="12700">
+            <a:solidFill>
+              <a:srgbClr val="DAE2EE"/>
+            </a:solidFill>
+          </a:ln>
+        </p:spPr>
+        <p:style>
+          <a:lnRef idx="1">
+            <a:schemeClr val="accent1"/>
+          </a:lnRef>
+          <a:fillRef idx="3">
+            <a:schemeClr val="accent1"/>
+          </a:fillRef>
+          <a:effectRef idx="2">
+            <a:schemeClr val="accent1"/>
+          </a:effectRef>
+          <a:fontRef idx="minor">
+            <a:schemeClr val="lt1"/>
+          </a:fontRef>
+        </p:style>
+        <p:txBody>
+          <a:bodyPr rtlCol="0" anchor="ctr"/>
+          <a:lstStyle/>
+          <a:p>
+            <a:pPr algn="ctr"/>
+          </a:p>
+        </p:txBody>
+      </p:sp>
+      <p:sp>
+        <p:nvSpPr>
+          <p:cNvPr id="9" name="Rectangle 8"/>
+          <p:cNvSpPr/>
+          <p:nvPr/>
+        </p:nvSpPr>
+        <p:spPr>
+          <a:xfrm>
+            <a:off x="4526280" y="1024128"/>
+            <a:ext cx="7086600" cy="73152"/>
+          </a:xfrm>
+          <a:prstGeom prst="rect">
+            <a:avLst/>
+          </a:prstGeom>
+          <a:solidFill>
+            <a:srgbClr val="028090"/>
+          </a:solidFill>
+          <a:ln>
+            <a:noFill/>
+          </a:ln>
+        </p:spPr>
+        <p:style>
+          <a:lnRef idx="1">
+            <a:schemeClr val="accent1"/>
+          </a:lnRef>
+          <a:fillRef idx="3">
+            <a:schemeClr val="accent1"/>
+          </a:fillRef>
+          <a:effectRef idx="2">
+            <a:schemeClr val="accent1"/>
+          </a:effectRef>
+          <a:fontRef idx="minor">
+            <a:schemeClr val="lt1"/>
+          </a:fontRef>
+        </p:style>
+        <p:txBody>
+          <a:bodyPr rtlCol="0" anchor="ctr"/>
+          <a:lstStyle/>
+          <a:p>
+            <a:pPr algn="ctr"/>
+          </a:p>
+        </p:txBody>
+      </p:sp>
+      <p:sp>
+        <p:nvSpPr>
+          <p:cNvPr id="10" name="TextBox 9"/>
+          <p:cNvSpPr txBox="1"/>
+          <p:nvPr/>
+        </p:nvSpPr>
+        <p:spPr>
+          <a:xfrm>
+            <a:off x="4663440" y="1152144"/>
+            <a:ext cx="6812280" cy="274320"/>
+          </a:xfrm>
+          <a:prstGeom prst="rect">
+            <a:avLst/>
+          </a:prstGeom>
+          <a:noFill/>
+        </p:spPr>
+        <p:txBody>
+          <a:bodyPr wrap="square" lIns="0" rIns="0" tIns="0" bIns="0">
+            <a:spAutoFit/>
+          </a:bodyPr>
+          <a:lstStyle/>
+          <a:p>
+            <a:r>
+              <a:rPr sz="1300" b="1">
+                <a:solidFill>
+                  <a:srgbClr val="1E2761"/>
+                </a:solidFill>
+                <a:latin typeface="Aptos"/>
+              </a:rPr>
+              <a:t>WebApps and hosting servers</a:t>
+            </a:r>
+          </a:p>
+        </p:txBody>
+      </p:sp>
+      <p:graphicFrame>
+        <p:nvGraphicFramePr>
+          <p:cNvPr id="11" name="Table 10"/>
+          <p:cNvGraphicFramePr>
+            <a:graphicFrameLocks noGrp="1"/>
+          </p:cNvGraphicFramePr>
+          <p:nvPr/>
+        </p:nvGraphicFramePr>
+        <p:xfrm>
+          <a:off x="4773168" y="1627632"/>
+          <a:ext cx="6492239" cy="1234440"/>
+        </p:xfrm>
+        <a:graphic>
+          <a:graphicData uri="http://schemas.openxmlformats.org/drawingml/2006/table">
+            <a:tbl>
+              <a:tblPr firstRow="1" bandRow="1">
+                <a:tableStyleId>{5C22544A-7EE6-4342-B048-85BDC9FD1C3A}</a:tableStyleId>
+              </a:tblPr>
+              <a:tblGrid>
+                <a:gridCol w="2606040"/>
+                <a:gridCol w="1874519"/>
+                <a:gridCol w="2011680"/>
+              </a:tblGrid>
+              <a:tr h="308610">
+                <a:tc>
+                  <a:txBody>
+                    <a:bodyPr/>
+                    <a:lstStyle/>
+                    <a:p>
+                      <a:pPr>
+                        <a:defRPr sz="1100" b="1">
+                          <a:solidFill>
+                            <a:srgbClr val="FFFFFF"/>
+                          </a:solidFill>
+                          <a:latin typeface="Aptos"/>
+                        </a:defRPr>
+                      </a:pPr>
+                      <a:r>
+                        <a:t>WebApp type</a:t>
+                      </a:r>
+                    </a:p>
+                  </a:txBody>
+                  <a:tcPr marL="36576" marR="36576" marT="18288" marB="18288">
+                    <a:solidFill>
+                      <a:srgbClr val="1E2761"/>
+                    </a:solidFill>
+                  </a:tcPr>
+                </a:tc>
+                <a:tc>
+                  <a:txBody>
+                    <a:bodyPr/>
+                    <a:lstStyle/>
+                    <a:p>
+                      <a:pPr>
+                        <a:defRPr sz="1100" b="1">
+                          <a:solidFill>
+                            <a:srgbClr val="FFFFFF"/>
+                          </a:solidFill>
+                          <a:latin typeface="Aptos"/>
+                        </a:defRPr>
+                      </a:pPr>
+                      <a:r>
+                        <a:t>WebApps</a:t>
+                      </a:r>
+                    </a:p>
+                  </a:txBody>
+                  <a:tcPr marL="36576" marR="36576" marT="18288" marB="18288">
+                    <a:solidFill>
+                      <a:srgbClr val="1E2761"/>
+                    </a:solidFill>
+                  </a:tcPr>
+                </a:tc>
+                <a:tc>
+                  <a:txBody>
+                    <a:bodyPr/>
+                    <a:lstStyle/>
+                    <a:p>
+                      <a:pPr>
+                        <a:defRPr sz="1100" b="1">
+                          <a:solidFill>
+                            <a:srgbClr val="FFFFFF"/>
+                          </a:solidFill>
+                          <a:latin typeface="Aptos"/>
+                        </a:defRPr>
+                      </a:pPr>
+                      <a:r>
+                        <a:t>Unique servers</a:t>
+                      </a:r>
+                    </a:p>
+                  </a:txBody>
+                  <a:tcPr marL="36576" marR="36576" marT="18288" marB="18288">
+                    <a:solidFill>
+                      <a:srgbClr val="1E2761"/>
+                    </a:solidFill>
+                  </a:tcPr>
+                </a:tc>
+              </a:tr>
+              <a:tr h="308610">
+                <a:tc>
+                  <a:txBody>
+                    <a:bodyPr/>
+                    <a:lstStyle/>
+                    <a:p>
+                      <a:pPr>
+                        <a:defRPr sz="1100" b="0">
+                          <a:solidFill>
+                            <a:srgbClr val="36454F"/>
+                          </a:solidFill>
+                          <a:latin typeface="Aptos"/>
+                        </a:defRPr>
+                      </a:pPr>
+                      <a:r>
+                        <a:t>IIS</a:t>
+                      </a:r>
+                    </a:p>
+                  </a:txBody>
+                  <a:tcPr marL="36576" marR="36576" marT="18288" marB="18288">
+                    <a:solidFill>
+                      <a:srgbClr val="FFFFFF"/>
+                    </a:solidFill>
+                  </a:tcPr>
+                </a:tc>
+                <a:tc>
+                  <a:txBody>
+                    <a:bodyPr/>
+                    <a:lstStyle/>
+                    <a:p>
+                      <a:pPr>
+                        <a:defRPr sz="1100" b="0">
+                          <a:solidFill>
+                            <a:srgbClr val="36454F"/>
+                          </a:solidFill>
+                          <a:latin typeface="Aptos"/>
+                        </a:defRPr>
+                      </a:pPr>
+                      <a:r>
+                        <a:t>866</a:t>
+                      </a:r>
+                    </a:p>
+                  </a:txBody>
+                  <a:tcPr marL="36576" marR="36576" marT="18288" marB="18288">
+                    <a:solidFill>
+                      <a:srgbClr val="FFFFFF"/>
+                    </a:solidFill>
+                  </a:tcPr>
+                </a:tc>
+                <a:tc>
+                  <a:txBody>
+                    <a:bodyPr/>
+                    <a:lstStyle/>
+                    <a:p>
+                      <a:pPr>
+                        <a:defRPr sz="1100" b="0">
+                          <a:solidFill>
+                            <a:srgbClr val="36454F"/>
+                          </a:solidFill>
+                          <a:latin typeface="Aptos"/>
+                        </a:defRPr>
+                      </a:pPr>
+                      <a:r>
+                        <a:t>681</a:t>
+                      </a:r>
+                    </a:p>
+                  </a:txBody>
+                  <a:tcPr marL="36576" marR="36576" marT="18288" marB="18288">
+                    <a:solidFill>
+                      <a:srgbClr val="FFFFFF"/>
+                    </a:solidFill>
+                  </a:tcPr>
+                </a:tc>
+              </a:tr>
+              <a:tr h="308610">
+                <a:tc>
+                  <a:txBody>
+                    <a:bodyPr/>
+                    <a:lstStyle/>
+                    <a:p>
+                      <a:pPr>
+                        <a:defRPr sz="1100" b="0">
+                          <a:solidFill>
+                            <a:srgbClr val="36454F"/>
+                          </a:solidFill>
+                          <a:latin typeface="Aptos"/>
+                        </a:defRPr>
+                      </a:pPr>
+                      <a:r>
+                        <a:t>Tomcat</a:t>
+                      </a:r>
+                    </a:p>
+                  </a:txBody>
+                  <a:tcPr marL="36576" marR="36576" marT="18288" marB="18288">
+                    <a:solidFill>
+                      <a:srgbClr val="F1F5F9"/>
+                    </a:solidFill>
+                  </a:tcPr>
+                </a:tc>
+                <a:tc>
+                  <a:txBody>
+                    <a:bodyPr/>
+                    <a:lstStyle/>
+                    <a:p>
+                      <a:pPr>
+                        <a:defRPr sz="1100" b="0">
+                          <a:solidFill>
+                            <a:srgbClr val="36454F"/>
+                          </a:solidFill>
+                          <a:latin typeface="Aptos"/>
+                        </a:defRPr>
+                      </a:pPr>
+                      <a:r>
+                        <a:t>4</a:t>
+                      </a:r>
+                    </a:p>
+                  </a:txBody>
+                  <a:tcPr marL="36576" marR="36576" marT="18288" marB="18288">
+                    <a:solidFill>
+                      <a:srgbClr val="F1F5F9"/>
+                    </a:solidFill>
+                  </a:tcPr>
+                </a:tc>
+                <a:tc>
+                  <a:txBody>
+                    <a:bodyPr/>
+                    <a:lstStyle/>
+                    <a:p>
+                      <a:pPr>
+                        <a:defRPr sz="1100" b="0">
+                          <a:solidFill>
+                            <a:srgbClr val="36454F"/>
+                          </a:solidFill>
+                          <a:latin typeface="Aptos"/>
+                        </a:defRPr>
+                      </a:pPr>
+                      <a:r>
+                        <a:t>2</a:t>
+                      </a:r>
+                    </a:p>
+                  </a:txBody>
+                  <a:tcPr marL="36576" marR="36576" marT="18288" marB="18288">
+                    <a:solidFill>
+                      <a:srgbClr val="F1F5F9"/>
+                    </a:solidFill>
+                  </a:tcPr>
+                </a:tc>
+              </a:tr>
+              <a:tr h="308610">
+                <a:tc>
+                  <a:txBody>
+                    <a:bodyPr/>
+                    <a:lstStyle/>
+                    <a:p>
+                      <a:pPr>
+                        <a:defRPr sz="1100" b="0">
+                          <a:solidFill>
+                            <a:srgbClr val="36454F"/>
+                          </a:solidFill>
+                          <a:latin typeface="Aptos"/>
+                        </a:defRPr>
+                      </a:pPr>
+                      <a:r>
+                        <a:t>Total</a:t>
+                      </a:r>
+                    </a:p>
+                  </a:txBody>
+                  <a:tcPr marL="36576" marR="36576" marT="18288" marB="18288">
+                    <a:solidFill>
+                      <a:srgbClr val="FFFFFF"/>
+                    </a:solidFill>
+                  </a:tcPr>
+                </a:tc>
+                <a:tc>
+                  <a:txBody>
+                    <a:bodyPr/>
+                    <a:lstStyle/>
+                    <a:p>
+                      <a:pPr>
+                        <a:defRPr sz="1100" b="0">
+                          <a:solidFill>
+                            <a:srgbClr val="36454F"/>
+                          </a:solidFill>
+                          <a:latin typeface="Aptos"/>
+                        </a:defRPr>
+                      </a:pPr>
+                      <a:r>
+                        <a:t>870</a:t>
+                      </a:r>
+                    </a:p>
+                  </a:txBody>
+                  <a:tcPr marL="36576" marR="36576" marT="18288" marB="18288">
+                    <a:solidFill>
+                      <a:srgbClr val="FFFFFF"/>
+                    </a:solidFill>
+                  </a:tcPr>
+                </a:tc>
+                <a:tc>
+                  <a:txBody>
+                    <a:bodyPr/>
+                    <a:lstStyle/>
+                    <a:p>
+                      <a:pPr>
+                        <a:defRPr sz="1100" b="0">
+                          <a:solidFill>
+                            <a:srgbClr val="36454F"/>
+                          </a:solidFill>
+                          <a:latin typeface="Aptos"/>
+                        </a:defRPr>
+                      </a:pPr>
+                      <a:r>
+                        <a:t>683</a:t>
+                      </a:r>
+                    </a:p>
+                  </a:txBody>
+                  <a:tcPr marL="36576" marR="36576" marT="18288" marB="18288">
+                    <a:solidFill>
+                      <a:srgbClr val="FFFFFF"/>
+                    </a:solidFill>
+                  </a:tcPr>
+                </a:tc>
+              </a:tr>
+            </a:tbl>
+          </a:graphicData>
+        </a:graphic>
+      </p:graphicFrame>
+      <p:sp>
+        <p:nvSpPr>
+          <p:cNvPr id="12" name="Rounded Rectangle 11"/>
+          <p:cNvSpPr/>
+          <p:nvPr/>
+        </p:nvSpPr>
+        <p:spPr>
+          <a:xfrm>
+            <a:off x="502920" y="3675887"/>
+            <a:ext cx="5440680" cy="2304288"/>
+          </a:xfrm>
+          <a:prstGeom prst="roundRect">
+            <a:avLst/>
+          </a:prstGeom>
+          <a:solidFill>
+            <a:srgbClr val="FFFFFF"/>
+          </a:solidFill>
+          <a:ln w="12700">
+            <a:solidFill>
+              <a:srgbClr val="DAE2EE"/>
+            </a:solidFill>
+          </a:ln>
+        </p:spPr>
+        <p:style>
+          <a:lnRef idx="1">
+            <a:schemeClr val="accent1"/>
+          </a:lnRef>
+          <a:fillRef idx="3">
+            <a:schemeClr val="accent1"/>
+          </a:fillRef>
+          <a:effectRef idx="2">
+            <a:schemeClr val="accent1"/>
+          </a:effectRef>
+          <a:fontRef idx="minor">
+            <a:schemeClr val="lt1"/>
+          </a:fontRef>
+        </p:style>
+        <p:txBody>
+          <a:bodyPr rtlCol="0" anchor="ctr"/>
+          <a:lstStyle/>
+          <a:p>
+            <a:pPr algn="ctr"/>
+          </a:p>
+        </p:txBody>
+      </p:sp>
+      <p:sp>
+        <p:nvSpPr>
+          <p:cNvPr id="13" name="Rectangle 12"/>
+          <p:cNvSpPr/>
+          <p:nvPr/>
+        </p:nvSpPr>
+        <p:spPr>
+          <a:xfrm>
+            <a:off x="502920" y="3675887"/>
+            <a:ext cx="5440680" cy="73152"/>
+          </a:xfrm>
+          <a:prstGeom prst="rect">
+            <a:avLst/>
+          </a:prstGeom>
+          <a:solidFill>
+            <a:srgbClr val="028090"/>
+          </a:solidFill>
+          <a:ln>
+            <a:noFill/>
+          </a:ln>
+        </p:spPr>
+        <p:style>
+          <a:lnRef idx="1">
+            <a:schemeClr val="accent1"/>
+          </a:lnRef>
+          <a:fillRef idx="3">
+            <a:schemeClr val="accent1"/>
+          </a:fillRef>
+          <a:effectRef idx="2">
+            <a:schemeClr val="accent1"/>
+          </a:effectRef>
+          <a:fontRef idx="minor">
+            <a:schemeClr val="lt1"/>
+          </a:fontRef>
+        </p:style>
+        <p:txBody>
+          <a:bodyPr rtlCol="0" anchor="ctr"/>
+          <a:lstStyle/>
+          <a:p>
+            <a:pPr algn="ctr"/>
+          </a:p>
+        </p:txBody>
+      </p:sp>
+      <p:sp>
+        <p:nvSpPr>
+          <p:cNvPr id="14" name="TextBox 13"/>
+          <p:cNvSpPr txBox="1"/>
+          <p:nvPr/>
+        </p:nvSpPr>
+        <p:spPr>
+          <a:xfrm>
+            <a:off x="640080" y="3803903"/>
+            <a:ext cx="5166360" cy="274320"/>
+          </a:xfrm>
+          <a:prstGeom prst="rect">
+            <a:avLst/>
+          </a:prstGeom>
+          <a:noFill/>
+        </p:spPr>
+        <p:txBody>
+          <a:bodyPr wrap="square" lIns="0" rIns="0" tIns="0" bIns="0">
+            <a:spAutoFit/>
+          </a:bodyPr>
+          <a:lstStyle/>
+          <a:p>
+            <a:r>
+              <a:rPr sz="1300" b="1">
+                <a:solidFill>
+                  <a:srgbClr val="1E2761"/>
+                </a:solidFill>
+                <a:latin typeface="Aptos"/>
+              </a:rPr>
+              <a:t>directSupportStatus by type</a:t>
+            </a:r>
+          </a:p>
+        </p:txBody>
+      </p:sp>
+      <p:sp>
+        <p:nvSpPr>
+          <p:cNvPr id="15" name="Rounded Rectangle 14"/>
+          <p:cNvSpPr/>
+          <p:nvPr/>
+        </p:nvSpPr>
+        <p:spPr>
+          <a:xfrm>
+            <a:off x="1764792" y="4270248"/>
+            <a:ext cx="1249680" cy="310896"/>
+          </a:xfrm>
+          <a:prstGeom prst="roundRect">
+            <a:avLst/>
+          </a:prstGeom>
+          <a:solidFill>
+            <a:srgbClr val="228B22"/>
+          </a:solidFill>
+          <a:ln>
+            <a:noFill/>
+          </a:ln>
+        </p:spPr>
+        <p:style>
+          <a:lnRef idx="1">
+            <a:schemeClr val="accent1"/>
+          </a:lnRef>
+          <a:fillRef idx="3">
+            <a:schemeClr val="accent1"/>
+          </a:fillRef>
+          <a:effectRef idx="2">
+            <a:schemeClr val="accent1"/>
+          </a:effectRef>
+          <a:fontRef idx="minor">
+            <a:schemeClr val="lt1"/>
+          </a:fontRef>
+        </p:style>
+        <p:txBody>
+          <a:bodyPr rtlCol="0" anchor="ctr"/>
+          <a:lstStyle/>
+          <a:p>
+            <a:pPr algn="ctr"/>
+          </a:p>
+        </p:txBody>
+      </p:sp>
+      <p:sp>
+        <p:nvSpPr>
+          <p:cNvPr id="16" name="TextBox 15"/>
+          <p:cNvSpPr txBox="1"/>
+          <p:nvPr/>
+        </p:nvSpPr>
+        <p:spPr>
+          <a:xfrm>
+            <a:off x="1801368" y="4343400"/>
+            <a:ext cx="1176528" cy="155448"/>
+          </a:xfrm>
+          <a:prstGeom prst="rect">
+            <a:avLst/>
+          </a:prstGeom>
+          <a:noFill/>
+        </p:spPr>
+        <p:txBody>
+          <a:bodyPr wrap="square" lIns="0" rIns="0" tIns="0" bIns="0">
+            <a:spAutoFit/>
+          </a:bodyPr>
+          <a:lstStyle/>
+          <a:p>
+            <a:pPr algn="ctr"/>
+            <a:r>
+              <a:rPr sz="700" b="1">
+                <a:solidFill>
+                  <a:srgbClr val="FFFFFF"/>
+                </a:solidFill>
+                <a:latin typeface="Aptos"/>
+              </a:rPr>
+              <a:t>Mainstream</a:t>
+            </a:r>
+          </a:p>
+        </p:txBody>
+      </p:sp>
+      <p:sp>
+        <p:nvSpPr>
+          <p:cNvPr id="17" name="Rounded Rectangle 16"/>
+          <p:cNvSpPr/>
+          <p:nvPr/>
+        </p:nvSpPr>
+        <p:spPr>
+          <a:xfrm>
+            <a:off x="3060192" y="4270248"/>
+            <a:ext cx="1249680" cy="310896"/>
+          </a:xfrm>
+          <a:prstGeom prst="roundRect">
+            <a:avLst/>
+          </a:prstGeom>
+          <a:solidFill>
+            <a:srgbClr val="DC2626"/>
+          </a:solidFill>
+          <a:ln>
+            <a:noFill/>
+          </a:ln>
+        </p:spPr>
+        <p:style>
+          <a:lnRef idx="1">
+            <a:schemeClr val="accent1"/>
+          </a:lnRef>
+          <a:fillRef idx="3">
+            <a:schemeClr val="accent1"/>
+          </a:fillRef>
+          <a:effectRef idx="2">
+            <a:schemeClr val="accent1"/>
+          </a:effectRef>
+          <a:fontRef idx="minor">
+            <a:schemeClr val="lt1"/>
+          </a:fontRef>
+        </p:style>
+        <p:txBody>
+          <a:bodyPr rtlCol="0" anchor="ctr"/>
+          <a:lstStyle/>
+          <a:p>
+            <a:pPr algn="ctr"/>
+          </a:p>
+        </p:txBody>
+      </p:sp>
+      <p:sp>
+        <p:nvSpPr>
+          <p:cNvPr id="18" name="TextBox 17"/>
+          <p:cNvSpPr txBox="1"/>
+          <p:nvPr/>
+        </p:nvSpPr>
+        <p:spPr>
+          <a:xfrm>
+            <a:off x="3096768" y="4343400"/>
+            <a:ext cx="1176528" cy="155448"/>
+          </a:xfrm>
+          <a:prstGeom prst="rect">
+            <a:avLst/>
+          </a:prstGeom>
+          <a:noFill/>
+        </p:spPr>
+        <p:txBody>
+          <a:bodyPr wrap="square" lIns="0" rIns="0" tIns="0" bIns="0">
+            <a:spAutoFit/>
+          </a:bodyPr>
+          <a:lstStyle/>
+          <a:p>
+            <a:pPr algn="ctr"/>
+            <a:r>
+              <a:rPr sz="700" b="1">
+                <a:solidFill>
+                  <a:srgbClr val="FFFFFF"/>
+                </a:solidFill>
+                <a:latin typeface="Aptos"/>
+              </a:rPr>
+              <a:t>Out of support</a:t>
+            </a:r>
+          </a:p>
+        </p:txBody>
+      </p:sp>
+      <p:sp>
+        <p:nvSpPr>
+          <p:cNvPr id="19" name="Rounded Rectangle 18"/>
+          <p:cNvSpPr/>
+          <p:nvPr/>
+        </p:nvSpPr>
+        <p:spPr>
+          <a:xfrm>
+            <a:off x="4355592" y="4270248"/>
+            <a:ext cx="1249680" cy="310896"/>
+          </a:xfrm>
+          <a:prstGeom prst="roundRect">
+            <a:avLst/>
+          </a:prstGeom>
+          <a:solidFill>
+            <a:srgbClr val="94A3B8"/>
+          </a:solidFill>
+          <a:ln>
+            <a:noFill/>
+          </a:ln>
+        </p:spPr>
+        <p:style>
+          <a:lnRef idx="1">
+            <a:schemeClr val="accent1"/>
+          </a:lnRef>
+          <a:fillRef idx="3">
+            <a:schemeClr val="accent1"/>
+          </a:fillRef>
+          <a:effectRef idx="2">
+            <a:schemeClr val="accent1"/>
+          </a:effectRef>
+          <a:fontRef idx="minor">
+            <a:schemeClr val="lt1"/>
+          </a:fontRef>
+        </p:style>
+        <p:txBody>
+          <a:bodyPr rtlCol="0" anchor="ctr"/>
+          <a:lstStyle/>
+          <a:p>
+            <a:pPr algn="ctr"/>
+          </a:p>
+        </p:txBody>
+      </p:sp>
+      <p:sp>
+        <p:nvSpPr>
+          <p:cNvPr id="20" name="TextBox 19"/>
+          <p:cNvSpPr txBox="1"/>
+          <p:nvPr/>
+        </p:nvSpPr>
+        <p:spPr>
+          <a:xfrm>
+            <a:off x="4392168" y="4343400"/>
+            <a:ext cx="1176528" cy="155448"/>
+          </a:xfrm>
+          <a:prstGeom prst="rect">
+            <a:avLst/>
+          </a:prstGeom>
+          <a:noFill/>
+        </p:spPr>
+        <p:txBody>
+          <a:bodyPr wrap="square" lIns="0" rIns="0" tIns="0" bIns="0">
+            <a:spAutoFit/>
+          </a:bodyPr>
+          <a:lstStyle/>
+          <a:p>
+            <a:pPr algn="ctr"/>
+            <a:r>
+              <a:rPr sz="700" b="1">
+                <a:solidFill>
+                  <a:srgbClr val="FFFFFF"/>
+                </a:solidFill>
+                <a:latin typeface="Aptos"/>
+              </a:rPr>
+              <a:t>Unknown</a:t>
+            </a:r>
+          </a:p>
+        </p:txBody>
+      </p:sp>
+      <p:sp>
+        <p:nvSpPr>
+          <p:cNvPr id="21" name="TextBox 20"/>
+          <p:cNvSpPr txBox="1"/>
+          <p:nvPr/>
+        </p:nvSpPr>
+        <p:spPr>
+          <a:xfrm>
+            <a:off x="704088" y="4727448"/>
+            <a:ext cx="868680" cy="155448"/>
+          </a:xfrm>
+          <a:prstGeom prst="rect">
+            <a:avLst/>
+          </a:prstGeom>
+          <a:noFill/>
+        </p:spPr>
+        <p:txBody>
+          <a:bodyPr wrap="square" lIns="0" rIns="0" tIns="0" bIns="0">
+            <a:spAutoFit/>
+          </a:bodyPr>
+          <a:lstStyle/>
+          <a:p>
+            <a:r>
+              <a:rPr sz="900" b="1">
+                <a:solidFill>
+                  <a:srgbClr val="1E2761"/>
+                </a:solidFill>
+                <a:latin typeface="Aptos"/>
+              </a:rPr>
+              <a:t>IIS</a:t>
+            </a:r>
+          </a:p>
+        </p:txBody>
+      </p:sp>
+      <p:sp>
+        <p:nvSpPr>
+          <p:cNvPr id="22" name="Rounded Rectangle 21"/>
+          <p:cNvSpPr/>
+          <p:nvPr/>
+        </p:nvSpPr>
+        <p:spPr>
+          <a:xfrm>
+            <a:off x="1764792" y="4654296"/>
+            <a:ext cx="1249680" cy="310896"/>
+          </a:xfrm>
+          <a:prstGeom prst="roundRect">
+            <a:avLst/>
+          </a:prstGeom>
+          <a:solidFill>
+            <a:srgbClr val="CEE5CE"/>
+          </a:solidFill>
+          <a:ln w="12700">
+            <a:solidFill>
+              <a:srgbClr val="FFFFFF"/>
+            </a:solidFill>
+          </a:ln>
+        </p:spPr>
+        <p:style>
+          <a:lnRef idx="1">
+            <a:schemeClr val="accent1"/>
+          </a:lnRef>
+          <a:fillRef idx="3">
+            <a:schemeClr val="accent1"/>
+          </a:fillRef>
+          <a:effectRef idx="2">
+            <a:schemeClr val="accent1"/>
+          </a:effectRef>
+          <a:fontRef idx="minor">
+            <a:schemeClr val="lt1"/>
+          </a:fontRef>
+        </p:style>
+        <p:txBody>
+          <a:bodyPr rtlCol="0" anchor="ctr"/>
+          <a:lstStyle/>
+          <a:p>
+            <a:pPr algn="ctr"/>
+          </a:p>
+        </p:txBody>
+      </p:sp>
+      <p:sp>
+        <p:nvSpPr>
+          <p:cNvPr id="23" name="TextBox 22"/>
+          <p:cNvSpPr txBox="1"/>
+          <p:nvPr/>
+        </p:nvSpPr>
+        <p:spPr>
+          <a:xfrm>
+            <a:off x="1801368" y="4727448"/>
+            <a:ext cx="1176528" cy="155448"/>
+          </a:xfrm>
+          <a:prstGeom prst="rect">
+            <a:avLst/>
+          </a:prstGeom>
+          <a:noFill/>
+        </p:spPr>
+        <p:txBody>
+          <a:bodyPr wrap="square" lIns="0" rIns="0" tIns="0" bIns="0">
+            <a:spAutoFit/>
+          </a:bodyPr>
+          <a:lstStyle/>
+          <a:p>
+            <a:pPr algn="ctr"/>
+            <a:r>
+              <a:rPr sz="900" b="1">
+                <a:solidFill>
+                  <a:srgbClr val="1E2761"/>
+                </a:solidFill>
+                <a:latin typeface="Aptos"/>
+              </a:rPr>
+              <a:t>755</a:t>
+            </a:r>
+          </a:p>
+        </p:txBody>
+      </p:sp>
+      <p:sp>
+        <p:nvSpPr>
+          <p:cNvPr id="24" name="Rounded Rectangle 23"/>
+          <p:cNvSpPr/>
+          <p:nvPr/>
+        </p:nvSpPr>
+        <p:spPr>
+          <a:xfrm>
+            <a:off x="3060192" y="4654296"/>
+            <a:ext cx="1249680" cy="310896"/>
+          </a:xfrm>
+          <a:prstGeom prst="roundRect">
+            <a:avLst/>
+          </a:prstGeom>
+          <a:solidFill>
+            <a:srgbClr val="F7CFCF"/>
+          </a:solidFill>
+          <a:ln w="12700">
+            <a:solidFill>
+              <a:srgbClr val="FFFFFF"/>
+            </a:solidFill>
+          </a:ln>
+        </p:spPr>
+        <p:style>
+          <a:lnRef idx="1">
+            <a:schemeClr val="accent1"/>
+          </a:lnRef>
+          <a:fillRef idx="3">
+            <a:schemeClr val="accent1"/>
+          </a:fillRef>
+          <a:effectRef idx="2">
+            <a:schemeClr val="accent1"/>
+          </a:effectRef>
+          <a:fontRef idx="minor">
+            <a:schemeClr val="lt1"/>
+          </a:fontRef>
+        </p:style>
+        <p:txBody>
+          <a:bodyPr rtlCol="0" anchor="ctr"/>
+          <a:lstStyle/>
+          <a:p>
+            <a:pPr algn="ctr"/>
+          </a:p>
+        </p:txBody>
+      </p:sp>
+      <p:sp>
+        <p:nvSpPr>
+          <p:cNvPr id="25" name="TextBox 24"/>
+          <p:cNvSpPr txBox="1"/>
+          <p:nvPr/>
+        </p:nvSpPr>
+        <p:spPr>
+          <a:xfrm>
+            <a:off x="3096768" y="4727448"/>
+            <a:ext cx="1176528" cy="155448"/>
+          </a:xfrm>
+          <a:prstGeom prst="rect">
+            <a:avLst/>
+          </a:prstGeom>
+          <a:noFill/>
+        </p:spPr>
+        <p:txBody>
+          <a:bodyPr wrap="square" lIns="0" rIns="0" tIns="0" bIns="0">
+            <a:spAutoFit/>
+          </a:bodyPr>
+          <a:lstStyle/>
+          <a:p>
+            <a:pPr algn="ctr"/>
+            <a:r>
+              <a:rPr sz="900" b="1">
+                <a:solidFill>
+                  <a:srgbClr val="1E2761"/>
+                </a:solidFill>
+                <a:latin typeface="Aptos"/>
+              </a:rPr>
+              <a:t>27</a:t>
+            </a:r>
+          </a:p>
+        </p:txBody>
+      </p:sp>
+      <p:sp>
+        <p:nvSpPr>
+          <p:cNvPr id="26" name="Rounded Rectangle 25"/>
+          <p:cNvSpPr/>
+          <p:nvPr/>
+        </p:nvSpPr>
+        <p:spPr>
+          <a:xfrm>
+            <a:off x="4355592" y="4654296"/>
+            <a:ext cx="1249680" cy="310896"/>
+          </a:xfrm>
+          <a:prstGeom prst="roundRect">
+            <a:avLst/>
+          </a:prstGeom>
+          <a:solidFill>
+            <a:srgbClr val="E7EAEF"/>
+          </a:solidFill>
+          <a:ln w="12700">
+            <a:solidFill>
+              <a:srgbClr val="FFFFFF"/>
+            </a:solidFill>
+          </a:ln>
+        </p:spPr>
+        <p:style>
+          <a:lnRef idx="1">
+            <a:schemeClr val="accent1"/>
+          </a:lnRef>
+          <a:fillRef idx="3">
+            <a:schemeClr val="accent1"/>
+          </a:fillRef>
+          <a:effectRef idx="2">
+            <a:schemeClr val="accent1"/>
+          </a:effectRef>
+          <a:fontRef idx="minor">
+            <a:schemeClr val="lt1"/>
+          </a:fontRef>
+        </p:style>
+        <p:txBody>
+          <a:bodyPr rtlCol="0" anchor="ctr"/>
+          <a:lstStyle/>
+          <a:p>
+            <a:pPr algn="ctr"/>
+          </a:p>
+        </p:txBody>
+      </p:sp>
+      <p:sp>
+        <p:nvSpPr>
+          <p:cNvPr id="27" name="TextBox 26"/>
+          <p:cNvSpPr txBox="1"/>
+          <p:nvPr/>
+        </p:nvSpPr>
+        <p:spPr>
+          <a:xfrm>
+            <a:off x="4392168" y="4727448"/>
+            <a:ext cx="1176528" cy="155448"/>
+          </a:xfrm>
+          <a:prstGeom prst="rect">
+            <a:avLst/>
+          </a:prstGeom>
+          <a:noFill/>
+        </p:spPr>
+        <p:txBody>
+          <a:bodyPr wrap="square" lIns="0" rIns="0" tIns="0" bIns="0">
+            <a:spAutoFit/>
+          </a:bodyPr>
+          <a:lstStyle/>
+          <a:p>
+            <a:pPr algn="ctr"/>
+            <a:r>
+              <a:rPr sz="900" b="1">
+                <a:solidFill>
+                  <a:srgbClr val="1E2761"/>
+                </a:solidFill>
+                <a:latin typeface="Aptos"/>
+              </a:rPr>
+              <a:t>84</a:t>
+            </a:r>
+          </a:p>
+        </p:txBody>
+      </p:sp>
+      <p:sp>
+        <p:nvSpPr>
+          <p:cNvPr id="28" name="TextBox 27"/>
+          <p:cNvSpPr txBox="1"/>
+          <p:nvPr/>
+        </p:nvSpPr>
+        <p:spPr>
+          <a:xfrm>
+            <a:off x="704088" y="5111496"/>
+            <a:ext cx="868680" cy="155448"/>
+          </a:xfrm>
+          <a:prstGeom prst="rect">
+            <a:avLst/>
+          </a:prstGeom>
+          <a:noFill/>
+        </p:spPr>
+        <p:txBody>
+          <a:bodyPr wrap="square" lIns="0" rIns="0" tIns="0" bIns="0">
+            <a:spAutoFit/>
+          </a:bodyPr>
+          <a:lstStyle/>
+          <a:p>
+            <a:r>
+              <a:rPr sz="900" b="1">
+                <a:solidFill>
+                  <a:srgbClr val="1E2761"/>
+                </a:solidFill>
+                <a:latin typeface="Aptos"/>
+              </a:rPr>
+              <a:t>Tomcat</a:t>
+            </a:r>
+          </a:p>
+        </p:txBody>
+      </p:sp>
+      <p:sp>
+        <p:nvSpPr>
+          <p:cNvPr id="29" name="Rounded Rectangle 28"/>
+          <p:cNvSpPr/>
+          <p:nvPr/>
+        </p:nvSpPr>
+        <p:spPr>
+          <a:xfrm>
+            <a:off x="1764792" y="5038344"/>
+            <a:ext cx="1249680" cy="310896"/>
+          </a:xfrm>
+          <a:prstGeom prst="roundRect">
+            <a:avLst/>
+          </a:prstGeom>
+          <a:solidFill>
+            <a:srgbClr val="CEE5CE"/>
+          </a:solidFill>
+          <a:ln w="12700">
+            <a:solidFill>
+              <a:srgbClr val="FFFFFF"/>
+            </a:solidFill>
+          </a:ln>
+        </p:spPr>
+        <p:style>
+          <a:lnRef idx="1">
+            <a:schemeClr val="accent1"/>
+          </a:lnRef>
+          <a:fillRef idx="3">
+            <a:schemeClr val="accent1"/>
+          </a:fillRef>
+          <a:effectRef idx="2">
+            <a:schemeClr val="accent1"/>
+          </a:effectRef>
+          <a:fontRef idx="minor">
+            <a:schemeClr val="lt1"/>
+          </a:fontRef>
+        </p:style>
+        <p:txBody>
+          <a:bodyPr rtlCol="0" anchor="ctr"/>
+          <a:lstStyle/>
+          <a:p>
+            <a:pPr algn="ctr"/>
+          </a:p>
+        </p:txBody>
+      </p:sp>
+      <p:sp>
+        <p:nvSpPr>
+          <p:cNvPr id="30" name="TextBox 29"/>
+          <p:cNvSpPr txBox="1"/>
+          <p:nvPr/>
+        </p:nvSpPr>
+        <p:spPr>
+          <a:xfrm>
+            <a:off x="1801368" y="5111496"/>
+            <a:ext cx="1176528" cy="155448"/>
+          </a:xfrm>
+          <a:prstGeom prst="rect">
+            <a:avLst/>
+          </a:prstGeom>
+          <a:noFill/>
+        </p:spPr>
+        <p:txBody>
+          <a:bodyPr wrap="square" lIns="0" rIns="0" tIns="0" bIns="0">
+            <a:spAutoFit/>
+          </a:bodyPr>
+          <a:lstStyle/>
+          <a:p>
+            <a:pPr algn="ctr"/>
+            <a:r>
+              <a:rPr sz="900" b="1">
+                <a:solidFill>
+                  <a:srgbClr val="1E2761"/>
+                </a:solidFill>
+                <a:latin typeface="Aptos"/>
+              </a:rPr>
+              <a:t>4</a:t>
+            </a:r>
+          </a:p>
+        </p:txBody>
+      </p:sp>
+      <p:sp>
+        <p:nvSpPr>
+          <p:cNvPr id="31" name="Rounded Rectangle 30"/>
+          <p:cNvSpPr/>
+          <p:nvPr/>
+        </p:nvSpPr>
+        <p:spPr>
+          <a:xfrm>
+            <a:off x="3060192" y="5038344"/>
+            <a:ext cx="1249680" cy="310896"/>
+          </a:xfrm>
+          <a:prstGeom prst="roundRect">
+            <a:avLst/>
+          </a:prstGeom>
+          <a:solidFill>
+            <a:srgbClr val="F7CFCF"/>
+          </a:solidFill>
+          <a:ln w="12700">
+            <a:solidFill>
+              <a:srgbClr val="FFFFFF"/>
+            </a:solidFill>
+          </a:ln>
+        </p:spPr>
+        <p:style>
+          <a:lnRef idx="1">
+            <a:schemeClr val="accent1"/>
+          </a:lnRef>
+          <a:fillRef idx="3">
+            <a:schemeClr val="accent1"/>
+          </a:fillRef>
+          <a:effectRef idx="2">
+            <a:schemeClr val="accent1"/>
+          </a:effectRef>
+          <a:fontRef idx="minor">
+            <a:schemeClr val="lt1"/>
+          </a:fontRef>
+        </p:style>
+        <p:txBody>
+          <a:bodyPr rtlCol="0" anchor="ctr"/>
+          <a:lstStyle/>
+          <a:p>
+            <a:pPr algn="ctr"/>
+          </a:p>
+        </p:txBody>
+      </p:sp>
+      <p:sp>
+        <p:nvSpPr>
+          <p:cNvPr id="32" name="TextBox 31"/>
+          <p:cNvSpPr txBox="1"/>
+          <p:nvPr/>
+        </p:nvSpPr>
+        <p:spPr>
+          <a:xfrm>
+            <a:off x="3096768" y="5111496"/>
+            <a:ext cx="1176528" cy="155448"/>
+          </a:xfrm>
+          <a:prstGeom prst="rect">
+            <a:avLst/>
+          </a:prstGeom>
+          <a:noFill/>
+        </p:spPr>
+        <p:txBody>
+          <a:bodyPr wrap="square" lIns="0" rIns="0" tIns="0" bIns="0">
+            <a:spAutoFit/>
+          </a:bodyPr>
+          <a:lstStyle/>
+          <a:p>
+            <a:pPr algn="ctr"/>
+            <a:r>
+              <a:rPr sz="900" b="1">
+                <a:solidFill>
+                  <a:srgbClr val="1E2761"/>
+                </a:solidFill>
+                <a:latin typeface="Aptos"/>
+              </a:rPr>
+              <a:t>0</a:t>
+            </a:r>
+          </a:p>
+        </p:txBody>
+      </p:sp>
+      <p:sp>
+        <p:nvSpPr>
+          <p:cNvPr id="33" name="Rounded Rectangle 32"/>
+          <p:cNvSpPr/>
+          <p:nvPr/>
+        </p:nvSpPr>
+        <p:spPr>
+          <a:xfrm>
+            <a:off x="4355592" y="5038344"/>
+            <a:ext cx="1249680" cy="310896"/>
+          </a:xfrm>
+          <a:prstGeom prst="roundRect">
+            <a:avLst/>
+          </a:prstGeom>
+          <a:solidFill>
+            <a:srgbClr val="E7EAEF"/>
+          </a:solidFill>
+          <a:ln w="12700">
+            <a:solidFill>
+              <a:srgbClr val="FFFFFF"/>
+            </a:solidFill>
+          </a:ln>
+        </p:spPr>
+        <p:style>
+          <a:lnRef idx="1">
+            <a:schemeClr val="accent1"/>
+          </a:lnRef>
+          <a:fillRef idx="3">
+            <a:schemeClr val="accent1"/>
+          </a:fillRef>
+          <a:effectRef idx="2">
+            <a:schemeClr val="accent1"/>
+          </a:effectRef>
+          <a:fontRef idx="minor">
+            <a:schemeClr val="lt1"/>
+          </a:fontRef>
+        </p:style>
+        <p:txBody>
+          <a:bodyPr rtlCol="0" anchor="ctr"/>
+          <a:lstStyle/>
+          <a:p>
+            <a:pPr algn="ctr"/>
+          </a:p>
+        </p:txBody>
+      </p:sp>
+      <p:sp>
+        <p:nvSpPr>
+          <p:cNvPr id="34" name="TextBox 33"/>
+          <p:cNvSpPr txBox="1"/>
+          <p:nvPr/>
+        </p:nvSpPr>
+        <p:spPr>
+          <a:xfrm>
+            <a:off x="4392168" y="5111496"/>
+            <a:ext cx="1176528" cy="155448"/>
+          </a:xfrm>
+          <a:prstGeom prst="rect">
+            <a:avLst/>
+          </a:prstGeom>
+          <a:noFill/>
+        </p:spPr>
+        <p:txBody>
+          <a:bodyPr wrap="square" lIns="0" rIns="0" tIns="0" bIns="0">
+            <a:spAutoFit/>
+          </a:bodyPr>
+          <a:lstStyle/>
+          <a:p>
+            <a:pPr algn="ctr"/>
+            <a:r>
+              <a:rPr sz="900" b="1">
+                <a:solidFill>
+                  <a:srgbClr val="1E2761"/>
+                </a:solidFill>
+                <a:latin typeface="Aptos"/>
+              </a:rPr>
+              <a:t>0</a:t>
+            </a:r>
+          </a:p>
+        </p:txBody>
+      </p:sp>
+      <p:sp>
+        <p:nvSpPr>
+          <p:cNvPr id="35" name="TextBox 34"/>
+          <p:cNvSpPr txBox="1"/>
+          <p:nvPr/>
+        </p:nvSpPr>
+        <p:spPr>
+          <a:xfrm>
+            <a:off x="704088" y="5495544"/>
+            <a:ext cx="868680" cy="155448"/>
+          </a:xfrm>
+          <a:prstGeom prst="rect">
+            <a:avLst/>
+          </a:prstGeom>
+          <a:noFill/>
+        </p:spPr>
+        <p:txBody>
+          <a:bodyPr wrap="square" lIns="0" rIns="0" tIns="0" bIns="0">
+            <a:spAutoFit/>
+          </a:bodyPr>
+          <a:lstStyle/>
+          <a:p>
+            <a:r>
+              <a:rPr sz="900" b="1">
+                <a:solidFill>
+                  <a:srgbClr val="1E2761"/>
+                </a:solidFill>
+                <a:latin typeface="Aptos"/>
+              </a:rPr>
+              <a:t>Total</a:t>
+            </a:r>
+          </a:p>
+        </p:txBody>
+      </p:sp>
+      <p:sp>
+        <p:nvSpPr>
+          <p:cNvPr id="36" name="Rounded Rectangle 35"/>
+          <p:cNvSpPr/>
+          <p:nvPr/>
+        </p:nvSpPr>
+        <p:spPr>
+          <a:xfrm>
+            <a:off x="1764792" y="5422392"/>
+            <a:ext cx="1249680" cy="310896"/>
+          </a:xfrm>
+          <a:prstGeom prst="roundRect">
+            <a:avLst/>
+          </a:prstGeom>
+          <a:solidFill>
+            <a:srgbClr val="228B22"/>
+          </a:solidFill>
+          <a:ln w="12700">
+            <a:solidFill>
+              <a:srgbClr val="FFFFFF"/>
+            </a:solidFill>
+          </a:ln>
+        </p:spPr>
+        <p:style>
+          <a:lnRef idx="1">
+            <a:schemeClr val="accent1"/>
+          </a:lnRef>
+          <a:fillRef idx="3">
+            <a:schemeClr val="accent1"/>
+          </a:fillRef>
+          <a:effectRef idx="2">
+            <a:schemeClr val="accent1"/>
+          </a:effectRef>
+          <a:fontRef idx="minor">
+            <a:schemeClr val="lt1"/>
+          </a:fontRef>
+        </p:style>
+        <p:txBody>
+          <a:bodyPr rtlCol="0" anchor="ctr"/>
+          <a:lstStyle/>
+          <a:p>
+            <a:pPr algn="ctr"/>
+          </a:p>
+        </p:txBody>
+      </p:sp>
+      <p:sp>
+        <p:nvSpPr>
+          <p:cNvPr id="37" name="TextBox 36"/>
+          <p:cNvSpPr txBox="1"/>
+          <p:nvPr/>
+        </p:nvSpPr>
+        <p:spPr>
+          <a:xfrm>
+            <a:off x="1801368" y="5495544"/>
+            <a:ext cx="1176528" cy="155448"/>
+          </a:xfrm>
+          <a:prstGeom prst="rect">
+            <a:avLst/>
+          </a:prstGeom>
+          <a:noFill/>
+        </p:spPr>
+        <p:txBody>
+          <a:bodyPr wrap="square" lIns="0" rIns="0" tIns="0" bIns="0">
+            <a:spAutoFit/>
+          </a:bodyPr>
+          <a:lstStyle/>
+          <a:p>
+            <a:pPr algn="ctr"/>
+            <a:r>
+              <a:rPr sz="900" b="1">
+                <a:solidFill>
+                  <a:srgbClr val="FFFFFF"/>
+                </a:solidFill>
+                <a:latin typeface="Aptos"/>
+              </a:rPr>
+              <a:t>759</a:t>
+            </a:r>
+          </a:p>
+        </p:txBody>
+      </p:sp>
+      <p:sp>
+        <p:nvSpPr>
+          <p:cNvPr id="38" name="Rounded Rectangle 37"/>
+          <p:cNvSpPr/>
+          <p:nvPr/>
+        </p:nvSpPr>
+        <p:spPr>
+          <a:xfrm>
+            <a:off x="3060192" y="5422392"/>
+            <a:ext cx="1249680" cy="310896"/>
+          </a:xfrm>
+          <a:prstGeom prst="roundRect">
+            <a:avLst/>
+          </a:prstGeom>
+          <a:solidFill>
+            <a:srgbClr val="DC2626"/>
+          </a:solidFill>
+          <a:ln w="12700">
+            <a:solidFill>
+              <a:srgbClr val="FFFFFF"/>
+            </a:solidFill>
+          </a:ln>
+        </p:spPr>
+        <p:style>
+          <a:lnRef idx="1">
+            <a:schemeClr val="accent1"/>
+          </a:lnRef>
+          <a:fillRef idx="3">
+            <a:schemeClr val="accent1"/>
+          </a:fillRef>
+          <a:effectRef idx="2">
+            <a:schemeClr val="accent1"/>
+          </a:effectRef>
+          <a:fontRef idx="minor">
+            <a:schemeClr val="lt1"/>
+          </a:fontRef>
+        </p:style>
+        <p:txBody>
+          <a:bodyPr rtlCol="0" anchor="ctr"/>
+          <a:lstStyle/>
+          <a:p>
+            <a:pPr algn="ctr"/>
+          </a:p>
+        </p:txBody>
+      </p:sp>
+      <p:sp>
+        <p:nvSpPr>
+          <p:cNvPr id="39" name="TextBox 38"/>
+          <p:cNvSpPr txBox="1"/>
+          <p:nvPr/>
+        </p:nvSpPr>
+        <p:spPr>
+          <a:xfrm>
+            <a:off x="3096768" y="5495544"/>
+            <a:ext cx="1176528" cy="155448"/>
+          </a:xfrm>
+          <a:prstGeom prst="rect">
+            <a:avLst/>
+          </a:prstGeom>
+          <a:noFill/>
+        </p:spPr>
+        <p:txBody>
+          <a:bodyPr wrap="square" lIns="0" rIns="0" tIns="0" bIns="0">
+            <a:spAutoFit/>
+          </a:bodyPr>
+          <a:lstStyle/>
+          <a:p>
+            <a:pPr algn="ctr"/>
+            <a:r>
+              <a:rPr sz="900" b="1">
+                <a:solidFill>
+                  <a:srgbClr val="FFFFFF"/>
+                </a:solidFill>
+                <a:latin typeface="Aptos"/>
+              </a:rPr>
+              <a:t>27</a:t>
+            </a:r>
+          </a:p>
+        </p:txBody>
+      </p:sp>
+      <p:sp>
+        <p:nvSpPr>
+          <p:cNvPr id="40" name="Rounded Rectangle 39"/>
+          <p:cNvSpPr/>
+          <p:nvPr/>
+        </p:nvSpPr>
+        <p:spPr>
+          <a:xfrm>
+            <a:off x="4355592" y="5422392"/>
+            <a:ext cx="1249680" cy="310896"/>
+          </a:xfrm>
+          <a:prstGeom prst="roundRect">
+            <a:avLst/>
+          </a:prstGeom>
+          <a:solidFill>
+            <a:srgbClr val="94A3B8"/>
+          </a:solidFill>
+          <a:ln w="12700">
+            <a:solidFill>
+              <a:srgbClr val="FFFFFF"/>
+            </a:solidFill>
+          </a:ln>
+        </p:spPr>
+        <p:style>
+          <a:lnRef idx="1">
+            <a:schemeClr val="accent1"/>
+          </a:lnRef>
+          <a:fillRef idx="3">
+            <a:schemeClr val="accent1"/>
+          </a:fillRef>
+          <a:effectRef idx="2">
+            <a:schemeClr val="accent1"/>
+          </a:effectRef>
+          <a:fontRef idx="minor">
+            <a:schemeClr val="lt1"/>
+          </a:fontRef>
+        </p:style>
+        <p:txBody>
+          <a:bodyPr rtlCol="0" anchor="ctr"/>
+          <a:lstStyle/>
+          <a:p>
+            <a:pPr algn="ctr"/>
+          </a:p>
+        </p:txBody>
+      </p:sp>
+      <p:sp>
+        <p:nvSpPr>
+          <p:cNvPr id="41" name="TextBox 40"/>
+          <p:cNvSpPr txBox="1"/>
+          <p:nvPr/>
+        </p:nvSpPr>
+        <p:spPr>
+          <a:xfrm>
+            <a:off x="4392168" y="5495544"/>
+            <a:ext cx="1176528" cy="155448"/>
+          </a:xfrm>
+          <a:prstGeom prst="rect">
+            <a:avLst/>
+          </a:prstGeom>
+          <a:noFill/>
+        </p:spPr>
+        <p:txBody>
+          <a:bodyPr wrap="square" lIns="0" rIns="0" tIns="0" bIns="0">
+            <a:spAutoFit/>
+          </a:bodyPr>
+          <a:lstStyle/>
+          <a:p>
+            <a:pPr algn="ctr"/>
+            <a:r>
+              <a:rPr sz="900" b="1">
+                <a:solidFill>
+                  <a:srgbClr val="FFFFFF"/>
+                </a:solidFill>
+                <a:latin typeface="Aptos"/>
+              </a:rPr>
+              <a:t>84</a:t>
+            </a:r>
+          </a:p>
+        </p:txBody>
+      </p:sp>
+      <p:sp>
+        <p:nvSpPr>
+          <p:cNvPr id="42" name="Rounded Rectangle 41"/>
+          <p:cNvSpPr/>
+          <p:nvPr/>
+        </p:nvSpPr>
+        <p:spPr>
+          <a:xfrm>
+            <a:off x="6172200" y="3675887"/>
+            <a:ext cx="5440680" cy="2304288"/>
+          </a:xfrm>
+          <a:prstGeom prst="roundRect">
+            <a:avLst/>
+          </a:prstGeom>
+          <a:solidFill>
+            <a:srgbClr val="FFFFFF"/>
+          </a:solidFill>
+          <a:ln w="12700">
+            <a:solidFill>
+              <a:srgbClr val="DAE2EE"/>
+            </a:solidFill>
+          </a:ln>
+        </p:spPr>
+        <p:style>
+          <a:lnRef idx="1">
+            <a:schemeClr val="accent1"/>
+          </a:lnRef>
+          <a:fillRef idx="3">
+            <a:schemeClr val="accent1"/>
+          </a:fillRef>
+          <a:effectRef idx="2">
+            <a:schemeClr val="accent1"/>
+          </a:effectRef>
+          <a:fontRef idx="minor">
+            <a:schemeClr val="lt1"/>
+          </a:fontRef>
+        </p:style>
+        <p:txBody>
+          <a:bodyPr rtlCol="0" anchor="ctr"/>
+          <a:lstStyle/>
+          <a:p>
+            <a:pPr algn="ctr"/>
+          </a:p>
+        </p:txBody>
+      </p:sp>
+      <p:sp>
+        <p:nvSpPr>
+          <p:cNvPr id="43" name="Rectangle 42"/>
+          <p:cNvSpPr/>
+          <p:nvPr/>
+        </p:nvSpPr>
+        <p:spPr>
+          <a:xfrm>
+            <a:off x="6172200" y="3675887"/>
+            <a:ext cx="5440680" cy="73152"/>
+          </a:xfrm>
+          <a:prstGeom prst="rect">
+            <a:avLst/>
+          </a:prstGeom>
+          <a:solidFill>
+            <a:srgbClr val="028090"/>
+          </a:solidFill>
+          <a:ln>
+            <a:noFill/>
+          </a:ln>
+        </p:spPr>
+        <p:style>
+          <a:lnRef idx="1">
+            <a:schemeClr val="accent1"/>
+          </a:lnRef>
+          <a:fillRef idx="3">
+            <a:schemeClr val="accent1"/>
+          </a:fillRef>
+          <a:effectRef idx="2">
+            <a:schemeClr val="accent1"/>
+          </a:effectRef>
+          <a:fontRef idx="minor">
+            <a:schemeClr val="lt1"/>
+          </a:fontRef>
+        </p:style>
+        <p:txBody>
+          <a:bodyPr rtlCol="0" anchor="ctr"/>
+          <a:lstStyle/>
+          <a:p>
+            <a:pPr algn="ctr"/>
+          </a:p>
+        </p:txBody>
+      </p:sp>
+      <p:sp>
+        <p:nvSpPr>
+          <p:cNvPr id="44" name="TextBox 43"/>
+          <p:cNvSpPr txBox="1"/>
+          <p:nvPr/>
+        </p:nvSpPr>
+        <p:spPr>
+          <a:xfrm>
+            <a:off x="6309360" y="3803903"/>
+            <a:ext cx="5166360" cy="274320"/>
+          </a:xfrm>
+          <a:prstGeom prst="rect">
+            <a:avLst/>
+          </a:prstGeom>
+          <a:noFill/>
+        </p:spPr>
+        <p:txBody>
+          <a:bodyPr wrap="square" lIns="0" rIns="0" tIns="0" bIns="0">
+            <a:spAutoFit/>
+          </a:bodyPr>
+          <a:lstStyle/>
+          <a:p>
+            <a:r>
+              <a:rPr sz="1300" b="1">
+                <a:solidFill>
+                  <a:srgbClr val="1E2761"/>
+                </a:solidFill>
+                <a:latin typeface="Aptos"/>
+              </a:rPr>
+              <a:t>AKS readiness by type</a:t>
+            </a:r>
+          </a:p>
+        </p:txBody>
+      </p:sp>
+      <p:sp>
+        <p:nvSpPr>
+          <p:cNvPr id="45" name="Rounded Rectangle 44"/>
+          <p:cNvSpPr/>
+          <p:nvPr/>
+        </p:nvSpPr>
+        <p:spPr>
+          <a:xfrm>
+            <a:off x="7434071" y="4270248"/>
+            <a:ext cx="925830" cy="310896"/>
+          </a:xfrm>
+          <a:prstGeom prst="roundRect">
+            <a:avLst/>
+          </a:prstGeom>
+          <a:solidFill>
+            <a:srgbClr val="94A3B8"/>
+          </a:solidFill>
+          <a:ln>
+            <a:noFill/>
+          </a:ln>
+        </p:spPr>
+        <p:style>
+          <a:lnRef idx="1">
+            <a:schemeClr val="accent1"/>
+          </a:lnRef>
+          <a:fillRef idx="3">
+            <a:schemeClr val="accent1"/>
+          </a:fillRef>
+          <a:effectRef idx="2">
+            <a:schemeClr val="accent1"/>
+          </a:effectRef>
+          <a:fontRef idx="minor">
+            <a:schemeClr val="lt1"/>
+          </a:fontRef>
+        </p:style>
+        <p:txBody>
+          <a:bodyPr rtlCol="0" anchor="ctr"/>
+          <a:lstStyle/>
+          <a:p>
+            <a:pPr algn="ctr"/>
+          </a:p>
+        </p:txBody>
+      </p:sp>
+      <p:sp>
+        <p:nvSpPr>
+          <p:cNvPr id="46" name="TextBox 45"/>
+          <p:cNvSpPr txBox="1"/>
+          <p:nvPr/>
+        </p:nvSpPr>
+        <p:spPr>
+          <a:xfrm>
+            <a:off x="7470647" y="4343400"/>
+            <a:ext cx="852678" cy="155448"/>
+          </a:xfrm>
+          <a:prstGeom prst="rect">
+            <a:avLst/>
+          </a:prstGeom>
+          <a:noFill/>
+        </p:spPr>
+        <p:txBody>
+          <a:bodyPr wrap="square" lIns="0" rIns="0" tIns="0" bIns="0">
+            <a:spAutoFit/>
+          </a:bodyPr>
+          <a:lstStyle/>
+          <a:p>
+            <a:pPr algn="ctr"/>
+            <a:r>
+              <a:rPr sz="700" b="1">
+                <a:solidFill>
+                  <a:srgbClr val="FFFFFF"/>
+                </a:solidFill>
+                <a:latin typeface="Aptos"/>
+              </a:rPr>
+              <a:t>Unknown</a:t>
+            </a:r>
+          </a:p>
+        </p:txBody>
+      </p:sp>
+      <p:sp>
+        <p:nvSpPr>
+          <p:cNvPr id="47" name="Rounded Rectangle 46"/>
+          <p:cNvSpPr/>
+          <p:nvPr/>
+        </p:nvSpPr>
+        <p:spPr>
+          <a:xfrm>
+            <a:off x="8405622" y="4270248"/>
+            <a:ext cx="925830" cy="310896"/>
+          </a:xfrm>
+          <a:prstGeom prst="roundRect">
+            <a:avLst/>
+          </a:prstGeom>
+          <a:solidFill>
+            <a:srgbClr val="228B22"/>
+          </a:solidFill>
+          <a:ln>
+            <a:noFill/>
+          </a:ln>
+        </p:spPr>
+        <p:style>
+          <a:lnRef idx="1">
+            <a:schemeClr val="accent1"/>
+          </a:lnRef>
+          <a:fillRef idx="3">
+            <a:schemeClr val="accent1"/>
+          </a:fillRef>
+          <a:effectRef idx="2">
+            <a:schemeClr val="accent1"/>
+          </a:effectRef>
+          <a:fontRef idx="minor">
+            <a:schemeClr val="lt1"/>
+          </a:fontRef>
+        </p:style>
+        <p:txBody>
+          <a:bodyPr rtlCol="0" anchor="ctr"/>
+          <a:lstStyle/>
+          <a:p>
+            <a:pPr algn="ctr"/>
+          </a:p>
+        </p:txBody>
+      </p:sp>
+      <p:sp>
+        <p:nvSpPr>
+          <p:cNvPr id="48" name="TextBox 47"/>
+          <p:cNvSpPr txBox="1"/>
+          <p:nvPr/>
+        </p:nvSpPr>
+        <p:spPr>
+          <a:xfrm>
+            <a:off x="8442197" y="4343400"/>
+            <a:ext cx="852678" cy="155448"/>
+          </a:xfrm>
+          <a:prstGeom prst="rect">
+            <a:avLst/>
+          </a:prstGeom>
+          <a:noFill/>
+        </p:spPr>
+        <p:txBody>
+          <a:bodyPr wrap="square" lIns="0" rIns="0" tIns="0" bIns="0">
+            <a:spAutoFit/>
+          </a:bodyPr>
+          <a:lstStyle/>
+          <a:p>
+            <a:pPr algn="ctr"/>
+            <a:r>
+              <a:rPr sz="700" b="1">
+                <a:solidFill>
+                  <a:srgbClr val="FFFFFF"/>
+                </a:solidFill>
+                <a:latin typeface="Aptos"/>
+              </a:rPr>
+              <a:t>Ready</a:t>
+            </a:r>
+          </a:p>
+        </p:txBody>
+      </p:sp>
+      <p:sp>
+        <p:nvSpPr>
+          <p:cNvPr id="49" name="Rounded Rectangle 48"/>
+          <p:cNvSpPr/>
+          <p:nvPr/>
+        </p:nvSpPr>
+        <p:spPr>
+          <a:xfrm>
+            <a:off x="9377172" y="4270248"/>
+            <a:ext cx="925830" cy="310896"/>
+          </a:xfrm>
+          <a:prstGeom prst="roundRect">
+            <a:avLst/>
+          </a:prstGeom>
+          <a:solidFill>
+            <a:srgbClr val="EAB308"/>
+          </a:solidFill>
+          <a:ln>
+            <a:noFill/>
+          </a:ln>
+        </p:spPr>
+        <p:style>
+          <a:lnRef idx="1">
+            <a:schemeClr val="accent1"/>
+          </a:lnRef>
+          <a:fillRef idx="3">
+            <a:schemeClr val="accent1"/>
+          </a:fillRef>
+          <a:effectRef idx="2">
+            <a:schemeClr val="accent1"/>
+          </a:effectRef>
+          <a:fontRef idx="minor">
+            <a:schemeClr val="lt1"/>
+          </a:fontRef>
+        </p:style>
+        <p:txBody>
+          <a:bodyPr rtlCol="0" anchor="ctr"/>
+          <a:lstStyle/>
+          <a:p>
+            <a:pPr algn="ctr"/>
+          </a:p>
+        </p:txBody>
+      </p:sp>
+      <p:sp>
+        <p:nvSpPr>
+          <p:cNvPr id="50" name="TextBox 49"/>
+          <p:cNvSpPr txBox="1"/>
+          <p:nvPr/>
+        </p:nvSpPr>
+        <p:spPr>
+          <a:xfrm>
+            <a:off x="9413747" y="4343400"/>
+            <a:ext cx="852678" cy="155448"/>
+          </a:xfrm>
+          <a:prstGeom prst="rect">
+            <a:avLst/>
+          </a:prstGeom>
+          <a:noFill/>
+        </p:spPr>
+        <p:txBody>
+          <a:bodyPr wrap="square" lIns="0" rIns="0" tIns="0" bIns="0">
+            <a:spAutoFit/>
+          </a:bodyPr>
+          <a:lstStyle/>
+          <a:p>
+            <a:pPr algn="ctr"/>
+            <a:r>
+              <a:rPr sz="700" b="1">
+                <a:solidFill>
+                  <a:srgbClr val="1E2761"/>
+                </a:solidFill>
+                <a:latin typeface="Aptos"/>
+              </a:rPr>
+              <a:t>Ready w/ conditions</a:t>
+            </a:r>
+          </a:p>
+        </p:txBody>
+      </p:sp>
+      <p:sp>
+        <p:nvSpPr>
+          <p:cNvPr id="51" name="Rounded Rectangle 50"/>
+          <p:cNvSpPr/>
+          <p:nvPr/>
+        </p:nvSpPr>
+        <p:spPr>
+          <a:xfrm>
+            <a:off x="10348722" y="4270248"/>
+            <a:ext cx="925830" cy="310896"/>
+          </a:xfrm>
+          <a:prstGeom prst="roundRect">
+            <a:avLst/>
+          </a:prstGeom>
+          <a:solidFill>
+            <a:srgbClr val="DC2626"/>
+          </a:solidFill>
+          <a:ln>
+            <a:noFill/>
+          </a:ln>
+        </p:spPr>
+        <p:style>
+          <a:lnRef idx="1">
+            <a:schemeClr val="accent1"/>
+          </a:lnRef>
+          <a:fillRef idx="3">
+            <a:schemeClr val="accent1"/>
+          </a:fillRef>
+          <a:effectRef idx="2">
+            <a:schemeClr val="accent1"/>
+          </a:effectRef>
+          <a:fontRef idx="minor">
+            <a:schemeClr val="lt1"/>
+          </a:fontRef>
+        </p:style>
+        <p:txBody>
+          <a:bodyPr rtlCol="0" anchor="ctr"/>
+          <a:lstStyle/>
+          <a:p>
+            <a:pPr algn="ctr"/>
+          </a:p>
+        </p:txBody>
+      </p:sp>
+      <p:sp>
+        <p:nvSpPr>
+          <p:cNvPr id="52" name="TextBox 51"/>
+          <p:cNvSpPr txBox="1"/>
+          <p:nvPr/>
+        </p:nvSpPr>
+        <p:spPr>
+          <a:xfrm>
+            <a:off x="10385297" y="4343400"/>
+            <a:ext cx="852678" cy="155448"/>
+          </a:xfrm>
+          <a:prstGeom prst="rect">
+            <a:avLst/>
+          </a:prstGeom>
+          <a:noFill/>
+        </p:spPr>
+        <p:txBody>
+          <a:bodyPr wrap="square" lIns="0" rIns="0" tIns="0" bIns="0">
+            <a:spAutoFit/>
+          </a:bodyPr>
+          <a:lstStyle/>
+          <a:p>
+            <a:pPr algn="ctr"/>
+            <a:r>
+              <a:rPr sz="700" b="1">
+                <a:solidFill>
+                  <a:srgbClr val="FFFFFF"/>
+                </a:solidFill>
+                <a:latin typeface="Aptos"/>
+              </a:rPr>
+              <a:t>Not Ready</a:t>
+            </a:r>
+          </a:p>
+        </p:txBody>
+      </p:sp>
+      <p:sp>
+        <p:nvSpPr>
+          <p:cNvPr id="53" name="TextBox 52"/>
+          <p:cNvSpPr txBox="1"/>
+          <p:nvPr/>
+        </p:nvSpPr>
+        <p:spPr>
+          <a:xfrm>
+            <a:off x="6373368" y="4727448"/>
+            <a:ext cx="868680" cy="155448"/>
+          </a:xfrm>
+          <a:prstGeom prst="rect">
+            <a:avLst/>
+          </a:prstGeom>
+          <a:noFill/>
+        </p:spPr>
+        <p:txBody>
+          <a:bodyPr wrap="square" lIns="0" rIns="0" tIns="0" bIns="0">
+            <a:spAutoFit/>
+          </a:bodyPr>
+          <a:lstStyle/>
+          <a:p>
+            <a:r>
+              <a:rPr sz="900" b="1">
+                <a:solidFill>
+                  <a:srgbClr val="1E2761"/>
+                </a:solidFill>
+                <a:latin typeface="Aptos"/>
+              </a:rPr>
+              <a:t>IIS</a:t>
+            </a:r>
+          </a:p>
+        </p:txBody>
+      </p:sp>
+      <p:sp>
+        <p:nvSpPr>
+          <p:cNvPr id="54" name="Rounded Rectangle 53"/>
+          <p:cNvSpPr/>
+          <p:nvPr/>
+        </p:nvSpPr>
+        <p:spPr>
+          <a:xfrm>
+            <a:off x="7434071" y="4654296"/>
+            <a:ext cx="925830" cy="310896"/>
+          </a:xfrm>
+          <a:prstGeom prst="roundRect">
+            <a:avLst/>
+          </a:prstGeom>
+          <a:solidFill>
+            <a:srgbClr val="E7EAEF"/>
+          </a:solidFill>
+          <a:ln w="12700">
+            <a:solidFill>
+              <a:srgbClr val="FFFFFF"/>
+            </a:solidFill>
+          </a:ln>
+        </p:spPr>
+        <p:style>
+          <a:lnRef idx="1">
+            <a:schemeClr val="accent1"/>
+          </a:lnRef>
+          <a:fillRef idx="3">
+            <a:schemeClr val="accent1"/>
+          </a:fillRef>
+          <a:effectRef idx="2">
+            <a:schemeClr val="accent1"/>
+          </a:effectRef>
+          <a:fontRef idx="minor">
+            <a:schemeClr val="lt1"/>
+          </a:fontRef>
+        </p:style>
+        <p:txBody>
+          <a:bodyPr rtlCol="0" anchor="ctr"/>
+          <a:lstStyle/>
+          <a:p>
+            <a:pPr algn="ctr"/>
+          </a:p>
+        </p:txBody>
+      </p:sp>
+      <p:sp>
+        <p:nvSpPr>
+          <p:cNvPr id="55" name="TextBox 54"/>
+          <p:cNvSpPr txBox="1"/>
+          <p:nvPr/>
+        </p:nvSpPr>
+        <p:spPr>
+          <a:xfrm>
+            <a:off x="7470647" y="4727448"/>
+            <a:ext cx="852678" cy="155448"/>
+          </a:xfrm>
+          <a:prstGeom prst="rect">
+            <a:avLst/>
+          </a:prstGeom>
+          <a:noFill/>
+        </p:spPr>
+        <p:txBody>
+          <a:bodyPr wrap="square" lIns="0" rIns="0" tIns="0" bIns="0">
+            <a:spAutoFit/>
+          </a:bodyPr>
+          <a:lstStyle/>
+          <a:p>
+            <a:pPr algn="ctr"/>
+            <a:r>
+              <a:rPr sz="900" b="1">
+                <a:solidFill>
+                  <a:srgbClr val="1E2761"/>
+                </a:solidFill>
+                <a:latin typeface="Aptos"/>
+              </a:rPr>
+              <a:t>0</a:t>
+            </a:r>
+          </a:p>
+        </p:txBody>
+      </p:sp>
+      <p:sp>
+        <p:nvSpPr>
+          <p:cNvPr id="56" name="Rounded Rectangle 55"/>
+          <p:cNvSpPr/>
+          <p:nvPr/>
+        </p:nvSpPr>
+        <p:spPr>
+          <a:xfrm>
+            <a:off x="8405622" y="4654296"/>
+            <a:ext cx="925830" cy="310896"/>
+          </a:xfrm>
+          <a:prstGeom prst="roundRect">
+            <a:avLst/>
+          </a:prstGeom>
+          <a:solidFill>
+            <a:srgbClr val="CEE5CE"/>
+          </a:solidFill>
+          <a:ln w="12700">
+            <a:solidFill>
+              <a:srgbClr val="FFFFFF"/>
+            </a:solidFill>
+          </a:ln>
+        </p:spPr>
+        <p:style>
+          <a:lnRef idx="1">
+            <a:schemeClr val="accent1"/>
+          </a:lnRef>
+          <a:fillRef idx="3">
+            <a:schemeClr val="accent1"/>
+          </a:fillRef>
+          <a:effectRef idx="2">
+            <a:schemeClr val="accent1"/>
+          </a:effectRef>
+          <a:fontRef idx="minor">
+            <a:schemeClr val="lt1"/>
+          </a:fontRef>
+        </p:style>
+        <p:txBody>
+          <a:bodyPr rtlCol="0" anchor="ctr"/>
+          <a:lstStyle/>
+          <a:p>
+            <a:pPr algn="ctr"/>
+          </a:p>
+        </p:txBody>
+      </p:sp>
+      <p:sp>
+        <p:nvSpPr>
+          <p:cNvPr id="57" name="TextBox 56"/>
+          <p:cNvSpPr txBox="1"/>
+          <p:nvPr/>
+        </p:nvSpPr>
+        <p:spPr>
+          <a:xfrm>
+            <a:off x="8442197" y="4727448"/>
+            <a:ext cx="852678" cy="155448"/>
+          </a:xfrm>
+          <a:prstGeom prst="rect">
+            <a:avLst/>
+          </a:prstGeom>
+          <a:noFill/>
+        </p:spPr>
+        <p:txBody>
+          <a:bodyPr wrap="square" lIns="0" rIns="0" tIns="0" bIns="0">
+            <a:spAutoFit/>
+          </a:bodyPr>
+          <a:lstStyle/>
+          <a:p>
+            <a:pPr algn="ctr"/>
+            <a:r>
+              <a:rPr sz="900" b="1">
+                <a:solidFill>
+                  <a:srgbClr val="1E2761"/>
+                </a:solidFill>
+                <a:latin typeface="Aptos"/>
+              </a:rPr>
+              <a:t>0</a:t>
+            </a:r>
+          </a:p>
+        </p:txBody>
+      </p:sp>
+      <p:sp>
+        <p:nvSpPr>
+          <p:cNvPr id="58" name="Rounded Rectangle 57"/>
+          <p:cNvSpPr/>
+          <p:nvPr/>
+        </p:nvSpPr>
+        <p:spPr>
+          <a:xfrm>
+            <a:off x="9377172" y="4654296"/>
+            <a:ext cx="925830" cy="310896"/>
+          </a:xfrm>
+          <a:prstGeom prst="roundRect">
+            <a:avLst/>
+          </a:prstGeom>
+          <a:solidFill>
+            <a:srgbClr val="FAEEC8"/>
+          </a:solidFill>
+          <a:ln w="12700">
+            <a:solidFill>
+              <a:srgbClr val="FFFFFF"/>
+            </a:solidFill>
+          </a:ln>
+        </p:spPr>
+        <p:style>
+          <a:lnRef idx="1">
+            <a:schemeClr val="accent1"/>
+          </a:lnRef>
+          <a:fillRef idx="3">
+            <a:schemeClr val="accent1"/>
+          </a:fillRef>
+          <a:effectRef idx="2">
+            <a:schemeClr val="accent1"/>
+          </a:effectRef>
+          <a:fontRef idx="minor">
+            <a:schemeClr val="lt1"/>
+          </a:fontRef>
+        </p:style>
+        <p:txBody>
+          <a:bodyPr rtlCol="0" anchor="ctr"/>
+          <a:lstStyle/>
+          <a:p>
+            <a:pPr algn="ctr"/>
+          </a:p>
+        </p:txBody>
+      </p:sp>
+      <p:sp>
+        <p:nvSpPr>
+          <p:cNvPr id="59" name="TextBox 58"/>
+          <p:cNvSpPr txBox="1"/>
+          <p:nvPr/>
+        </p:nvSpPr>
+        <p:spPr>
+          <a:xfrm>
+            <a:off x="9413747" y="4727448"/>
+            <a:ext cx="852678" cy="155448"/>
+          </a:xfrm>
+          <a:prstGeom prst="rect">
+            <a:avLst/>
+          </a:prstGeom>
+          <a:noFill/>
+        </p:spPr>
+        <p:txBody>
+          <a:bodyPr wrap="square" lIns="0" rIns="0" tIns="0" bIns="0">
+            <a:spAutoFit/>
+          </a:bodyPr>
+          <a:lstStyle/>
+          <a:p>
+            <a:pPr algn="ctr"/>
+            <a:r>
+              <a:rPr sz="900" b="1">
+                <a:solidFill>
+                  <a:srgbClr val="1E2761"/>
+                </a:solidFill>
+                <a:latin typeface="Aptos"/>
+              </a:rPr>
+              <a:t>402</a:t>
+            </a:r>
+          </a:p>
+        </p:txBody>
+      </p:sp>
+      <p:sp>
+        <p:nvSpPr>
+          <p:cNvPr id="60" name="Rounded Rectangle 59"/>
+          <p:cNvSpPr/>
+          <p:nvPr/>
+        </p:nvSpPr>
+        <p:spPr>
+          <a:xfrm>
+            <a:off x="10348722" y="4654296"/>
+            <a:ext cx="925830" cy="310896"/>
+          </a:xfrm>
+          <a:prstGeom prst="roundRect">
+            <a:avLst/>
+          </a:prstGeom>
+          <a:solidFill>
+            <a:srgbClr val="F7CFCF"/>
+          </a:solidFill>
+          <a:ln w="12700">
+            <a:solidFill>
+              <a:srgbClr val="FFFFFF"/>
+            </a:solidFill>
+          </a:ln>
+        </p:spPr>
+        <p:style>
+          <a:lnRef idx="1">
+            <a:schemeClr val="accent1"/>
+          </a:lnRef>
+          <a:fillRef idx="3">
+            <a:schemeClr val="accent1"/>
+          </a:fillRef>
+          <a:effectRef idx="2">
+            <a:schemeClr val="accent1"/>
+          </a:effectRef>
+          <a:fontRef idx="minor">
+            <a:schemeClr val="lt1"/>
+          </a:fontRef>
+        </p:style>
+        <p:txBody>
+          <a:bodyPr rtlCol="0" anchor="ctr"/>
+          <a:lstStyle/>
+          <a:p>
+            <a:pPr algn="ctr"/>
+          </a:p>
+        </p:txBody>
+      </p:sp>
+      <p:sp>
+        <p:nvSpPr>
+          <p:cNvPr id="61" name="TextBox 60"/>
+          <p:cNvSpPr txBox="1"/>
+          <p:nvPr/>
+        </p:nvSpPr>
+        <p:spPr>
+          <a:xfrm>
+            <a:off x="10385297" y="4727448"/>
+            <a:ext cx="852678" cy="155448"/>
+          </a:xfrm>
+          <a:prstGeom prst="rect">
+            <a:avLst/>
+          </a:prstGeom>
+          <a:noFill/>
+        </p:spPr>
+        <p:txBody>
+          <a:bodyPr wrap="square" lIns="0" rIns="0" tIns="0" bIns="0">
+            <a:spAutoFit/>
+          </a:bodyPr>
+          <a:lstStyle/>
+          <a:p>
+            <a:pPr algn="ctr"/>
+            <a:r>
+              <a:rPr sz="900" b="1">
+                <a:solidFill>
+                  <a:srgbClr val="1E2761"/>
+                </a:solidFill>
+                <a:latin typeface="Aptos"/>
+              </a:rPr>
+              <a:t>0</a:t>
+            </a:r>
+          </a:p>
+        </p:txBody>
+      </p:sp>
+      <p:sp>
+        <p:nvSpPr>
+          <p:cNvPr id="62" name="TextBox 61"/>
+          <p:cNvSpPr txBox="1"/>
+          <p:nvPr/>
+        </p:nvSpPr>
+        <p:spPr>
+          <a:xfrm>
+            <a:off x="6373368" y="5111496"/>
+            <a:ext cx="868680" cy="155448"/>
+          </a:xfrm>
+          <a:prstGeom prst="rect">
+            <a:avLst/>
+          </a:prstGeom>
+          <a:noFill/>
+        </p:spPr>
+        <p:txBody>
+          <a:bodyPr wrap="square" lIns="0" rIns="0" tIns="0" bIns="0">
+            <a:spAutoFit/>
+          </a:bodyPr>
+          <a:lstStyle/>
+          <a:p>
+            <a:r>
+              <a:rPr sz="900" b="1">
+                <a:solidFill>
+                  <a:srgbClr val="1E2761"/>
+                </a:solidFill>
+                <a:latin typeface="Aptos"/>
+              </a:rPr>
+              <a:t>Tomcat</a:t>
+            </a:r>
+          </a:p>
+        </p:txBody>
+      </p:sp>
+      <p:sp>
+        <p:nvSpPr>
+          <p:cNvPr id="63" name="Rounded Rectangle 62"/>
+          <p:cNvSpPr/>
+          <p:nvPr/>
+        </p:nvSpPr>
+        <p:spPr>
+          <a:xfrm>
+            <a:off x="7434071" y="5038344"/>
+            <a:ext cx="925830" cy="310896"/>
+          </a:xfrm>
+          <a:prstGeom prst="roundRect">
+            <a:avLst/>
+          </a:prstGeom>
+          <a:solidFill>
+            <a:srgbClr val="E7EAEF"/>
+          </a:solidFill>
+          <a:ln w="12700">
+            <a:solidFill>
+              <a:srgbClr val="FFFFFF"/>
+            </a:solidFill>
+          </a:ln>
+        </p:spPr>
+        <p:style>
+          <a:lnRef idx="1">
+            <a:schemeClr val="accent1"/>
+          </a:lnRef>
+          <a:fillRef idx="3">
+            <a:schemeClr val="accent1"/>
+          </a:fillRef>
+          <a:effectRef idx="2">
+            <a:schemeClr val="accent1"/>
+          </a:effectRef>
+          <a:fontRef idx="minor">
+            <a:schemeClr val="lt1"/>
+          </a:fontRef>
+        </p:style>
+        <p:txBody>
+          <a:bodyPr rtlCol="0" anchor="ctr"/>
+          <a:lstStyle/>
+          <a:p>
+            <a:pPr algn="ctr"/>
+          </a:p>
+        </p:txBody>
+      </p:sp>
+      <p:sp>
+        <p:nvSpPr>
+          <p:cNvPr id="64" name="TextBox 63"/>
+          <p:cNvSpPr txBox="1"/>
+          <p:nvPr/>
+        </p:nvSpPr>
+        <p:spPr>
+          <a:xfrm>
+            <a:off x="7470647" y="5111496"/>
+            <a:ext cx="852678" cy="155448"/>
+          </a:xfrm>
+          <a:prstGeom prst="rect">
+            <a:avLst/>
+          </a:prstGeom>
+          <a:noFill/>
+        </p:spPr>
+        <p:txBody>
+          <a:bodyPr wrap="square" lIns="0" rIns="0" tIns="0" bIns="0">
+            <a:spAutoFit/>
+          </a:bodyPr>
+          <a:lstStyle/>
+          <a:p>
+            <a:pPr algn="ctr"/>
+            <a:r>
+              <a:rPr sz="900" b="1">
+                <a:solidFill>
+                  <a:srgbClr val="1E2761"/>
+                </a:solidFill>
+                <a:latin typeface="Aptos"/>
+              </a:rPr>
+              <a:t>0</a:t>
+            </a:r>
+          </a:p>
+        </p:txBody>
+      </p:sp>
+      <p:sp>
+        <p:nvSpPr>
+          <p:cNvPr id="65" name="Rounded Rectangle 64"/>
+          <p:cNvSpPr/>
+          <p:nvPr/>
+        </p:nvSpPr>
+        <p:spPr>
+          <a:xfrm>
+            <a:off x="8405622" y="5038344"/>
+            <a:ext cx="925830" cy="310896"/>
+          </a:xfrm>
+          <a:prstGeom prst="roundRect">
+            <a:avLst/>
+          </a:prstGeom>
+          <a:solidFill>
+            <a:srgbClr val="CEE5CE"/>
+          </a:solidFill>
+          <a:ln w="12700">
+            <a:solidFill>
+              <a:srgbClr val="FFFFFF"/>
+            </a:solidFill>
+          </a:ln>
+        </p:spPr>
+        <p:style>
+          <a:lnRef idx="1">
+            <a:schemeClr val="accent1"/>
+          </a:lnRef>
+          <a:fillRef idx="3">
+            <a:schemeClr val="accent1"/>
+          </a:fillRef>
+          <a:effectRef idx="2">
+            <a:schemeClr val="accent1"/>
+          </a:effectRef>
+          <a:fontRef idx="minor">
+            <a:schemeClr val="lt1"/>
+          </a:fontRef>
+        </p:style>
+        <p:txBody>
+          <a:bodyPr rtlCol="0" anchor="ctr"/>
+          <a:lstStyle/>
+          <a:p>
+            <a:pPr algn="ctr"/>
+          </a:p>
+        </p:txBody>
+      </p:sp>
+      <p:sp>
+        <p:nvSpPr>
+          <p:cNvPr id="66" name="TextBox 65"/>
+          <p:cNvSpPr txBox="1"/>
+          <p:nvPr/>
+        </p:nvSpPr>
+        <p:spPr>
+          <a:xfrm>
+            <a:off x="8442197" y="5111496"/>
+            <a:ext cx="852678" cy="155448"/>
+          </a:xfrm>
+          <a:prstGeom prst="rect">
+            <a:avLst/>
+          </a:prstGeom>
+          <a:noFill/>
+        </p:spPr>
+        <p:txBody>
+          <a:bodyPr wrap="square" lIns="0" rIns="0" tIns="0" bIns="0">
+            <a:spAutoFit/>
+          </a:bodyPr>
+          <a:lstStyle/>
+          <a:p>
+            <a:pPr algn="ctr"/>
+            <a:r>
+              <a:rPr sz="900" b="1">
+                <a:solidFill>
+                  <a:srgbClr val="1E2761"/>
+                </a:solidFill>
+                <a:latin typeface="Aptos"/>
+              </a:rPr>
+              <a:t>0</a:t>
+            </a:r>
+          </a:p>
+        </p:txBody>
+      </p:sp>
+      <p:sp>
+        <p:nvSpPr>
+          <p:cNvPr id="67" name="Rounded Rectangle 66"/>
+          <p:cNvSpPr/>
+          <p:nvPr/>
+        </p:nvSpPr>
+        <p:spPr>
+          <a:xfrm>
+            <a:off x="9377172" y="5038344"/>
+            <a:ext cx="925830" cy="310896"/>
+          </a:xfrm>
+          <a:prstGeom prst="roundRect">
+            <a:avLst/>
+          </a:prstGeom>
+          <a:solidFill>
+            <a:srgbClr val="FAEEC8"/>
+          </a:solidFill>
+          <a:ln w="12700">
+            <a:solidFill>
+              <a:srgbClr val="FFFFFF"/>
+            </a:solidFill>
+          </a:ln>
+        </p:spPr>
+        <p:style>
+          <a:lnRef idx="1">
+            <a:schemeClr val="accent1"/>
+          </a:lnRef>
+          <a:fillRef idx="3">
+            <a:schemeClr val="accent1"/>
+          </a:fillRef>
+          <a:effectRef idx="2">
+            <a:schemeClr val="accent1"/>
+          </a:effectRef>
+          <a:fontRef idx="minor">
+            <a:schemeClr val="lt1"/>
+          </a:fontRef>
+        </p:style>
+        <p:txBody>
+          <a:bodyPr rtlCol="0" anchor="ctr"/>
+          <a:lstStyle/>
+          <a:p>
+            <a:pPr algn="ctr"/>
+          </a:p>
+        </p:txBody>
+      </p:sp>
+      <p:sp>
+        <p:nvSpPr>
+          <p:cNvPr id="68" name="TextBox 67"/>
+          <p:cNvSpPr txBox="1"/>
+          <p:nvPr/>
+        </p:nvSpPr>
+        <p:spPr>
+          <a:xfrm>
+            <a:off x="9413747" y="5111496"/>
+            <a:ext cx="852678" cy="155448"/>
+          </a:xfrm>
+          <a:prstGeom prst="rect">
+            <a:avLst/>
+          </a:prstGeom>
+          <a:noFill/>
+        </p:spPr>
+        <p:txBody>
+          <a:bodyPr wrap="square" lIns="0" rIns="0" tIns="0" bIns="0">
+            <a:spAutoFit/>
+          </a:bodyPr>
+          <a:lstStyle/>
+          <a:p>
+            <a:pPr algn="ctr"/>
+            <a:r>
+              <a:rPr sz="900" b="1">
+                <a:solidFill>
+                  <a:srgbClr val="1E2761"/>
+                </a:solidFill>
+                <a:latin typeface="Aptos"/>
+              </a:rPr>
+              <a:t>0</a:t>
+            </a:r>
+          </a:p>
+        </p:txBody>
+      </p:sp>
+      <p:sp>
+        <p:nvSpPr>
+          <p:cNvPr id="69" name="Rounded Rectangle 68"/>
+          <p:cNvSpPr/>
+          <p:nvPr/>
+        </p:nvSpPr>
+        <p:spPr>
+          <a:xfrm>
+            <a:off x="10348722" y="5038344"/>
+            <a:ext cx="925830" cy="310896"/>
+          </a:xfrm>
+          <a:prstGeom prst="roundRect">
+            <a:avLst/>
+          </a:prstGeom>
+          <a:solidFill>
+            <a:srgbClr val="F7CFCF"/>
+          </a:solidFill>
+          <a:ln w="12700">
+            <a:solidFill>
+              <a:srgbClr val="FFFFFF"/>
+            </a:solidFill>
+          </a:ln>
+        </p:spPr>
+        <p:style>
+          <a:lnRef idx="1">
+            <a:schemeClr val="accent1"/>
+          </a:lnRef>
+          <a:fillRef idx="3">
+            <a:schemeClr val="accent1"/>
+          </a:fillRef>
+          <a:effectRef idx="2">
+            <a:schemeClr val="accent1"/>
+          </a:effectRef>
+          <a:fontRef idx="minor">
+            <a:schemeClr val="lt1"/>
+          </a:fontRef>
+        </p:style>
+        <p:txBody>
+          <a:bodyPr rtlCol="0" anchor="ctr"/>
+          <a:lstStyle/>
+          <a:p>
+            <a:pPr algn="ctr"/>
+          </a:p>
+        </p:txBody>
+      </p:sp>
+      <p:sp>
+        <p:nvSpPr>
+          <p:cNvPr id="70" name="TextBox 69"/>
+          <p:cNvSpPr txBox="1"/>
+          <p:nvPr/>
+        </p:nvSpPr>
+        <p:spPr>
+          <a:xfrm>
+            <a:off x="10385297" y="5111496"/>
+            <a:ext cx="852678" cy="155448"/>
+          </a:xfrm>
+          <a:prstGeom prst="rect">
+            <a:avLst/>
+          </a:prstGeom>
+          <a:noFill/>
+        </p:spPr>
+        <p:txBody>
+          <a:bodyPr wrap="square" lIns="0" rIns="0" tIns="0" bIns="0">
+            <a:spAutoFit/>
+          </a:bodyPr>
+          <a:lstStyle/>
+          <a:p>
+            <a:pPr algn="ctr"/>
+            <a:r>
+              <a:rPr sz="900" b="1">
+                <a:solidFill>
+                  <a:srgbClr val="1E2761"/>
+                </a:solidFill>
+                <a:latin typeface="Aptos"/>
+              </a:rPr>
+              <a:t>0</a:t>
+            </a:r>
+          </a:p>
+        </p:txBody>
+      </p:sp>
+      <p:sp>
+        <p:nvSpPr>
+          <p:cNvPr id="71" name="TextBox 70"/>
+          <p:cNvSpPr txBox="1"/>
+          <p:nvPr/>
+        </p:nvSpPr>
+        <p:spPr>
+          <a:xfrm>
+            <a:off x="6373368" y="5495544"/>
+            <a:ext cx="868680" cy="155448"/>
+          </a:xfrm>
+          <a:prstGeom prst="rect">
+            <a:avLst/>
+          </a:prstGeom>
+          <a:noFill/>
+        </p:spPr>
+        <p:txBody>
+          <a:bodyPr wrap="square" lIns="0" rIns="0" tIns="0" bIns="0">
+            <a:spAutoFit/>
+          </a:bodyPr>
+          <a:lstStyle/>
+          <a:p>
+            <a:r>
+              <a:rPr sz="900" b="1">
+                <a:solidFill>
+                  <a:srgbClr val="1E2761"/>
+                </a:solidFill>
+                <a:latin typeface="Aptos"/>
+              </a:rPr>
+              <a:t>Total</a:t>
+            </a:r>
+          </a:p>
+        </p:txBody>
+      </p:sp>
+      <p:sp>
+        <p:nvSpPr>
+          <p:cNvPr id="72" name="Rounded Rectangle 71"/>
+          <p:cNvSpPr/>
+          <p:nvPr/>
+        </p:nvSpPr>
+        <p:spPr>
+          <a:xfrm>
+            <a:off x="7434071" y="5422392"/>
+            <a:ext cx="925830" cy="310896"/>
+          </a:xfrm>
+          <a:prstGeom prst="roundRect">
+            <a:avLst/>
+          </a:prstGeom>
+          <a:solidFill>
+            <a:srgbClr val="94A3B8"/>
+          </a:solidFill>
+          <a:ln w="12700">
+            <a:solidFill>
+              <a:srgbClr val="FFFFFF"/>
+            </a:solidFill>
+          </a:ln>
+        </p:spPr>
+        <p:style>
+          <a:lnRef idx="1">
+            <a:schemeClr val="accent1"/>
+          </a:lnRef>
+          <a:fillRef idx="3">
+            <a:schemeClr val="accent1"/>
+          </a:fillRef>
+          <a:effectRef idx="2">
+            <a:schemeClr val="accent1"/>
+          </a:effectRef>
+          <a:fontRef idx="minor">
+            <a:schemeClr val="lt1"/>
+          </a:fontRef>
+        </p:style>
+        <p:txBody>
+          <a:bodyPr rtlCol="0" anchor="ctr"/>
+          <a:lstStyle/>
+          <a:p>
+            <a:pPr algn="ctr"/>
+          </a:p>
+        </p:txBody>
+      </p:sp>
+      <p:sp>
+        <p:nvSpPr>
+          <p:cNvPr id="73" name="TextBox 72"/>
+          <p:cNvSpPr txBox="1"/>
+          <p:nvPr/>
+        </p:nvSpPr>
+        <p:spPr>
+          <a:xfrm>
+            <a:off x="7470647" y="5495544"/>
+            <a:ext cx="852678" cy="155448"/>
+          </a:xfrm>
+          <a:prstGeom prst="rect">
+            <a:avLst/>
+          </a:prstGeom>
+          <a:noFill/>
+        </p:spPr>
+        <p:txBody>
+          <a:bodyPr wrap="square" lIns="0" rIns="0" tIns="0" bIns="0">
+            <a:spAutoFit/>
+          </a:bodyPr>
+          <a:lstStyle/>
+          <a:p>
+            <a:pPr algn="ctr"/>
+            <a:r>
+              <a:rPr sz="900" b="1">
+                <a:solidFill>
+                  <a:srgbClr val="FFFFFF"/>
+                </a:solidFill>
+                <a:latin typeface="Aptos"/>
+              </a:rPr>
+              <a:t>0</a:t>
+            </a:r>
+          </a:p>
+        </p:txBody>
+      </p:sp>
+      <p:sp>
+        <p:nvSpPr>
+          <p:cNvPr id="74" name="Rounded Rectangle 73"/>
+          <p:cNvSpPr/>
+          <p:nvPr/>
+        </p:nvSpPr>
+        <p:spPr>
+          <a:xfrm>
+            <a:off x="8405622" y="5422392"/>
+            <a:ext cx="925830" cy="310896"/>
+          </a:xfrm>
+          <a:prstGeom prst="roundRect">
+            <a:avLst/>
+          </a:prstGeom>
+          <a:solidFill>
+            <a:srgbClr val="228B22"/>
+          </a:solidFill>
+          <a:ln w="12700">
+            <a:solidFill>
+              <a:srgbClr val="FFFFFF"/>
+            </a:solidFill>
+          </a:ln>
+        </p:spPr>
+        <p:style>
+          <a:lnRef idx="1">
+            <a:schemeClr val="accent1"/>
+          </a:lnRef>
+          <a:fillRef idx="3">
+            <a:schemeClr val="accent1"/>
+          </a:fillRef>
+          <a:effectRef idx="2">
+            <a:schemeClr val="accent1"/>
+          </a:effectRef>
+          <a:fontRef idx="minor">
+            <a:schemeClr val="lt1"/>
+          </a:fontRef>
+        </p:style>
+        <p:txBody>
+          <a:bodyPr rtlCol="0" anchor="ctr"/>
+          <a:lstStyle/>
+          <a:p>
+            <a:pPr algn="ctr"/>
+          </a:p>
+        </p:txBody>
+      </p:sp>
+      <p:sp>
+        <p:nvSpPr>
+          <p:cNvPr id="75" name="TextBox 74"/>
+          <p:cNvSpPr txBox="1"/>
+          <p:nvPr/>
+        </p:nvSpPr>
+        <p:spPr>
+          <a:xfrm>
+            <a:off x="8442197" y="5495544"/>
+            <a:ext cx="852678" cy="155448"/>
+          </a:xfrm>
+          <a:prstGeom prst="rect">
+            <a:avLst/>
+          </a:prstGeom>
+          <a:noFill/>
+        </p:spPr>
+        <p:txBody>
+          <a:bodyPr wrap="square" lIns="0" rIns="0" tIns="0" bIns="0">
+            <a:spAutoFit/>
+          </a:bodyPr>
+          <a:lstStyle/>
+          <a:p>
+            <a:pPr algn="ctr"/>
+            <a:r>
+              <a:rPr sz="900" b="1">
+                <a:solidFill>
+                  <a:srgbClr val="FFFFFF"/>
+                </a:solidFill>
+                <a:latin typeface="Aptos"/>
+              </a:rPr>
+              <a:t>0</a:t>
+            </a:r>
+          </a:p>
+        </p:txBody>
+      </p:sp>
+      <p:sp>
+        <p:nvSpPr>
+          <p:cNvPr id="76" name="Rounded Rectangle 75"/>
+          <p:cNvSpPr/>
+          <p:nvPr/>
+        </p:nvSpPr>
+        <p:spPr>
+          <a:xfrm>
+            <a:off x="9377172" y="5422392"/>
+            <a:ext cx="925830" cy="310896"/>
+          </a:xfrm>
+          <a:prstGeom prst="roundRect">
+            <a:avLst/>
+          </a:prstGeom>
+          <a:solidFill>
+            <a:srgbClr val="EAB308"/>
+          </a:solidFill>
+          <a:ln w="12700">
+            <a:solidFill>
+              <a:srgbClr val="FFFFFF"/>
+            </a:solidFill>
+          </a:ln>
+        </p:spPr>
+        <p:style>
+          <a:lnRef idx="1">
+            <a:schemeClr val="accent1"/>
+          </a:lnRef>
+          <a:fillRef idx="3">
+            <a:schemeClr val="accent1"/>
+          </a:fillRef>
+          <a:effectRef idx="2">
+            <a:schemeClr val="accent1"/>
+          </a:effectRef>
+          <a:fontRef idx="minor">
+            <a:schemeClr val="lt1"/>
+          </a:fontRef>
+        </p:style>
+        <p:txBody>
+          <a:bodyPr rtlCol="0" anchor="ctr"/>
+          <a:lstStyle/>
+          <a:p>
+            <a:pPr algn="ctr"/>
+          </a:p>
+        </p:txBody>
+      </p:sp>
+      <p:sp>
+        <p:nvSpPr>
+          <p:cNvPr id="77" name="TextBox 76"/>
+          <p:cNvSpPr txBox="1"/>
+          <p:nvPr/>
+        </p:nvSpPr>
+        <p:spPr>
+          <a:xfrm>
+            <a:off x="9413747" y="5495544"/>
+            <a:ext cx="852678" cy="155448"/>
+          </a:xfrm>
+          <a:prstGeom prst="rect">
+            <a:avLst/>
+          </a:prstGeom>
+          <a:noFill/>
+        </p:spPr>
+        <p:txBody>
+          <a:bodyPr wrap="square" lIns="0" rIns="0" tIns="0" bIns="0">
+            <a:spAutoFit/>
+          </a:bodyPr>
+          <a:lstStyle/>
+          <a:p>
+            <a:pPr algn="ctr"/>
+            <a:r>
+              <a:rPr sz="900" b="1">
+                <a:solidFill>
+                  <a:srgbClr val="1E2761"/>
+                </a:solidFill>
+                <a:latin typeface="Aptos"/>
+              </a:rPr>
+              <a:t>402</a:t>
+            </a:r>
+          </a:p>
+        </p:txBody>
+      </p:sp>
+      <p:sp>
+        <p:nvSpPr>
+          <p:cNvPr id="78" name="Rounded Rectangle 77"/>
+          <p:cNvSpPr/>
+          <p:nvPr/>
+        </p:nvSpPr>
+        <p:spPr>
+          <a:xfrm>
+            <a:off x="10348722" y="5422392"/>
+            <a:ext cx="925830" cy="310896"/>
+          </a:xfrm>
+          <a:prstGeom prst="roundRect">
+            <a:avLst/>
+          </a:prstGeom>
+          <a:solidFill>
+            <a:srgbClr val="DC2626"/>
+          </a:solidFill>
+          <a:ln w="12700">
+            <a:solidFill>
+              <a:srgbClr val="FFFFFF"/>
+            </a:solidFill>
+          </a:ln>
+        </p:spPr>
+        <p:style>
+          <a:lnRef idx="1">
+            <a:schemeClr val="accent1"/>
+          </a:lnRef>
+          <a:fillRef idx="3">
+            <a:schemeClr val="accent1"/>
+          </a:fillRef>
+          <a:effectRef idx="2">
+            <a:schemeClr val="accent1"/>
+          </a:effectRef>
+          <a:fontRef idx="minor">
+            <a:schemeClr val="lt1"/>
+          </a:fontRef>
+        </p:style>
+        <p:txBody>
+          <a:bodyPr rtlCol="0" anchor="ctr"/>
+          <a:lstStyle/>
+          <a:p>
+            <a:pPr algn="ctr"/>
+          </a:p>
+        </p:txBody>
+      </p:sp>
+      <p:sp>
+        <p:nvSpPr>
+          <p:cNvPr id="79" name="TextBox 78"/>
+          <p:cNvSpPr txBox="1"/>
+          <p:nvPr/>
+        </p:nvSpPr>
+        <p:spPr>
+          <a:xfrm>
+            <a:off x="10385297" y="5495544"/>
+            <a:ext cx="852678" cy="155448"/>
+          </a:xfrm>
+          <a:prstGeom prst="rect">
+            <a:avLst/>
+          </a:prstGeom>
+          <a:noFill/>
+        </p:spPr>
+        <p:txBody>
+          <a:bodyPr wrap="square" lIns="0" rIns="0" tIns="0" bIns="0">
+            <a:spAutoFit/>
+          </a:bodyPr>
+          <a:lstStyle/>
+          <a:p>
+            <a:pPr algn="ctr"/>
+            <a:r>
+              <a:rPr sz="900" b="1">
+                <a:solidFill>
+                  <a:srgbClr val="FFFFFF"/>
+                </a:solidFill>
+                <a:latin typeface="Aptos"/>
+              </a:rPr>
+              <a:t>0</a:t>
+            </a:r>
+          </a:p>
+        </p:txBody>
+      </p:sp>
+      <p:sp>
+        <p:nvSpPr>
+          <p:cNvPr id="80" name="TextBox 79"/>
+          <p:cNvSpPr txBox="1"/>
+          <p:nvPr/>
+        </p:nvSpPr>
+        <p:spPr>
+          <a:xfrm>
+            <a:off x="548640" y="6327648"/>
+            <a:ext cx="11064240" cy="164592"/>
+          </a:xfrm>
+          <a:prstGeom prst="rect">
+            <a:avLst/>
+          </a:prstGeom>
+          <a:noFill/>
+        </p:spPr>
+        <p:txBody>
+          <a:bodyPr wrap="square" lIns="0" rIns="0" tIns="0" bIns="0">
+            <a:spAutoFit/>
+          </a:bodyPr>
+          <a:lstStyle/>
+          <a:p>
+            <a:r>
+              <a:rPr sz="700" b="0">
+                <a:solidFill>
+                  <a:srgbClr val="64748B"/>
+                </a:solidFill>
+                <a:latin typeface="Aptos"/>
+              </a:rPr>
+              <a:t>Sources: Discovery.xlsx Data sheet for resourceType, parentResourceName, and directSupportStatus; Strategy_PaaS_Preferred.xlsx WebApp_to_AKS for READINESS.</a:t>
+            </a:r>
+          </a:p>
+        </p:txBody>
+      </p:sp>
+    </p:spTree>
+  </p:cSld>
+  <p:clrMapOvr>
+    <a:masterClrMapping/>
+  </p:clrMapOvr>
+</p:sld>
+</file>
+
+<file path=ppt/slides/slide11.xml><?xml version="1.0" encoding="utf-8"?>
 <p:sld xmlns:a="http://schemas.openxmlformats.org/drawingml/2006/main" xmlns:p="http://schemas.openxmlformats.org/presentationml/2006/main" xmlns:r="http://schemas.openxmlformats.org/officeDocument/2006/relationships">
   <p:cSld>
     <p:bg>

--- a/test-out.pptx
+++ b/test-out.pptx
@@ -4028,16 +4028,516 @@
       </p:sp>
       <p:sp>
         <p:nvSpPr>
-          <p:cNvPr id="15" name="Rounded Rectangle 14"/>
+          <p:cNvPr id="15" name="TextBox 14"/>
+          <p:cNvSpPr txBox="1"/>
+          <p:nvPr/>
+        </p:nvSpPr>
+        <p:spPr>
+          <a:xfrm>
+            <a:off x="749808" y="4526280"/>
+            <a:ext cx="777240" cy="164592"/>
+          </a:xfrm>
+          <a:prstGeom prst="rect">
+            <a:avLst/>
+          </a:prstGeom>
+          <a:noFill/>
+        </p:spPr>
+        <p:txBody>
+          <a:bodyPr wrap="square" lIns="0" rIns="0" tIns="0" bIns="0">
+            <a:spAutoFit/>
+          </a:bodyPr>
+          <a:lstStyle/>
+          <a:p>
+            <a:r>
+              <a:rPr sz="900" b="1">
+                <a:solidFill>
+                  <a:srgbClr val="1E2761"/>
+                </a:solidFill>
+                <a:latin typeface="Aptos"/>
+              </a:rPr>
+              <a:t>IIS</a:t>
+            </a:r>
+          </a:p>
+        </p:txBody>
+      </p:sp>
+      <p:sp>
+        <p:nvSpPr>
+          <p:cNvPr id="16" name="Rectangle 15"/>
           <p:cNvSpPr/>
           <p:nvPr/>
         </p:nvSpPr>
         <p:spPr>
           <a:xfrm>
-            <a:off x="1764792" y="4270248"/>
-            <a:ext cx="1249680" cy="310896"/>
-          </a:xfrm>
-          <a:prstGeom prst="roundRect">
+            <a:off x="1828800" y="4535424"/>
+            <a:ext cx="2737682" cy="164592"/>
+          </a:xfrm>
+          <a:prstGeom prst="rect">
+            <a:avLst/>
+          </a:prstGeom>
+          <a:solidFill>
+            <a:srgbClr val="CEE5CE"/>
+          </a:solidFill>
+          <a:ln>
+            <a:noFill/>
+          </a:ln>
+        </p:spPr>
+        <p:style>
+          <a:lnRef idx="1">
+            <a:schemeClr val="accent1"/>
+          </a:lnRef>
+          <a:fillRef idx="3">
+            <a:schemeClr val="accent1"/>
+          </a:fillRef>
+          <a:effectRef idx="2">
+            <a:schemeClr val="accent1"/>
+          </a:effectRef>
+          <a:fontRef idx="minor">
+            <a:schemeClr val="lt1"/>
+          </a:fontRef>
+        </p:style>
+        <p:txBody>
+          <a:bodyPr rtlCol="0" anchor="ctr"/>
+          <a:lstStyle/>
+          <a:p>
+            <a:pPr algn="ctr"/>
+          </a:p>
+        </p:txBody>
+      </p:sp>
+      <p:sp>
+        <p:nvSpPr>
+          <p:cNvPr id="17" name="TextBox 16"/>
+          <p:cNvSpPr txBox="1"/>
+          <p:nvPr/>
+        </p:nvSpPr>
+        <p:spPr>
+          <a:xfrm>
+            <a:off x="1856231" y="4539996"/>
+            <a:ext cx="2682818" cy="128016"/>
+          </a:xfrm>
+          <a:prstGeom prst="rect">
+            <a:avLst/>
+          </a:prstGeom>
+          <a:noFill/>
+        </p:spPr>
+        <p:txBody>
+          <a:bodyPr wrap="square" lIns="0" rIns="0" tIns="0" bIns="0">
+            <a:spAutoFit/>
+          </a:bodyPr>
+          <a:lstStyle/>
+          <a:p>
+            <a:pPr algn="ctr"/>
+            <a:r>
+              <a:rPr sz="700" b="1">
+                <a:solidFill>
+                  <a:srgbClr val="1E2761"/>
+                </a:solidFill>
+                <a:latin typeface="Aptos"/>
+              </a:rPr>
+              <a:t>755</a:t>
+            </a:r>
+          </a:p>
+        </p:txBody>
+      </p:sp>
+      <p:sp>
+        <p:nvSpPr>
+          <p:cNvPr id="18" name="Rectangle 17"/>
+          <p:cNvSpPr/>
+          <p:nvPr/>
+        </p:nvSpPr>
+        <p:spPr>
+          <a:xfrm>
+            <a:off x="4566482" y="4535424"/>
+            <a:ext cx="97903" cy="164592"/>
+          </a:xfrm>
+          <a:prstGeom prst="rect">
+            <a:avLst/>
+          </a:prstGeom>
+          <a:solidFill>
+            <a:srgbClr val="F7CFCF"/>
+          </a:solidFill>
+          <a:ln>
+            <a:noFill/>
+          </a:ln>
+        </p:spPr>
+        <p:style>
+          <a:lnRef idx="1">
+            <a:schemeClr val="accent1"/>
+          </a:lnRef>
+          <a:fillRef idx="3">
+            <a:schemeClr val="accent1"/>
+          </a:fillRef>
+          <a:effectRef idx="2">
+            <a:schemeClr val="accent1"/>
+          </a:effectRef>
+          <a:fontRef idx="minor">
+            <a:schemeClr val="lt1"/>
+          </a:fontRef>
+        </p:style>
+        <p:txBody>
+          <a:bodyPr rtlCol="0" anchor="ctr"/>
+          <a:lstStyle/>
+          <a:p>
+            <a:pPr algn="ctr"/>
+          </a:p>
+        </p:txBody>
+      </p:sp>
+      <p:sp>
+        <p:nvSpPr>
+          <p:cNvPr id="19" name="TextBox 18"/>
+          <p:cNvSpPr txBox="1"/>
+          <p:nvPr/>
+        </p:nvSpPr>
+        <p:spPr>
+          <a:xfrm>
+            <a:off x="4593914" y="4539996"/>
+            <a:ext cx="201168" cy="128016"/>
+          </a:xfrm>
+          <a:prstGeom prst="rect">
+            <a:avLst/>
+          </a:prstGeom>
+          <a:noFill/>
+        </p:spPr>
+        <p:txBody>
+          <a:bodyPr wrap="square" lIns="0" rIns="0" tIns="0" bIns="0">
+            <a:spAutoFit/>
+          </a:bodyPr>
+          <a:lstStyle/>
+          <a:p>
+            <a:pPr algn="ctr"/>
+            <a:r>
+              <a:rPr sz="700" b="1">
+                <a:solidFill>
+                  <a:srgbClr val="1E2761"/>
+                </a:solidFill>
+                <a:latin typeface="Aptos"/>
+              </a:rPr>
+              <a:t>27</a:t>
+            </a:r>
+          </a:p>
+        </p:txBody>
+      </p:sp>
+      <p:sp>
+        <p:nvSpPr>
+          <p:cNvPr id="20" name="Rectangle 19"/>
+          <p:cNvSpPr/>
+          <p:nvPr/>
+        </p:nvSpPr>
+        <p:spPr>
+          <a:xfrm>
+            <a:off x="4664385" y="4535424"/>
+            <a:ext cx="304589" cy="164592"/>
+          </a:xfrm>
+          <a:prstGeom prst="rect">
+            <a:avLst/>
+          </a:prstGeom>
+          <a:solidFill>
+            <a:srgbClr val="E7EAEF"/>
+          </a:solidFill>
+          <a:ln>
+            <a:noFill/>
+          </a:ln>
+        </p:spPr>
+        <p:style>
+          <a:lnRef idx="1">
+            <a:schemeClr val="accent1"/>
+          </a:lnRef>
+          <a:fillRef idx="3">
+            <a:schemeClr val="accent1"/>
+          </a:fillRef>
+          <a:effectRef idx="2">
+            <a:schemeClr val="accent1"/>
+          </a:effectRef>
+          <a:fontRef idx="minor">
+            <a:schemeClr val="lt1"/>
+          </a:fontRef>
+        </p:style>
+        <p:txBody>
+          <a:bodyPr rtlCol="0" anchor="ctr"/>
+          <a:lstStyle/>
+          <a:p>
+            <a:pPr algn="ctr"/>
+          </a:p>
+        </p:txBody>
+      </p:sp>
+      <p:sp>
+        <p:nvSpPr>
+          <p:cNvPr id="21" name="TextBox 20"/>
+          <p:cNvSpPr txBox="1"/>
+          <p:nvPr/>
+        </p:nvSpPr>
+        <p:spPr>
+          <a:xfrm>
+            <a:off x="4691817" y="4539996"/>
+            <a:ext cx="249725" cy="128016"/>
+          </a:xfrm>
+          <a:prstGeom prst="rect">
+            <a:avLst/>
+          </a:prstGeom>
+          <a:noFill/>
+        </p:spPr>
+        <p:txBody>
+          <a:bodyPr wrap="square" lIns="0" rIns="0" tIns="0" bIns="0">
+            <a:spAutoFit/>
+          </a:bodyPr>
+          <a:lstStyle/>
+          <a:p>
+            <a:pPr algn="ctr"/>
+            <a:r>
+              <a:rPr sz="700" b="1">
+                <a:solidFill>
+                  <a:srgbClr val="1E2761"/>
+                </a:solidFill>
+                <a:latin typeface="Aptos"/>
+              </a:rPr>
+              <a:t>84</a:t>
+            </a:r>
+          </a:p>
+        </p:txBody>
+      </p:sp>
+      <p:sp>
+        <p:nvSpPr>
+          <p:cNvPr id="22" name="TextBox 21"/>
+          <p:cNvSpPr txBox="1"/>
+          <p:nvPr/>
+        </p:nvSpPr>
+        <p:spPr>
+          <a:xfrm>
+            <a:off x="749808" y="4910328"/>
+            <a:ext cx="777240" cy="164592"/>
+          </a:xfrm>
+          <a:prstGeom prst="rect">
+            <a:avLst/>
+          </a:prstGeom>
+          <a:noFill/>
+        </p:spPr>
+        <p:txBody>
+          <a:bodyPr wrap="square" lIns="0" rIns="0" tIns="0" bIns="0">
+            <a:spAutoFit/>
+          </a:bodyPr>
+          <a:lstStyle/>
+          <a:p>
+            <a:r>
+              <a:rPr sz="900" b="1">
+                <a:solidFill>
+                  <a:srgbClr val="1E2761"/>
+                </a:solidFill>
+                <a:latin typeface="Aptos"/>
+              </a:rPr>
+              <a:t>Tomcat</a:t>
+            </a:r>
+          </a:p>
+        </p:txBody>
+      </p:sp>
+      <p:sp>
+        <p:nvSpPr>
+          <p:cNvPr id="23" name="Rectangle 22"/>
+          <p:cNvSpPr/>
+          <p:nvPr/>
+        </p:nvSpPr>
+        <p:spPr>
+          <a:xfrm>
+            <a:off x="1828800" y="4919472"/>
+            <a:ext cx="14504" cy="164592"/>
+          </a:xfrm>
+          <a:prstGeom prst="rect">
+            <a:avLst/>
+          </a:prstGeom>
+          <a:solidFill>
+            <a:srgbClr val="CEE5CE"/>
+          </a:solidFill>
+          <a:ln>
+            <a:noFill/>
+          </a:ln>
+        </p:spPr>
+        <p:style>
+          <a:lnRef idx="1">
+            <a:schemeClr val="accent1"/>
+          </a:lnRef>
+          <a:fillRef idx="3">
+            <a:schemeClr val="accent1"/>
+          </a:fillRef>
+          <a:effectRef idx="2">
+            <a:schemeClr val="accent1"/>
+          </a:effectRef>
+          <a:fontRef idx="minor">
+            <a:schemeClr val="lt1"/>
+          </a:fontRef>
+        </p:style>
+        <p:txBody>
+          <a:bodyPr rtlCol="0" anchor="ctr"/>
+          <a:lstStyle/>
+          <a:p>
+            <a:pPr algn="ctr"/>
+          </a:p>
+        </p:txBody>
+      </p:sp>
+      <p:sp>
+        <p:nvSpPr>
+          <p:cNvPr id="24" name="TextBox 23"/>
+          <p:cNvSpPr txBox="1"/>
+          <p:nvPr/>
+        </p:nvSpPr>
+        <p:spPr>
+          <a:xfrm>
+            <a:off x="1856231" y="4924044"/>
+            <a:ext cx="201168" cy="128016"/>
+          </a:xfrm>
+          <a:prstGeom prst="rect">
+            <a:avLst/>
+          </a:prstGeom>
+          <a:noFill/>
+        </p:spPr>
+        <p:txBody>
+          <a:bodyPr wrap="square" lIns="0" rIns="0" tIns="0" bIns="0">
+            <a:spAutoFit/>
+          </a:bodyPr>
+          <a:lstStyle/>
+          <a:p>
+            <a:pPr algn="ctr"/>
+            <a:r>
+              <a:rPr sz="700" b="1">
+                <a:solidFill>
+                  <a:srgbClr val="1E2761"/>
+                </a:solidFill>
+                <a:latin typeface="Aptos"/>
+              </a:rPr>
+              <a:t>4</a:t>
+            </a:r>
+          </a:p>
+        </p:txBody>
+      </p:sp>
+      <p:sp>
+        <p:nvSpPr>
+          <p:cNvPr id="25" name="Rectangle 24"/>
+          <p:cNvSpPr/>
+          <p:nvPr/>
+        </p:nvSpPr>
+        <p:spPr>
+          <a:xfrm>
+            <a:off x="1843304" y="4919472"/>
+            <a:ext cx="9144" cy="164592"/>
+          </a:xfrm>
+          <a:prstGeom prst="rect">
+            <a:avLst/>
+          </a:prstGeom>
+          <a:solidFill>
+            <a:srgbClr val="F7CFCF"/>
+          </a:solidFill>
+          <a:ln>
+            <a:noFill/>
+          </a:ln>
+        </p:spPr>
+        <p:style>
+          <a:lnRef idx="1">
+            <a:schemeClr val="accent1"/>
+          </a:lnRef>
+          <a:fillRef idx="3">
+            <a:schemeClr val="accent1"/>
+          </a:fillRef>
+          <a:effectRef idx="2">
+            <a:schemeClr val="accent1"/>
+          </a:effectRef>
+          <a:fontRef idx="minor">
+            <a:schemeClr val="lt1"/>
+          </a:fontRef>
+        </p:style>
+        <p:txBody>
+          <a:bodyPr rtlCol="0" anchor="ctr"/>
+          <a:lstStyle/>
+          <a:p>
+            <a:pPr algn="ctr"/>
+          </a:p>
+        </p:txBody>
+      </p:sp>
+      <p:sp>
+        <p:nvSpPr>
+          <p:cNvPr id="26" name="Rectangle 25"/>
+          <p:cNvSpPr/>
+          <p:nvPr/>
+        </p:nvSpPr>
+        <p:spPr>
+          <a:xfrm>
+            <a:off x="1852448" y="4919472"/>
+            <a:ext cx="9144" cy="164592"/>
+          </a:xfrm>
+          <a:prstGeom prst="rect">
+            <a:avLst/>
+          </a:prstGeom>
+          <a:solidFill>
+            <a:srgbClr val="E7EAEF"/>
+          </a:solidFill>
+          <a:ln>
+            <a:noFill/>
+          </a:ln>
+        </p:spPr>
+        <p:style>
+          <a:lnRef idx="1">
+            <a:schemeClr val="accent1"/>
+          </a:lnRef>
+          <a:fillRef idx="3">
+            <a:schemeClr val="accent1"/>
+          </a:fillRef>
+          <a:effectRef idx="2">
+            <a:schemeClr val="accent1"/>
+          </a:effectRef>
+          <a:fontRef idx="minor">
+            <a:schemeClr val="lt1"/>
+          </a:fontRef>
+        </p:style>
+        <p:txBody>
+          <a:bodyPr rtlCol="0" anchor="ctr"/>
+          <a:lstStyle/>
+          <a:p>
+            <a:pPr algn="ctr"/>
+          </a:p>
+        </p:txBody>
+      </p:sp>
+      <p:sp>
+        <p:nvSpPr>
+          <p:cNvPr id="27" name="TextBox 26"/>
+          <p:cNvSpPr txBox="1"/>
+          <p:nvPr/>
+        </p:nvSpPr>
+        <p:spPr>
+          <a:xfrm>
+            <a:off x="749808" y="5294376"/>
+            <a:ext cx="777240" cy="164592"/>
+          </a:xfrm>
+          <a:prstGeom prst="rect">
+            <a:avLst/>
+          </a:prstGeom>
+          <a:noFill/>
+        </p:spPr>
+        <p:txBody>
+          <a:bodyPr wrap="square" lIns="0" rIns="0" tIns="0" bIns="0">
+            <a:spAutoFit/>
+          </a:bodyPr>
+          <a:lstStyle/>
+          <a:p>
+            <a:r>
+              <a:rPr sz="900" b="1">
+                <a:solidFill>
+                  <a:srgbClr val="1E2761"/>
+                </a:solidFill>
+                <a:latin typeface="Aptos"/>
+              </a:rPr>
+              <a:t>Total</a:t>
+            </a:r>
+          </a:p>
+        </p:txBody>
+      </p:sp>
+      <p:sp>
+        <p:nvSpPr>
+          <p:cNvPr id="28" name="Rectangle 27"/>
+          <p:cNvSpPr/>
+          <p:nvPr/>
+        </p:nvSpPr>
+        <p:spPr>
+          <a:xfrm>
+            <a:off x="1828800" y="5303520"/>
+            <a:ext cx="2752186" cy="164592"/>
+          </a:xfrm>
+          <a:prstGeom prst="rect">
             <a:avLst/>
           </a:prstGeom>
           <a:solidFill>
@@ -4071,14 +4571,14 @@
       </p:sp>
       <p:sp>
         <p:nvSpPr>
-          <p:cNvPr id="16" name="TextBox 15"/>
-          <p:cNvSpPr txBox="1"/>
-          <p:nvPr/>
-        </p:nvSpPr>
-        <p:spPr>
-          <a:xfrm>
-            <a:off x="1801368" y="4343400"/>
-            <a:ext cx="1176528" cy="155448"/>
+          <p:cNvPr id="29" name="TextBox 28"/>
+          <p:cNvSpPr txBox="1"/>
+          <p:nvPr/>
+        </p:nvSpPr>
+        <p:spPr>
+          <a:xfrm>
+            <a:off x="1856231" y="5308092"/>
+            <a:ext cx="2697322" cy="128016"/>
           </a:xfrm>
           <a:prstGeom prst="rect">
             <a:avLst/>
@@ -4099,23 +4599,23 @@
                 </a:solidFill>
                 <a:latin typeface="Aptos"/>
               </a:rPr>
-              <a:t>Mainstream</a:t>
-            </a:r>
-          </a:p>
-        </p:txBody>
-      </p:sp>
-      <p:sp>
-        <p:nvSpPr>
-          <p:cNvPr id="17" name="Rounded Rectangle 16"/>
+              <a:t>759</a:t>
+            </a:r>
+          </a:p>
+        </p:txBody>
+      </p:sp>
+      <p:sp>
+        <p:nvSpPr>
+          <p:cNvPr id="30" name="Rectangle 29"/>
           <p:cNvSpPr/>
           <p:nvPr/>
         </p:nvSpPr>
         <p:spPr>
           <a:xfrm>
-            <a:off x="3060192" y="4270248"/>
-            <a:ext cx="1249680" cy="310896"/>
-          </a:xfrm>
-          <a:prstGeom prst="roundRect">
+            <a:off x="4580986" y="5303520"/>
+            <a:ext cx="97903" cy="164592"/>
+          </a:xfrm>
+          <a:prstGeom prst="rect">
             <a:avLst/>
           </a:prstGeom>
           <a:solidFill>
@@ -4149,14 +4649,14 @@
       </p:sp>
       <p:sp>
         <p:nvSpPr>
-          <p:cNvPr id="18" name="TextBox 17"/>
-          <p:cNvSpPr txBox="1"/>
-          <p:nvPr/>
-        </p:nvSpPr>
-        <p:spPr>
-          <a:xfrm>
-            <a:off x="3096768" y="4343400"/>
-            <a:ext cx="1176528" cy="155448"/>
+          <p:cNvPr id="31" name="TextBox 30"/>
+          <p:cNvSpPr txBox="1"/>
+          <p:nvPr/>
+        </p:nvSpPr>
+        <p:spPr>
+          <a:xfrm>
+            <a:off x="4608418" y="5308092"/>
+            <a:ext cx="201168" cy="128016"/>
           </a:xfrm>
           <a:prstGeom prst="rect">
             <a:avLst/>
@@ -4177,23 +4677,23 @@
                 </a:solidFill>
                 <a:latin typeface="Aptos"/>
               </a:rPr>
-              <a:t>Out of support</a:t>
-            </a:r>
-          </a:p>
-        </p:txBody>
-      </p:sp>
-      <p:sp>
-        <p:nvSpPr>
-          <p:cNvPr id="19" name="Rounded Rectangle 18"/>
+              <a:t>27</a:t>
+            </a:r>
+          </a:p>
+        </p:txBody>
+      </p:sp>
+      <p:sp>
+        <p:nvSpPr>
+          <p:cNvPr id="32" name="Rectangle 31"/>
           <p:cNvSpPr/>
           <p:nvPr/>
         </p:nvSpPr>
         <p:spPr>
           <a:xfrm>
-            <a:off x="4355592" y="4270248"/>
-            <a:ext cx="1249680" cy="310896"/>
-          </a:xfrm>
-          <a:prstGeom prst="roundRect">
+            <a:off x="4678890" y="5303520"/>
+            <a:ext cx="304589" cy="164592"/>
+          </a:xfrm>
+          <a:prstGeom prst="rect">
             <a:avLst/>
           </a:prstGeom>
           <a:solidFill>
@@ -4227,14 +4727,14 @@
       </p:sp>
       <p:sp>
         <p:nvSpPr>
-          <p:cNvPr id="20" name="TextBox 19"/>
-          <p:cNvSpPr txBox="1"/>
-          <p:nvPr/>
-        </p:nvSpPr>
-        <p:spPr>
-          <a:xfrm>
-            <a:off x="4392168" y="4343400"/>
-            <a:ext cx="1176528" cy="155448"/>
+          <p:cNvPr id="33" name="TextBox 32"/>
+          <p:cNvSpPr txBox="1"/>
+          <p:nvPr/>
+        </p:nvSpPr>
+        <p:spPr>
+          <a:xfrm>
+            <a:off x="4706322" y="5308092"/>
+            <a:ext cx="249725" cy="128016"/>
           </a:xfrm>
           <a:prstGeom prst="rect">
             <a:avLst/>
@@ -4255,6 +4755,237 @@
                 </a:solidFill>
                 <a:latin typeface="Aptos"/>
               </a:rPr>
+              <a:t>84</a:t>
+            </a:r>
+          </a:p>
+        </p:txBody>
+      </p:sp>
+      <p:sp>
+        <p:nvSpPr>
+          <p:cNvPr id="34" name="Rectangle 33"/>
+          <p:cNvSpPr/>
+          <p:nvPr/>
+        </p:nvSpPr>
+        <p:spPr>
+          <a:xfrm>
+            <a:off x="777240" y="4114800"/>
+            <a:ext cx="109728" cy="91440"/>
+          </a:xfrm>
+          <a:prstGeom prst="rect">
+            <a:avLst/>
+          </a:prstGeom>
+          <a:solidFill>
+            <a:srgbClr val="228B22"/>
+          </a:solidFill>
+          <a:ln>
+            <a:noFill/>
+          </a:ln>
+        </p:spPr>
+        <p:style>
+          <a:lnRef idx="1">
+            <a:schemeClr val="accent1"/>
+          </a:lnRef>
+          <a:fillRef idx="3">
+            <a:schemeClr val="accent1"/>
+          </a:fillRef>
+          <a:effectRef idx="2">
+            <a:schemeClr val="accent1"/>
+          </a:effectRef>
+          <a:fontRef idx="minor">
+            <a:schemeClr val="lt1"/>
+          </a:fontRef>
+        </p:style>
+        <p:txBody>
+          <a:bodyPr rtlCol="0" anchor="ctr"/>
+          <a:lstStyle/>
+          <a:p>
+            <a:pPr algn="ctr"/>
+          </a:p>
+        </p:txBody>
+      </p:sp>
+      <p:sp>
+        <p:nvSpPr>
+          <p:cNvPr id="35" name="TextBox 34"/>
+          <p:cNvSpPr txBox="1"/>
+          <p:nvPr/>
+        </p:nvSpPr>
+        <p:spPr>
+          <a:xfrm>
+            <a:off x="932688" y="4078224"/>
+            <a:ext cx="914400" cy="146304"/>
+          </a:xfrm>
+          <a:prstGeom prst="rect">
+            <a:avLst/>
+          </a:prstGeom>
+          <a:noFill/>
+        </p:spPr>
+        <p:txBody>
+          <a:bodyPr wrap="square" lIns="0" rIns="0" tIns="0" bIns="0">
+            <a:spAutoFit/>
+          </a:bodyPr>
+          <a:lstStyle/>
+          <a:p>
+            <a:r>
+              <a:rPr sz="700" b="1">
+                <a:solidFill>
+                  <a:srgbClr val="36454F"/>
+                </a:solidFill>
+                <a:latin typeface="Aptos"/>
+              </a:rPr>
+              <a:t>Mainstream</a:t>
+            </a:r>
+          </a:p>
+        </p:txBody>
+      </p:sp>
+      <p:sp>
+        <p:nvSpPr>
+          <p:cNvPr id="36" name="Rectangle 35"/>
+          <p:cNvSpPr/>
+          <p:nvPr/>
+        </p:nvSpPr>
+        <p:spPr>
+          <a:xfrm>
+            <a:off x="1920240" y="4114800"/>
+            <a:ext cx="109728" cy="91440"/>
+          </a:xfrm>
+          <a:prstGeom prst="rect">
+            <a:avLst/>
+          </a:prstGeom>
+          <a:solidFill>
+            <a:srgbClr val="DC2626"/>
+          </a:solidFill>
+          <a:ln>
+            <a:noFill/>
+          </a:ln>
+        </p:spPr>
+        <p:style>
+          <a:lnRef idx="1">
+            <a:schemeClr val="accent1"/>
+          </a:lnRef>
+          <a:fillRef idx="3">
+            <a:schemeClr val="accent1"/>
+          </a:fillRef>
+          <a:effectRef idx="2">
+            <a:schemeClr val="accent1"/>
+          </a:effectRef>
+          <a:fontRef idx="minor">
+            <a:schemeClr val="lt1"/>
+          </a:fontRef>
+        </p:style>
+        <p:txBody>
+          <a:bodyPr rtlCol="0" anchor="ctr"/>
+          <a:lstStyle/>
+          <a:p>
+            <a:pPr algn="ctr"/>
+          </a:p>
+        </p:txBody>
+      </p:sp>
+      <p:sp>
+        <p:nvSpPr>
+          <p:cNvPr id="37" name="TextBox 36"/>
+          <p:cNvSpPr txBox="1"/>
+          <p:nvPr/>
+        </p:nvSpPr>
+        <p:spPr>
+          <a:xfrm>
+            <a:off x="2075688" y="4078224"/>
+            <a:ext cx="914400" cy="146304"/>
+          </a:xfrm>
+          <a:prstGeom prst="rect">
+            <a:avLst/>
+          </a:prstGeom>
+          <a:noFill/>
+        </p:spPr>
+        <p:txBody>
+          <a:bodyPr wrap="square" lIns="0" rIns="0" tIns="0" bIns="0">
+            <a:spAutoFit/>
+          </a:bodyPr>
+          <a:lstStyle/>
+          <a:p>
+            <a:r>
+              <a:rPr sz="700" b="1">
+                <a:solidFill>
+                  <a:srgbClr val="36454F"/>
+                </a:solidFill>
+                <a:latin typeface="Aptos"/>
+              </a:rPr>
+              <a:t>Out of support</a:t>
+            </a:r>
+          </a:p>
+        </p:txBody>
+      </p:sp>
+      <p:sp>
+        <p:nvSpPr>
+          <p:cNvPr id="38" name="Rectangle 37"/>
+          <p:cNvSpPr/>
+          <p:nvPr/>
+        </p:nvSpPr>
+        <p:spPr>
+          <a:xfrm>
+            <a:off x="3063240" y="4114800"/>
+            <a:ext cx="109728" cy="91440"/>
+          </a:xfrm>
+          <a:prstGeom prst="rect">
+            <a:avLst/>
+          </a:prstGeom>
+          <a:solidFill>
+            <a:srgbClr val="94A3B8"/>
+          </a:solidFill>
+          <a:ln>
+            <a:noFill/>
+          </a:ln>
+        </p:spPr>
+        <p:style>
+          <a:lnRef idx="1">
+            <a:schemeClr val="accent1"/>
+          </a:lnRef>
+          <a:fillRef idx="3">
+            <a:schemeClr val="accent1"/>
+          </a:fillRef>
+          <a:effectRef idx="2">
+            <a:schemeClr val="accent1"/>
+          </a:effectRef>
+          <a:fontRef idx="minor">
+            <a:schemeClr val="lt1"/>
+          </a:fontRef>
+        </p:style>
+        <p:txBody>
+          <a:bodyPr rtlCol="0" anchor="ctr"/>
+          <a:lstStyle/>
+          <a:p>
+            <a:pPr algn="ctr"/>
+          </a:p>
+        </p:txBody>
+      </p:sp>
+      <p:sp>
+        <p:nvSpPr>
+          <p:cNvPr id="39" name="TextBox 38"/>
+          <p:cNvSpPr txBox="1"/>
+          <p:nvPr/>
+        </p:nvSpPr>
+        <p:spPr>
+          <a:xfrm>
+            <a:off x="3218688" y="4078224"/>
+            <a:ext cx="914400" cy="146304"/>
+          </a:xfrm>
+          <a:prstGeom prst="rect">
+            <a:avLst/>
+          </a:prstGeom>
+          <a:noFill/>
+        </p:spPr>
+        <p:txBody>
+          <a:bodyPr wrap="square" lIns="0" rIns="0" tIns="0" bIns="0">
+            <a:spAutoFit/>
+          </a:bodyPr>
+          <a:lstStyle/>
+          <a:p>
+            <a:r>
+              <a:rPr sz="700" b="1">
+                <a:solidFill>
+                  <a:srgbClr val="36454F"/>
+                </a:solidFill>
+                <a:latin typeface="Aptos"/>
+              </a:rPr>
               <a:t>Unknown</a:t>
             </a:r>
           </a:p>
@@ -4262,13 +4993,447 @@
       </p:sp>
       <p:sp>
         <p:nvSpPr>
-          <p:cNvPr id="21" name="TextBox 20"/>
-          <p:cNvSpPr txBox="1"/>
-          <p:nvPr/>
-        </p:nvSpPr>
-        <p:spPr>
-          <a:xfrm>
-            <a:off x="704088" y="4727448"/>
+          <p:cNvPr id="40" name="Rounded Rectangle 39"/>
+          <p:cNvSpPr/>
+          <p:nvPr/>
+        </p:nvSpPr>
+        <p:spPr>
+          <a:xfrm>
+            <a:off x="6172200" y="3675887"/>
+            <a:ext cx="5440680" cy="2304288"/>
+          </a:xfrm>
+          <a:prstGeom prst="roundRect">
+            <a:avLst/>
+          </a:prstGeom>
+          <a:solidFill>
+            <a:srgbClr val="FFFFFF"/>
+          </a:solidFill>
+          <a:ln w="12700">
+            <a:solidFill>
+              <a:srgbClr val="DAE2EE"/>
+            </a:solidFill>
+          </a:ln>
+        </p:spPr>
+        <p:style>
+          <a:lnRef idx="1">
+            <a:schemeClr val="accent1"/>
+          </a:lnRef>
+          <a:fillRef idx="3">
+            <a:schemeClr val="accent1"/>
+          </a:fillRef>
+          <a:effectRef idx="2">
+            <a:schemeClr val="accent1"/>
+          </a:effectRef>
+          <a:fontRef idx="minor">
+            <a:schemeClr val="lt1"/>
+          </a:fontRef>
+        </p:style>
+        <p:txBody>
+          <a:bodyPr rtlCol="0" anchor="ctr"/>
+          <a:lstStyle/>
+          <a:p>
+            <a:pPr algn="ctr"/>
+          </a:p>
+        </p:txBody>
+      </p:sp>
+      <p:sp>
+        <p:nvSpPr>
+          <p:cNvPr id="41" name="Rectangle 40"/>
+          <p:cNvSpPr/>
+          <p:nvPr/>
+        </p:nvSpPr>
+        <p:spPr>
+          <a:xfrm>
+            <a:off x="6172200" y="3675887"/>
+            <a:ext cx="5440680" cy="73152"/>
+          </a:xfrm>
+          <a:prstGeom prst="rect">
+            <a:avLst/>
+          </a:prstGeom>
+          <a:solidFill>
+            <a:srgbClr val="028090"/>
+          </a:solidFill>
+          <a:ln>
+            <a:noFill/>
+          </a:ln>
+        </p:spPr>
+        <p:style>
+          <a:lnRef idx="1">
+            <a:schemeClr val="accent1"/>
+          </a:lnRef>
+          <a:fillRef idx="3">
+            <a:schemeClr val="accent1"/>
+          </a:fillRef>
+          <a:effectRef idx="2">
+            <a:schemeClr val="accent1"/>
+          </a:effectRef>
+          <a:fontRef idx="minor">
+            <a:schemeClr val="lt1"/>
+          </a:fontRef>
+        </p:style>
+        <p:txBody>
+          <a:bodyPr rtlCol="0" anchor="ctr"/>
+          <a:lstStyle/>
+          <a:p>
+            <a:pPr algn="ctr"/>
+          </a:p>
+        </p:txBody>
+      </p:sp>
+      <p:sp>
+        <p:nvSpPr>
+          <p:cNvPr id="42" name="TextBox 41"/>
+          <p:cNvSpPr txBox="1"/>
+          <p:nvPr/>
+        </p:nvSpPr>
+        <p:spPr>
+          <a:xfrm>
+            <a:off x="6309360" y="3803903"/>
+            <a:ext cx="5166360" cy="274320"/>
+          </a:xfrm>
+          <a:prstGeom prst="rect">
+            <a:avLst/>
+          </a:prstGeom>
+          <a:noFill/>
+        </p:spPr>
+        <p:txBody>
+          <a:bodyPr wrap="square" lIns="0" rIns="0" tIns="0" bIns="0">
+            <a:spAutoFit/>
+          </a:bodyPr>
+          <a:lstStyle/>
+          <a:p>
+            <a:r>
+              <a:rPr sz="1300" b="1">
+                <a:solidFill>
+                  <a:srgbClr val="1E2761"/>
+                </a:solidFill>
+                <a:latin typeface="Aptos"/>
+              </a:rPr>
+              <a:t>AKS readiness by type</a:t>
+            </a:r>
+          </a:p>
+        </p:txBody>
+      </p:sp>
+      <p:sp>
+        <p:nvSpPr>
+          <p:cNvPr id="43" name="Rounded Rectangle 42"/>
+          <p:cNvSpPr/>
+          <p:nvPr/>
+        </p:nvSpPr>
+        <p:spPr>
+          <a:xfrm>
+            <a:off x="7434071" y="4270248"/>
+            <a:ext cx="925830" cy="310896"/>
+          </a:xfrm>
+          <a:prstGeom prst="roundRect">
+            <a:avLst/>
+          </a:prstGeom>
+          <a:solidFill>
+            <a:srgbClr val="94A3B8"/>
+          </a:solidFill>
+          <a:ln>
+            <a:noFill/>
+          </a:ln>
+        </p:spPr>
+        <p:style>
+          <a:lnRef idx="1">
+            <a:schemeClr val="accent1"/>
+          </a:lnRef>
+          <a:fillRef idx="3">
+            <a:schemeClr val="accent1"/>
+          </a:fillRef>
+          <a:effectRef idx="2">
+            <a:schemeClr val="accent1"/>
+          </a:effectRef>
+          <a:fontRef idx="minor">
+            <a:schemeClr val="lt1"/>
+          </a:fontRef>
+        </p:style>
+        <p:txBody>
+          <a:bodyPr rtlCol="0" anchor="ctr"/>
+          <a:lstStyle/>
+          <a:p>
+            <a:pPr algn="ctr"/>
+          </a:p>
+        </p:txBody>
+      </p:sp>
+      <p:sp>
+        <p:nvSpPr>
+          <p:cNvPr id="44" name="TextBox 43"/>
+          <p:cNvSpPr txBox="1"/>
+          <p:nvPr/>
+        </p:nvSpPr>
+        <p:spPr>
+          <a:xfrm>
+            <a:off x="7470647" y="4343400"/>
+            <a:ext cx="852678" cy="155448"/>
+          </a:xfrm>
+          <a:prstGeom prst="rect">
+            <a:avLst/>
+          </a:prstGeom>
+          <a:noFill/>
+        </p:spPr>
+        <p:txBody>
+          <a:bodyPr wrap="square" lIns="0" rIns="0" tIns="0" bIns="0">
+            <a:spAutoFit/>
+          </a:bodyPr>
+          <a:lstStyle/>
+          <a:p>
+            <a:pPr algn="ctr"/>
+            <a:r>
+              <a:rPr sz="700" b="1">
+                <a:solidFill>
+                  <a:srgbClr val="FFFFFF"/>
+                </a:solidFill>
+                <a:latin typeface="Aptos"/>
+              </a:rPr>
+              <a:t>Unknown</a:t>
+            </a:r>
+          </a:p>
+        </p:txBody>
+      </p:sp>
+      <p:sp>
+        <p:nvSpPr>
+          <p:cNvPr id="45" name="Rounded Rectangle 44"/>
+          <p:cNvSpPr/>
+          <p:nvPr/>
+        </p:nvSpPr>
+        <p:spPr>
+          <a:xfrm>
+            <a:off x="8405622" y="4270248"/>
+            <a:ext cx="925830" cy="310896"/>
+          </a:xfrm>
+          <a:prstGeom prst="roundRect">
+            <a:avLst/>
+          </a:prstGeom>
+          <a:solidFill>
+            <a:srgbClr val="228B22"/>
+          </a:solidFill>
+          <a:ln>
+            <a:noFill/>
+          </a:ln>
+        </p:spPr>
+        <p:style>
+          <a:lnRef idx="1">
+            <a:schemeClr val="accent1"/>
+          </a:lnRef>
+          <a:fillRef idx="3">
+            <a:schemeClr val="accent1"/>
+          </a:fillRef>
+          <a:effectRef idx="2">
+            <a:schemeClr val="accent1"/>
+          </a:effectRef>
+          <a:fontRef idx="minor">
+            <a:schemeClr val="lt1"/>
+          </a:fontRef>
+        </p:style>
+        <p:txBody>
+          <a:bodyPr rtlCol="0" anchor="ctr"/>
+          <a:lstStyle/>
+          <a:p>
+            <a:pPr algn="ctr"/>
+          </a:p>
+        </p:txBody>
+      </p:sp>
+      <p:sp>
+        <p:nvSpPr>
+          <p:cNvPr id="46" name="TextBox 45"/>
+          <p:cNvSpPr txBox="1"/>
+          <p:nvPr/>
+        </p:nvSpPr>
+        <p:spPr>
+          <a:xfrm>
+            <a:off x="8442197" y="4343400"/>
+            <a:ext cx="852678" cy="155448"/>
+          </a:xfrm>
+          <a:prstGeom prst="rect">
+            <a:avLst/>
+          </a:prstGeom>
+          <a:noFill/>
+        </p:spPr>
+        <p:txBody>
+          <a:bodyPr wrap="square" lIns="0" rIns="0" tIns="0" bIns="0">
+            <a:spAutoFit/>
+          </a:bodyPr>
+          <a:lstStyle/>
+          <a:p>
+            <a:pPr algn="ctr"/>
+            <a:r>
+              <a:rPr sz="700" b="1">
+                <a:solidFill>
+                  <a:srgbClr val="FFFFFF"/>
+                </a:solidFill>
+                <a:latin typeface="Aptos"/>
+              </a:rPr>
+              <a:t>Ready</a:t>
+            </a:r>
+          </a:p>
+        </p:txBody>
+      </p:sp>
+      <p:sp>
+        <p:nvSpPr>
+          <p:cNvPr id="47" name="Rounded Rectangle 46"/>
+          <p:cNvSpPr/>
+          <p:nvPr/>
+        </p:nvSpPr>
+        <p:spPr>
+          <a:xfrm>
+            <a:off x="9377172" y="4270248"/>
+            <a:ext cx="925830" cy="310896"/>
+          </a:xfrm>
+          <a:prstGeom prst="roundRect">
+            <a:avLst/>
+          </a:prstGeom>
+          <a:solidFill>
+            <a:srgbClr val="EAB308"/>
+          </a:solidFill>
+          <a:ln>
+            <a:noFill/>
+          </a:ln>
+        </p:spPr>
+        <p:style>
+          <a:lnRef idx="1">
+            <a:schemeClr val="accent1"/>
+          </a:lnRef>
+          <a:fillRef idx="3">
+            <a:schemeClr val="accent1"/>
+          </a:fillRef>
+          <a:effectRef idx="2">
+            <a:schemeClr val="accent1"/>
+          </a:effectRef>
+          <a:fontRef idx="minor">
+            <a:schemeClr val="lt1"/>
+          </a:fontRef>
+        </p:style>
+        <p:txBody>
+          <a:bodyPr rtlCol="0" anchor="ctr"/>
+          <a:lstStyle/>
+          <a:p>
+            <a:pPr algn="ctr"/>
+          </a:p>
+        </p:txBody>
+      </p:sp>
+      <p:sp>
+        <p:nvSpPr>
+          <p:cNvPr id="48" name="TextBox 47"/>
+          <p:cNvSpPr txBox="1"/>
+          <p:nvPr/>
+        </p:nvSpPr>
+        <p:spPr>
+          <a:xfrm>
+            <a:off x="9413747" y="4343400"/>
+            <a:ext cx="852678" cy="155448"/>
+          </a:xfrm>
+          <a:prstGeom prst="rect">
+            <a:avLst/>
+          </a:prstGeom>
+          <a:noFill/>
+        </p:spPr>
+        <p:txBody>
+          <a:bodyPr wrap="square" lIns="0" rIns="0" tIns="0" bIns="0">
+            <a:spAutoFit/>
+          </a:bodyPr>
+          <a:lstStyle/>
+          <a:p>
+            <a:pPr algn="ctr"/>
+            <a:r>
+              <a:rPr sz="700" b="1">
+                <a:solidFill>
+                  <a:srgbClr val="1E2761"/>
+                </a:solidFill>
+                <a:latin typeface="Aptos"/>
+              </a:rPr>
+              <a:t>Ready w/ conditions</a:t>
+            </a:r>
+          </a:p>
+        </p:txBody>
+      </p:sp>
+      <p:sp>
+        <p:nvSpPr>
+          <p:cNvPr id="49" name="Rounded Rectangle 48"/>
+          <p:cNvSpPr/>
+          <p:nvPr/>
+        </p:nvSpPr>
+        <p:spPr>
+          <a:xfrm>
+            <a:off x="10348722" y="4270248"/>
+            <a:ext cx="925830" cy="310896"/>
+          </a:xfrm>
+          <a:prstGeom prst="roundRect">
+            <a:avLst/>
+          </a:prstGeom>
+          <a:solidFill>
+            <a:srgbClr val="DC2626"/>
+          </a:solidFill>
+          <a:ln>
+            <a:noFill/>
+          </a:ln>
+        </p:spPr>
+        <p:style>
+          <a:lnRef idx="1">
+            <a:schemeClr val="accent1"/>
+          </a:lnRef>
+          <a:fillRef idx="3">
+            <a:schemeClr val="accent1"/>
+          </a:fillRef>
+          <a:effectRef idx="2">
+            <a:schemeClr val="accent1"/>
+          </a:effectRef>
+          <a:fontRef idx="minor">
+            <a:schemeClr val="lt1"/>
+          </a:fontRef>
+        </p:style>
+        <p:txBody>
+          <a:bodyPr rtlCol="0" anchor="ctr"/>
+          <a:lstStyle/>
+          <a:p>
+            <a:pPr algn="ctr"/>
+          </a:p>
+        </p:txBody>
+      </p:sp>
+      <p:sp>
+        <p:nvSpPr>
+          <p:cNvPr id="50" name="TextBox 49"/>
+          <p:cNvSpPr txBox="1"/>
+          <p:nvPr/>
+        </p:nvSpPr>
+        <p:spPr>
+          <a:xfrm>
+            <a:off x="10385297" y="4343400"/>
+            <a:ext cx="852678" cy="155448"/>
+          </a:xfrm>
+          <a:prstGeom prst="rect">
+            <a:avLst/>
+          </a:prstGeom>
+          <a:noFill/>
+        </p:spPr>
+        <p:txBody>
+          <a:bodyPr wrap="square" lIns="0" rIns="0" tIns="0" bIns="0">
+            <a:spAutoFit/>
+          </a:bodyPr>
+          <a:lstStyle/>
+          <a:p>
+            <a:pPr algn="ctr"/>
+            <a:r>
+              <a:rPr sz="700" b="1">
+                <a:solidFill>
+                  <a:srgbClr val="FFFFFF"/>
+                </a:solidFill>
+                <a:latin typeface="Aptos"/>
+              </a:rPr>
+              <a:t>Not Ready</a:t>
+            </a:r>
+          </a:p>
+        </p:txBody>
+      </p:sp>
+      <p:sp>
+        <p:nvSpPr>
+          <p:cNvPr id="51" name="TextBox 50"/>
+          <p:cNvSpPr txBox="1"/>
+          <p:nvPr/>
+        </p:nvSpPr>
+        <p:spPr>
+          <a:xfrm>
+            <a:off x="6373368" y="4727448"/>
             <a:ext cx="868680" cy="155448"/>
           </a:xfrm>
           <a:prstGeom prst="rect">
@@ -4296,14 +5461,94 @@
       </p:sp>
       <p:sp>
         <p:nvSpPr>
-          <p:cNvPr id="22" name="Rounded Rectangle 21"/>
+          <p:cNvPr id="52" name="Rounded Rectangle 51"/>
           <p:cNvSpPr/>
           <p:nvPr/>
         </p:nvSpPr>
         <p:spPr>
           <a:xfrm>
-            <a:off x="1764792" y="4654296"/>
-            <a:ext cx="1249680" cy="310896"/>
+            <a:off x="7434071" y="4654296"/>
+            <a:ext cx="925830" cy="310896"/>
+          </a:xfrm>
+          <a:prstGeom prst="roundRect">
+            <a:avLst/>
+          </a:prstGeom>
+          <a:solidFill>
+            <a:srgbClr val="E7EAEF"/>
+          </a:solidFill>
+          <a:ln w="12700">
+            <a:solidFill>
+              <a:srgbClr val="FFFFFF"/>
+            </a:solidFill>
+          </a:ln>
+        </p:spPr>
+        <p:style>
+          <a:lnRef idx="1">
+            <a:schemeClr val="accent1"/>
+          </a:lnRef>
+          <a:fillRef idx="3">
+            <a:schemeClr val="accent1"/>
+          </a:fillRef>
+          <a:effectRef idx="2">
+            <a:schemeClr val="accent1"/>
+          </a:effectRef>
+          <a:fontRef idx="minor">
+            <a:schemeClr val="lt1"/>
+          </a:fontRef>
+        </p:style>
+        <p:txBody>
+          <a:bodyPr rtlCol="0" anchor="ctr"/>
+          <a:lstStyle/>
+          <a:p>
+            <a:pPr algn="ctr"/>
+          </a:p>
+        </p:txBody>
+      </p:sp>
+      <p:sp>
+        <p:nvSpPr>
+          <p:cNvPr id="53" name="TextBox 52"/>
+          <p:cNvSpPr txBox="1"/>
+          <p:nvPr/>
+        </p:nvSpPr>
+        <p:spPr>
+          <a:xfrm>
+            <a:off x="7470647" y="4727448"/>
+            <a:ext cx="852678" cy="155448"/>
+          </a:xfrm>
+          <a:prstGeom prst="rect">
+            <a:avLst/>
+          </a:prstGeom>
+          <a:noFill/>
+        </p:spPr>
+        <p:txBody>
+          <a:bodyPr wrap="square" lIns="0" rIns="0" tIns="0" bIns="0">
+            <a:spAutoFit/>
+          </a:bodyPr>
+          <a:lstStyle/>
+          <a:p>
+            <a:pPr algn="ctr"/>
+            <a:r>
+              <a:rPr sz="900" b="1">
+                <a:solidFill>
+                  <a:srgbClr val="1E2761"/>
+                </a:solidFill>
+                <a:latin typeface="Aptos"/>
+              </a:rPr>
+              <a:t>0</a:t>
+            </a:r>
+          </a:p>
+        </p:txBody>
+      </p:sp>
+      <p:sp>
+        <p:nvSpPr>
+          <p:cNvPr id="54" name="Rounded Rectangle 53"/>
+          <p:cNvSpPr/>
+          <p:nvPr/>
+        </p:nvSpPr>
+        <p:spPr>
+          <a:xfrm>
+            <a:off x="8405622" y="4654296"/>
+            <a:ext cx="925830" cy="310896"/>
           </a:xfrm>
           <a:prstGeom prst="roundRect">
             <a:avLst/>
@@ -4341,14 +5586,14 @@
       </p:sp>
       <p:sp>
         <p:nvSpPr>
-          <p:cNvPr id="23" name="TextBox 22"/>
-          <p:cNvSpPr txBox="1"/>
-          <p:nvPr/>
-        </p:nvSpPr>
-        <p:spPr>
-          <a:xfrm>
-            <a:off x="1801368" y="4727448"/>
-            <a:ext cx="1176528" cy="155448"/>
+          <p:cNvPr id="55" name="TextBox 54"/>
+          <p:cNvSpPr txBox="1"/>
+          <p:nvPr/>
+        </p:nvSpPr>
+        <p:spPr>
+          <a:xfrm>
+            <a:off x="8442197" y="4727448"/>
+            <a:ext cx="852678" cy="155448"/>
           </a:xfrm>
           <a:prstGeom prst="rect">
             <a:avLst/>
@@ -4369,21 +5614,101 @@
                 </a:solidFill>
                 <a:latin typeface="Aptos"/>
               </a:rPr>
-              <a:t>755</a:t>
-            </a:r>
-          </a:p>
-        </p:txBody>
-      </p:sp>
-      <p:sp>
-        <p:nvSpPr>
-          <p:cNvPr id="24" name="Rounded Rectangle 23"/>
+              <a:t>0</a:t>
+            </a:r>
+          </a:p>
+        </p:txBody>
+      </p:sp>
+      <p:sp>
+        <p:nvSpPr>
+          <p:cNvPr id="56" name="Rounded Rectangle 55"/>
           <p:cNvSpPr/>
           <p:nvPr/>
         </p:nvSpPr>
         <p:spPr>
           <a:xfrm>
-            <a:off x="3060192" y="4654296"/>
-            <a:ext cx="1249680" cy="310896"/>
+            <a:off x="9377172" y="4654296"/>
+            <a:ext cx="925830" cy="310896"/>
+          </a:xfrm>
+          <a:prstGeom prst="roundRect">
+            <a:avLst/>
+          </a:prstGeom>
+          <a:solidFill>
+            <a:srgbClr val="FAEEC8"/>
+          </a:solidFill>
+          <a:ln w="12700">
+            <a:solidFill>
+              <a:srgbClr val="FFFFFF"/>
+            </a:solidFill>
+          </a:ln>
+        </p:spPr>
+        <p:style>
+          <a:lnRef idx="1">
+            <a:schemeClr val="accent1"/>
+          </a:lnRef>
+          <a:fillRef idx="3">
+            <a:schemeClr val="accent1"/>
+          </a:fillRef>
+          <a:effectRef idx="2">
+            <a:schemeClr val="accent1"/>
+          </a:effectRef>
+          <a:fontRef idx="minor">
+            <a:schemeClr val="lt1"/>
+          </a:fontRef>
+        </p:style>
+        <p:txBody>
+          <a:bodyPr rtlCol="0" anchor="ctr"/>
+          <a:lstStyle/>
+          <a:p>
+            <a:pPr algn="ctr"/>
+          </a:p>
+        </p:txBody>
+      </p:sp>
+      <p:sp>
+        <p:nvSpPr>
+          <p:cNvPr id="57" name="TextBox 56"/>
+          <p:cNvSpPr txBox="1"/>
+          <p:nvPr/>
+        </p:nvSpPr>
+        <p:spPr>
+          <a:xfrm>
+            <a:off x="9413747" y="4727448"/>
+            <a:ext cx="852678" cy="155448"/>
+          </a:xfrm>
+          <a:prstGeom prst="rect">
+            <a:avLst/>
+          </a:prstGeom>
+          <a:noFill/>
+        </p:spPr>
+        <p:txBody>
+          <a:bodyPr wrap="square" lIns="0" rIns="0" tIns="0" bIns="0">
+            <a:spAutoFit/>
+          </a:bodyPr>
+          <a:lstStyle/>
+          <a:p>
+            <a:pPr algn="ctr"/>
+            <a:r>
+              <a:rPr sz="900" b="1">
+                <a:solidFill>
+                  <a:srgbClr val="1E2761"/>
+                </a:solidFill>
+                <a:latin typeface="Aptos"/>
+              </a:rPr>
+              <a:t>402</a:t>
+            </a:r>
+          </a:p>
+        </p:txBody>
+      </p:sp>
+      <p:sp>
+        <p:nvSpPr>
+          <p:cNvPr id="58" name="Rounded Rectangle 57"/>
+          <p:cNvSpPr/>
+          <p:nvPr/>
+        </p:nvSpPr>
+        <p:spPr>
+          <a:xfrm>
+            <a:off x="10348722" y="4654296"/>
+            <a:ext cx="925830" cy="310896"/>
           </a:xfrm>
           <a:prstGeom prst="roundRect">
             <a:avLst/>
@@ -4421,14 +5746,14 @@
       </p:sp>
       <p:sp>
         <p:nvSpPr>
-          <p:cNvPr id="25" name="TextBox 24"/>
-          <p:cNvSpPr txBox="1"/>
-          <p:nvPr/>
-        </p:nvSpPr>
-        <p:spPr>
-          <a:xfrm>
-            <a:off x="3096768" y="4727448"/>
-            <a:ext cx="1176528" cy="155448"/>
+          <p:cNvPr id="59" name="TextBox 58"/>
+          <p:cNvSpPr txBox="1"/>
+          <p:nvPr/>
+        </p:nvSpPr>
+        <p:spPr>
+          <a:xfrm>
+            <a:off x="10385297" y="4727448"/>
+            <a:ext cx="852678" cy="155448"/>
           </a:xfrm>
           <a:prstGeom prst="rect">
             <a:avLst/>
@@ -4449,21 +5774,55 @@
                 </a:solidFill>
                 <a:latin typeface="Aptos"/>
               </a:rPr>
-              <a:t>27</a:t>
-            </a:r>
-          </a:p>
-        </p:txBody>
-      </p:sp>
-      <p:sp>
-        <p:nvSpPr>
-          <p:cNvPr id="26" name="Rounded Rectangle 25"/>
+              <a:t>0</a:t>
+            </a:r>
+          </a:p>
+        </p:txBody>
+      </p:sp>
+      <p:sp>
+        <p:nvSpPr>
+          <p:cNvPr id="60" name="TextBox 59"/>
+          <p:cNvSpPr txBox="1"/>
+          <p:nvPr/>
+        </p:nvSpPr>
+        <p:spPr>
+          <a:xfrm>
+            <a:off x="6373368" y="5111496"/>
+            <a:ext cx="868680" cy="155448"/>
+          </a:xfrm>
+          <a:prstGeom prst="rect">
+            <a:avLst/>
+          </a:prstGeom>
+          <a:noFill/>
+        </p:spPr>
+        <p:txBody>
+          <a:bodyPr wrap="square" lIns="0" rIns="0" tIns="0" bIns="0">
+            <a:spAutoFit/>
+          </a:bodyPr>
+          <a:lstStyle/>
+          <a:p>
+            <a:r>
+              <a:rPr sz="900" b="1">
+                <a:solidFill>
+                  <a:srgbClr val="1E2761"/>
+                </a:solidFill>
+                <a:latin typeface="Aptos"/>
+              </a:rPr>
+              <a:t>Tomcat</a:t>
+            </a:r>
+          </a:p>
+        </p:txBody>
+      </p:sp>
+      <p:sp>
+        <p:nvSpPr>
+          <p:cNvPr id="61" name="Rounded Rectangle 60"/>
           <p:cNvSpPr/>
           <p:nvPr/>
         </p:nvSpPr>
         <p:spPr>
           <a:xfrm>
-            <a:off x="4355592" y="4654296"/>
-            <a:ext cx="1249680" cy="310896"/>
+            <a:off x="7434071" y="5038344"/>
+            <a:ext cx="925830" cy="310896"/>
           </a:xfrm>
           <a:prstGeom prst="roundRect">
             <a:avLst/>
@@ -4501,14 +5860,14 @@
       </p:sp>
       <p:sp>
         <p:nvSpPr>
-          <p:cNvPr id="27" name="TextBox 26"/>
-          <p:cNvSpPr txBox="1"/>
-          <p:nvPr/>
-        </p:nvSpPr>
-        <p:spPr>
-          <a:xfrm>
-            <a:off x="4392168" y="4727448"/>
-            <a:ext cx="1176528" cy="155448"/>
+          <p:cNvPr id="62" name="TextBox 61"/>
+          <p:cNvSpPr txBox="1"/>
+          <p:nvPr/>
+        </p:nvSpPr>
+        <p:spPr>
+          <a:xfrm>
+            <a:off x="7470647" y="5111496"/>
+            <a:ext cx="852678" cy="155448"/>
           </a:xfrm>
           <a:prstGeom prst="rect">
             <a:avLst/>
@@ -4529,55 +5888,21 @@
                 </a:solidFill>
                 <a:latin typeface="Aptos"/>
               </a:rPr>
-              <a:t>84</a:t>
-            </a:r>
-          </a:p>
-        </p:txBody>
-      </p:sp>
-      <p:sp>
-        <p:nvSpPr>
-          <p:cNvPr id="28" name="TextBox 27"/>
-          <p:cNvSpPr txBox="1"/>
-          <p:nvPr/>
-        </p:nvSpPr>
-        <p:spPr>
-          <a:xfrm>
-            <a:off x="704088" y="5111496"/>
-            <a:ext cx="868680" cy="155448"/>
-          </a:xfrm>
-          <a:prstGeom prst="rect">
-            <a:avLst/>
-          </a:prstGeom>
-          <a:noFill/>
-        </p:spPr>
-        <p:txBody>
-          <a:bodyPr wrap="square" lIns="0" rIns="0" tIns="0" bIns="0">
-            <a:spAutoFit/>
-          </a:bodyPr>
-          <a:lstStyle/>
-          <a:p>
-            <a:r>
-              <a:rPr sz="900" b="1">
-                <a:solidFill>
-                  <a:srgbClr val="1E2761"/>
-                </a:solidFill>
-                <a:latin typeface="Aptos"/>
-              </a:rPr>
-              <a:t>Tomcat</a:t>
-            </a:r>
-          </a:p>
-        </p:txBody>
-      </p:sp>
-      <p:sp>
-        <p:nvSpPr>
-          <p:cNvPr id="29" name="Rounded Rectangle 28"/>
+              <a:t>0</a:t>
+            </a:r>
+          </a:p>
+        </p:txBody>
+      </p:sp>
+      <p:sp>
+        <p:nvSpPr>
+          <p:cNvPr id="63" name="Rounded Rectangle 62"/>
           <p:cNvSpPr/>
           <p:nvPr/>
         </p:nvSpPr>
         <p:spPr>
           <a:xfrm>
-            <a:off x="1764792" y="5038344"/>
-            <a:ext cx="1249680" cy="310896"/>
+            <a:off x="8405622" y="5038344"/>
+            <a:ext cx="925830" cy="310896"/>
           </a:xfrm>
           <a:prstGeom prst="roundRect">
             <a:avLst/>
@@ -4615,14 +5940,14 @@
       </p:sp>
       <p:sp>
         <p:nvSpPr>
-          <p:cNvPr id="30" name="TextBox 29"/>
-          <p:cNvSpPr txBox="1"/>
-          <p:nvPr/>
-        </p:nvSpPr>
-        <p:spPr>
-          <a:xfrm>
-            <a:off x="1801368" y="5111496"/>
-            <a:ext cx="1176528" cy="155448"/>
+          <p:cNvPr id="64" name="TextBox 63"/>
+          <p:cNvSpPr txBox="1"/>
+          <p:nvPr/>
+        </p:nvSpPr>
+        <p:spPr>
+          <a:xfrm>
+            <a:off x="8442197" y="5111496"/>
+            <a:ext cx="852678" cy="155448"/>
           </a:xfrm>
           <a:prstGeom prst="rect">
             <a:avLst/>
@@ -4643,21 +5968,101 @@
                 </a:solidFill>
                 <a:latin typeface="Aptos"/>
               </a:rPr>
-              <a:t>4</a:t>
-            </a:r>
-          </a:p>
-        </p:txBody>
-      </p:sp>
-      <p:sp>
-        <p:nvSpPr>
-          <p:cNvPr id="31" name="Rounded Rectangle 30"/>
+              <a:t>0</a:t>
+            </a:r>
+          </a:p>
+        </p:txBody>
+      </p:sp>
+      <p:sp>
+        <p:nvSpPr>
+          <p:cNvPr id="65" name="Rounded Rectangle 64"/>
           <p:cNvSpPr/>
           <p:nvPr/>
         </p:nvSpPr>
         <p:spPr>
           <a:xfrm>
-            <a:off x="3060192" y="5038344"/>
-            <a:ext cx="1249680" cy="310896"/>
+            <a:off x="9377172" y="5038344"/>
+            <a:ext cx="925830" cy="310896"/>
+          </a:xfrm>
+          <a:prstGeom prst="roundRect">
+            <a:avLst/>
+          </a:prstGeom>
+          <a:solidFill>
+            <a:srgbClr val="FAEEC8"/>
+          </a:solidFill>
+          <a:ln w="12700">
+            <a:solidFill>
+              <a:srgbClr val="FFFFFF"/>
+            </a:solidFill>
+          </a:ln>
+        </p:spPr>
+        <p:style>
+          <a:lnRef idx="1">
+            <a:schemeClr val="accent1"/>
+          </a:lnRef>
+          <a:fillRef idx="3">
+            <a:schemeClr val="accent1"/>
+          </a:fillRef>
+          <a:effectRef idx="2">
+            <a:schemeClr val="accent1"/>
+          </a:effectRef>
+          <a:fontRef idx="minor">
+            <a:schemeClr val="lt1"/>
+          </a:fontRef>
+        </p:style>
+        <p:txBody>
+          <a:bodyPr rtlCol="0" anchor="ctr"/>
+          <a:lstStyle/>
+          <a:p>
+            <a:pPr algn="ctr"/>
+          </a:p>
+        </p:txBody>
+      </p:sp>
+      <p:sp>
+        <p:nvSpPr>
+          <p:cNvPr id="66" name="TextBox 65"/>
+          <p:cNvSpPr txBox="1"/>
+          <p:nvPr/>
+        </p:nvSpPr>
+        <p:spPr>
+          <a:xfrm>
+            <a:off x="9413747" y="5111496"/>
+            <a:ext cx="852678" cy="155448"/>
+          </a:xfrm>
+          <a:prstGeom prst="rect">
+            <a:avLst/>
+          </a:prstGeom>
+          <a:noFill/>
+        </p:spPr>
+        <p:txBody>
+          <a:bodyPr wrap="square" lIns="0" rIns="0" tIns="0" bIns="0">
+            <a:spAutoFit/>
+          </a:bodyPr>
+          <a:lstStyle/>
+          <a:p>
+            <a:pPr algn="ctr"/>
+            <a:r>
+              <a:rPr sz="900" b="1">
+                <a:solidFill>
+                  <a:srgbClr val="1E2761"/>
+                </a:solidFill>
+                <a:latin typeface="Aptos"/>
+              </a:rPr>
+              <a:t>0</a:t>
+            </a:r>
+          </a:p>
+        </p:txBody>
+      </p:sp>
+      <p:sp>
+        <p:nvSpPr>
+          <p:cNvPr id="67" name="Rounded Rectangle 66"/>
+          <p:cNvSpPr/>
+          <p:nvPr/>
+        </p:nvSpPr>
+        <p:spPr>
+          <a:xfrm>
+            <a:off x="10348722" y="5038344"/>
+            <a:ext cx="925830" cy="310896"/>
           </a:xfrm>
           <a:prstGeom prst="roundRect">
             <a:avLst/>
@@ -4695,14 +6100,14 @@
       </p:sp>
       <p:sp>
         <p:nvSpPr>
-          <p:cNvPr id="32" name="TextBox 31"/>
-          <p:cNvSpPr txBox="1"/>
-          <p:nvPr/>
-        </p:nvSpPr>
-        <p:spPr>
-          <a:xfrm>
-            <a:off x="3096768" y="5111496"/>
-            <a:ext cx="1176528" cy="155448"/>
+          <p:cNvPr id="68" name="TextBox 67"/>
+          <p:cNvSpPr txBox="1"/>
+          <p:nvPr/>
+        </p:nvSpPr>
+        <p:spPr>
+          <a:xfrm>
+            <a:off x="10385297" y="5111496"/>
+            <a:ext cx="852678" cy="155448"/>
           </a:xfrm>
           <a:prstGeom prst="rect">
             <a:avLst/>
@@ -4730,20 +6135,54 @@
       </p:sp>
       <p:sp>
         <p:nvSpPr>
-          <p:cNvPr id="33" name="Rounded Rectangle 32"/>
+          <p:cNvPr id="69" name="TextBox 68"/>
+          <p:cNvSpPr txBox="1"/>
+          <p:nvPr/>
+        </p:nvSpPr>
+        <p:spPr>
+          <a:xfrm>
+            <a:off x="6373368" y="5495544"/>
+            <a:ext cx="868680" cy="155448"/>
+          </a:xfrm>
+          <a:prstGeom prst="rect">
+            <a:avLst/>
+          </a:prstGeom>
+          <a:noFill/>
+        </p:spPr>
+        <p:txBody>
+          <a:bodyPr wrap="square" lIns="0" rIns="0" tIns="0" bIns="0">
+            <a:spAutoFit/>
+          </a:bodyPr>
+          <a:lstStyle/>
+          <a:p>
+            <a:r>
+              <a:rPr sz="900" b="1">
+                <a:solidFill>
+                  <a:srgbClr val="1E2761"/>
+                </a:solidFill>
+                <a:latin typeface="Aptos"/>
+              </a:rPr>
+              <a:t>Total</a:t>
+            </a:r>
+          </a:p>
+        </p:txBody>
+      </p:sp>
+      <p:sp>
+        <p:nvSpPr>
+          <p:cNvPr id="70" name="Rounded Rectangle 69"/>
           <p:cNvSpPr/>
           <p:nvPr/>
         </p:nvSpPr>
         <p:spPr>
           <a:xfrm>
-            <a:off x="4355592" y="5038344"/>
-            <a:ext cx="1249680" cy="310896"/>
+            <a:off x="7434071" y="5422392"/>
+            <a:ext cx="925830" cy="310896"/>
           </a:xfrm>
           <a:prstGeom prst="roundRect">
             <a:avLst/>
           </a:prstGeom>
           <a:solidFill>
-            <a:srgbClr val="E7EAEF"/>
+            <a:srgbClr val="94A3B8"/>
           </a:solidFill>
           <a:ln w="12700">
             <a:solidFill>
@@ -4775,14 +6214,14 @@
       </p:sp>
       <p:sp>
         <p:nvSpPr>
-          <p:cNvPr id="34" name="TextBox 33"/>
-          <p:cNvSpPr txBox="1"/>
-          <p:nvPr/>
-        </p:nvSpPr>
-        <p:spPr>
-          <a:xfrm>
-            <a:off x="4392168" y="5111496"/>
-            <a:ext cx="1176528" cy="155448"/>
+          <p:cNvPr id="71" name="TextBox 70"/>
+          <p:cNvSpPr txBox="1"/>
+          <p:nvPr/>
+        </p:nvSpPr>
+        <p:spPr>
+          <a:xfrm>
+            <a:off x="7470647" y="5495544"/>
+            <a:ext cx="852678" cy="155448"/>
           </a:xfrm>
           <a:prstGeom prst="rect">
             <a:avLst/>
@@ -4799,7 +6238,7 @@
             <a:r>
               <a:rPr sz="900" b="1">
                 <a:solidFill>
-                  <a:srgbClr val="1E2761"/>
+                  <a:srgbClr val="FFFFFF"/>
                 </a:solidFill>
                 <a:latin typeface="Aptos"/>
               </a:rPr>
@@ -4810,48 +6249,14 @@
       </p:sp>
       <p:sp>
         <p:nvSpPr>
-          <p:cNvPr id="35" name="TextBox 34"/>
-          <p:cNvSpPr txBox="1"/>
-          <p:nvPr/>
-        </p:nvSpPr>
-        <p:spPr>
-          <a:xfrm>
-            <a:off x="704088" y="5495544"/>
-            <a:ext cx="868680" cy="155448"/>
-          </a:xfrm>
-          <a:prstGeom prst="rect">
-            <a:avLst/>
-          </a:prstGeom>
-          <a:noFill/>
-        </p:spPr>
-        <p:txBody>
-          <a:bodyPr wrap="square" lIns="0" rIns="0" tIns="0" bIns="0">
-            <a:spAutoFit/>
-          </a:bodyPr>
-          <a:lstStyle/>
-          <a:p>
-            <a:r>
-              <a:rPr sz="900" b="1">
-                <a:solidFill>
-                  <a:srgbClr val="1E2761"/>
-                </a:solidFill>
-                <a:latin typeface="Aptos"/>
-              </a:rPr>
-              <a:t>Total</a:t>
-            </a:r>
-          </a:p>
-        </p:txBody>
-      </p:sp>
-      <p:sp>
-        <p:nvSpPr>
-          <p:cNvPr id="36" name="Rounded Rectangle 35"/>
+          <p:cNvPr id="72" name="Rounded Rectangle 71"/>
           <p:cNvSpPr/>
           <p:nvPr/>
         </p:nvSpPr>
         <p:spPr>
           <a:xfrm>
-            <a:off x="1764792" y="5422392"/>
-            <a:ext cx="1249680" cy="310896"/>
+            <a:off x="8405622" y="5422392"/>
+            <a:ext cx="925830" cy="310896"/>
           </a:xfrm>
           <a:prstGeom prst="roundRect">
             <a:avLst/>
@@ -4889,14 +6294,14 @@
       </p:sp>
       <p:sp>
         <p:nvSpPr>
-          <p:cNvPr id="37" name="TextBox 36"/>
-          <p:cNvSpPr txBox="1"/>
-          <p:nvPr/>
-        </p:nvSpPr>
-        <p:spPr>
-          <a:xfrm>
-            <a:off x="1801368" y="5495544"/>
-            <a:ext cx="1176528" cy="155448"/>
+          <p:cNvPr id="73" name="TextBox 72"/>
+          <p:cNvSpPr txBox="1"/>
+          <p:nvPr/>
+        </p:nvSpPr>
+        <p:spPr>
+          <a:xfrm>
+            <a:off x="8442197" y="5495544"/>
+            <a:ext cx="852678" cy="155448"/>
           </a:xfrm>
           <a:prstGeom prst="rect">
             <a:avLst/>
@@ -4917,21 +6322,101 @@
                 </a:solidFill>
                 <a:latin typeface="Aptos"/>
               </a:rPr>
-              <a:t>759</a:t>
-            </a:r>
-          </a:p>
-        </p:txBody>
-      </p:sp>
-      <p:sp>
-        <p:nvSpPr>
-          <p:cNvPr id="38" name="Rounded Rectangle 37"/>
+              <a:t>0</a:t>
+            </a:r>
+          </a:p>
+        </p:txBody>
+      </p:sp>
+      <p:sp>
+        <p:nvSpPr>
+          <p:cNvPr id="74" name="Rounded Rectangle 73"/>
           <p:cNvSpPr/>
           <p:nvPr/>
         </p:nvSpPr>
         <p:spPr>
           <a:xfrm>
-            <a:off x="3060192" y="5422392"/>
-            <a:ext cx="1249680" cy="310896"/>
+            <a:off x="9377172" y="5422392"/>
+            <a:ext cx="925830" cy="310896"/>
+          </a:xfrm>
+          <a:prstGeom prst="roundRect">
+            <a:avLst/>
+          </a:prstGeom>
+          <a:solidFill>
+            <a:srgbClr val="EAB308"/>
+          </a:solidFill>
+          <a:ln w="12700">
+            <a:solidFill>
+              <a:srgbClr val="FFFFFF"/>
+            </a:solidFill>
+          </a:ln>
+        </p:spPr>
+        <p:style>
+          <a:lnRef idx="1">
+            <a:schemeClr val="accent1"/>
+          </a:lnRef>
+          <a:fillRef idx="3">
+            <a:schemeClr val="accent1"/>
+          </a:fillRef>
+          <a:effectRef idx="2">
+            <a:schemeClr val="accent1"/>
+          </a:effectRef>
+          <a:fontRef idx="minor">
+            <a:schemeClr val="lt1"/>
+          </a:fontRef>
+        </p:style>
+        <p:txBody>
+          <a:bodyPr rtlCol="0" anchor="ctr"/>
+          <a:lstStyle/>
+          <a:p>
+            <a:pPr algn="ctr"/>
+          </a:p>
+        </p:txBody>
+      </p:sp>
+      <p:sp>
+        <p:nvSpPr>
+          <p:cNvPr id="75" name="TextBox 74"/>
+          <p:cNvSpPr txBox="1"/>
+          <p:nvPr/>
+        </p:nvSpPr>
+        <p:spPr>
+          <a:xfrm>
+            <a:off x="9413747" y="5495544"/>
+            <a:ext cx="852678" cy="155448"/>
+          </a:xfrm>
+          <a:prstGeom prst="rect">
+            <a:avLst/>
+          </a:prstGeom>
+          <a:noFill/>
+        </p:spPr>
+        <p:txBody>
+          <a:bodyPr wrap="square" lIns="0" rIns="0" tIns="0" bIns="0">
+            <a:spAutoFit/>
+          </a:bodyPr>
+          <a:lstStyle/>
+          <a:p>
+            <a:pPr algn="ctr"/>
+            <a:r>
+              <a:rPr sz="900" b="1">
+                <a:solidFill>
+                  <a:srgbClr val="1E2761"/>
+                </a:solidFill>
+                <a:latin typeface="Aptos"/>
+              </a:rPr>
+              <a:t>402</a:t>
+            </a:r>
+          </a:p>
+        </p:txBody>
+      </p:sp>
+      <p:sp>
+        <p:nvSpPr>
+          <p:cNvPr id="76" name="Rounded Rectangle 75"/>
+          <p:cNvSpPr/>
+          <p:nvPr/>
+        </p:nvSpPr>
+        <p:spPr>
+          <a:xfrm>
+            <a:off x="10348722" y="5422392"/>
+            <a:ext cx="925830" cy="310896"/>
           </a:xfrm>
           <a:prstGeom prst="roundRect">
             <a:avLst/>
@@ -4969,1583 +6454,7 @@
       </p:sp>
       <p:sp>
         <p:nvSpPr>
-          <p:cNvPr id="39" name="TextBox 38"/>
-          <p:cNvSpPr txBox="1"/>
-          <p:nvPr/>
-        </p:nvSpPr>
-        <p:spPr>
-          <a:xfrm>
-            <a:off x="3096768" y="5495544"/>
-            <a:ext cx="1176528" cy="155448"/>
-          </a:xfrm>
-          <a:prstGeom prst="rect">
-            <a:avLst/>
-          </a:prstGeom>
-          <a:noFill/>
-        </p:spPr>
-        <p:txBody>
-          <a:bodyPr wrap="square" lIns="0" rIns="0" tIns="0" bIns="0">
-            <a:spAutoFit/>
-          </a:bodyPr>
-          <a:lstStyle/>
-          <a:p>
-            <a:pPr algn="ctr"/>
-            <a:r>
-              <a:rPr sz="900" b="1">
-                <a:solidFill>
-                  <a:srgbClr val="FFFFFF"/>
-                </a:solidFill>
-                <a:latin typeface="Aptos"/>
-              </a:rPr>
-              <a:t>27</a:t>
-            </a:r>
-          </a:p>
-        </p:txBody>
-      </p:sp>
-      <p:sp>
-        <p:nvSpPr>
-          <p:cNvPr id="40" name="Rounded Rectangle 39"/>
-          <p:cNvSpPr/>
-          <p:nvPr/>
-        </p:nvSpPr>
-        <p:spPr>
-          <a:xfrm>
-            <a:off x="4355592" y="5422392"/>
-            <a:ext cx="1249680" cy="310896"/>
-          </a:xfrm>
-          <a:prstGeom prst="roundRect">
-            <a:avLst/>
-          </a:prstGeom>
-          <a:solidFill>
-            <a:srgbClr val="94A3B8"/>
-          </a:solidFill>
-          <a:ln w="12700">
-            <a:solidFill>
-              <a:srgbClr val="FFFFFF"/>
-            </a:solidFill>
-          </a:ln>
-        </p:spPr>
-        <p:style>
-          <a:lnRef idx="1">
-            <a:schemeClr val="accent1"/>
-          </a:lnRef>
-          <a:fillRef idx="3">
-            <a:schemeClr val="accent1"/>
-          </a:fillRef>
-          <a:effectRef idx="2">
-            <a:schemeClr val="accent1"/>
-          </a:effectRef>
-          <a:fontRef idx="minor">
-            <a:schemeClr val="lt1"/>
-          </a:fontRef>
-        </p:style>
-        <p:txBody>
-          <a:bodyPr rtlCol="0" anchor="ctr"/>
-          <a:lstStyle/>
-          <a:p>
-            <a:pPr algn="ctr"/>
-          </a:p>
-        </p:txBody>
-      </p:sp>
-      <p:sp>
-        <p:nvSpPr>
-          <p:cNvPr id="41" name="TextBox 40"/>
-          <p:cNvSpPr txBox="1"/>
-          <p:nvPr/>
-        </p:nvSpPr>
-        <p:spPr>
-          <a:xfrm>
-            <a:off x="4392168" y="5495544"/>
-            <a:ext cx="1176528" cy="155448"/>
-          </a:xfrm>
-          <a:prstGeom prst="rect">
-            <a:avLst/>
-          </a:prstGeom>
-          <a:noFill/>
-        </p:spPr>
-        <p:txBody>
-          <a:bodyPr wrap="square" lIns="0" rIns="0" tIns="0" bIns="0">
-            <a:spAutoFit/>
-          </a:bodyPr>
-          <a:lstStyle/>
-          <a:p>
-            <a:pPr algn="ctr"/>
-            <a:r>
-              <a:rPr sz="900" b="1">
-                <a:solidFill>
-                  <a:srgbClr val="FFFFFF"/>
-                </a:solidFill>
-                <a:latin typeface="Aptos"/>
-              </a:rPr>
-              <a:t>84</a:t>
-            </a:r>
-          </a:p>
-        </p:txBody>
-      </p:sp>
-      <p:sp>
-        <p:nvSpPr>
-          <p:cNvPr id="42" name="Rounded Rectangle 41"/>
-          <p:cNvSpPr/>
-          <p:nvPr/>
-        </p:nvSpPr>
-        <p:spPr>
-          <a:xfrm>
-            <a:off x="6172200" y="3675887"/>
-            <a:ext cx="5440680" cy="2304288"/>
-          </a:xfrm>
-          <a:prstGeom prst="roundRect">
-            <a:avLst/>
-          </a:prstGeom>
-          <a:solidFill>
-            <a:srgbClr val="FFFFFF"/>
-          </a:solidFill>
-          <a:ln w="12700">
-            <a:solidFill>
-              <a:srgbClr val="DAE2EE"/>
-            </a:solidFill>
-          </a:ln>
-        </p:spPr>
-        <p:style>
-          <a:lnRef idx="1">
-            <a:schemeClr val="accent1"/>
-          </a:lnRef>
-          <a:fillRef idx="3">
-            <a:schemeClr val="accent1"/>
-          </a:fillRef>
-          <a:effectRef idx="2">
-            <a:schemeClr val="accent1"/>
-          </a:effectRef>
-          <a:fontRef idx="minor">
-            <a:schemeClr val="lt1"/>
-          </a:fontRef>
-        </p:style>
-        <p:txBody>
-          <a:bodyPr rtlCol="0" anchor="ctr"/>
-          <a:lstStyle/>
-          <a:p>
-            <a:pPr algn="ctr"/>
-          </a:p>
-        </p:txBody>
-      </p:sp>
-      <p:sp>
-        <p:nvSpPr>
-          <p:cNvPr id="43" name="Rectangle 42"/>
-          <p:cNvSpPr/>
-          <p:nvPr/>
-        </p:nvSpPr>
-        <p:spPr>
-          <a:xfrm>
-            <a:off x="6172200" y="3675887"/>
-            <a:ext cx="5440680" cy="73152"/>
-          </a:xfrm>
-          <a:prstGeom prst="rect">
-            <a:avLst/>
-          </a:prstGeom>
-          <a:solidFill>
-            <a:srgbClr val="028090"/>
-          </a:solidFill>
-          <a:ln>
-            <a:noFill/>
-          </a:ln>
-        </p:spPr>
-        <p:style>
-          <a:lnRef idx="1">
-            <a:schemeClr val="accent1"/>
-          </a:lnRef>
-          <a:fillRef idx="3">
-            <a:schemeClr val="accent1"/>
-          </a:fillRef>
-          <a:effectRef idx="2">
-            <a:schemeClr val="accent1"/>
-          </a:effectRef>
-          <a:fontRef idx="minor">
-            <a:schemeClr val="lt1"/>
-          </a:fontRef>
-        </p:style>
-        <p:txBody>
-          <a:bodyPr rtlCol="0" anchor="ctr"/>
-          <a:lstStyle/>
-          <a:p>
-            <a:pPr algn="ctr"/>
-          </a:p>
-        </p:txBody>
-      </p:sp>
-      <p:sp>
-        <p:nvSpPr>
-          <p:cNvPr id="44" name="TextBox 43"/>
-          <p:cNvSpPr txBox="1"/>
-          <p:nvPr/>
-        </p:nvSpPr>
-        <p:spPr>
-          <a:xfrm>
-            <a:off x="6309360" y="3803903"/>
-            <a:ext cx="5166360" cy="274320"/>
-          </a:xfrm>
-          <a:prstGeom prst="rect">
-            <a:avLst/>
-          </a:prstGeom>
-          <a:noFill/>
-        </p:spPr>
-        <p:txBody>
-          <a:bodyPr wrap="square" lIns="0" rIns="0" tIns="0" bIns="0">
-            <a:spAutoFit/>
-          </a:bodyPr>
-          <a:lstStyle/>
-          <a:p>
-            <a:r>
-              <a:rPr sz="1300" b="1">
-                <a:solidFill>
-                  <a:srgbClr val="1E2761"/>
-                </a:solidFill>
-                <a:latin typeface="Aptos"/>
-              </a:rPr>
-              <a:t>AKS readiness by type</a:t>
-            </a:r>
-          </a:p>
-        </p:txBody>
-      </p:sp>
-      <p:sp>
-        <p:nvSpPr>
-          <p:cNvPr id="45" name="Rounded Rectangle 44"/>
-          <p:cNvSpPr/>
-          <p:nvPr/>
-        </p:nvSpPr>
-        <p:spPr>
-          <a:xfrm>
-            <a:off x="7434071" y="4270248"/>
-            <a:ext cx="925830" cy="310896"/>
-          </a:xfrm>
-          <a:prstGeom prst="roundRect">
-            <a:avLst/>
-          </a:prstGeom>
-          <a:solidFill>
-            <a:srgbClr val="94A3B8"/>
-          </a:solidFill>
-          <a:ln>
-            <a:noFill/>
-          </a:ln>
-        </p:spPr>
-        <p:style>
-          <a:lnRef idx="1">
-            <a:schemeClr val="accent1"/>
-          </a:lnRef>
-          <a:fillRef idx="3">
-            <a:schemeClr val="accent1"/>
-          </a:fillRef>
-          <a:effectRef idx="2">
-            <a:schemeClr val="accent1"/>
-          </a:effectRef>
-          <a:fontRef idx="minor">
-            <a:schemeClr val="lt1"/>
-          </a:fontRef>
-        </p:style>
-        <p:txBody>
-          <a:bodyPr rtlCol="0" anchor="ctr"/>
-          <a:lstStyle/>
-          <a:p>
-            <a:pPr algn="ctr"/>
-          </a:p>
-        </p:txBody>
-      </p:sp>
-      <p:sp>
-        <p:nvSpPr>
-          <p:cNvPr id="46" name="TextBox 45"/>
-          <p:cNvSpPr txBox="1"/>
-          <p:nvPr/>
-        </p:nvSpPr>
-        <p:spPr>
-          <a:xfrm>
-            <a:off x="7470647" y="4343400"/>
-            <a:ext cx="852678" cy="155448"/>
-          </a:xfrm>
-          <a:prstGeom prst="rect">
-            <a:avLst/>
-          </a:prstGeom>
-          <a:noFill/>
-        </p:spPr>
-        <p:txBody>
-          <a:bodyPr wrap="square" lIns="0" rIns="0" tIns="0" bIns="0">
-            <a:spAutoFit/>
-          </a:bodyPr>
-          <a:lstStyle/>
-          <a:p>
-            <a:pPr algn="ctr"/>
-            <a:r>
-              <a:rPr sz="700" b="1">
-                <a:solidFill>
-                  <a:srgbClr val="FFFFFF"/>
-                </a:solidFill>
-                <a:latin typeface="Aptos"/>
-              </a:rPr>
-              <a:t>Unknown</a:t>
-            </a:r>
-          </a:p>
-        </p:txBody>
-      </p:sp>
-      <p:sp>
-        <p:nvSpPr>
-          <p:cNvPr id="47" name="Rounded Rectangle 46"/>
-          <p:cNvSpPr/>
-          <p:nvPr/>
-        </p:nvSpPr>
-        <p:spPr>
-          <a:xfrm>
-            <a:off x="8405622" y="4270248"/>
-            <a:ext cx="925830" cy="310896"/>
-          </a:xfrm>
-          <a:prstGeom prst="roundRect">
-            <a:avLst/>
-          </a:prstGeom>
-          <a:solidFill>
-            <a:srgbClr val="228B22"/>
-          </a:solidFill>
-          <a:ln>
-            <a:noFill/>
-          </a:ln>
-        </p:spPr>
-        <p:style>
-          <a:lnRef idx="1">
-            <a:schemeClr val="accent1"/>
-          </a:lnRef>
-          <a:fillRef idx="3">
-            <a:schemeClr val="accent1"/>
-          </a:fillRef>
-          <a:effectRef idx="2">
-            <a:schemeClr val="accent1"/>
-          </a:effectRef>
-          <a:fontRef idx="minor">
-            <a:schemeClr val="lt1"/>
-          </a:fontRef>
-        </p:style>
-        <p:txBody>
-          <a:bodyPr rtlCol="0" anchor="ctr"/>
-          <a:lstStyle/>
-          <a:p>
-            <a:pPr algn="ctr"/>
-          </a:p>
-        </p:txBody>
-      </p:sp>
-      <p:sp>
-        <p:nvSpPr>
-          <p:cNvPr id="48" name="TextBox 47"/>
-          <p:cNvSpPr txBox="1"/>
-          <p:nvPr/>
-        </p:nvSpPr>
-        <p:spPr>
-          <a:xfrm>
-            <a:off x="8442197" y="4343400"/>
-            <a:ext cx="852678" cy="155448"/>
-          </a:xfrm>
-          <a:prstGeom prst="rect">
-            <a:avLst/>
-          </a:prstGeom>
-          <a:noFill/>
-        </p:spPr>
-        <p:txBody>
-          <a:bodyPr wrap="square" lIns="0" rIns="0" tIns="0" bIns="0">
-            <a:spAutoFit/>
-          </a:bodyPr>
-          <a:lstStyle/>
-          <a:p>
-            <a:pPr algn="ctr"/>
-            <a:r>
-              <a:rPr sz="700" b="1">
-                <a:solidFill>
-                  <a:srgbClr val="FFFFFF"/>
-                </a:solidFill>
-                <a:latin typeface="Aptos"/>
-              </a:rPr>
-              <a:t>Ready</a:t>
-            </a:r>
-          </a:p>
-        </p:txBody>
-      </p:sp>
-      <p:sp>
-        <p:nvSpPr>
-          <p:cNvPr id="49" name="Rounded Rectangle 48"/>
-          <p:cNvSpPr/>
-          <p:nvPr/>
-        </p:nvSpPr>
-        <p:spPr>
-          <a:xfrm>
-            <a:off x="9377172" y="4270248"/>
-            <a:ext cx="925830" cy="310896"/>
-          </a:xfrm>
-          <a:prstGeom prst="roundRect">
-            <a:avLst/>
-          </a:prstGeom>
-          <a:solidFill>
-            <a:srgbClr val="EAB308"/>
-          </a:solidFill>
-          <a:ln>
-            <a:noFill/>
-          </a:ln>
-        </p:spPr>
-        <p:style>
-          <a:lnRef idx="1">
-            <a:schemeClr val="accent1"/>
-          </a:lnRef>
-          <a:fillRef idx="3">
-            <a:schemeClr val="accent1"/>
-          </a:fillRef>
-          <a:effectRef idx="2">
-            <a:schemeClr val="accent1"/>
-          </a:effectRef>
-          <a:fontRef idx="minor">
-            <a:schemeClr val="lt1"/>
-          </a:fontRef>
-        </p:style>
-        <p:txBody>
-          <a:bodyPr rtlCol="0" anchor="ctr"/>
-          <a:lstStyle/>
-          <a:p>
-            <a:pPr algn="ctr"/>
-          </a:p>
-        </p:txBody>
-      </p:sp>
-      <p:sp>
-        <p:nvSpPr>
-          <p:cNvPr id="50" name="TextBox 49"/>
-          <p:cNvSpPr txBox="1"/>
-          <p:nvPr/>
-        </p:nvSpPr>
-        <p:spPr>
-          <a:xfrm>
-            <a:off x="9413747" y="4343400"/>
-            <a:ext cx="852678" cy="155448"/>
-          </a:xfrm>
-          <a:prstGeom prst="rect">
-            <a:avLst/>
-          </a:prstGeom>
-          <a:noFill/>
-        </p:spPr>
-        <p:txBody>
-          <a:bodyPr wrap="square" lIns="0" rIns="0" tIns="0" bIns="0">
-            <a:spAutoFit/>
-          </a:bodyPr>
-          <a:lstStyle/>
-          <a:p>
-            <a:pPr algn="ctr"/>
-            <a:r>
-              <a:rPr sz="700" b="1">
-                <a:solidFill>
-                  <a:srgbClr val="1E2761"/>
-                </a:solidFill>
-                <a:latin typeface="Aptos"/>
-              </a:rPr>
-              <a:t>Ready w/ conditions</a:t>
-            </a:r>
-          </a:p>
-        </p:txBody>
-      </p:sp>
-      <p:sp>
-        <p:nvSpPr>
-          <p:cNvPr id="51" name="Rounded Rectangle 50"/>
-          <p:cNvSpPr/>
-          <p:nvPr/>
-        </p:nvSpPr>
-        <p:spPr>
-          <a:xfrm>
-            <a:off x="10348722" y="4270248"/>
-            <a:ext cx="925830" cy="310896"/>
-          </a:xfrm>
-          <a:prstGeom prst="roundRect">
-            <a:avLst/>
-          </a:prstGeom>
-          <a:solidFill>
-            <a:srgbClr val="DC2626"/>
-          </a:solidFill>
-          <a:ln>
-            <a:noFill/>
-          </a:ln>
-        </p:spPr>
-        <p:style>
-          <a:lnRef idx="1">
-            <a:schemeClr val="accent1"/>
-          </a:lnRef>
-          <a:fillRef idx="3">
-            <a:schemeClr val="accent1"/>
-          </a:fillRef>
-          <a:effectRef idx="2">
-            <a:schemeClr val="accent1"/>
-          </a:effectRef>
-          <a:fontRef idx="minor">
-            <a:schemeClr val="lt1"/>
-          </a:fontRef>
-        </p:style>
-        <p:txBody>
-          <a:bodyPr rtlCol="0" anchor="ctr"/>
-          <a:lstStyle/>
-          <a:p>
-            <a:pPr algn="ctr"/>
-          </a:p>
-        </p:txBody>
-      </p:sp>
-      <p:sp>
-        <p:nvSpPr>
-          <p:cNvPr id="52" name="TextBox 51"/>
-          <p:cNvSpPr txBox="1"/>
-          <p:nvPr/>
-        </p:nvSpPr>
-        <p:spPr>
-          <a:xfrm>
-            <a:off x="10385297" y="4343400"/>
-            <a:ext cx="852678" cy="155448"/>
-          </a:xfrm>
-          <a:prstGeom prst="rect">
-            <a:avLst/>
-          </a:prstGeom>
-          <a:noFill/>
-        </p:spPr>
-        <p:txBody>
-          <a:bodyPr wrap="square" lIns="0" rIns="0" tIns="0" bIns="0">
-            <a:spAutoFit/>
-          </a:bodyPr>
-          <a:lstStyle/>
-          <a:p>
-            <a:pPr algn="ctr"/>
-            <a:r>
-              <a:rPr sz="700" b="1">
-                <a:solidFill>
-                  <a:srgbClr val="FFFFFF"/>
-                </a:solidFill>
-                <a:latin typeface="Aptos"/>
-              </a:rPr>
-              <a:t>Not Ready</a:t>
-            </a:r>
-          </a:p>
-        </p:txBody>
-      </p:sp>
-      <p:sp>
-        <p:nvSpPr>
-          <p:cNvPr id="53" name="TextBox 52"/>
-          <p:cNvSpPr txBox="1"/>
-          <p:nvPr/>
-        </p:nvSpPr>
-        <p:spPr>
-          <a:xfrm>
-            <a:off x="6373368" y="4727448"/>
-            <a:ext cx="868680" cy="155448"/>
-          </a:xfrm>
-          <a:prstGeom prst="rect">
-            <a:avLst/>
-          </a:prstGeom>
-          <a:noFill/>
-        </p:spPr>
-        <p:txBody>
-          <a:bodyPr wrap="square" lIns="0" rIns="0" tIns="0" bIns="0">
-            <a:spAutoFit/>
-          </a:bodyPr>
-          <a:lstStyle/>
-          <a:p>
-            <a:r>
-              <a:rPr sz="900" b="1">
-                <a:solidFill>
-                  <a:srgbClr val="1E2761"/>
-                </a:solidFill>
-                <a:latin typeface="Aptos"/>
-              </a:rPr>
-              <a:t>IIS</a:t>
-            </a:r>
-          </a:p>
-        </p:txBody>
-      </p:sp>
-      <p:sp>
-        <p:nvSpPr>
-          <p:cNvPr id="54" name="Rounded Rectangle 53"/>
-          <p:cNvSpPr/>
-          <p:nvPr/>
-        </p:nvSpPr>
-        <p:spPr>
-          <a:xfrm>
-            <a:off x="7434071" y="4654296"/>
-            <a:ext cx="925830" cy="310896"/>
-          </a:xfrm>
-          <a:prstGeom prst="roundRect">
-            <a:avLst/>
-          </a:prstGeom>
-          <a:solidFill>
-            <a:srgbClr val="E7EAEF"/>
-          </a:solidFill>
-          <a:ln w="12700">
-            <a:solidFill>
-              <a:srgbClr val="FFFFFF"/>
-            </a:solidFill>
-          </a:ln>
-        </p:spPr>
-        <p:style>
-          <a:lnRef idx="1">
-            <a:schemeClr val="accent1"/>
-          </a:lnRef>
-          <a:fillRef idx="3">
-            <a:schemeClr val="accent1"/>
-          </a:fillRef>
-          <a:effectRef idx="2">
-            <a:schemeClr val="accent1"/>
-          </a:effectRef>
-          <a:fontRef idx="minor">
-            <a:schemeClr val="lt1"/>
-          </a:fontRef>
-        </p:style>
-        <p:txBody>
-          <a:bodyPr rtlCol="0" anchor="ctr"/>
-          <a:lstStyle/>
-          <a:p>
-            <a:pPr algn="ctr"/>
-          </a:p>
-        </p:txBody>
-      </p:sp>
-      <p:sp>
-        <p:nvSpPr>
-          <p:cNvPr id="55" name="TextBox 54"/>
-          <p:cNvSpPr txBox="1"/>
-          <p:nvPr/>
-        </p:nvSpPr>
-        <p:spPr>
-          <a:xfrm>
-            <a:off x="7470647" y="4727448"/>
-            <a:ext cx="852678" cy="155448"/>
-          </a:xfrm>
-          <a:prstGeom prst="rect">
-            <a:avLst/>
-          </a:prstGeom>
-          <a:noFill/>
-        </p:spPr>
-        <p:txBody>
-          <a:bodyPr wrap="square" lIns="0" rIns="0" tIns="0" bIns="0">
-            <a:spAutoFit/>
-          </a:bodyPr>
-          <a:lstStyle/>
-          <a:p>
-            <a:pPr algn="ctr"/>
-            <a:r>
-              <a:rPr sz="900" b="1">
-                <a:solidFill>
-                  <a:srgbClr val="1E2761"/>
-                </a:solidFill>
-                <a:latin typeface="Aptos"/>
-              </a:rPr>
-              <a:t>0</a:t>
-            </a:r>
-          </a:p>
-        </p:txBody>
-      </p:sp>
-      <p:sp>
-        <p:nvSpPr>
-          <p:cNvPr id="56" name="Rounded Rectangle 55"/>
-          <p:cNvSpPr/>
-          <p:nvPr/>
-        </p:nvSpPr>
-        <p:spPr>
-          <a:xfrm>
-            <a:off x="8405622" y="4654296"/>
-            <a:ext cx="925830" cy="310896"/>
-          </a:xfrm>
-          <a:prstGeom prst="roundRect">
-            <a:avLst/>
-          </a:prstGeom>
-          <a:solidFill>
-            <a:srgbClr val="CEE5CE"/>
-          </a:solidFill>
-          <a:ln w="12700">
-            <a:solidFill>
-              <a:srgbClr val="FFFFFF"/>
-            </a:solidFill>
-          </a:ln>
-        </p:spPr>
-        <p:style>
-          <a:lnRef idx="1">
-            <a:schemeClr val="accent1"/>
-          </a:lnRef>
-          <a:fillRef idx="3">
-            <a:schemeClr val="accent1"/>
-          </a:fillRef>
-          <a:effectRef idx="2">
-            <a:schemeClr val="accent1"/>
-          </a:effectRef>
-          <a:fontRef idx="minor">
-            <a:schemeClr val="lt1"/>
-          </a:fontRef>
-        </p:style>
-        <p:txBody>
-          <a:bodyPr rtlCol="0" anchor="ctr"/>
-          <a:lstStyle/>
-          <a:p>
-            <a:pPr algn="ctr"/>
-          </a:p>
-        </p:txBody>
-      </p:sp>
-      <p:sp>
-        <p:nvSpPr>
-          <p:cNvPr id="57" name="TextBox 56"/>
-          <p:cNvSpPr txBox="1"/>
-          <p:nvPr/>
-        </p:nvSpPr>
-        <p:spPr>
-          <a:xfrm>
-            <a:off x="8442197" y="4727448"/>
-            <a:ext cx="852678" cy="155448"/>
-          </a:xfrm>
-          <a:prstGeom prst="rect">
-            <a:avLst/>
-          </a:prstGeom>
-          <a:noFill/>
-        </p:spPr>
-        <p:txBody>
-          <a:bodyPr wrap="square" lIns="0" rIns="0" tIns="0" bIns="0">
-            <a:spAutoFit/>
-          </a:bodyPr>
-          <a:lstStyle/>
-          <a:p>
-            <a:pPr algn="ctr"/>
-            <a:r>
-              <a:rPr sz="900" b="1">
-                <a:solidFill>
-                  <a:srgbClr val="1E2761"/>
-                </a:solidFill>
-                <a:latin typeface="Aptos"/>
-              </a:rPr>
-              <a:t>0</a:t>
-            </a:r>
-          </a:p>
-        </p:txBody>
-      </p:sp>
-      <p:sp>
-        <p:nvSpPr>
-          <p:cNvPr id="58" name="Rounded Rectangle 57"/>
-          <p:cNvSpPr/>
-          <p:nvPr/>
-        </p:nvSpPr>
-        <p:spPr>
-          <a:xfrm>
-            <a:off x="9377172" y="4654296"/>
-            <a:ext cx="925830" cy="310896"/>
-          </a:xfrm>
-          <a:prstGeom prst="roundRect">
-            <a:avLst/>
-          </a:prstGeom>
-          <a:solidFill>
-            <a:srgbClr val="FAEEC8"/>
-          </a:solidFill>
-          <a:ln w="12700">
-            <a:solidFill>
-              <a:srgbClr val="FFFFFF"/>
-            </a:solidFill>
-          </a:ln>
-        </p:spPr>
-        <p:style>
-          <a:lnRef idx="1">
-            <a:schemeClr val="accent1"/>
-          </a:lnRef>
-          <a:fillRef idx="3">
-            <a:schemeClr val="accent1"/>
-          </a:fillRef>
-          <a:effectRef idx="2">
-            <a:schemeClr val="accent1"/>
-          </a:effectRef>
-          <a:fontRef idx="minor">
-            <a:schemeClr val="lt1"/>
-          </a:fontRef>
-        </p:style>
-        <p:txBody>
-          <a:bodyPr rtlCol="0" anchor="ctr"/>
-          <a:lstStyle/>
-          <a:p>
-            <a:pPr algn="ctr"/>
-          </a:p>
-        </p:txBody>
-      </p:sp>
-      <p:sp>
-        <p:nvSpPr>
-          <p:cNvPr id="59" name="TextBox 58"/>
-          <p:cNvSpPr txBox="1"/>
-          <p:nvPr/>
-        </p:nvSpPr>
-        <p:spPr>
-          <a:xfrm>
-            <a:off x="9413747" y="4727448"/>
-            <a:ext cx="852678" cy="155448"/>
-          </a:xfrm>
-          <a:prstGeom prst="rect">
-            <a:avLst/>
-          </a:prstGeom>
-          <a:noFill/>
-        </p:spPr>
-        <p:txBody>
-          <a:bodyPr wrap="square" lIns="0" rIns="0" tIns="0" bIns="0">
-            <a:spAutoFit/>
-          </a:bodyPr>
-          <a:lstStyle/>
-          <a:p>
-            <a:pPr algn="ctr"/>
-            <a:r>
-              <a:rPr sz="900" b="1">
-                <a:solidFill>
-                  <a:srgbClr val="1E2761"/>
-                </a:solidFill>
-                <a:latin typeface="Aptos"/>
-              </a:rPr>
-              <a:t>402</a:t>
-            </a:r>
-          </a:p>
-        </p:txBody>
-      </p:sp>
-      <p:sp>
-        <p:nvSpPr>
-          <p:cNvPr id="60" name="Rounded Rectangle 59"/>
-          <p:cNvSpPr/>
-          <p:nvPr/>
-        </p:nvSpPr>
-        <p:spPr>
-          <a:xfrm>
-            <a:off x="10348722" y="4654296"/>
-            <a:ext cx="925830" cy="310896"/>
-          </a:xfrm>
-          <a:prstGeom prst="roundRect">
-            <a:avLst/>
-          </a:prstGeom>
-          <a:solidFill>
-            <a:srgbClr val="F7CFCF"/>
-          </a:solidFill>
-          <a:ln w="12700">
-            <a:solidFill>
-              <a:srgbClr val="FFFFFF"/>
-            </a:solidFill>
-          </a:ln>
-        </p:spPr>
-        <p:style>
-          <a:lnRef idx="1">
-            <a:schemeClr val="accent1"/>
-          </a:lnRef>
-          <a:fillRef idx="3">
-            <a:schemeClr val="accent1"/>
-          </a:fillRef>
-          <a:effectRef idx="2">
-            <a:schemeClr val="accent1"/>
-          </a:effectRef>
-          <a:fontRef idx="minor">
-            <a:schemeClr val="lt1"/>
-          </a:fontRef>
-        </p:style>
-        <p:txBody>
-          <a:bodyPr rtlCol="0" anchor="ctr"/>
-          <a:lstStyle/>
-          <a:p>
-            <a:pPr algn="ctr"/>
-          </a:p>
-        </p:txBody>
-      </p:sp>
-      <p:sp>
-        <p:nvSpPr>
-          <p:cNvPr id="61" name="TextBox 60"/>
-          <p:cNvSpPr txBox="1"/>
-          <p:nvPr/>
-        </p:nvSpPr>
-        <p:spPr>
-          <a:xfrm>
-            <a:off x="10385297" y="4727448"/>
-            <a:ext cx="852678" cy="155448"/>
-          </a:xfrm>
-          <a:prstGeom prst="rect">
-            <a:avLst/>
-          </a:prstGeom>
-          <a:noFill/>
-        </p:spPr>
-        <p:txBody>
-          <a:bodyPr wrap="square" lIns="0" rIns="0" tIns="0" bIns="0">
-            <a:spAutoFit/>
-          </a:bodyPr>
-          <a:lstStyle/>
-          <a:p>
-            <a:pPr algn="ctr"/>
-            <a:r>
-              <a:rPr sz="900" b="1">
-                <a:solidFill>
-                  <a:srgbClr val="1E2761"/>
-                </a:solidFill>
-                <a:latin typeface="Aptos"/>
-              </a:rPr>
-              <a:t>0</a:t>
-            </a:r>
-          </a:p>
-        </p:txBody>
-      </p:sp>
-      <p:sp>
-        <p:nvSpPr>
-          <p:cNvPr id="62" name="TextBox 61"/>
-          <p:cNvSpPr txBox="1"/>
-          <p:nvPr/>
-        </p:nvSpPr>
-        <p:spPr>
-          <a:xfrm>
-            <a:off x="6373368" y="5111496"/>
-            <a:ext cx="868680" cy="155448"/>
-          </a:xfrm>
-          <a:prstGeom prst="rect">
-            <a:avLst/>
-          </a:prstGeom>
-          <a:noFill/>
-        </p:spPr>
-        <p:txBody>
-          <a:bodyPr wrap="square" lIns="0" rIns="0" tIns="0" bIns="0">
-            <a:spAutoFit/>
-          </a:bodyPr>
-          <a:lstStyle/>
-          <a:p>
-            <a:r>
-              <a:rPr sz="900" b="1">
-                <a:solidFill>
-                  <a:srgbClr val="1E2761"/>
-                </a:solidFill>
-                <a:latin typeface="Aptos"/>
-              </a:rPr>
-              <a:t>Tomcat</a:t>
-            </a:r>
-          </a:p>
-        </p:txBody>
-      </p:sp>
-      <p:sp>
-        <p:nvSpPr>
-          <p:cNvPr id="63" name="Rounded Rectangle 62"/>
-          <p:cNvSpPr/>
-          <p:nvPr/>
-        </p:nvSpPr>
-        <p:spPr>
-          <a:xfrm>
-            <a:off x="7434071" y="5038344"/>
-            <a:ext cx="925830" cy="310896"/>
-          </a:xfrm>
-          <a:prstGeom prst="roundRect">
-            <a:avLst/>
-          </a:prstGeom>
-          <a:solidFill>
-            <a:srgbClr val="E7EAEF"/>
-          </a:solidFill>
-          <a:ln w="12700">
-            <a:solidFill>
-              <a:srgbClr val="FFFFFF"/>
-            </a:solidFill>
-          </a:ln>
-        </p:spPr>
-        <p:style>
-          <a:lnRef idx="1">
-            <a:schemeClr val="accent1"/>
-          </a:lnRef>
-          <a:fillRef idx="3">
-            <a:schemeClr val="accent1"/>
-          </a:fillRef>
-          <a:effectRef idx="2">
-            <a:schemeClr val="accent1"/>
-          </a:effectRef>
-          <a:fontRef idx="minor">
-            <a:schemeClr val="lt1"/>
-          </a:fontRef>
-        </p:style>
-        <p:txBody>
-          <a:bodyPr rtlCol="0" anchor="ctr"/>
-          <a:lstStyle/>
-          <a:p>
-            <a:pPr algn="ctr"/>
-          </a:p>
-        </p:txBody>
-      </p:sp>
-      <p:sp>
-        <p:nvSpPr>
-          <p:cNvPr id="64" name="TextBox 63"/>
-          <p:cNvSpPr txBox="1"/>
-          <p:nvPr/>
-        </p:nvSpPr>
-        <p:spPr>
-          <a:xfrm>
-            <a:off x="7470647" y="5111496"/>
-            <a:ext cx="852678" cy="155448"/>
-          </a:xfrm>
-          <a:prstGeom prst="rect">
-            <a:avLst/>
-          </a:prstGeom>
-          <a:noFill/>
-        </p:spPr>
-        <p:txBody>
-          <a:bodyPr wrap="square" lIns="0" rIns="0" tIns="0" bIns="0">
-            <a:spAutoFit/>
-          </a:bodyPr>
-          <a:lstStyle/>
-          <a:p>
-            <a:pPr algn="ctr"/>
-            <a:r>
-              <a:rPr sz="900" b="1">
-                <a:solidFill>
-                  <a:srgbClr val="1E2761"/>
-                </a:solidFill>
-                <a:latin typeface="Aptos"/>
-              </a:rPr>
-              <a:t>0</a:t>
-            </a:r>
-          </a:p>
-        </p:txBody>
-      </p:sp>
-      <p:sp>
-        <p:nvSpPr>
-          <p:cNvPr id="65" name="Rounded Rectangle 64"/>
-          <p:cNvSpPr/>
-          <p:nvPr/>
-        </p:nvSpPr>
-        <p:spPr>
-          <a:xfrm>
-            <a:off x="8405622" y="5038344"/>
-            <a:ext cx="925830" cy="310896"/>
-          </a:xfrm>
-          <a:prstGeom prst="roundRect">
-            <a:avLst/>
-          </a:prstGeom>
-          <a:solidFill>
-            <a:srgbClr val="CEE5CE"/>
-          </a:solidFill>
-          <a:ln w="12700">
-            <a:solidFill>
-              <a:srgbClr val="FFFFFF"/>
-            </a:solidFill>
-          </a:ln>
-        </p:spPr>
-        <p:style>
-          <a:lnRef idx="1">
-            <a:schemeClr val="accent1"/>
-          </a:lnRef>
-          <a:fillRef idx="3">
-            <a:schemeClr val="accent1"/>
-          </a:fillRef>
-          <a:effectRef idx="2">
-            <a:schemeClr val="accent1"/>
-          </a:effectRef>
-          <a:fontRef idx="minor">
-            <a:schemeClr val="lt1"/>
-          </a:fontRef>
-        </p:style>
-        <p:txBody>
-          <a:bodyPr rtlCol="0" anchor="ctr"/>
-          <a:lstStyle/>
-          <a:p>
-            <a:pPr algn="ctr"/>
-          </a:p>
-        </p:txBody>
-      </p:sp>
-      <p:sp>
-        <p:nvSpPr>
-          <p:cNvPr id="66" name="TextBox 65"/>
-          <p:cNvSpPr txBox="1"/>
-          <p:nvPr/>
-        </p:nvSpPr>
-        <p:spPr>
-          <a:xfrm>
-            <a:off x="8442197" y="5111496"/>
-            <a:ext cx="852678" cy="155448"/>
-          </a:xfrm>
-          <a:prstGeom prst="rect">
-            <a:avLst/>
-          </a:prstGeom>
-          <a:noFill/>
-        </p:spPr>
-        <p:txBody>
-          <a:bodyPr wrap="square" lIns="0" rIns="0" tIns="0" bIns="0">
-            <a:spAutoFit/>
-          </a:bodyPr>
-          <a:lstStyle/>
-          <a:p>
-            <a:pPr algn="ctr"/>
-            <a:r>
-              <a:rPr sz="900" b="1">
-                <a:solidFill>
-                  <a:srgbClr val="1E2761"/>
-                </a:solidFill>
-                <a:latin typeface="Aptos"/>
-              </a:rPr>
-              <a:t>0</a:t>
-            </a:r>
-          </a:p>
-        </p:txBody>
-      </p:sp>
-      <p:sp>
-        <p:nvSpPr>
-          <p:cNvPr id="67" name="Rounded Rectangle 66"/>
-          <p:cNvSpPr/>
-          <p:nvPr/>
-        </p:nvSpPr>
-        <p:spPr>
-          <a:xfrm>
-            <a:off x="9377172" y="5038344"/>
-            <a:ext cx="925830" cy="310896"/>
-          </a:xfrm>
-          <a:prstGeom prst="roundRect">
-            <a:avLst/>
-          </a:prstGeom>
-          <a:solidFill>
-            <a:srgbClr val="FAEEC8"/>
-          </a:solidFill>
-          <a:ln w="12700">
-            <a:solidFill>
-              <a:srgbClr val="FFFFFF"/>
-            </a:solidFill>
-          </a:ln>
-        </p:spPr>
-        <p:style>
-          <a:lnRef idx="1">
-            <a:schemeClr val="accent1"/>
-          </a:lnRef>
-          <a:fillRef idx="3">
-            <a:schemeClr val="accent1"/>
-          </a:fillRef>
-          <a:effectRef idx="2">
-            <a:schemeClr val="accent1"/>
-          </a:effectRef>
-          <a:fontRef idx="minor">
-            <a:schemeClr val="lt1"/>
-          </a:fontRef>
-        </p:style>
-        <p:txBody>
-          <a:bodyPr rtlCol="0" anchor="ctr"/>
-          <a:lstStyle/>
-          <a:p>
-            <a:pPr algn="ctr"/>
-          </a:p>
-        </p:txBody>
-      </p:sp>
-      <p:sp>
-        <p:nvSpPr>
-          <p:cNvPr id="68" name="TextBox 67"/>
-          <p:cNvSpPr txBox="1"/>
-          <p:nvPr/>
-        </p:nvSpPr>
-        <p:spPr>
-          <a:xfrm>
-            <a:off x="9413747" y="5111496"/>
-            <a:ext cx="852678" cy="155448"/>
-          </a:xfrm>
-          <a:prstGeom prst="rect">
-            <a:avLst/>
-          </a:prstGeom>
-          <a:noFill/>
-        </p:spPr>
-        <p:txBody>
-          <a:bodyPr wrap="square" lIns="0" rIns="0" tIns="0" bIns="0">
-            <a:spAutoFit/>
-          </a:bodyPr>
-          <a:lstStyle/>
-          <a:p>
-            <a:pPr algn="ctr"/>
-            <a:r>
-              <a:rPr sz="900" b="1">
-                <a:solidFill>
-                  <a:srgbClr val="1E2761"/>
-                </a:solidFill>
-                <a:latin typeface="Aptos"/>
-              </a:rPr>
-              <a:t>0</a:t>
-            </a:r>
-          </a:p>
-        </p:txBody>
-      </p:sp>
-      <p:sp>
-        <p:nvSpPr>
-          <p:cNvPr id="69" name="Rounded Rectangle 68"/>
-          <p:cNvSpPr/>
-          <p:nvPr/>
-        </p:nvSpPr>
-        <p:spPr>
-          <a:xfrm>
-            <a:off x="10348722" y="5038344"/>
-            <a:ext cx="925830" cy="310896"/>
-          </a:xfrm>
-          <a:prstGeom prst="roundRect">
-            <a:avLst/>
-          </a:prstGeom>
-          <a:solidFill>
-            <a:srgbClr val="F7CFCF"/>
-          </a:solidFill>
-          <a:ln w="12700">
-            <a:solidFill>
-              <a:srgbClr val="FFFFFF"/>
-            </a:solidFill>
-          </a:ln>
-        </p:spPr>
-        <p:style>
-          <a:lnRef idx="1">
-            <a:schemeClr val="accent1"/>
-          </a:lnRef>
-          <a:fillRef idx="3">
-            <a:schemeClr val="accent1"/>
-          </a:fillRef>
-          <a:effectRef idx="2">
-            <a:schemeClr val="accent1"/>
-          </a:effectRef>
-          <a:fontRef idx="minor">
-            <a:schemeClr val="lt1"/>
-          </a:fontRef>
-        </p:style>
-        <p:txBody>
-          <a:bodyPr rtlCol="0" anchor="ctr"/>
-          <a:lstStyle/>
-          <a:p>
-            <a:pPr algn="ctr"/>
-          </a:p>
-        </p:txBody>
-      </p:sp>
-      <p:sp>
-        <p:nvSpPr>
-          <p:cNvPr id="70" name="TextBox 69"/>
-          <p:cNvSpPr txBox="1"/>
-          <p:nvPr/>
-        </p:nvSpPr>
-        <p:spPr>
-          <a:xfrm>
-            <a:off x="10385297" y="5111496"/>
-            <a:ext cx="852678" cy="155448"/>
-          </a:xfrm>
-          <a:prstGeom prst="rect">
-            <a:avLst/>
-          </a:prstGeom>
-          <a:noFill/>
-        </p:spPr>
-        <p:txBody>
-          <a:bodyPr wrap="square" lIns="0" rIns="0" tIns="0" bIns="0">
-            <a:spAutoFit/>
-          </a:bodyPr>
-          <a:lstStyle/>
-          <a:p>
-            <a:pPr algn="ctr"/>
-            <a:r>
-              <a:rPr sz="900" b="1">
-                <a:solidFill>
-                  <a:srgbClr val="1E2761"/>
-                </a:solidFill>
-                <a:latin typeface="Aptos"/>
-              </a:rPr>
-              <a:t>0</a:t>
-            </a:r>
-          </a:p>
-        </p:txBody>
-      </p:sp>
-      <p:sp>
-        <p:nvSpPr>
-          <p:cNvPr id="71" name="TextBox 70"/>
-          <p:cNvSpPr txBox="1"/>
-          <p:nvPr/>
-        </p:nvSpPr>
-        <p:spPr>
-          <a:xfrm>
-            <a:off x="6373368" y="5495544"/>
-            <a:ext cx="868680" cy="155448"/>
-          </a:xfrm>
-          <a:prstGeom prst="rect">
-            <a:avLst/>
-          </a:prstGeom>
-          <a:noFill/>
-        </p:spPr>
-        <p:txBody>
-          <a:bodyPr wrap="square" lIns="0" rIns="0" tIns="0" bIns="0">
-            <a:spAutoFit/>
-          </a:bodyPr>
-          <a:lstStyle/>
-          <a:p>
-            <a:r>
-              <a:rPr sz="900" b="1">
-                <a:solidFill>
-                  <a:srgbClr val="1E2761"/>
-                </a:solidFill>
-                <a:latin typeface="Aptos"/>
-              </a:rPr>
-              <a:t>Total</a:t>
-            </a:r>
-          </a:p>
-        </p:txBody>
-      </p:sp>
-      <p:sp>
-        <p:nvSpPr>
-          <p:cNvPr id="72" name="Rounded Rectangle 71"/>
-          <p:cNvSpPr/>
-          <p:nvPr/>
-        </p:nvSpPr>
-        <p:spPr>
-          <a:xfrm>
-            <a:off x="7434071" y="5422392"/>
-            <a:ext cx="925830" cy="310896"/>
-          </a:xfrm>
-          <a:prstGeom prst="roundRect">
-            <a:avLst/>
-          </a:prstGeom>
-          <a:solidFill>
-            <a:srgbClr val="94A3B8"/>
-          </a:solidFill>
-          <a:ln w="12700">
-            <a:solidFill>
-              <a:srgbClr val="FFFFFF"/>
-            </a:solidFill>
-          </a:ln>
-        </p:spPr>
-        <p:style>
-          <a:lnRef idx="1">
-            <a:schemeClr val="accent1"/>
-          </a:lnRef>
-          <a:fillRef idx="3">
-            <a:schemeClr val="accent1"/>
-          </a:fillRef>
-          <a:effectRef idx="2">
-            <a:schemeClr val="accent1"/>
-          </a:effectRef>
-          <a:fontRef idx="minor">
-            <a:schemeClr val="lt1"/>
-          </a:fontRef>
-        </p:style>
-        <p:txBody>
-          <a:bodyPr rtlCol="0" anchor="ctr"/>
-          <a:lstStyle/>
-          <a:p>
-            <a:pPr algn="ctr"/>
-          </a:p>
-        </p:txBody>
-      </p:sp>
-      <p:sp>
-        <p:nvSpPr>
-          <p:cNvPr id="73" name="TextBox 72"/>
-          <p:cNvSpPr txBox="1"/>
-          <p:nvPr/>
-        </p:nvSpPr>
-        <p:spPr>
-          <a:xfrm>
-            <a:off x="7470647" y="5495544"/>
-            <a:ext cx="852678" cy="155448"/>
-          </a:xfrm>
-          <a:prstGeom prst="rect">
-            <a:avLst/>
-          </a:prstGeom>
-          <a:noFill/>
-        </p:spPr>
-        <p:txBody>
-          <a:bodyPr wrap="square" lIns="0" rIns="0" tIns="0" bIns="0">
-            <a:spAutoFit/>
-          </a:bodyPr>
-          <a:lstStyle/>
-          <a:p>
-            <a:pPr algn="ctr"/>
-            <a:r>
-              <a:rPr sz="900" b="1">
-                <a:solidFill>
-                  <a:srgbClr val="FFFFFF"/>
-                </a:solidFill>
-                <a:latin typeface="Aptos"/>
-              </a:rPr>
-              <a:t>0</a:t>
-            </a:r>
-          </a:p>
-        </p:txBody>
-      </p:sp>
-      <p:sp>
-        <p:nvSpPr>
-          <p:cNvPr id="74" name="Rounded Rectangle 73"/>
-          <p:cNvSpPr/>
-          <p:nvPr/>
-        </p:nvSpPr>
-        <p:spPr>
-          <a:xfrm>
-            <a:off x="8405622" y="5422392"/>
-            <a:ext cx="925830" cy="310896"/>
-          </a:xfrm>
-          <a:prstGeom prst="roundRect">
-            <a:avLst/>
-          </a:prstGeom>
-          <a:solidFill>
-            <a:srgbClr val="228B22"/>
-          </a:solidFill>
-          <a:ln w="12700">
-            <a:solidFill>
-              <a:srgbClr val="FFFFFF"/>
-            </a:solidFill>
-          </a:ln>
-        </p:spPr>
-        <p:style>
-          <a:lnRef idx="1">
-            <a:schemeClr val="accent1"/>
-          </a:lnRef>
-          <a:fillRef idx="3">
-            <a:schemeClr val="accent1"/>
-          </a:fillRef>
-          <a:effectRef idx="2">
-            <a:schemeClr val="accent1"/>
-          </a:effectRef>
-          <a:fontRef idx="minor">
-            <a:schemeClr val="lt1"/>
-          </a:fontRef>
-        </p:style>
-        <p:txBody>
-          <a:bodyPr rtlCol="0" anchor="ctr"/>
-          <a:lstStyle/>
-          <a:p>
-            <a:pPr algn="ctr"/>
-          </a:p>
-        </p:txBody>
-      </p:sp>
-      <p:sp>
-        <p:nvSpPr>
-          <p:cNvPr id="75" name="TextBox 74"/>
-          <p:cNvSpPr txBox="1"/>
-          <p:nvPr/>
-        </p:nvSpPr>
-        <p:spPr>
-          <a:xfrm>
-            <a:off x="8442197" y="5495544"/>
-            <a:ext cx="852678" cy="155448"/>
-          </a:xfrm>
-          <a:prstGeom prst="rect">
-            <a:avLst/>
-          </a:prstGeom>
-          <a:noFill/>
-        </p:spPr>
-        <p:txBody>
-          <a:bodyPr wrap="square" lIns="0" rIns="0" tIns="0" bIns="0">
-            <a:spAutoFit/>
-          </a:bodyPr>
-          <a:lstStyle/>
-          <a:p>
-            <a:pPr algn="ctr"/>
-            <a:r>
-              <a:rPr sz="900" b="1">
-                <a:solidFill>
-                  <a:srgbClr val="FFFFFF"/>
-                </a:solidFill>
-                <a:latin typeface="Aptos"/>
-              </a:rPr>
-              <a:t>0</a:t>
-            </a:r>
-          </a:p>
-        </p:txBody>
-      </p:sp>
-      <p:sp>
-        <p:nvSpPr>
-          <p:cNvPr id="76" name="Rounded Rectangle 75"/>
-          <p:cNvSpPr/>
-          <p:nvPr/>
-        </p:nvSpPr>
-        <p:spPr>
-          <a:xfrm>
-            <a:off x="9377172" y="5422392"/>
-            <a:ext cx="925830" cy="310896"/>
-          </a:xfrm>
-          <a:prstGeom prst="roundRect">
-            <a:avLst/>
-          </a:prstGeom>
-          <a:solidFill>
-            <a:srgbClr val="EAB308"/>
-          </a:solidFill>
-          <a:ln w="12700">
-            <a:solidFill>
-              <a:srgbClr val="FFFFFF"/>
-            </a:solidFill>
-          </a:ln>
-        </p:spPr>
-        <p:style>
-          <a:lnRef idx="1">
-            <a:schemeClr val="accent1"/>
-          </a:lnRef>
-          <a:fillRef idx="3">
-            <a:schemeClr val="accent1"/>
-          </a:fillRef>
-          <a:effectRef idx="2">
-            <a:schemeClr val="accent1"/>
-          </a:effectRef>
-          <a:fontRef idx="minor">
-            <a:schemeClr val="lt1"/>
-          </a:fontRef>
-        </p:style>
-        <p:txBody>
-          <a:bodyPr rtlCol="0" anchor="ctr"/>
-          <a:lstStyle/>
-          <a:p>
-            <a:pPr algn="ctr"/>
-          </a:p>
-        </p:txBody>
-      </p:sp>
-      <p:sp>
-        <p:nvSpPr>
           <p:cNvPr id="77" name="TextBox 76"/>
-          <p:cNvSpPr txBox="1"/>
-          <p:nvPr/>
-        </p:nvSpPr>
-        <p:spPr>
-          <a:xfrm>
-            <a:off x="9413747" y="5495544"/>
-            <a:ext cx="852678" cy="155448"/>
-          </a:xfrm>
-          <a:prstGeom prst="rect">
-            <a:avLst/>
-          </a:prstGeom>
-          <a:noFill/>
-        </p:spPr>
-        <p:txBody>
-          <a:bodyPr wrap="square" lIns="0" rIns="0" tIns="0" bIns="0">
-            <a:spAutoFit/>
-          </a:bodyPr>
-          <a:lstStyle/>
-          <a:p>
-            <a:pPr algn="ctr"/>
-            <a:r>
-              <a:rPr sz="900" b="1">
-                <a:solidFill>
-                  <a:srgbClr val="1E2761"/>
-                </a:solidFill>
-                <a:latin typeface="Aptos"/>
-              </a:rPr>
-              <a:t>402</a:t>
-            </a:r>
-          </a:p>
-        </p:txBody>
-      </p:sp>
-      <p:sp>
-        <p:nvSpPr>
-          <p:cNvPr id="78" name="Rounded Rectangle 77"/>
-          <p:cNvSpPr/>
-          <p:nvPr/>
-        </p:nvSpPr>
-        <p:spPr>
-          <a:xfrm>
-            <a:off x="10348722" y="5422392"/>
-            <a:ext cx="925830" cy="310896"/>
-          </a:xfrm>
-          <a:prstGeom prst="roundRect">
-            <a:avLst/>
-          </a:prstGeom>
-          <a:solidFill>
-            <a:srgbClr val="DC2626"/>
-          </a:solidFill>
-          <a:ln w="12700">
-            <a:solidFill>
-              <a:srgbClr val="FFFFFF"/>
-            </a:solidFill>
-          </a:ln>
-        </p:spPr>
-        <p:style>
-          <a:lnRef idx="1">
-            <a:schemeClr val="accent1"/>
-          </a:lnRef>
-          <a:fillRef idx="3">
-            <a:schemeClr val="accent1"/>
-          </a:fillRef>
-          <a:effectRef idx="2">
-            <a:schemeClr val="accent1"/>
-          </a:effectRef>
-          <a:fontRef idx="minor">
-            <a:schemeClr val="lt1"/>
-          </a:fontRef>
-        </p:style>
-        <p:txBody>
-          <a:bodyPr rtlCol="0" anchor="ctr"/>
-          <a:lstStyle/>
-          <a:p>
-            <a:pPr algn="ctr"/>
-          </a:p>
-        </p:txBody>
-      </p:sp>
-      <p:sp>
-        <p:nvSpPr>
-          <p:cNvPr id="79" name="TextBox 78"/>
           <p:cNvSpPr txBox="1"/>
           <p:nvPr/>
         </p:nvSpPr>
@@ -6580,7 +6489,7 @@
       </p:sp>
       <p:sp>
         <p:nvSpPr>
-          <p:cNvPr id="80" name="TextBox 79"/>
+          <p:cNvPr id="78" name="TextBox 77"/>
           <p:cNvSpPr txBox="1"/>
           <p:nvPr/>
         </p:nvSpPr>
@@ -6714,8 +6623,8 @@
         </p:nvSpPr>
         <p:spPr>
           <a:xfrm>
-            <a:off x="777240" y="1143000"/>
-            <a:ext cx="2148840" cy="1234440"/>
+            <a:off x="2148840" y="1143000"/>
+            <a:ext cx="7863840" cy="4526280"/>
           </a:xfrm>
           <a:prstGeom prst="roundRect">
             <a:avLst/>
@@ -6759,8 +6668,8 @@
         </p:nvSpPr>
         <p:spPr>
           <a:xfrm>
-            <a:off x="777240" y="1143000"/>
-            <a:ext cx="2148840" cy="73152"/>
+            <a:off x="2148840" y="1143000"/>
+            <a:ext cx="7863840" cy="73152"/>
           </a:xfrm>
           <a:prstGeom prst="rect">
             <a:avLst/>
@@ -6802,824 +6711,59 @@
         </p:nvSpPr>
         <p:spPr>
           <a:xfrm>
-            <a:off x="932688" y="1417320"/>
-            <a:ext cx="1837944" cy="365760"/>
-          </a:xfrm>
-          <a:prstGeom prst="rect">
-            <a:avLst/>
-          </a:prstGeom>
-          <a:noFill/>
-        </p:spPr>
-        <p:txBody>
-          <a:bodyPr wrap="square" lIns="0" rIns="0" tIns="0" bIns="0">
-            <a:spAutoFit/>
-          </a:bodyPr>
-          <a:lstStyle/>
-          <a:p>
-            <a:r>
-              <a:rPr sz="3400" b="1">
+            <a:off x="2286000" y="1271016"/>
+            <a:ext cx="7589519" cy="274320"/>
+          </a:xfrm>
+          <a:prstGeom prst="rect">
+            <a:avLst/>
+          </a:prstGeom>
+          <a:noFill/>
+        </p:spPr>
+        <p:txBody>
+          <a:bodyPr wrap="square" lIns="0" rIns="0" tIns="0" bIns="0">
+            <a:spAutoFit/>
+          </a:bodyPr>
+          <a:lstStyle/>
+          <a:p>
+            <a:r>
+              <a:rPr sz="1700" b="1">
                 <a:solidFill>
                   <a:srgbClr val="1E2761"/>
                 </a:solidFill>
                 <a:latin typeface="Aptos"/>
               </a:rPr>
-              <a:t>870</a:t>
-            </a:r>
-          </a:p>
-        </p:txBody>
-      </p:sp>
-      <p:sp>
-        <p:nvSpPr>
-          <p:cNvPr id="7" name="TextBox 6"/>
-          <p:cNvSpPr txBox="1"/>
-          <p:nvPr/>
-        </p:nvSpPr>
-        <p:spPr>
-          <a:xfrm>
-            <a:off x="932688" y="1892807"/>
-            <a:ext cx="1837944" cy="274320"/>
-          </a:xfrm>
-          <a:prstGeom prst="rect">
-            <a:avLst/>
-          </a:prstGeom>
-          <a:noFill/>
-        </p:spPr>
-        <p:txBody>
-          <a:bodyPr wrap="square" lIns="0" rIns="0" tIns="0" bIns="0">
-            <a:spAutoFit/>
-          </a:bodyPr>
-          <a:lstStyle/>
-          <a:p>
-            <a:r>
-              <a:rPr sz="1100" b="1">
-                <a:solidFill>
-                  <a:srgbClr val="36454F"/>
-                </a:solidFill>
-                <a:latin typeface="Aptos"/>
-              </a:rPr>
-              <a:t>Total webapps</a:t>
-            </a:r>
-          </a:p>
-        </p:txBody>
-      </p:sp>
+              <a:t>Webapp type distribution</a:t>
+            </a:r>
+          </a:p>
+        </p:txBody>
+      </p:sp>
+      <p:pic>
+        <p:nvPicPr>
+          <p:cNvPr id="7" name="Picture 6" descr="webapp-type-distribution.png"/>
+          <p:cNvPicPr>
+            <a:picLocks noChangeAspect="1"/>
+          </p:cNvPicPr>
+          <p:nvPr/>
+        </p:nvPicPr>
+        <p:blipFill>
+          <a:blip r:embed="rId2"/>
+          <a:stretch>
+            <a:fillRect/>
+          </a:stretch>
+        </p:blipFill>
+        <p:spPr>
+          <a:xfrm>
+            <a:off x="2971800" y="1627632"/>
+            <a:ext cx="6126480" cy="3611880"/>
+          </a:xfrm>
+          <a:prstGeom prst="rect">
+            <a:avLst/>
+          </a:prstGeom>
+        </p:spPr>
+      </p:pic>
       <p:sp>
         <p:nvSpPr>
           <p:cNvPr id="8" name="TextBox 7"/>
-          <p:cNvSpPr txBox="1"/>
-          <p:nvPr/>
-        </p:nvSpPr>
-        <p:spPr>
-          <a:xfrm>
-            <a:off x="3063240" y="1389888"/>
-            <a:ext cx="1554480" cy="164592"/>
-          </a:xfrm>
-          <a:prstGeom prst="rect">
-            <a:avLst/>
-          </a:prstGeom>
-          <a:noFill/>
-        </p:spPr>
-        <p:txBody>
-          <a:bodyPr wrap="square" lIns="0" rIns="0" tIns="0" bIns="0">
-            <a:spAutoFit/>
-          </a:bodyPr>
-          <a:lstStyle/>
-          <a:p>
-            <a:r>
-              <a:rPr sz="1000" b="0">
-                <a:solidFill>
-                  <a:srgbClr val="36454F"/>
-                </a:solidFill>
-                <a:latin typeface="Aptos"/>
-              </a:rPr>
-              <a:t>IIS Web Applications</a:t>
-            </a:r>
-          </a:p>
-        </p:txBody>
-      </p:sp>
-      <p:sp>
-        <p:nvSpPr>
-          <p:cNvPr id="9" name="Rectangle 8"/>
-          <p:cNvSpPr/>
-          <p:nvPr/>
-        </p:nvSpPr>
-        <p:spPr>
-          <a:xfrm>
-            <a:off x="4709160" y="1417320"/>
-            <a:ext cx="5943600" cy="137160"/>
-          </a:xfrm>
-          <a:prstGeom prst="rect">
-            <a:avLst/>
-          </a:prstGeom>
-          <a:solidFill>
-            <a:srgbClr val="F1F5F9"/>
-          </a:solidFill>
-          <a:ln>
-            <a:noFill/>
-          </a:ln>
-        </p:spPr>
-        <p:style>
-          <a:lnRef idx="1">
-            <a:schemeClr val="accent1"/>
-          </a:lnRef>
-          <a:fillRef idx="3">
-            <a:schemeClr val="accent1"/>
-          </a:fillRef>
-          <a:effectRef idx="2">
-            <a:schemeClr val="accent1"/>
-          </a:effectRef>
-          <a:fontRef idx="minor">
-            <a:schemeClr val="lt1"/>
-          </a:fontRef>
-        </p:style>
-        <p:txBody>
-          <a:bodyPr rtlCol="0" anchor="ctr"/>
-          <a:lstStyle/>
-          <a:p>
-            <a:pPr algn="ctr"/>
-          </a:p>
-        </p:txBody>
-      </p:sp>
-      <p:sp>
-        <p:nvSpPr>
-          <p:cNvPr id="10" name="Rectangle 9"/>
-          <p:cNvSpPr/>
-          <p:nvPr/>
-        </p:nvSpPr>
-        <p:spPr>
-          <a:xfrm>
-            <a:off x="4709160" y="1417320"/>
-            <a:ext cx="5943600" cy="137160"/>
-          </a:xfrm>
-          <a:prstGeom prst="rect">
-            <a:avLst/>
-          </a:prstGeom>
-          <a:solidFill>
-            <a:srgbClr val="028090"/>
-          </a:solidFill>
-          <a:ln>
-            <a:noFill/>
-          </a:ln>
-        </p:spPr>
-        <p:style>
-          <a:lnRef idx="1">
-            <a:schemeClr val="accent1"/>
-          </a:lnRef>
-          <a:fillRef idx="3">
-            <a:schemeClr val="accent1"/>
-          </a:fillRef>
-          <a:effectRef idx="2">
-            <a:schemeClr val="accent1"/>
-          </a:effectRef>
-          <a:fontRef idx="minor">
-            <a:schemeClr val="lt1"/>
-          </a:fontRef>
-        </p:style>
-        <p:txBody>
-          <a:bodyPr rtlCol="0" anchor="ctr"/>
-          <a:lstStyle/>
-          <a:p>
-            <a:pPr algn="ctr"/>
-          </a:p>
-        </p:txBody>
-      </p:sp>
-      <p:sp>
-        <p:nvSpPr>
-          <p:cNvPr id="11" name="TextBox 10"/>
-          <p:cNvSpPr txBox="1"/>
-          <p:nvPr/>
-        </p:nvSpPr>
-        <p:spPr>
-          <a:xfrm>
-            <a:off x="10789920" y="1389888"/>
-            <a:ext cx="457200" cy="164592"/>
-          </a:xfrm>
-          <a:prstGeom prst="rect">
-            <a:avLst/>
-          </a:prstGeom>
-          <a:noFill/>
-        </p:spPr>
-        <p:txBody>
-          <a:bodyPr wrap="square" lIns="0" rIns="0" tIns="0" bIns="0">
-            <a:spAutoFit/>
-          </a:bodyPr>
-          <a:lstStyle/>
-          <a:p>
-            <a:pPr algn="r"/>
-            <a:r>
-              <a:rPr sz="1000" b="1">
-                <a:solidFill>
-                  <a:srgbClr val="1E2761"/>
-                </a:solidFill>
-                <a:latin typeface="Aptos"/>
-              </a:rPr>
-              <a:t>866</a:t>
-            </a:r>
-          </a:p>
-        </p:txBody>
-      </p:sp>
-      <p:sp>
-        <p:nvSpPr>
-          <p:cNvPr id="12" name="TextBox 11"/>
-          <p:cNvSpPr txBox="1"/>
-          <p:nvPr/>
-        </p:nvSpPr>
-        <p:spPr>
-          <a:xfrm>
-            <a:off x="3063240" y="1645920"/>
-            <a:ext cx="1554480" cy="164592"/>
-          </a:xfrm>
-          <a:prstGeom prst="rect">
-            <a:avLst/>
-          </a:prstGeom>
-          <a:noFill/>
-        </p:spPr>
-        <p:txBody>
-          <a:bodyPr wrap="square" lIns="0" rIns="0" tIns="0" bIns="0">
-            <a:spAutoFit/>
-          </a:bodyPr>
-          <a:lstStyle/>
-          <a:p>
-            <a:r>
-              <a:rPr sz="1000" b="0">
-                <a:solidFill>
-                  <a:srgbClr val="36454F"/>
-                </a:solidFill>
-                <a:latin typeface="Aptos"/>
-              </a:rPr>
-              <a:t>Tomcat Web Applications</a:t>
-            </a:r>
-          </a:p>
-        </p:txBody>
-      </p:sp>
-      <p:sp>
-        <p:nvSpPr>
-          <p:cNvPr id="13" name="Rectangle 12"/>
-          <p:cNvSpPr/>
-          <p:nvPr/>
-        </p:nvSpPr>
-        <p:spPr>
-          <a:xfrm>
-            <a:off x="4709160" y="1673352"/>
-            <a:ext cx="5943600" cy="137160"/>
-          </a:xfrm>
-          <a:prstGeom prst="rect">
-            <a:avLst/>
-          </a:prstGeom>
-          <a:solidFill>
-            <a:srgbClr val="F1F5F9"/>
-          </a:solidFill>
-          <a:ln>
-            <a:noFill/>
-          </a:ln>
-        </p:spPr>
-        <p:style>
-          <a:lnRef idx="1">
-            <a:schemeClr val="accent1"/>
-          </a:lnRef>
-          <a:fillRef idx="3">
-            <a:schemeClr val="accent1"/>
-          </a:fillRef>
-          <a:effectRef idx="2">
-            <a:schemeClr val="accent1"/>
-          </a:effectRef>
-          <a:fontRef idx="minor">
-            <a:schemeClr val="lt1"/>
-          </a:fontRef>
-        </p:style>
-        <p:txBody>
-          <a:bodyPr rtlCol="0" anchor="ctr"/>
-          <a:lstStyle/>
-          <a:p>
-            <a:pPr algn="ctr"/>
-          </a:p>
-        </p:txBody>
-      </p:sp>
-      <p:sp>
-        <p:nvSpPr>
-          <p:cNvPr id="14" name="Rectangle 13"/>
-          <p:cNvSpPr/>
-          <p:nvPr/>
-        </p:nvSpPr>
-        <p:spPr>
-          <a:xfrm>
-            <a:off x="4709160" y="1673352"/>
-            <a:ext cx="27453" cy="137160"/>
-          </a:xfrm>
-          <a:prstGeom prst="rect">
-            <a:avLst/>
-          </a:prstGeom>
-          <a:solidFill>
-            <a:srgbClr val="028090"/>
-          </a:solidFill>
-          <a:ln>
-            <a:noFill/>
-          </a:ln>
-        </p:spPr>
-        <p:style>
-          <a:lnRef idx="1">
-            <a:schemeClr val="accent1"/>
-          </a:lnRef>
-          <a:fillRef idx="3">
-            <a:schemeClr val="accent1"/>
-          </a:fillRef>
-          <a:effectRef idx="2">
-            <a:schemeClr val="accent1"/>
-          </a:effectRef>
-          <a:fontRef idx="minor">
-            <a:schemeClr val="lt1"/>
-          </a:fontRef>
-        </p:style>
-        <p:txBody>
-          <a:bodyPr rtlCol="0" anchor="ctr"/>
-          <a:lstStyle/>
-          <a:p>
-            <a:pPr algn="ctr"/>
-          </a:p>
-        </p:txBody>
-      </p:sp>
-      <p:sp>
-        <p:nvSpPr>
-          <p:cNvPr id="15" name="TextBox 14"/>
-          <p:cNvSpPr txBox="1"/>
-          <p:nvPr/>
-        </p:nvSpPr>
-        <p:spPr>
-          <a:xfrm>
-            <a:off x="10789920" y="1645920"/>
-            <a:ext cx="457200" cy="164592"/>
-          </a:xfrm>
-          <a:prstGeom prst="rect">
-            <a:avLst/>
-          </a:prstGeom>
-          <a:noFill/>
-        </p:spPr>
-        <p:txBody>
-          <a:bodyPr wrap="square" lIns="0" rIns="0" tIns="0" bIns="0">
-            <a:spAutoFit/>
-          </a:bodyPr>
-          <a:lstStyle/>
-          <a:p>
-            <a:pPr algn="r"/>
-            <a:r>
-              <a:rPr sz="1000" b="1">
-                <a:solidFill>
-                  <a:srgbClr val="1E2761"/>
-                </a:solidFill>
-                <a:latin typeface="Aptos"/>
-              </a:rPr>
-              <a:t>4</a:t>
-            </a:r>
-          </a:p>
-        </p:txBody>
-      </p:sp>
-      <p:sp>
-        <p:nvSpPr>
-          <p:cNvPr id="16" name="Rounded Rectangle 15"/>
-          <p:cNvSpPr/>
-          <p:nvPr/>
-        </p:nvSpPr>
-        <p:spPr>
-          <a:xfrm>
-            <a:off x="1645920" y="2971800"/>
-            <a:ext cx="8412480" cy="2377440"/>
-          </a:xfrm>
-          <a:prstGeom prst="roundRect">
-            <a:avLst/>
-          </a:prstGeom>
-          <a:solidFill>
-            <a:srgbClr val="FFFFFF"/>
-          </a:solidFill>
-          <a:ln w="12700">
-            <a:solidFill>
-              <a:srgbClr val="DAE2EE"/>
-            </a:solidFill>
-          </a:ln>
-        </p:spPr>
-        <p:style>
-          <a:lnRef idx="1">
-            <a:schemeClr val="accent1"/>
-          </a:lnRef>
-          <a:fillRef idx="3">
-            <a:schemeClr val="accent1"/>
-          </a:fillRef>
-          <a:effectRef idx="2">
-            <a:schemeClr val="accent1"/>
-          </a:effectRef>
-          <a:fontRef idx="minor">
-            <a:schemeClr val="lt1"/>
-          </a:fontRef>
-        </p:style>
-        <p:txBody>
-          <a:bodyPr rtlCol="0" anchor="ctr"/>
-          <a:lstStyle/>
-          <a:p>
-            <a:pPr algn="ctr"/>
-          </a:p>
-        </p:txBody>
-      </p:sp>
-      <p:sp>
-        <p:nvSpPr>
-          <p:cNvPr id="17" name="Rectangle 16"/>
-          <p:cNvSpPr/>
-          <p:nvPr/>
-        </p:nvSpPr>
-        <p:spPr>
-          <a:xfrm>
-            <a:off x="1645920" y="2971800"/>
-            <a:ext cx="8412480" cy="73152"/>
-          </a:xfrm>
-          <a:prstGeom prst="rect">
-            <a:avLst/>
-          </a:prstGeom>
-          <a:solidFill>
-            <a:srgbClr val="028090"/>
-          </a:solidFill>
-          <a:ln>
-            <a:noFill/>
-          </a:ln>
-        </p:spPr>
-        <p:style>
-          <a:lnRef idx="1">
-            <a:schemeClr val="accent1"/>
-          </a:lnRef>
-          <a:fillRef idx="3">
-            <a:schemeClr val="accent1"/>
-          </a:fillRef>
-          <a:effectRef idx="2">
-            <a:schemeClr val="accent1"/>
-          </a:effectRef>
-          <a:fontRef idx="minor">
-            <a:schemeClr val="lt1"/>
-          </a:fontRef>
-        </p:style>
-        <p:txBody>
-          <a:bodyPr rtlCol="0" anchor="ctr"/>
-          <a:lstStyle/>
-          <a:p>
-            <a:pPr algn="ctr"/>
-          </a:p>
-        </p:txBody>
-      </p:sp>
-      <p:sp>
-        <p:nvSpPr>
-          <p:cNvPr id="18" name="TextBox 17"/>
-          <p:cNvSpPr txBox="1"/>
-          <p:nvPr/>
-        </p:nvSpPr>
-        <p:spPr>
-          <a:xfrm>
-            <a:off x="1783080" y="3099816"/>
-            <a:ext cx="8138159" cy="274320"/>
-          </a:xfrm>
-          <a:prstGeom prst="rect">
-            <a:avLst/>
-          </a:prstGeom>
-          <a:noFill/>
-        </p:spPr>
-        <p:txBody>
-          <a:bodyPr wrap="square" lIns="0" rIns="0" tIns="0" bIns="0">
-            <a:spAutoFit/>
-          </a:bodyPr>
-          <a:lstStyle/>
-          <a:p>
-            <a:r>
-              <a:rPr sz="1700" b="1">
-                <a:solidFill>
-                  <a:srgbClr val="1E2761"/>
-                </a:solidFill>
-                <a:latin typeface="Aptos"/>
-              </a:rPr>
-              <a:t>Webapp count by type</a:t>
-            </a:r>
-          </a:p>
-        </p:txBody>
-      </p:sp>
-      <p:graphicFrame>
-        <p:nvGraphicFramePr>
-          <p:cNvPr id="19" name="Table 18"/>
-          <p:cNvGraphicFramePr>
-            <a:graphicFrameLocks noGrp="1"/>
-          </p:cNvGraphicFramePr>
-          <p:nvPr/>
-        </p:nvGraphicFramePr>
-        <p:xfrm>
-          <a:off x="1828800" y="3584448"/>
-          <a:ext cx="7863840" cy="1645920"/>
-        </p:xfrm>
-        <a:graphic>
-          <a:graphicData uri="http://schemas.openxmlformats.org/drawingml/2006/table">
-            <a:tbl>
-              <a:tblPr firstRow="1" bandRow="1">
-                <a:tableStyleId>{5C22544A-7EE6-4342-B048-85BDC9FD1C3A}</a:tableStyleId>
-              </a:tblPr>
-              <a:tblGrid>
-                <a:gridCol w="4206240"/>
-                <a:gridCol w="1828800"/>
-                <a:gridCol w="1828800"/>
-              </a:tblGrid>
-              <a:tr h="411480">
-                <a:tc>
-                  <a:txBody>
-                    <a:bodyPr/>
-                    <a:lstStyle/>
-                    <a:p>
-                      <a:pPr>
-                        <a:defRPr sz="1200" b="1">
-                          <a:solidFill>
-                            <a:srgbClr val="FFFFFF"/>
-                          </a:solidFill>
-                          <a:latin typeface="Aptos"/>
-                        </a:defRPr>
-                      </a:pPr>
-                      <a:r>
-                        <a:t>Webapp type</a:t>
-                      </a:r>
-                    </a:p>
-                  </a:txBody>
-                  <a:tcPr marL="36576" marR="36576" marT="18288" marB="18288">
-                    <a:solidFill>
-                      <a:srgbClr val="1E2761"/>
-                    </a:solidFill>
-                  </a:tcPr>
-                </a:tc>
-                <a:tc>
-                  <a:txBody>
-                    <a:bodyPr/>
-                    <a:lstStyle/>
-                    <a:p>
-                      <a:pPr>
-                        <a:defRPr sz="1200" b="1">
-                          <a:solidFill>
-                            <a:srgbClr val="FFFFFF"/>
-                          </a:solidFill>
-                          <a:latin typeface="Aptos"/>
-                        </a:defRPr>
-                      </a:pPr>
-                      <a:r>
-                        <a:t>Webapp rows</a:t>
-                      </a:r>
-                    </a:p>
-                  </a:txBody>
-                  <a:tcPr marL="36576" marR="36576" marT="18288" marB="18288">
-                    <a:solidFill>
-                      <a:srgbClr val="1E2761"/>
-                    </a:solidFill>
-                  </a:tcPr>
-                </a:tc>
-                <a:tc>
-                  <a:txBody>
-                    <a:bodyPr/>
-                    <a:lstStyle/>
-                    <a:p>
-                      <a:pPr>
-                        <a:defRPr sz="1200" b="1">
-                          <a:solidFill>
-                            <a:srgbClr val="FFFFFF"/>
-                          </a:solidFill>
-                          <a:latin typeface="Aptos"/>
-                        </a:defRPr>
-                      </a:pPr>
-                      <a:r>
-                        <a:t>Share</a:t>
-                      </a:r>
-                    </a:p>
-                  </a:txBody>
-                  <a:tcPr marL="36576" marR="36576" marT="18288" marB="18288">
-                    <a:solidFill>
-                      <a:srgbClr val="1E2761"/>
-                    </a:solidFill>
-                  </a:tcPr>
-                </a:tc>
-              </a:tr>
-              <a:tr h="411480">
-                <a:tc>
-                  <a:txBody>
-                    <a:bodyPr/>
-                    <a:lstStyle/>
-                    <a:p>
-                      <a:pPr>
-                        <a:defRPr sz="1200" b="0">
-                          <a:solidFill>
-                            <a:srgbClr val="36454F"/>
-                          </a:solidFill>
-                          <a:latin typeface="Aptos"/>
-                        </a:defRPr>
-                      </a:pPr>
-                      <a:r>
-                        <a:t>IIS Web Applications</a:t>
-                      </a:r>
-                    </a:p>
-                  </a:txBody>
-                  <a:tcPr marL="36576" marR="36576" marT="18288" marB="18288">
-                    <a:solidFill>
-                      <a:srgbClr val="FFFFFF"/>
-                    </a:solidFill>
-                  </a:tcPr>
-                </a:tc>
-                <a:tc>
-                  <a:txBody>
-                    <a:bodyPr/>
-                    <a:lstStyle/>
-                    <a:p>
-                      <a:pPr>
-                        <a:defRPr sz="1200" b="0">
-                          <a:solidFill>
-                            <a:srgbClr val="36454F"/>
-                          </a:solidFill>
-                          <a:latin typeface="Aptos"/>
-                        </a:defRPr>
-                      </a:pPr>
-                      <a:r>
-                        <a:t>866</a:t>
-                      </a:r>
-                    </a:p>
-                  </a:txBody>
-                  <a:tcPr marL="36576" marR="36576" marT="18288" marB="18288">
-                    <a:solidFill>
-                      <a:srgbClr val="FFFFFF"/>
-                    </a:solidFill>
-                  </a:tcPr>
-                </a:tc>
-                <a:tc>
-                  <a:txBody>
-                    <a:bodyPr/>
-                    <a:lstStyle/>
-                    <a:p>
-                      <a:pPr>
-                        <a:defRPr sz="1200" b="0">
-                          <a:solidFill>
-                            <a:srgbClr val="36454F"/>
-                          </a:solidFill>
-                          <a:latin typeface="Aptos"/>
-                        </a:defRPr>
-                      </a:pPr>
-                      <a:r>
-                        <a:t>99.5%</a:t>
-                      </a:r>
-                    </a:p>
-                  </a:txBody>
-                  <a:tcPr marL="36576" marR="36576" marT="18288" marB="18288">
-                    <a:solidFill>
-                      <a:srgbClr val="FFFFFF"/>
-                    </a:solidFill>
-                  </a:tcPr>
-                </a:tc>
-              </a:tr>
-              <a:tr h="411480">
-                <a:tc>
-                  <a:txBody>
-                    <a:bodyPr/>
-                    <a:lstStyle/>
-                    <a:p>
-                      <a:pPr>
-                        <a:defRPr sz="1200" b="0">
-                          <a:solidFill>
-                            <a:srgbClr val="36454F"/>
-                          </a:solidFill>
-                          <a:latin typeface="Aptos"/>
-                        </a:defRPr>
-                      </a:pPr>
-                      <a:r>
-                        <a:t>Tomcat Web Applications</a:t>
-                      </a:r>
-                    </a:p>
-                  </a:txBody>
-                  <a:tcPr marL="36576" marR="36576" marT="18288" marB="18288">
-                    <a:solidFill>
-                      <a:srgbClr val="F1F5F9"/>
-                    </a:solidFill>
-                  </a:tcPr>
-                </a:tc>
-                <a:tc>
-                  <a:txBody>
-                    <a:bodyPr/>
-                    <a:lstStyle/>
-                    <a:p>
-                      <a:pPr>
-                        <a:defRPr sz="1200" b="0">
-                          <a:solidFill>
-                            <a:srgbClr val="36454F"/>
-                          </a:solidFill>
-                          <a:latin typeface="Aptos"/>
-                        </a:defRPr>
-                      </a:pPr>
-                      <a:r>
-                        <a:t>4</a:t>
-                      </a:r>
-                    </a:p>
-                  </a:txBody>
-                  <a:tcPr marL="36576" marR="36576" marT="18288" marB="18288">
-                    <a:solidFill>
-                      <a:srgbClr val="F1F5F9"/>
-                    </a:solidFill>
-                  </a:tcPr>
-                </a:tc>
-                <a:tc>
-                  <a:txBody>
-                    <a:bodyPr/>
-                    <a:lstStyle/>
-                    <a:p>
-                      <a:pPr>
-                        <a:defRPr sz="1200" b="0">
-                          <a:solidFill>
-                            <a:srgbClr val="36454F"/>
-                          </a:solidFill>
-                          <a:latin typeface="Aptos"/>
-                        </a:defRPr>
-                      </a:pPr>
-                      <a:r>
-                        <a:t>0.5%</a:t>
-                      </a:r>
-                    </a:p>
-                  </a:txBody>
-                  <a:tcPr marL="36576" marR="36576" marT="18288" marB="18288">
-                    <a:solidFill>
-                      <a:srgbClr val="F1F5F9"/>
-                    </a:solidFill>
-                  </a:tcPr>
-                </a:tc>
-              </a:tr>
-              <a:tr h="411480">
-                <a:tc>
-                  <a:txBody>
-                    <a:bodyPr/>
-                    <a:lstStyle/>
-                    <a:p>
-                      <a:pPr>
-                        <a:defRPr sz="1200" b="0">
-                          <a:solidFill>
-                            <a:srgbClr val="36454F"/>
-                          </a:solidFill>
-                          <a:latin typeface="Aptos"/>
-                        </a:defRPr>
-                      </a:pPr>
-                      <a:r>
-                        <a:t>Total</a:t>
-                      </a:r>
-                    </a:p>
-                  </a:txBody>
-                  <a:tcPr marL="36576" marR="36576" marT="18288" marB="18288">
-                    <a:solidFill>
-                      <a:srgbClr val="FFFFFF"/>
-                    </a:solidFill>
-                  </a:tcPr>
-                </a:tc>
-                <a:tc>
-                  <a:txBody>
-                    <a:bodyPr/>
-                    <a:lstStyle/>
-                    <a:p>
-                      <a:pPr>
-                        <a:defRPr sz="1200" b="0">
-                          <a:solidFill>
-                            <a:srgbClr val="36454F"/>
-                          </a:solidFill>
-                          <a:latin typeface="Aptos"/>
-                        </a:defRPr>
-                      </a:pPr>
-                      <a:r>
-                        <a:t>870</a:t>
-                      </a:r>
-                    </a:p>
-                  </a:txBody>
-                  <a:tcPr marL="36576" marR="36576" marT="18288" marB="18288">
-                    <a:solidFill>
-                      <a:srgbClr val="FFFFFF"/>
-                    </a:solidFill>
-                  </a:tcPr>
-                </a:tc>
-                <a:tc>
-                  <a:txBody>
-                    <a:bodyPr/>
-                    <a:lstStyle/>
-                    <a:p>
-                      <a:pPr>
-                        <a:defRPr sz="1200" b="0">
-                          <a:solidFill>
-                            <a:srgbClr val="36454F"/>
-                          </a:solidFill>
-                          <a:latin typeface="Aptos"/>
-                        </a:defRPr>
-                      </a:pPr>
-                      <a:r>
-                        <a:t>100.0%</a:t>
-                      </a:r>
-                    </a:p>
-                  </a:txBody>
-                  <a:tcPr marL="36576" marR="36576" marT="18288" marB="18288">
-                    <a:solidFill>
-                      <a:srgbClr val="FFFFFF"/>
-                    </a:solidFill>
-                  </a:tcPr>
-                </a:tc>
-              </a:tr>
-            </a:tbl>
-          </a:graphicData>
-        </a:graphic>
-      </p:graphicFrame>
-      <p:sp>
-        <p:nvSpPr>
-          <p:cNvPr id="20" name="TextBox 19"/>
           <p:cNvSpPr txBox="1"/>
           <p:nvPr/>
         </p:nvSpPr>
